--- a/sesion-05/Sesion_05_Ecosistema_Herramientas.pptx
+++ b/sesion-05/Sesion_05_Ecosistema_Herramientas.pptx
@@ -19,9 +19,12 @@
     <p:sldId id="267" r:id="rId13"/>
     <p:sldId id="268" r:id="rId14"/>
     <p:sldId id="269" r:id="rId15"/>
+    <p:sldId id="270" r:id="rId16"/>
+    <p:sldId id="271" r:id="rId17"/>
+    <p:sldId id="272" r:id="rId18"/>
   </p:sldIdLst>
   <p:notesMasterIdLst>
-    <p:notesMasterId r:id="rId16"/>
+    <p:notesMasterId r:id="rId19"/>
   </p:notesMasterIdLst>
   <p:sldSz cx="12192000" cy="6858000"/>
   <p:notesSz cx="6858000" cy="12192000"/>
@@ -515,7 +518,7 @@
           <a:p>
             <a:r>
               <a:rPr lang="en-US" dirty="0"/>
-              <a:t/>
+              <a:t>Hoy se usa el mismo corpus del viernes y el libro de códigos que cada equipo ratificó. Ten listo Atlas.ti o MAXQDA con un proyecto ya codificado: es lo único que hay que preparar con tiempo.</a:t>
             </a:r>
             <a:endParaRPr lang="en-US" dirty="0"/>
           </a:p>
@@ -955,7 +958,7 @@
           <a:p>
             <a:r>
               <a:rPr lang="en-US" dirty="0"/>
-              <a:t/>
+              <a:t>Estas tres se cubren por demostración conforme a lo indicado por la coordinación del Instituto: las herramientas no disponibles desde la infraestructura institucional pueden abordarse mediante sesiones expositivas de los instructores.</a:t>
             </a:r>
             <a:endParaRPr lang="en-US" dirty="0"/>
           </a:p>
@@ -979,6 +982,270 @@
             <a:fld id="{F7021451-1387-4CA6-816F-3879F97B5CBC}" type="slidenum">
               <a:rPr lang="en-US"/>
               <a:t>14</a:t>
+            </a:fld>
+            <a:endParaRPr lang="en-US"/>
+          </a:p>
+        </p:txBody>
+      </p:sp>
+    </p:spTree>
+    <p:extLst>
+      <p:ext uri="{BB962C8B-B14F-4D97-AF65-F5344CB8AC3E}">
+        <p14:creationId xmlns:p14="http://schemas.microsoft.com/office/powerpoint/2010/main" val="1024086991"/>
+      </p:ext>
+    </p:extLst>
+  </p:cSld>
+  <p:clrMapOvr>
+    <a:masterClrMapping/>
+  </p:clrMapOvr>
+</p:notes>
+</file>
+
+<file path=ppt/notesSlides/notesSlide15.xml><?xml version="1.0" encoding="utf-8"?>
+<p:notes xmlns:a="http://schemas.openxmlformats.org/drawingml/2006/main" xmlns:r="http://schemas.openxmlformats.org/officeDocument/2006/relationships" xmlns:p="http://schemas.openxmlformats.org/presentationml/2006/main">
+  <p:cSld>
+    <p:spTree>
+      <p:nvGrpSpPr>
+        <p:cNvPr id="1" name=""/>
+        <p:cNvGrpSpPr/>
+        <p:nvPr/>
+      </p:nvGrpSpPr>
+      <p:grpSpPr>
+        <a:xfrm>
+          <a:off x="0" y="0"/>
+          <a:ext cx="0" cy="0"/>
+          <a:chOff x="0" y="0"/>
+          <a:chExt cx="0" cy="0"/>
+        </a:xfrm>
+      </p:grpSpPr>
+      <p:sp>
+        <p:nvSpPr>
+          <p:cNvPr id="2" name="Slide Image Placeholder 1"/>
+          <p:cNvSpPr>
+            <a:spLocks noGrp="1" noRot="1" noChangeAspect="1"/>
+          </p:cNvSpPr>
+          <p:nvPr>
+            <p:ph type="sldImg"/>
+          </p:nvPr>
+        </p:nvSpPr>
+        <p:spPr/>
+      </p:sp>
+      <p:sp>
+        <p:nvSpPr>
+          <p:cNvPr id="3" name="Notes Placeholder 2"/>
+          <p:cNvSpPr>
+            <a:spLocks noGrp="1"/>
+          </p:cNvSpPr>
+          <p:nvPr>
+            <p:ph type="body" idx="1"/>
+          </p:nvPr>
+        </p:nvSpPr>
+        <p:spPr/>
+        <p:txBody>
+          <a:bodyPr/>
+          <a:lstStyle/>
+          <a:p>
+            <a:r>
+              <a:rPr lang="en-US" dirty="0"/>
+              <a:t/>
+            </a:r>
+            <a:endParaRPr lang="en-US" dirty="0"/>
+          </a:p>
+        </p:txBody>
+      </p:sp>
+      <p:sp>
+        <p:nvSpPr>
+          <p:cNvPr id="4" name="Slide Number Placeholder 3"/>
+          <p:cNvSpPr>
+            <a:spLocks noGrp="1"/>
+          </p:cNvSpPr>
+          <p:nvPr>
+            <p:ph type="sldNum" sz="quarter" idx="10"/>
+          </p:nvPr>
+        </p:nvSpPr>
+        <p:spPr/>
+        <p:txBody>
+          <a:bodyPr/>
+          <a:lstStyle/>
+          <a:p>
+            <a:fld id="{F7021451-1387-4CA6-816F-3879F97B5CBC}" type="slidenum">
+              <a:rPr lang="en-US"/>
+              <a:t>15</a:t>
+            </a:fld>
+            <a:endParaRPr lang="en-US"/>
+          </a:p>
+        </p:txBody>
+      </p:sp>
+    </p:spTree>
+    <p:extLst>
+      <p:ext uri="{BB962C8B-B14F-4D97-AF65-F5344CB8AC3E}">
+        <p14:creationId xmlns:p14="http://schemas.microsoft.com/office/powerpoint/2010/main" val="1024086991"/>
+      </p:ext>
+    </p:extLst>
+  </p:cSld>
+  <p:clrMapOvr>
+    <a:masterClrMapping/>
+  </p:clrMapOvr>
+</p:notes>
+</file>
+
+<file path=ppt/notesSlides/notesSlide16.xml><?xml version="1.0" encoding="utf-8"?>
+<p:notes xmlns:a="http://schemas.openxmlformats.org/drawingml/2006/main" xmlns:r="http://schemas.openxmlformats.org/officeDocument/2006/relationships" xmlns:p="http://schemas.openxmlformats.org/presentationml/2006/main">
+  <p:cSld>
+    <p:spTree>
+      <p:nvGrpSpPr>
+        <p:cNvPr id="1" name=""/>
+        <p:cNvGrpSpPr/>
+        <p:nvPr/>
+      </p:nvGrpSpPr>
+      <p:grpSpPr>
+        <a:xfrm>
+          <a:off x="0" y="0"/>
+          <a:ext cx="0" cy="0"/>
+          <a:chOff x="0" y="0"/>
+          <a:chExt cx="0" cy="0"/>
+        </a:xfrm>
+      </p:grpSpPr>
+      <p:sp>
+        <p:nvSpPr>
+          <p:cNvPr id="2" name="Slide Image Placeholder 1"/>
+          <p:cNvSpPr>
+            <a:spLocks noGrp="1" noRot="1" noChangeAspect="1"/>
+          </p:cNvSpPr>
+          <p:nvPr>
+            <p:ph type="sldImg"/>
+          </p:nvPr>
+        </p:nvSpPr>
+        <p:spPr/>
+      </p:sp>
+      <p:sp>
+        <p:nvSpPr>
+          <p:cNvPr id="3" name="Notes Placeholder 2"/>
+          <p:cNvSpPr>
+            <a:spLocks noGrp="1"/>
+          </p:cNvSpPr>
+          <p:nvPr>
+            <p:ph type="body" idx="1"/>
+          </p:nvPr>
+        </p:nvSpPr>
+        <p:spPr/>
+        <p:txBody>
+          <a:bodyPr/>
+          <a:lstStyle/>
+          <a:p>
+            <a:r>
+              <a:rPr lang="en-US" dirty="0"/>
+              <a:t/>
+            </a:r>
+            <a:endParaRPr lang="en-US" dirty="0"/>
+          </a:p>
+        </p:txBody>
+      </p:sp>
+      <p:sp>
+        <p:nvSpPr>
+          <p:cNvPr id="4" name="Slide Number Placeholder 3"/>
+          <p:cNvSpPr>
+            <a:spLocks noGrp="1"/>
+          </p:cNvSpPr>
+          <p:nvPr>
+            <p:ph type="sldNum" sz="quarter" idx="10"/>
+          </p:nvPr>
+        </p:nvSpPr>
+        <p:spPr/>
+        <p:txBody>
+          <a:bodyPr/>
+          <a:lstStyle/>
+          <a:p>
+            <a:fld id="{F7021451-1387-4CA6-816F-3879F97B5CBC}" type="slidenum">
+              <a:rPr lang="en-US"/>
+              <a:t>16</a:t>
+            </a:fld>
+            <a:endParaRPr lang="en-US"/>
+          </a:p>
+        </p:txBody>
+      </p:sp>
+    </p:spTree>
+    <p:extLst>
+      <p:ext uri="{BB962C8B-B14F-4D97-AF65-F5344CB8AC3E}">
+        <p14:creationId xmlns:p14="http://schemas.microsoft.com/office/powerpoint/2010/main" val="1024086991"/>
+      </p:ext>
+    </p:extLst>
+  </p:cSld>
+  <p:clrMapOvr>
+    <a:masterClrMapping/>
+  </p:clrMapOvr>
+</p:notes>
+</file>
+
+<file path=ppt/notesSlides/notesSlide17.xml><?xml version="1.0" encoding="utf-8"?>
+<p:notes xmlns:a="http://schemas.openxmlformats.org/drawingml/2006/main" xmlns:r="http://schemas.openxmlformats.org/officeDocument/2006/relationships" xmlns:p="http://schemas.openxmlformats.org/presentationml/2006/main">
+  <p:cSld>
+    <p:spTree>
+      <p:nvGrpSpPr>
+        <p:cNvPr id="1" name=""/>
+        <p:cNvGrpSpPr/>
+        <p:nvPr/>
+      </p:nvGrpSpPr>
+      <p:grpSpPr>
+        <a:xfrm>
+          <a:off x="0" y="0"/>
+          <a:ext cx="0" cy="0"/>
+          <a:chOff x="0" y="0"/>
+          <a:chExt cx="0" cy="0"/>
+        </a:xfrm>
+      </p:grpSpPr>
+      <p:sp>
+        <p:nvSpPr>
+          <p:cNvPr id="2" name="Slide Image Placeholder 1"/>
+          <p:cNvSpPr>
+            <a:spLocks noGrp="1" noRot="1" noChangeAspect="1"/>
+          </p:cNvSpPr>
+          <p:nvPr>
+            <p:ph type="sldImg"/>
+          </p:nvPr>
+        </p:nvSpPr>
+        <p:spPr/>
+      </p:sp>
+      <p:sp>
+        <p:nvSpPr>
+          <p:cNvPr id="3" name="Notes Placeholder 2"/>
+          <p:cNvSpPr>
+            <a:spLocks noGrp="1"/>
+          </p:cNvSpPr>
+          <p:nvPr>
+            <p:ph type="body" idx="1"/>
+          </p:nvPr>
+        </p:nvSpPr>
+        <p:spPr/>
+        <p:txBody>
+          <a:bodyPr/>
+          <a:lstStyle/>
+          <a:p>
+            <a:r>
+              <a:rPr lang="en-US" dirty="0"/>
+              <a:t/>
+            </a:r>
+            <a:endParaRPr lang="en-US" dirty="0"/>
+          </a:p>
+        </p:txBody>
+      </p:sp>
+      <p:sp>
+        <p:nvSpPr>
+          <p:cNvPr id="4" name="Slide Number Placeholder 3"/>
+          <p:cNvSpPr>
+            <a:spLocks noGrp="1"/>
+          </p:cNvSpPr>
+          <p:nvPr>
+            <p:ph type="sldNum" sz="quarter" idx="10"/>
+          </p:nvPr>
+        </p:nvSpPr>
+        <p:spPr/>
+        <p:txBody>
+          <a:bodyPr/>
+          <a:lstStyle/>
+          <a:p>
+            <a:fld id="{F7021451-1387-4CA6-816F-3879F97B5CBC}" type="slidenum">
+              <a:rPr lang="en-US"/>
+              <a:t>17</a:t>
             </a:fld>
             <a:endParaRPr lang="en-US"/>
           </a:p>
@@ -2115,7 +2382,7 @@
                 <a:ea typeface="Calibri" pitchFamily="34" charset="-122"/>
                 <a:cs typeface="Calibri" pitchFamily="34" charset="-120"/>
               </a:rPr>
-              <a:t>MÓDULO II. ANÁLISIS CUALITATIVO ASISTIDO POR IA Y PLN</a:t>
+              <a:t>MÓDULO II. ANÁLISIS CUALITATIVO ASISTIDO POR IA</a:t>
             </a:r>
             <a:endParaRPr lang="en-US" sz="1500" dirty="0"/>
           </a:p>
@@ -2193,7 +2460,7 @@
                 <a:ea typeface="Arial" pitchFamily="34" charset="-122"/>
                 <a:cs typeface="Arial" pitchFamily="34" charset="-120"/>
               </a:rPr>
-              <a:t>Plataformas especializadas en análisis cualitativo con IA</a:t>
+              <a:t>Plataformas de análisis cualitativo: codificar, medir postura y comparar contra Copilot</a:t>
             </a:r>
             <a:endParaRPr lang="en-US" sz="3400" dirty="0"/>
           </a:p>
@@ -2298,7 +2565,7 @@
                 <a:ea typeface="Calibri" pitchFamily="34" charset="-122"/>
                 <a:cs typeface="Calibri" pitchFamily="34" charset="-120"/>
               </a:rPr>
-              <a:t>Curso de Inteligencia Artificial Aplicada. INEGI 2026. Sesión de ecosistema.</a:t>
+              <a:t>Curso de Inteligencia Artificial Aplicada. INEGI 2026. CC BY-NC-SA 4.0.</a:t>
             </a:r>
             <a:endParaRPr lang="en-US" sz="1300" dirty="0"/>
           </a:p>
@@ -2315,6 +2582,13 @@
 <file path=ppt/slides/slide10.xml><?xml version="1.0" encoding="utf-8"?>
 <p:sld xmlns:a="http://schemas.openxmlformats.org/drawingml/2006/main" xmlns:r="http://schemas.openxmlformats.org/officeDocument/2006/relationships" xmlns:p="http://schemas.openxmlformats.org/presentationml/2006/main">
   <p:cSld name="Slide 10">
+    <p:bg>
+      <p:bgPr>
+        <a:solidFill>
+          <a:srgbClr val="D7E7E7"/>
+        </a:solidFill>
+      </p:bgPr>
+    </p:bg>
     <p:spTree>
       <p:nvGrpSpPr>
         <p:cNvPr id="1" name=""/>
@@ -2331,122 +2605,19 @@
       </p:grpSpPr>
       <p:sp>
         <p:nvSpPr>
-          <p:cNvPr id="2" name="Text 0"/>
-          <p:cNvSpPr txBox="1"/>
-          <p:nvPr/>
-        </p:nvSpPr>
-        <p:spPr>
-          <a:xfrm>
-            <a:off x="566928" y="402336"/>
-            <a:ext cx="9229039" cy="749808"/>
-          </a:xfrm>
-          <a:prstGeom prst="rect">
-            <a:avLst/>
-          </a:prstGeom>
-          <a:noFill/>
-          <a:ln/>
-        </p:spPr>
-        <p:txBody>
-          <a:bodyPr wrap="square" lIns="0" tIns="0" rIns="0" bIns="0" rtlCol="0" anchor="t"/>
-          <a:lstStyle/>
-          <a:p>
-            <a:pPr algn="l" indent="0" marL="0">
-              <a:buNone/>
-            </a:pPr>
-            <a:r>
-              <a:rPr lang="en-US" sz="3200" b="1" dirty="0">
-                <a:solidFill>
-                  <a:srgbClr val="16262E"/>
-                </a:solidFill>
-                <a:latin typeface="Arial" pitchFamily="34" charset="0"/>
-                <a:ea typeface="Arial" pitchFamily="34" charset="-122"/>
-                <a:cs typeface="Arial" pitchFamily="34" charset="-120"/>
-              </a:rPr>
-              <a:t>Los cinco minutos tienen que responder tres cosas</a:t>
-            </a:r>
-            <a:endParaRPr lang="en-US" sz="3200" dirty="0"/>
-          </a:p>
-        </p:txBody>
-      </p:sp>
-      <p:sp>
-        <p:nvSpPr>
-          <p:cNvPr id="3" name="Text 1"/>
-          <p:cNvSpPr txBox="1"/>
-          <p:nvPr/>
-        </p:nvSpPr>
-        <p:spPr>
-          <a:xfrm>
-            <a:off x="566928" y="1280160"/>
-            <a:ext cx="9960559" cy="365760"/>
-          </a:xfrm>
-          <a:prstGeom prst="rect">
-            <a:avLst/>
-          </a:prstGeom>
-          <a:noFill/>
-          <a:ln/>
-        </p:spPr>
-        <p:txBody>
-          <a:bodyPr wrap="square" lIns="0" tIns="0" rIns="0" bIns="0" rtlCol="0" anchor="t"/>
-          <a:lstStyle/>
-          <a:p>
-            <a:pPr indent="0" marL="0">
-              <a:buNone/>
-            </a:pPr>
-            <a:r>
-              <a:rPr lang="en-US" sz="1500" dirty="0">
-                <a:solidFill>
-                  <a:srgbClr val="5A6B73"/>
-                </a:solidFill>
-                <a:latin typeface="Calibri" pitchFamily="34" charset="0"/>
-                <a:ea typeface="Calibri" pitchFamily="34" charset="-122"/>
-                <a:cs typeface="Calibri" pitchFamily="34" charset="-120"/>
-              </a:rPr>
-              <a:t>No es una demostración de la herramienta. Es un dictamen sobre ella.</a:t>
-            </a:r>
-            <a:endParaRPr lang="en-US" sz="1500" dirty="0"/>
-          </a:p>
-        </p:txBody>
-      </p:sp>
-      <p:sp>
-        <p:nvSpPr>
-          <p:cNvPr id="4" name="Shape 2"/>
+          <p:cNvPr id="2" name="Shape 0"/>
           <p:cNvSpPr/>
           <p:nvPr/>
         </p:nvSpPr>
         <p:spPr>
           <a:xfrm>
-            <a:off x="566928" y="2011680"/>
-            <a:ext cx="3503066" cy="2078228"/>
+            <a:off x="566928" y="457200"/>
+            <a:ext cx="2788920" cy="457200"/>
           </a:xfrm>
           <a:prstGeom prst="roundRect">
             <a:avLst>
-              <a:gd name="adj" fmla="val 3520"/>
+              <a:gd name="adj" fmla="val 50000"/>
             </a:avLst>
-          </a:prstGeom>
-          <a:solidFill>
-            <a:srgbClr val="F2F5F6"/>
-          </a:solidFill>
-          <a:ln w="12700">
-            <a:solidFill>
-              <a:srgbClr val="F2F5F6"/>
-            </a:solidFill>
-            <a:prstDash val="solid"/>
-          </a:ln>
-        </p:spPr>
-      </p:sp>
-      <p:sp>
-        <p:nvSpPr>
-          <p:cNvPr id="5" name="Shape 3"/>
-          <p:cNvSpPr/>
-          <p:nvPr/>
-        </p:nvSpPr>
-        <p:spPr>
-          <a:xfrm>
-            <a:off x="804672" y="2231136"/>
-            <a:ext cx="420624" cy="420624"/>
-          </a:xfrm>
-          <a:prstGeom prst="ellipse">
-            <a:avLst/>
           </a:prstGeom>
           <a:solidFill>
             <a:srgbClr val="2E7D7D"/>
@@ -2461,13 +2632,209 @@
       </p:sp>
       <p:sp>
         <p:nvSpPr>
+          <p:cNvPr id="3" name="Text 1"/>
+          <p:cNvSpPr txBox="1"/>
+          <p:nvPr/>
+        </p:nvSpPr>
+        <p:spPr>
+          <a:xfrm>
+            <a:off x="566928" y="457200"/>
+            <a:ext cx="2788920" cy="457200"/>
+          </a:xfrm>
+          <a:prstGeom prst="rect">
+            <a:avLst/>
+          </a:prstGeom>
+          <a:noFill/>
+          <a:ln/>
+        </p:spPr>
+        <p:txBody>
+          <a:bodyPr wrap="square" lIns="0" tIns="0" rIns="0" bIns="0" rtlCol="0" anchor="ctr"/>
+          <a:lstStyle/>
+          <a:p>
+            <a:pPr algn="ctr" indent="0" marL="0">
+              <a:buNone/>
+            </a:pPr>
+            <a:r>
+              <a:rPr lang="en-US" sz="1300" b="1" spc="200" kern="0" dirty="0">
+                <a:solidFill>
+                  <a:srgbClr val="FFFFFF"/>
+                </a:solidFill>
+                <a:latin typeface="Arial" pitchFamily="34" charset="0"/>
+                <a:ea typeface="Arial" pitchFamily="34" charset="-122"/>
+                <a:cs typeface="Arial" pitchFamily="34" charset="-120"/>
+              </a:rPr>
+              <a:t>TU TURNO</a:t>
+            </a:r>
+            <a:endParaRPr lang="en-US" sz="1300" dirty="0"/>
+          </a:p>
+        </p:txBody>
+      </p:sp>
+      <p:sp>
+        <p:nvSpPr>
+          <p:cNvPr id="4" name="Shape 2"/>
+          <p:cNvSpPr/>
+          <p:nvPr/>
+        </p:nvSpPr>
+        <p:spPr>
+          <a:xfrm>
+            <a:off x="9704527" y="457200"/>
+            <a:ext cx="1920240" cy="457200"/>
+          </a:xfrm>
+          <a:prstGeom prst="roundRect">
+            <a:avLst>
+              <a:gd name="adj" fmla="val 50000"/>
+            </a:avLst>
+          </a:prstGeom>
+          <a:solidFill>
+            <a:srgbClr val="C85A28"/>
+          </a:solidFill>
+          <a:ln w="12700">
+            <a:solidFill>
+              <a:srgbClr val="C85A28"/>
+            </a:solidFill>
+            <a:prstDash val="solid"/>
+          </a:ln>
+        </p:spPr>
+      </p:sp>
+      <p:sp>
+        <p:nvSpPr>
+          <p:cNvPr id="5" name="Text 3"/>
+          <p:cNvSpPr txBox="1"/>
+          <p:nvPr/>
+        </p:nvSpPr>
+        <p:spPr>
+          <a:xfrm>
+            <a:off x="9704527" y="457200"/>
+            <a:ext cx="1920240" cy="457200"/>
+          </a:xfrm>
+          <a:prstGeom prst="rect">
+            <a:avLst/>
+          </a:prstGeom>
+          <a:noFill/>
+          <a:ln/>
+        </p:spPr>
+        <p:txBody>
+          <a:bodyPr wrap="square" lIns="0" tIns="0" rIns="0" bIns="0" rtlCol="0" anchor="ctr"/>
+          <a:lstStyle/>
+          <a:p>
+            <a:pPr algn="ctr" indent="0" marL="0">
+              <a:buNone/>
+            </a:pPr>
+            <a:r>
+              <a:rPr lang="en-US" sz="1300" b="1" dirty="0">
+                <a:solidFill>
+                  <a:srgbClr val="FFFFFF"/>
+                </a:solidFill>
+                <a:latin typeface="Arial" pitchFamily="34" charset="0"/>
+                <a:ea typeface="Arial" pitchFamily="34" charset="-122"/>
+                <a:cs typeface="Arial" pitchFamily="34" charset="-120"/>
+              </a:rPr>
+              <a:t>45 minutos</a:t>
+            </a:r>
+            <a:endParaRPr lang="en-US" sz="1300" dirty="0"/>
+          </a:p>
+        </p:txBody>
+      </p:sp>
+      <p:sp>
+        <p:nvSpPr>
           <p:cNvPr id="6" name="Text 4"/>
           <p:cNvSpPr txBox="1"/>
           <p:nvPr/>
         </p:nvSpPr>
         <p:spPr>
           <a:xfrm>
-            <a:off x="804672" y="2231136"/>
+            <a:off x="566928" y="1078992"/>
+            <a:ext cx="11057839" cy="685800"/>
+          </a:xfrm>
+          <a:prstGeom prst="rect">
+            <a:avLst/>
+          </a:prstGeom>
+          <a:noFill/>
+          <a:ln/>
+        </p:spPr>
+        <p:txBody>
+          <a:bodyPr wrap="square" lIns="0" tIns="0" rIns="0" bIns="0" rtlCol="0" anchor="ctr"/>
+          <a:lstStyle/>
+          <a:p>
+            <a:pPr indent="0" marL="0">
+              <a:buNone/>
+            </a:pPr>
+            <a:r>
+              <a:rPr lang="en-US" sz="2900" b="1" dirty="0">
+                <a:solidFill>
+                  <a:srgbClr val="16262E"/>
+                </a:solidFill>
+                <a:latin typeface="Arial" pitchFamily="34" charset="0"/>
+                <a:ea typeface="Arial" pitchFamily="34" charset="-122"/>
+                <a:cs typeface="Arial" pitchFamily="34" charset="-120"/>
+              </a:rPr>
+              <a:t>Tu herramienta contra Copilot, sobre el mismo material</a:t>
+            </a:r>
+            <a:endParaRPr lang="en-US" sz="2900" dirty="0"/>
+          </a:p>
+        </p:txBody>
+      </p:sp>
+      <p:sp>
+        <p:nvSpPr>
+          <p:cNvPr id="7" name="Shape 5"/>
+          <p:cNvSpPr/>
+          <p:nvPr/>
+        </p:nvSpPr>
+        <p:spPr>
+          <a:xfrm>
+            <a:off x="566928" y="1920240"/>
+            <a:ext cx="11057839" cy="628650"/>
+          </a:xfrm>
+          <a:prstGeom prst="roundRect">
+            <a:avLst>
+              <a:gd name="adj" fmla="val 10182"/>
+            </a:avLst>
+          </a:prstGeom>
+          <a:solidFill>
+            <a:srgbClr val="FFFFFF"/>
+          </a:solidFill>
+          <a:ln w="12700">
+            <a:solidFill>
+              <a:srgbClr val="FFFFFF"/>
+            </a:solidFill>
+            <a:prstDash val="solid"/>
+          </a:ln>
+        </p:spPr>
+      </p:sp>
+      <p:sp>
+        <p:nvSpPr>
+          <p:cNvPr id="8" name="Shape 6"/>
+          <p:cNvSpPr/>
+          <p:nvPr/>
+        </p:nvSpPr>
+        <p:spPr>
+          <a:xfrm>
+            <a:off x="786384" y="2024253"/>
+            <a:ext cx="420624" cy="420624"/>
+          </a:xfrm>
+          <a:prstGeom prst="ellipse">
+            <a:avLst/>
+          </a:prstGeom>
+          <a:solidFill>
+            <a:srgbClr val="2E7D7D"/>
+          </a:solidFill>
+          <a:ln w="12700">
+            <a:solidFill>
+              <a:srgbClr val="2E7D7D"/>
+            </a:solidFill>
+            <a:prstDash val="solid"/>
+          </a:ln>
+        </p:spPr>
+      </p:sp>
+      <p:sp>
+        <p:nvSpPr>
+          <p:cNvPr id="9" name="Text 7"/>
+          <p:cNvSpPr txBox="1"/>
+          <p:nvPr/>
+        </p:nvSpPr>
+        <p:spPr>
+          <a:xfrm>
+            <a:off x="786384" y="2024253"/>
             <a:ext cx="420624" cy="420624"/>
           </a:xfrm>
           <a:prstGeom prst="rect">
@@ -2500,14 +2867,14 @@
       </p:sp>
       <p:sp>
         <p:nvSpPr>
-          <p:cNvPr id="7" name="Text 5"/>
+          <p:cNvPr id="10" name="Text 8"/>
           <p:cNvSpPr txBox="1"/>
           <p:nvPr/>
         </p:nvSpPr>
         <p:spPr>
           <a:xfrm>
-            <a:off x="804672" y="2798064"/>
-            <a:ext cx="3027578" cy="457200"/>
+            <a:off x="1408176" y="2011680"/>
+            <a:ext cx="9960559" cy="445770"/>
           </a:xfrm>
           <a:prstGeom prst="rect">
             <a:avLst/>
@@ -2516,46 +2883,7 @@
           <a:ln/>
         </p:spPr>
         <p:txBody>
-          <a:bodyPr wrap="square" lIns="0" tIns="0" rIns="0" bIns="0" rtlCol="0" anchor="t"/>
-          <a:lstStyle/>
-          <a:p>
-            <a:pPr indent="0" marL="0">
-              <a:buNone/>
-            </a:pPr>
-            <a:r>
-              <a:rPr lang="en-US" sz="1600" b="1" dirty="0">
-                <a:solidFill>
-                  <a:srgbClr val="16262E"/>
-                </a:solidFill>
-                <a:latin typeface="Arial" pitchFamily="34" charset="0"/>
-                <a:ea typeface="Arial" pitchFamily="34" charset="-122"/>
-                <a:cs typeface="Arial" pitchFamily="34" charset="-120"/>
-              </a:rPr>
-              <a:t>¿Qué hace mejor que Copilot?</a:t>
-            </a:r>
-            <a:endParaRPr lang="en-US" sz="1600" dirty="0"/>
-          </a:p>
-        </p:txBody>
-      </p:sp>
-      <p:sp>
-        <p:nvSpPr>
-          <p:cNvPr id="8" name="Text 6"/>
-          <p:cNvSpPr txBox="1"/>
-          <p:nvPr/>
-        </p:nvSpPr>
-        <p:spPr>
-          <a:xfrm>
-            <a:off x="804672" y="3273552"/>
-            <a:ext cx="3027578" cy="578612"/>
-          </a:xfrm>
-          <a:prstGeom prst="rect">
-            <a:avLst/>
-          </a:prstGeom>
-          <a:noFill/>
-          <a:ln/>
-        </p:spPr>
-        <p:txBody>
-          <a:bodyPr wrap="square" lIns="0" tIns="0" rIns="0" bIns="0" rtlCol="0" anchor="t"/>
+          <a:bodyPr wrap="square" lIns="0" tIns="0" rIns="0" bIns="0" rtlCol="0" anchor="ctr"/>
           <a:lstStyle/>
           <a:p>
             <a:pPr indent="0" marL="0">
@@ -2565,7 +2893,7 @@
               <a:buNone/>
             </a:pPr>
             <a:r>
-              <a:rPr lang="en-US" sz="1300" dirty="0">
+              <a:rPr lang="en-US" sz="1450" dirty="0">
                 <a:solidFill>
                   <a:srgbClr val="16262E"/>
                 </a:solidFill>
@@ -2573,34 +2901,34 @@
                 <a:ea typeface="Calibri" pitchFamily="34" charset="-122"/>
                 <a:cs typeface="Calibri" pitchFamily="34" charset="-120"/>
               </a:rPr>
-              <a:t>Y si la respuesta es nada relevante para nuestro trabajo, esa también es una conclusión válida y útil. Dígalo así.</a:t>
-            </a:r>
-            <a:endParaRPr lang="en-US" sz="1300" dirty="0"/>
-          </a:p>
-        </p:txBody>
-      </p:sp>
-      <p:sp>
-        <p:nvSpPr>
-          <p:cNvPr id="9" name="Shape 7"/>
+              <a:t>Quince minutos con Copilot. Es el punto de comparación de todos los equipos. Si ya lo hiciste el viernes, revisa y anota lo que te dio.</a:t>
+            </a:r>
+            <a:endParaRPr lang="en-US" sz="1450" dirty="0"/>
+          </a:p>
+        </p:txBody>
+      </p:sp>
+      <p:sp>
+        <p:nvSpPr>
+          <p:cNvPr id="11" name="Shape 9"/>
           <p:cNvSpPr/>
           <p:nvPr/>
         </p:nvSpPr>
         <p:spPr>
           <a:xfrm>
-            <a:off x="4344314" y="2011680"/>
-            <a:ext cx="3503066" cy="2078228"/>
+            <a:off x="566928" y="2731770"/>
+            <a:ext cx="11057839" cy="628650"/>
           </a:xfrm>
           <a:prstGeom prst="roundRect">
             <a:avLst>
-              <a:gd name="adj" fmla="val 3520"/>
+              <a:gd name="adj" fmla="val 10182"/>
             </a:avLst>
           </a:prstGeom>
           <a:solidFill>
-            <a:srgbClr val="F2F5F6"/>
+            <a:srgbClr val="FFFFFF"/>
           </a:solidFill>
           <a:ln w="12700">
             <a:solidFill>
-              <a:srgbClr val="F2F5F6"/>
+              <a:srgbClr val="FFFFFF"/>
             </a:solidFill>
             <a:prstDash val="solid"/>
           </a:ln>
@@ -2608,13 +2936,13 @@
       </p:sp>
       <p:sp>
         <p:nvSpPr>
-          <p:cNvPr id="10" name="Shape 8"/>
+          <p:cNvPr id="12" name="Shape 10"/>
           <p:cNvSpPr/>
           <p:nvPr/>
         </p:nvSpPr>
         <p:spPr>
           <a:xfrm>
-            <a:off x="4582058" y="2231136"/>
+            <a:off x="786384" y="2835783"/>
             <a:ext cx="420624" cy="420624"/>
           </a:xfrm>
           <a:prstGeom prst="ellipse">
@@ -2633,13 +2961,13 @@
       </p:sp>
       <p:sp>
         <p:nvSpPr>
-          <p:cNvPr id="11" name="Text 9"/>
+          <p:cNvPr id="13" name="Text 11"/>
           <p:cNvSpPr txBox="1"/>
           <p:nvPr/>
         </p:nvSpPr>
         <p:spPr>
           <a:xfrm>
-            <a:off x="4582058" y="2231136"/>
+            <a:off x="786384" y="2835783"/>
             <a:ext cx="420624" cy="420624"/>
           </a:xfrm>
           <a:prstGeom prst="rect">
@@ -2672,14 +3000,14 @@
       </p:sp>
       <p:sp>
         <p:nvSpPr>
-          <p:cNvPr id="12" name="Text 10"/>
+          <p:cNvPr id="14" name="Text 12"/>
           <p:cNvSpPr txBox="1"/>
           <p:nvPr/>
         </p:nvSpPr>
         <p:spPr>
           <a:xfrm>
-            <a:off x="4582058" y="2798064"/>
-            <a:ext cx="3027578" cy="457200"/>
+            <a:off x="1408176" y="2823210"/>
+            <a:ext cx="9960559" cy="445770"/>
           </a:xfrm>
           <a:prstGeom prst="rect">
             <a:avLst/>
@@ -2688,46 +3016,7 @@
           <a:ln/>
         </p:spPr>
         <p:txBody>
-          <a:bodyPr wrap="square" lIns="0" tIns="0" rIns="0" bIns="0" rtlCol="0" anchor="t"/>
-          <a:lstStyle/>
-          <a:p>
-            <a:pPr indent="0" marL="0">
-              <a:buNone/>
-            </a:pPr>
-            <a:r>
-              <a:rPr lang="en-US" sz="1600" b="1" dirty="0">
-                <a:solidFill>
-                  <a:srgbClr val="16262E"/>
-                </a:solidFill>
-                <a:latin typeface="Arial" pitchFamily="34" charset="0"/>
-                <a:ea typeface="Arial" pitchFamily="34" charset="-122"/>
-                <a:cs typeface="Arial" pitchFamily="34" charset="-120"/>
-              </a:rPr>
-              <a:t>¿Qué le pide al usuario?</a:t>
-            </a:r>
-            <a:endParaRPr lang="en-US" sz="1600" dirty="0"/>
-          </a:p>
-        </p:txBody>
-      </p:sp>
-      <p:sp>
-        <p:nvSpPr>
-          <p:cNvPr id="13" name="Text 11"/>
-          <p:cNvSpPr txBox="1"/>
-          <p:nvPr/>
-        </p:nvSpPr>
-        <p:spPr>
-          <a:xfrm>
-            <a:off x="4582058" y="3273552"/>
-            <a:ext cx="3027578" cy="578612"/>
-          </a:xfrm>
-          <a:prstGeom prst="rect">
-            <a:avLst/>
-          </a:prstGeom>
-          <a:noFill/>
-          <a:ln/>
-        </p:spPr>
-        <p:txBody>
-          <a:bodyPr wrap="square" lIns="0" tIns="0" rIns="0" bIns="0" rtlCol="0" anchor="t"/>
+          <a:bodyPr wrap="square" lIns="0" tIns="0" rIns="0" bIns="0" rtlCol="0" anchor="ctr"/>
           <a:lstStyle/>
           <a:p>
             <a:pPr indent="0" marL="0">
@@ -2737,7 +3026,7 @@
               <a:buNone/>
             </a:pPr>
             <a:r>
-              <a:rPr lang="en-US" sz="1300" dirty="0">
+              <a:rPr lang="en-US" sz="1450" dirty="0">
                 <a:solidFill>
                   <a:srgbClr val="16262E"/>
                 </a:solidFill>
@@ -2745,34 +3034,34 @@
                 <a:ea typeface="Calibri" pitchFamily="34" charset="-122"/>
                 <a:cs typeface="Calibri" pitchFamily="34" charset="-120"/>
               </a:rPr>
-              <a:t>Cuenta, costo si se quisiera usar en serio, tiempo de aprendizaje, y qué información habría que darle.</a:t>
-            </a:r>
-            <a:endParaRPr lang="en-US" sz="1300" dirty="0"/>
-          </a:p>
-        </p:txBody>
-      </p:sp>
-      <p:sp>
-        <p:nvSpPr>
-          <p:cNvPr id="14" name="Shape 12"/>
+              <a:t>Veinticinco minutos con tu herramienta asignada. Misma tarea, mismo corpus, mismo libro de códigos.</a:t>
+            </a:r>
+            <a:endParaRPr lang="en-US" sz="1450" dirty="0"/>
+          </a:p>
+        </p:txBody>
+      </p:sp>
+      <p:sp>
+        <p:nvSpPr>
+          <p:cNvPr id="15" name="Shape 13"/>
           <p:cNvSpPr/>
           <p:nvPr/>
         </p:nvSpPr>
         <p:spPr>
           <a:xfrm>
-            <a:off x="8121701" y="2011680"/>
-            <a:ext cx="3503066" cy="2078228"/>
+            <a:off x="566928" y="3543300"/>
+            <a:ext cx="11057839" cy="628650"/>
           </a:xfrm>
           <a:prstGeom prst="roundRect">
             <a:avLst>
-              <a:gd name="adj" fmla="val 3520"/>
+              <a:gd name="adj" fmla="val 10182"/>
             </a:avLst>
           </a:prstGeom>
           <a:solidFill>
-            <a:srgbClr val="F7E4D8"/>
+            <a:srgbClr val="FFFFFF"/>
           </a:solidFill>
           <a:ln w="12700">
             <a:solidFill>
-              <a:srgbClr val="F7E4D8"/>
+              <a:srgbClr val="FFFFFF"/>
             </a:solidFill>
             <a:prstDash val="solid"/>
           </a:ln>
@@ -2780,24 +3069,24 @@
       </p:sp>
       <p:sp>
         <p:nvSpPr>
-          <p:cNvPr id="15" name="Shape 13"/>
+          <p:cNvPr id="16" name="Shape 14"/>
           <p:cNvSpPr/>
           <p:nvPr/>
         </p:nvSpPr>
         <p:spPr>
           <a:xfrm>
-            <a:off x="8359445" y="2231136"/>
+            <a:off x="786384" y="3647313"/>
             <a:ext cx="420624" cy="420624"/>
           </a:xfrm>
           <a:prstGeom prst="ellipse">
             <a:avLst/>
           </a:prstGeom>
           <a:solidFill>
-            <a:srgbClr val="C85A28"/>
+            <a:srgbClr val="2E7D7D"/>
           </a:solidFill>
           <a:ln w="12700">
             <a:solidFill>
-              <a:srgbClr val="C85A28"/>
+              <a:srgbClr val="2E7D7D"/>
             </a:solidFill>
             <a:prstDash val="solid"/>
           </a:ln>
@@ -2805,13 +3094,13 @@
       </p:sp>
       <p:sp>
         <p:nvSpPr>
-          <p:cNvPr id="16" name="Text 14"/>
+          <p:cNvPr id="17" name="Text 15"/>
           <p:cNvSpPr txBox="1"/>
           <p:nvPr/>
         </p:nvSpPr>
         <p:spPr>
           <a:xfrm>
-            <a:off x="8359445" y="2231136"/>
+            <a:off x="786384" y="3647313"/>
             <a:ext cx="420624" cy="420624"/>
           </a:xfrm>
           <a:prstGeom prst="rect">
@@ -2844,14 +3133,14 @@
       </p:sp>
       <p:sp>
         <p:nvSpPr>
-          <p:cNvPr id="17" name="Text 15"/>
+          <p:cNvPr id="18" name="Text 16"/>
           <p:cNvSpPr txBox="1"/>
           <p:nvPr/>
         </p:nvSpPr>
         <p:spPr>
           <a:xfrm>
-            <a:off x="8359445" y="2798064"/>
-            <a:ext cx="3027578" cy="457200"/>
+            <a:off x="1408176" y="3634740"/>
+            <a:ext cx="9960559" cy="445770"/>
           </a:xfrm>
           <a:prstGeom prst="rect">
             <a:avLst/>
@@ -2860,46 +3149,7 @@
           <a:ln/>
         </p:spPr>
         <p:txBody>
-          <a:bodyPr wrap="square" lIns="0" tIns="0" rIns="0" bIns="0" rtlCol="0" anchor="t"/>
-          <a:lstStyle/>
-          <a:p>
-            <a:pPr indent="0" marL="0">
-              <a:buNone/>
-            </a:pPr>
-            <a:r>
-              <a:rPr lang="en-US" sz="1600" b="1" dirty="0">
-                <a:solidFill>
-                  <a:srgbClr val="16262E"/>
-                </a:solidFill>
-                <a:latin typeface="Arial" pitchFamily="34" charset="0"/>
-                <a:ea typeface="Arial" pitchFamily="34" charset="-122"/>
-                <a:cs typeface="Arial" pitchFamily="34" charset="-120"/>
-              </a:rPr>
-              <a:t>¿Para qué tarea la recomendarían?</a:t>
-            </a:r>
-            <a:endParaRPr lang="en-US" sz="1600" dirty="0"/>
-          </a:p>
-        </p:txBody>
-      </p:sp>
-      <p:sp>
-        <p:nvSpPr>
-          <p:cNvPr id="18" name="Text 16"/>
-          <p:cNvSpPr txBox="1"/>
-          <p:nvPr/>
-        </p:nvSpPr>
-        <p:spPr>
-          <a:xfrm>
-            <a:off x="8359445" y="3273552"/>
-            <a:ext cx="3027578" cy="578612"/>
-          </a:xfrm>
-          <a:prstGeom prst="rect">
-            <a:avLst/>
-          </a:prstGeom>
-          <a:noFill/>
-          <a:ln/>
-        </p:spPr>
-        <p:txBody>
-          <a:bodyPr wrap="square" lIns="0" tIns="0" rIns="0" bIns="0" rtlCol="0" anchor="t"/>
+          <a:bodyPr wrap="square" lIns="0" tIns="0" rIns="0" bIns="0" rtlCol="0" anchor="ctr"/>
           <a:lstStyle/>
           <a:p>
             <a:pPr indent="0" marL="0">
@@ -2909,7 +3159,7 @@
               <a:buNone/>
             </a:pPr>
             <a:r>
-              <a:rPr lang="en-US" sz="1300" dirty="0">
+              <a:rPr lang="en-US" sz="1450" dirty="0">
                 <a:solidFill>
                   <a:srgbClr val="16262E"/>
                 </a:solidFill>
@@ -2917,22 +3167,74 @@
                 <a:ea typeface="Calibri" pitchFamily="34" charset="-122"/>
                 <a:cs typeface="Calibri" pitchFamily="34" charset="-120"/>
               </a:rPr>
-              <a:t>Una tarea concreta del trabajo de esta área. Si no encuentran ninguna, eso es lo que hay que reportar.</a:t>
-            </a:r>
-            <a:endParaRPr lang="en-US" sz="1300" dirty="0"/>
-          </a:p>
-        </p:txBody>
-      </p:sp>
-      <p:sp>
-        <p:nvSpPr>
-          <p:cNvPr id="19" name="Text 17"/>
+              <a:t>Busca la diferencia, no la repetición. Si tu herramienta dio lo mismo que Copilot, eso también es un hallazgo y hay que reportarlo.</a:t>
+            </a:r>
+            <a:endParaRPr lang="en-US" sz="1450" dirty="0"/>
+          </a:p>
+        </p:txBody>
+      </p:sp>
+      <p:sp>
+        <p:nvSpPr>
+          <p:cNvPr id="19" name="Shape 17"/>
+          <p:cNvSpPr/>
+          <p:nvPr/>
+        </p:nvSpPr>
+        <p:spPr>
+          <a:xfrm>
+            <a:off x="566928" y="4354830"/>
+            <a:ext cx="11057839" cy="628650"/>
+          </a:xfrm>
+          <a:prstGeom prst="roundRect">
+            <a:avLst>
+              <a:gd name="adj" fmla="val 10182"/>
+            </a:avLst>
+          </a:prstGeom>
+          <a:solidFill>
+            <a:srgbClr val="FFFFFF"/>
+          </a:solidFill>
+          <a:ln w="12700">
+            <a:solidFill>
+              <a:srgbClr val="FFFFFF"/>
+            </a:solidFill>
+            <a:prstDash val="solid"/>
+          </a:ln>
+        </p:spPr>
+      </p:sp>
+      <p:sp>
+        <p:nvSpPr>
+          <p:cNvPr id="20" name="Shape 18"/>
+          <p:cNvSpPr/>
+          <p:nvPr/>
+        </p:nvSpPr>
+        <p:spPr>
+          <a:xfrm>
+            <a:off x="786384" y="4458843"/>
+            <a:ext cx="420624" cy="420624"/>
+          </a:xfrm>
+          <a:prstGeom prst="ellipse">
+            <a:avLst/>
+          </a:prstGeom>
+          <a:solidFill>
+            <a:srgbClr val="2E7D7D"/>
+          </a:solidFill>
+          <a:ln w="12700">
+            <a:solidFill>
+              <a:srgbClr val="2E7D7D"/>
+            </a:solidFill>
+            <a:prstDash val="solid"/>
+          </a:ln>
+        </p:spPr>
+      </p:sp>
+      <p:sp>
+        <p:nvSpPr>
+          <p:cNvPr id="21" name="Text 19"/>
           <p:cNvSpPr txBox="1"/>
           <p:nvPr/>
         </p:nvSpPr>
         <p:spPr>
           <a:xfrm>
-            <a:off x="566928" y="6327648"/>
-            <a:ext cx="11057839" cy="292608"/>
+            <a:off x="786384" y="4458843"/>
+            <a:ext cx="420624" cy="420624"/>
           </a:xfrm>
           <a:prstGeom prst="rect">
             <a:avLst/>
@@ -2944,21 +3246,129 @@
           <a:bodyPr wrap="square" lIns="0" tIns="0" rIns="0" bIns="0" rtlCol="0" anchor="ctr"/>
           <a:lstStyle/>
           <a:p>
+            <a:pPr algn="ctr" indent="0" marL="0">
+              <a:buNone/>
+            </a:pPr>
+            <a:r>
+              <a:rPr lang="en-US" sz="1400" b="1" dirty="0">
+                <a:solidFill>
+                  <a:srgbClr val="FFFFFF"/>
+                </a:solidFill>
+                <a:latin typeface="Arial" pitchFamily="34" charset="0"/>
+                <a:ea typeface="Arial" pitchFamily="34" charset="-122"/>
+                <a:cs typeface="Arial" pitchFamily="34" charset="-120"/>
+              </a:rPr>
+              <a:t>4</a:t>
+            </a:r>
+            <a:endParaRPr lang="en-US" sz="1400" dirty="0"/>
+          </a:p>
+        </p:txBody>
+      </p:sp>
+      <p:sp>
+        <p:nvSpPr>
+          <p:cNvPr id="22" name="Text 20"/>
+          <p:cNvSpPr txBox="1"/>
+          <p:nvPr/>
+        </p:nvSpPr>
+        <p:spPr>
+          <a:xfrm>
+            <a:off x="1408176" y="4446270"/>
+            <a:ext cx="9960559" cy="445770"/>
+          </a:xfrm>
+          <a:prstGeom prst="rect">
+            <a:avLst/>
+          </a:prstGeom>
+          <a:noFill/>
+          <a:ln/>
+        </p:spPr>
+        <p:txBody>
+          <a:bodyPr wrap="square" lIns="0" tIns="0" rIns="0" bIns="0" rtlCol="0" anchor="ctr"/>
+          <a:lstStyle/>
+          <a:p>
             <a:pPr indent="0" marL="0">
-              <a:buNone/>
-            </a:pPr>
-            <a:r>
-              <a:rPr lang="en-US" sz="1000" dirty="0">
+              <a:lnSpc>
+                <a:spcPct val="110000"/>
+              </a:lnSpc>
+              <a:buNone/>
+            </a:pPr>
+            <a:r>
+              <a:rPr lang="en-US" sz="1450" dirty="0">
                 <a:solidFill>
-                  <a:srgbClr val="5A6B73"/>
+                  <a:srgbClr val="16262E"/>
                 </a:solidFill>
                 <a:latin typeface="Calibri" pitchFamily="34" charset="0"/>
                 <a:ea typeface="Calibri" pitchFamily="34" charset="-122"/>
                 <a:cs typeface="Calibri" pitchFamily="34" charset="-120"/>
               </a:rPr>
-              <a:t>Al terminar las seis presentaciones, el cuadro comparativo queda lleno con las ocho herramientas evaluadas por uso propio.</a:t>
-            </a:r>
-            <a:endParaRPr lang="en-US" sz="1000" dirty="0"/>
+              <a:t>Cinco minutos para llenar tu renglón del cuadro comparativo y preparar cinco minutos de presentación.</a:t>
+            </a:r>
+            <a:endParaRPr lang="en-US" sz="1450" dirty="0"/>
+          </a:p>
+        </p:txBody>
+      </p:sp>
+      <p:sp>
+        <p:nvSpPr>
+          <p:cNvPr id="23" name="Shape 21"/>
+          <p:cNvSpPr/>
+          <p:nvPr/>
+        </p:nvSpPr>
+        <p:spPr>
+          <a:xfrm>
+            <a:off x="566928" y="5193792"/>
+            <a:ext cx="11057839" cy="777240"/>
+          </a:xfrm>
+          <a:prstGeom prst="roundRect">
+            <a:avLst>
+              <a:gd name="adj" fmla="val 8235"/>
+            </a:avLst>
+          </a:prstGeom>
+          <a:solidFill>
+            <a:srgbClr val="16262E"/>
+          </a:solidFill>
+          <a:ln w="12700">
+            <a:solidFill>
+              <a:srgbClr val="16262E"/>
+            </a:solidFill>
+            <a:prstDash val="solid"/>
+          </a:ln>
+        </p:spPr>
+      </p:sp>
+      <p:sp>
+        <p:nvSpPr>
+          <p:cNvPr id="24" name="Text 22"/>
+          <p:cNvSpPr txBox="1"/>
+          <p:nvPr/>
+        </p:nvSpPr>
+        <p:spPr>
+          <a:xfrm>
+            <a:off x="841248" y="5193792"/>
+            <a:ext cx="10509199" cy="777240"/>
+          </a:xfrm>
+          <a:prstGeom prst="rect">
+            <a:avLst/>
+          </a:prstGeom>
+          <a:noFill/>
+          <a:ln/>
+        </p:spPr>
+        <p:txBody>
+          <a:bodyPr wrap="square" lIns="0" tIns="0" rIns="0" bIns="0" rtlCol="0" anchor="ctr"/>
+          <a:lstStyle/>
+          <a:p>
+            <a:pPr indent="0" marL="0">
+              <a:buNone/>
+            </a:pPr>
+            <a:r>
+              <a:rPr lang="en-US" sz="1350" dirty="0">
+                <a:solidFill>
+                  <a:srgbClr val="FFFFFF"/>
+                </a:solidFill>
+                <a:latin typeface="Calibri" pitchFamily="34" charset="0"/>
+                <a:ea typeface="Calibri" pitchFamily="34" charset="-122"/>
+                <a:cs typeface="Calibri" pitchFamily="34" charset="-120"/>
+              </a:rPr>
+              <a:t>Corpus: Registros_atencion_ciudadana_PARTICIPANTE.xlsx. Cuadro: Plantillas_tabulares_curso_IA.xlsx, hoja Cuadro comparativo.</a:t>
+            </a:r>
+            <a:endParaRPr lang="en-US" sz="1350" dirty="0"/>
           </a:p>
         </p:txBody>
       </p:sp>
@@ -2973,383 +3383,6 @@
 <file path=ppt/slides/slide11.xml><?xml version="1.0" encoding="utf-8"?>
 <p:sld xmlns:a="http://schemas.openxmlformats.org/drawingml/2006/main" xmlns:r="http://schemas.openxmlformats.org/officeDocument/2006/relationships" xmlns:p="http://schemas.openxmlformats.org/presentationml/2006/main">
   <p:cSld name="Slide 11">
-    <p:spTree>
-      <p:nvGrpSpPr>
-        <p:cNvPr id="1" name=""/>
-        <p:cNvGrpSpPr/>
-        <p:nvPr/>
-      </p:nvGrpSpPr>
-      <p:grpSpPr>
-        <a:xfrm>
-          <a:off x="0" y="0"/>
-          <a:ext cx="0" cy="0"/>
-          <a:chOff x="0" y="0"/>
-          <a:chExt cx="0" cy="0"/>
-        </a:xfrm>
-      </p:grpSpPr>
-      <p:sp>
-        <p:nvSpPr>
-          <p:cNvPr id="2" name="Text 0"/>
-          <p:cNvSpPr txBox="1"/>
-          <p:nvPr/>
-        </p:nvSpPr>
-        <p:spPr>
-          <a:xfrm>
-            <a:off x="566928" y="402336"/>
-            <a:ext cx="9229039" cy="749808"/>
-          </a:xfrm>
-          <a:prstGeom prst="rect">
-            <a:avLst/>
-          </a:prstGeom>
-          <a:noFill/>
-          <a:ln/>
-        </p:spPr>
-        <p:txBody>
-          <a:bodyPr wrap="square" lIns="0" tIns="0" rIns="0" bIns="0" rtlCol="0" anchor="t"/>
-          <a:lstStyle/>
-          <a:p>
-            <a:pPr algn="l" indent="0" marL="0">
-              <a:buNone/>
-            </a:pPr>
-            <a:r>
-              <a:rPr lang="en-US" sz="3200" b="1" dirty="0">
-                <a:solidFill>
-                  <a:srgbClr val="16262E"/>
-                </a:solidFill>
-                <a:latin typeface="Arial" pitchFamily="34" charset="0"/>
-                <a:ea typeface="Arial" pitchFamily="34" charset="-122"/>
-                <a:cs typeface="Arial" pitchFamily="34" charset="-120"/>
-              </a:rPr>
-              <a:t>Lo que queda fuera del alcance de red</a:t>
-            </a:r>
-            <a:endParaRPr lang="en-US" sz="3200" dirty="0"/>
-          </a:p>
-        </p:txBody>
-      </p:sp>
-      <p:sp>
-        <p:nvSpPr>
-          <p:cNvPr id="3" name="Text 1"/>
-          <p:cNvSpPr txBox="1"/>
-          <p:nvPr/>
-        </p:nvSpPr>
-        <p:spPr>
-          <a:xfrm>
-            <a:off x="566928" y="1280160"/>
-            <a:ext cx="9960559" cy="365760"/>
-          </a:xfrm>
-          <a:prstGeom prst="rect">
-            <a:avLst/>
-          </a:prstGeom>
-          <a:noFill/>
-          <a:ln/>
-        </p:spPr>
-        <p:txBody>
-          <a:bodyPr wrap="square" lIns="0" tIns="0" rIns="0" bIns="0" rtlCol="0" anchor="t"/>
-          <a:lstStyle/>
-          <a:p>
-            <a:pPr indent="0" marL="0">
-              <a:buNone/>
-            </a:pPr>
-            <a:r>
-              <a:rPr lang="en-US" sz="1500" dirty="0">
-                <a:solidFill>
-                  <a:srgbClr val="5A6B73"/>
-                </a:solidFill>
-                <a:latin typeface="Calibri" pitchFamily="34" charset="0"/>
-                <a:ea typeface="Calibri" pitchFamily="34" charset="-122"/>
-                <a:cs typeface="Calibri" pitchFamily="34" charset="-120"/>
-              </a:rPr>
-              <a:t>Dos herramientas que no se resuelven con permisos, porque requieren licencia de paga. Las veo en demostración.</a:t>
-            </a:r>
-            <a:endParaRPr lang="en-US" sz="1500" dirty="0"/>
-          </a:p>
-        </p:txBody>
-      </p:sp>
-      <p:sp>
-        <p:nvSpPr>
-          <p:cNvPr id="4" name="Shape 2"/>
-          <p:cNvSpPr/>
-          <p:nvPr/>
-        </p:nvSpPr>
-        <p:spPr>
-          <a:xfrm>
-            <a:off x="566928" y="2011680"/>
-            <a:ext cx="5391760" cy="2074418"/>
-          </a:xfrm>
-          <a:prstGeom prst="roundRect">
-            <a:avLst>
-              <a:gd name="adj" fmla="val 3526"/>
-            </a:avLst>
-          </a:prstGeom>
-          <a:solidFill>
-            <a:srgbClr val="D7E7E7"/>
-          </a:solidFill>
-          <a:ln w="12700">
-            <a:solidFill>
-              <a:srgbClr val="D7E7E7"/>
-            </a:solidFill>
-            <a:prstDash val="solid"/>
-          </a:ln>
-        </p:spPr>
-      </p:sp>
-      <p:sp>
-        <p:nvSpPr>
-          <p:cNvPr id="5" name="Text 3"/>
-          <p:cNvSpPr txBox="1"/>
-          <p:nvPr/>
-        </p:nvSpPr>
-        <p:spPr>
-          <a:xfrm>
-            <a:off x="804672" y="2249424"/>
-            <a:ext cx="4916272" cy="457200"/>
-          </a:xfrm>
-          <a:prstGeom prst="rect">
-            <a:avLst/>
-          </a:prstGeom>
-          <a:noFill/>
-          <a:ln/>
-        </p:spPr>
-        <p:txBody>
-          <a:bodyPr wrap="square" lIns="0" tIns="0" rIns="0" bIns="0" rtlCol="0" anchor="t"/>
-          <a:lstStyle/>
-          <a:p>
-            <a:pPr indent="0" marL="0">
-              <a:buNone/>
-            </a:pPr>
-            <a:r>
-              <a:rPr lang="en-US" sz="1600" b="1" dirty="0">
-                <a:solidFill>
-                  <a:srgbClr val="16262E"/>
-                </a:solidFill>
-                <a:latin typeface="Arial" pitchFamily="34" charset="0"/>
-                <a:ea typeface="Arial" pitchFamily="34" charset="-122"/>
-                <a:cs typeface="Arial" pitchFamily="34" charset="-120"/>
-              </a:rPr>
-              <a:t>Atlas.ti y MAXQDA con IA</a:t>
-            </a:r>
-            <a:endParaRPr lang="en-US" sz="1600" dirty="0"/>
-          </a:p>
-        </p:txBody>
-      </p:sp>
-      <p:sp>
-        <p:nvSpPr>
-          <p:cNvPr id="6" name="Text 4"/>
-          <p:cNvSpPr txBox="1"/>
-          <p:nvPr/>
-        </p:nvSpPr>
-        <p:spPr>
-          <a:xfrm>
-            <a:off x="804672" y="2724912"/>
-            <a:ext cx="4916272" cy="1123442"/>
-          </a:xfrm>
-          <a:prstGeom prst="rect">
-            <a:avLst/>
-          </a:prstGeom>
-          <a:noFill/>
-          <a:ln/>
-        </p:spPr>
-        <p:txBody>
-          <a:bodyPr wrap="square" lIns="0" tIns="0" rIns="0" bIns="0" rtlCol="0" anchor="t"/>
-          <a:lstStyle/>
-          <a:p>
-            <a:pPr indent="0" marL="0">
-              <a:lnSpc>
-                <a:spcPct val="110000"/>
-              </a:lnSpc>
-              <a:buNone/>
-            </a:pPr>
-            <a:r>
-              <a:rPr lang="en-US" sz="1300" dirty="0">
-                <a:solidFill>
-                  <a:srgbClr val="16262E"/>
-                </a:solidFill>
-                <a:latin typeface="Calibri" pitchFamily="34" charset="0"/>
-                <a:ea typeface="Calibri" pitchFamily="34" charset="-122"/>
-                <a:cs typeface="Calibri" pitchFamily="34" charset="-120"/>
-              </a:rPr>
-              <a:t>Son el estándar en investigación cualitativa formal. Muestro la codificación asistida y el reporte de codificación, que es lo que pide una revisión metodológica seria.</a:t>
-            </a:r>
-            <a:endParaRPr lang="en-US" sz="1300" dirty="0"/>
-          </a:p>
-          <a:p>
-            <a:pPr indent="0" marL="0">
-              <a:lnSpc>
-                <a:spcPct val="110000"/>
-              </a:lnSpc>
-              <a:buNone/>
-            </a:pPr>
-            <a:endParaRPr lang="en-US" sz="1300" dirty="0"/>
-          </a:p>
-          <a:p>
-            <a:pPr indent="0" marL="0">
-              <a:lnSpc>
-                <a:spcPct val="110000"/>
-              </a:lnSpc>
-              <a:buNone/>
-            </a:pPr>
-            <a:r>
-              <a:rPr lang="en-US" sz="1300" dirty="0">
-                <a:solidFill>
-                  <a:srgbClr val="16262E"/>
-                </a:solidFill>
-                <a:latin typeface="Calibri" pitchFamily="34" charset="0"/>
-                <a:ea typeface="Calibri" pitchFamily="34" charset="-122"/>
-                <a:cs typeface="Calibri" pitchFamily="34" charset="-120"/>
-              </a:rPr>
-              <a:t>Si alguna vez tienen que defender un análisis cualitativo ante un comité, esta es la diferencia.</a:t>
-            </a:r>
-            <a:endParaRPr lang="en-US" sz="1300" dirty="0"/>
-          </a:p>
-        </p:txBody>
-      </p:sp>
-      <p:sp>
-        <p:nvSpPr>
-          <p:cNvPr id="7" name="Shape 5"/>
-          <p:cNvSpPr/>
-          <p:nvPr/>
-        </p:nvSpPr>
-        <p:spPr>
-          <a:xfrm>
-            <a:off x="6233008" y="2011680"/>
-            <a:ext cx="5391760" cy="2074418"/>
-          </a:xfrm>
-          <a:prstGeom prst="roundRect">
-            <a:avLst>
-              <a:gd name="adj" fmla="val 3526"/>
-            </a:avLst>
-          </a:prstGeom>
-          <a:solidFill>
-            <a:srgbClr val="F7E4D8"/>
-          </a:solidFill>
-          <a:ln w="12700">
-            <a:solidFill>
-              <a:srgbClr val="F7E4D8"/>
-            </a:solidFill>
-            <a:prstDash val="solid"/>
-          </a:ln>
-        </p:spPr>
-      </p:sp>
-      <p:sp>
-        <p:nvSpPr>
-          <p:cNvPr id="8" name="Text 6"/>
-          <p:cNvSpPr txBox="1"/>
-          <p:nvPr/>
-        </p:nvSpPr>
-        <p:spPr>
-          <a:xfrm>
-            <a:off x="6470752" y="2249424"/>
-            <a:ext cx="4916272" cy="457200"/>
-          </a:xfrm>
-          <a:prstGeom prst="rect">
-            <a:avLst/>
-          </a:prstGeom>
-          <a:noFill/>
-          <a:ln/>
-        </p:spPr>
-        <p:txBody>
-          <a:bodyPr wrap="square" lIns="0" tIns="0" rIns="0" bIns="0" rtlCol="0" anchor="t"/>
-          <a:lstStyle/>
-          <a:p>
-            <a:pPr indent="0" marL="0">
-              <a:buNone/>
-            </a:pPr>
-            <a:r>
-              <a:rPr lang="en-US" sz="1600" b="1" dirty="0">
-                <a:solidFill>
-                  <a:srgbClr val="16262E"/>
-                </a:solidFill>
-                <a:latin typeface="Arial" pitchFamily="34" charset="0"/>
-                <a:ea typeface="Arial" pitchFamily="34" charset="-122"/>
-                <a:cs typeface="Arial" pitchFamily="34" charset="-120"/>
-              </a:rPr>
-              <a:t>NotebookLM</a:t>
-            </a:r>
-            <a:endParaRPr lang="en-US" sz="1600" dirty="0"/>
-          </a:p>
-        </p:txBody>
-      </p:sp>
-      <p:sp>
-        <p:nvSpPr>
-          <p:cNvPr id="9" name="Text 7"/>
-          <p:cNvSpPr txBox="1"/>
-          <p:nvPr/>
-        </p:nvSpPr>
-        <p:spPr>
-          <a:xfrm>
-            <a:off x="6470752" y="2724912"/>
-            <a:ext cx="4916272" cy="1123442"/>
-          </a:xfrm>
-          <a:prstGeom prst="rect">
-            <a:avLst/>
-          </a:prstGeom>
-          <a:noFill/>
-          <a:ln/>
-        </p:spPr>
-        <p:txBody>
-          <a:bodyPr wrap="square" lIns="0" tIns="0" rIns="0" bIns="0" rtlCol="0" anchor="t"/>
-          <a:lstStyle/>
-          <a:p>
-            <a:pPr indent="0" marL="0">
-              <a:lnSpc>
-                <a:spcPct val="110000"/>
-              </a:lnSpc>
-              <a:buNone/>
-            </a:pPr>
-            <a:r>
-              <a:rPr lang="en-US" sz="1300" dirty="0">
-                <a:solidFill>
-                  <a:srgbClr val="16262E"/>
-                </a:solidFill>
-                <a:latin typeface="Calibri" pitchFamily="34" charset="0"/>
-                <a:ea typeface="Calibri" pitchFamily="34" charset="-122"/>
-                <a:cs typeface="Calibri" pitchFamily="34" charset="-120"/>
-              </a:rPr>
-              <a:t>Todavía no está liberada y vale la pena pedirla. Responde citando el párrafo exacto de cada documento fuente, que es justo lo que ustedes van a construir a mano mañana en la matriz de evidencia.</a:t>
-            </a:r>
-            <a:endParaRPr lang="en-US" sz="1300" dirty="0"/>
-          </a:p>
-          <a:p>
-            <a:pPr indent="0" marL="0">
-              <a:lnSpc>
-                <a:spcPct val="110000"/>
-              </a:lnSpc>
-              <a:buNone/>
-            </a:pPr>
-            <a:endParaRPr lang="en-US" sz="1300" dirty="0"/>
-          </a:p>
-          <a:p>
-            <a:pPr indent="0" marL="0">
-              <a:lnSpc>
-                <a:spcPct val="110000"/>
-              </a:lnSpc>
-              <a:buNone/>
-            </a:pPr>
-            <a:r>
-              <a:rPr lang="en-US" sz="1300" dirty="0">
-                <a:solidFill>
-                  <a:srgbClr val="16262E"/>
-                </a:solidFill>
-                <a:latin typeface="Calibri" pitchFamily="34" charset="0"/>
-                <a:ea typeface="Calibri" pitchFamily="34" charset="-122"/>
-                <a:cs typeface="Calibri" pitchFamily="34" charset="-120"/>
-              </a:rPr>
-              <a:t>Es del mismo proveedor que Gemini, así que probablemente sea el mismo trámite.</a:t>
-            </a:r>
-            <a:endParaRPr lang="en-US" sz="1300" dirty="0"/>
-          </a:p>
-        </p:txBody>
-      </p:sp>
-    </p:spTree>
-  </p:cSld>
-  <p:clrMapOvr>
-    <a:masterClrMapping/>
-  </p:clrMapOvr>
-</p:sld>
-</file>
-
-<file path=ppt/slides/slide12.xml><?xml version="1.0" encoding="utf-8"?>
-<p:sld xmlns:a="http://schemas.openxmlformats.org/drawingml/2006/main" xmlns:r="http://schemas.openxmlformats.org/officeDocument/2006/relationships" xmlns:p="http://schemas.openxmlformats.org/presentationml/2006/main">
-  <p:cSld name="Slide 12">
     <p:bg>
       <p:bgPr>
         <a:solidFill>
@@ -3468,7 +3501,7 @@
                 <a:ea typeface="Calibri" pitchFamily="34" charset="-122"/>
                 <a:cs typeface="Calibri" pitchFamily="34" charset="-120"/>
               </a:rPr>
-              <a:t>LA RESPUESTA PRÁCTICA</a:t>
+              <a:t>PUESTA EN COMÚN</a:t>
             </a:r>
             <a:endParaRPr lang="en-US" sz="1400" dirty="0"/>
           </a:p>
@@ -3507,7 +3540,7 @@
                 <a:ea typeface="Arial" pitchFamily="34" charset="-122"/>
                 <a:cs typeface="Arial" pitchFamily="34" charset="-120"/>
               </a:rPr>
-              <a:t>Armar un ambiente con lo que ya tenemos</a:t>
+              <a:t>Cinco minutos por equipo</a:t>
             </a:r>
             <a:endParaRPr lang="en-US" sz="3400" dirty="0"/>
           </a:p>
@@ -3573,9 +3606,839 @@
                 <a:ea typeface="Calibri" pitchFamily="34" charset="-122"/>
                 <a:cs typeface="Calibri" pitchFamily="34" charset="-120"/>
               </a:rPr>
-              <a:t>11:10 a 11:25</a:t>
+              <a:t>10:20 a 10:50</a:t>
             </a:r>
             <a:endParaRPr lang="en-US" sz="1200" dirty="0"/>
+          </a:p>
+        </p:txBody>
+      </p:sp>
+    </p:spTree>
+  </p:cSld>
+  <p:clrMapOvr>
+    <a:masterClrMapping/>
+  </p:clrMapOvr>
+</p:sld>
+</file>
+
+<file path=ppt/slides/slide12.xml><?xml version="1.0" encoding="utf-8"?>
+<p:sld xmlns:a="http://schemas.openxmlformats.org/drawingml/2006/main" xmlns:r="http://schemas.openxmlformats.org/officeDocument/2006/relationships" xmlns:p="http://schemas.openxmlformats.org/presentationml/2006/main">
+  <p:cSld name="Slide 12">
+    <p:spTree>
+      <p:nvGrpSpPr>
+        <p:cNvPr id="1" name=""/>
+        <p:cNvGrpSpPr/>
+        <p:nvPr/>
+      </p:nvGrpSpPr>
+      <p:grpSpPr>
+        <a:xfrm>
+          <a:off x="0" y="0"/>
+          <a:ext cx="0" cy="0"/>
+          <a:chOff x="0" y="0"/>
+          <a:chExt cx="0" cy="0"/>
+        </a:xfrm>
+      </p:grpSpPr>
+      <p:sp>
+        <p:nvSpPr>
+          <p:cNvPr id="2" name="Text 0"/>
+          <p:cNvSpPr txBox="1"/>
+          <p:nvPr/>
+        </p:nvSpPr>
+        <p:spPr>
+          <a:xfrm>
+            <a:off x="566928" y="402336"/>
+            <a:ext cx="9229039" cy="749808"/>
+          </a:xfrm>
+          <a:prstGeom prst="rect">
+            <a:avLst/>
+          </a:prstGeom>
+          <a:noFill/>
+          <a:ln/>
+        </p:spPr>
+        <p:txBody>
+          <a:bodyPr wrap="square" lIns="0" tIns="0" rIns="0" bIns="0" rtlCol="0" anchor="t"/>
+          <a:lstStyle/>
+          <a:p>
+            <a:pPr algn="l" indent="0" marL="0">
+              <a:buNone/>
+            </a:pPr>
+            <a:r>
+              <a:rPr lang="en-US" sz="3200" b="1" dirty="0">
+                <a:solidFill>
+                  <a:srgbClr val="16262E"/>
+                </a:solidFill>
+                <a:latin typeface="Arial" pitchFamily="34" charset="0"/>
+                <a:ea typeface="Arial" pitchFamily="34" charset="-122"/>
+                <a:cs typeface="Arial" pitchFamily="34" charset="-120"/>
+              </a:rPr>
+              <a:t>Tu presentación responde cuatro cosas</a:t>
+            </a:r>
+            <a:endParaRPr lang="en-US" sz="3200" dirty="0"/>
+          </a:p>
+        </p:txBody>
+      </p:sp>
+      <p:sp>
+        <p:nvSpPr>
+          <p:cNvPr id="3" name="Text 1"/>
+          <p:cNvSpPr txBox="1"/>
+          <p:nvPr/>
+        </p:nvSpPr>
+        <p:spPr>
+          <a:xfrm>
+            <a:off x="566928" y="1280160"/>
+            <a:ext cx="9960559" cy="365760"/>
+          </a:xfrm>
+          <a:prstGeom prst="rect">
+            <a:avLst/>
+          </a:prstGeom>
+          <a:noFill/>
+          <a:ln/>
+        </p:spPr>
+        <p:txBody>
+          <a:bodyPr wrap="square" lIns="0" tIns="0" rIns="0" bIns="0" rtlCol="0" anchor="t"/>
+          <a:lstStyle/>
+          <a:p>
+            <a:pPr indent="0" marL="0">
+              <a:buNone/>
+            </a:pPr>
+            <a:r>
+              <a:rPr lang="en-US" sz="1500" dirty="0">
+                <a:solidFill>
+                  <a:srgbClr val="5A6B73"/>
+                </a:solidFill>
+                <a:latin typeface="Calibri" pitchFamily="34" charset="0"/>
+                <a:ea typeface="Calibri" pitchFamily="34" charset="-122"/>
+                <a:cs typeface="Calibri" pitchFamily="34" charset="-120"/>
+              </a:rPr>
+              <a:t>No es una demostración de la herramienta. Es un dictamen sobre ella.</a:t>
+            </a:r>
+            <a:endParaRPr lang="en-US" sz="1500" dirty="0"/>
+          </a:p>
+        </p:txBody>
+      </p:sp>
+      <p:sp>
+        <p:nvSpPr>
+          <p:cNvPr id="4" name="Shape 2"/>
+          <p:cNvSpPr/>
+          <p:nvPr/>
+        </p:nvSpPr>
+        <p:spPr>
+          <a:xfrm>
+            <a:off x="566928" y="2011680"/>
+            <a:ext cx="2558720" cy="2989072"/>
+          </a:xfrm>
+          <a:prstGeom prst="roundRect">
+            <a:avLst>
+              <a:gd name="adj" fmla="val 2859"/>
+            </a:avLst>
+          </a:prstGeom>
+          <a:solidFill>
+            <a:srgbClr val="F2F5F6"/>
+          </a:solidFill>
+          <a:ln w="12700">
+            <a:solidFill>
+              <a:srgbClr val="F2F5F6"/>
+            </a:solidFill>
+            <a:prstDash val="solid"/>
+          </a:ln>
+        </p:spPr>
+      </p:sp>
+      <p:sp>
+        <p:nvSpPr>
+          <p:cNvPr id="5" name="Shape 3"/>
+          <p:cNvSpPr/>
+          <p:nvPr/>
+        </p:nvSpPr>
+        <p:spPr>
+          <a:xfrm>
+            <a:off x="804672" y="2231136"/>
+            <a:ext cx="420624" cy="420624"/>
+          </a:xfrm>
+          <a:prstGeom prst="ellipse">
+            <a:avLst/>
+          </a:prstGeom>
+          <a:solidFill>
+            <a:srgbClr val="2E7D7D"/>
+          </a:solidFill>
+          <a:ln w="12700">
+            <a:solidFill>
+              <a:srgbClr val="2E7D7D"/>
+            </a:solidFill>
+            <a:prstDash val="solid"/>
+          </a:ln>
+        </p:spPr>
+      </p:sp>
+      <p:sp>
+        <p:nvSpPr>
+          <p:cNvPr id="6" name="Text 4"/>
+          <p:cNvSpPr txBox="1"/>
+          <p:nvPr/>
+        </p:nvSpPr>
+        <p:spPr>
+          <a:xfrm>
+            <a:off x="804672" y="2231136"/>
+            <a:ext cx="420624" cy="420624"/>
+          </a:xfrm>
+          <a:prstGeom prst="rect">
+            <a:avLst/>
+          </a:prstGeom>
+          <a:noFill/>
+          <a:ln/>
+        </p:spPr>
+        <p:txBody>
+          <a:bodyPr wrap="square" lIns="0" tIns="0" rIns="0" bIns="0" rtlCol="0" anchor="ctr"/>
+          <a:lstStyle/>
+          <a:p>
+            <a:pPr algn="ctr" indent="0" marL="0">
+              <a:buNone/>
+            </a:pPr>
+            <a:r>
+              <a:rPr lang="en-US" sz="1400" b="1" dirty="0">
+                <a:solidFill>
+                  <a:srgbClr val="FFFFFF"/>
+                </a:solidFill>
+                <a:latin typeface="Arial" pitchFamily="34" charset="0"/>
+                <a:ea typeface="Arial" pitchFamily="34" charset="-122"/>
+                <a:cs typeface="Arial" pitchFamily="34" charset="-120"/>
+              </a:rPr>
+              <a:t>1</a:t>
+            </a:r>
+            <a:endParaRPr lang="en-US" sz="1400" dirty="0"/>
+          </a:p>
+        </p:txBody>
+      </p:sp>
+      <p:sp>
+        <p:nvSpPr>
+          <p:cNvPr id="7" name="Text 5"/>
+          <p:cNvSpPr txBox="1"/>
+          <p:nvPr/>
+        </p:nvSpPr>
+        <p:spPr>
+          <a:xfrm>
+            <a:off x="804672" y="2798064"/>
+            <a:ext cx="2083232" cy="583184"/>
+          </a:xfrm>
+          <a:prstGeom prst="rect">
+            <a:avLst/>
+          </a:prstGeom>
+          <a:noFill/>
+          <a:ln/>
+        </p:spPr>
+        <p:txBody>
+          <a:bodyPr wrap="square" lIns="0" tIns="0" rIns="0" bIns="0" rtlCol="0" anchor="t"/>
+          <a:lstStyle/>
+          <a:p>
+            <a:pPr indent="0" marL="0">
+              <a:buNone/>
+            </a:pPr>
+            <a:r>
+              <a:rPr lang="en-US" sz="1600" b="1" dirty="0">
+                <a:solidFill>
+                  <a:srgbClr val="16262E"/>
+                </a:solidFill>
+                <a:latin typeface="Arial" pitchFamily="34" charset="0"/>
+                <a:ea typeface="Arial" pitchFamily="34" charset="-122"/>
+                <a:cs typeface="Arial" pitchFamily="34" charset="-120"/>
+              </a:rPr>
+              <a:t>¿Qué hizo mejor que Copilot?</a:t>
+            </a:r>
+            <a:endParaRPr lang="en-US" sz="1600" dirty="0"/>
+          </a:p>
+        </p:txBody>
+      </p:sp>
+      <p:sp>
+        <p:nvSpPr>
+          <p:cNvPr id="8" name="Text 6"/>
+          <p:cNvSpPr txBox="1"/>
+          <p:nvPr/>
+        </p:nvSpPr>
+        <p:spPr>
+          <a:xfrm>
+            <a:off x="804672" y="3527552"/>
+            <a:ext cx="2083232" cy="1272032"/>
+          </a:xfrm>
+          <a:prstGeom prst="rect">
+            <a:avLst/>
+          </a:prstGeom>
+          <a:noFill/>
+          <a:ln/>
+        </p:spPr>
+        <p:txBody>
+          <a:bodyPr wrap="square" lIns="0" tIns="0" rIns="0" bIns="0" rtlCol="0" anchor="t"/>
+          <a:lstStyle/>
+          <a:p>
+            <a:pPr indent="0" marL="0">
+              <a:lnSpc>
+                <a:spcPct val="110000"/>
+              </a:lnSpc>
+              <a:buNone/>
+            </a:pPr>
+            <a:r>
+              <a:rPr lang="en-US" sz="1300" dirty="0">
+                <a:solidFill>
+                  <a:srgbClr val="16262E"/>
+                </a:solidFill>
+                <a:latin typeface="Calibri" pitchFamily="34" charset="0"/>
+                <a:ea typeface="Calibri" pitchFamily="34" charset="-122"/>
+                <a:cs typeface="Calibri" pitchFamily="34" charset="-120"/>
+              </a:rPr>
+              <a:t>Y si la respuesta es nada relevante para nuestro trabajo, esa también es una conclusión válida. Dilo así.</a:t>
+            </a:r>
+            <a:endParaRPr lang="en-US" sz="1300" dirty="0"/>
+          </a:p>
+        </p:txBody>
+      </p:sp>
+      <p:sp>
+        <p:nvSpPr>
+          <p:cNvPr id="9" name="Shape 7"/>
+          <p:cNvSpPr/>
+          <p:nvPr/>
+        </p:nvSpPr>
+        <p:spPr>
+          <a:xfrm>
+            <a:off x="3399968" y="2011680"/>
+            <a:ext cx="2558720" cy="2989072"/>
+          </a:xfrm>
+          <a:prstGeom prst="roundRect">
+            <a:avLst>
+              <a:gd name="adj" fmla="val 2859"/>
+            </a:avLst>
+          </a:prstGeom>
+          <a:solidFill>
+            <a:srgbClr val="F2F5F6"/>
+          </a:solidFill>
+          <a:ln w="12700">
+            <a:solidFill>
+              <a:srgbClr val="F2F5F6"/>
+            </a:solidFill>
+            <a:prstDash val="solid"/>
+          </a:ln>
+        </p:spPr>
+      </p:sp>
+      <p:sp>
+        <p:nvSpPr>
+          <p:cNvPr id="10" name="Shape 8"/>
+          <p:cNvSpPr/>
+          <p:nvPr/>
+        </p:nvSpPr>
+        <p:spPr>
+          <a:xfrm>
+            <a:off x="3637712" y="2231136"/>
+            <a:ext cx="420624" cy="420624"/>
+          </a:xfrm>
+          <a:prstGeom prst="ellipse">
+            <a:avLst/>
+          </a:prstGeom>
+          <a:solidFill>
+            <a:srgbClr val="2E7D7D"/>
+          </a:solidFill>
+          <a:ln w="12700">
+            <a:solidFill>
+              <a:srgbClr val="2E7D7D"/>
+            </a:solidFill>
+            <a:prstDash val="solid"/>
+          </a:ln>
+        </p:spPr>
+      </p:sp>
+      <p:sp>
+        <p:nvSpPr>
+          <p:cNvPr id="11" name="Text 9"/>
+          <p:cNvSpPr txBox="1"/>
+          <p:nvPr/>
+        </p:nvSpPr>
+        <p:spPr>
+          <a:xfrm>
+            <a:off x="3637712" y="2231136"/>
+            <a:ext cx="420624" cy="420624"/>
+          </a:xfrm>
+          <a:prstGeom prst="rect">
+            <a:avLst/>
+          </a:prstGeom>
+          <a:noFill/>
+          <a:ln/>
+        </p:spPr>
+        <p:txBody>
+          <a:bodyPr wrap="square" lIns="0" tIns="0" rIns="0" bIns="0" rtlCol="0" anchor="ctr"/>
+          <a:lstStyle/>
+          <a:p>
+            <a:pPr algn="ctr" indent="0" marL="0">
+              <a:buNone/>
+            </a:pPr>
+            <a:r>
+              <a:rPr lang="en-US" sz="1400" b="1" dirty="0">
+                <a:solidFill>
+                  <a:srgbClr val="FFFFFF"/>
+                </a:solidFill>
+                <a:latin typeface="Arial" pitchFamily="34" charset="0"/>
+                <a:ea typeface="Arial" pitchFamily="34" charset="-122"/>
+                <a:cs typeface="Arial" pitchFamily="34" charset="-120"/>
+              </a:rPr>
+              <a:t>2</a:t>
+            </a:r>
+            <a:endParaRPr lang="en-US" sz="1400" dirty="0"/>
+          </a:p>
+        </p:txBody>
+      </p:sp>
+      <p:sp>
+        <p:nvSpPr>
+          <p:cNvPr id="12" name="Text 10"/>
+          <p:cNvSpPr txBox="1"/>
+          <p:nvPr/>
+        </p:nvSpPr>
+        <p:spPr>
+          <a:xfrm>
+            <a:off x="3637712" y="2798064"/>
+            <a:ext cx="2083232" cy="319024"/>
+          </a:xfrm>
+          <a:prstGeom prst="rect">
+            <a:avLst/>
+          </a:prstGeom>
+          <a:noFill/>
+          <a:ln/>
+        </p:spPr>
+        <p:txBody>
+          <a:bodyPr wrap="square" lIns="0" tIns="0" rIns="0" bIns="0" rtlCol="0" anchor="t"/>
+          <a:lstStyle/>
+          <a:p>
+            <a:pPr indent="0" marL="0">
+              <a:buNone/>
+            </a:pPr>
+            <a:r>
+              <a:rPr lang="en-US" sz="1600" b="1" dirty="0">
+                <a:solidFill>
+                  <a:srgbClr val="16262E"/>
+                </a:solidFill>
+                <a:latin typeface="Arial" pitchFamily="34" charset="0"/>
+                <a:ea typeface="Arial" pitchFamily="34" charset="-122"/>
+                <a:cs typeface="Arial" pitchFamily="34" charset="-120"/>
+              </a:rPr>
+              <a:t>¿Qué hizo peor?</a:t>
+            </a:r>
+            <a:endParaRPr lang="en-US" sz="1600" dirty="0"/>
+          </a:p>
+        </p:txBody>
+      </p:sp>
+      <p:sp>
+        <p:nvSpPr>
+          <p:cNvPr id="13" name="Text 11"/>
+          <p:cNvSpPr txBox="1"/>
+          <p:nvPr/>
+        </p:nvSpPr>
+        <p:spPr>
+          <a:xfrm>
+            <a:off x="3637712" y="3263392"/>
+            <a:ext cx="2083232" cy="1536192"/>
+          </a:xfrm>
+          <a:prstGeom prst="rect">
+            <a:avLst/>
+          </a:prstGeom>
+          <a:noFill/>
+          <a:ln/>
+        </p:spPr>
+        <p:txBody>
+          <a:bodyPr wrap="square" lIns="0" tIns="0" rIns="0" bIns="0" rtlCol="0" anchor="t"/>
+          <a:lstStyle/>
+          <a:p>
+            <a:pPr indent="0" marL="0">
+              <a:lnSpc>
+                <a:spcPct val="110000"/>
+              </a:lnSpc>
+              <a:buNone/>
+            </a:pPr>
+            <a:r>
+              <a:rPr lang="en-US" sz="1300" dirty="0">
+                <a:solidFill>
+                  <a:srgbClr val="16262E"/>
+                </a:solidFill>
+                <a:latin typeface="Calibri" pitchFamily="34" charset="0"/>
+                <a:ea typeface="Calibri" pitchFamily="34" charset="-122"/>
+                <a:cs typeface="Calibri" pitchFamily="34" charset="-120"/>
+              </a:rPr>
+              <a:t>Categorías que fundió, minorías que perdió, referencias que inventó. Sé específico.</a:t>
+            </a:r>
+            <a:endParaRPr lang="en-US" sz="1300" dirty="0"/>
+          </a:p>
+        </p:txBody>
+      </p:sp>
+      <p:sp>
+        <p:nvSpPr>
+          <p:cNvPr id="14" name="Shape 12"/>
+          <p:cNvSpPr/>
+          <p:nvPr/>
+        </p:nvSpPr>
+        <p:spPr>
+          <a:xfrm>
+            <a:off x="6233008" y="2011680"/>
+            <a:ext cx="2558720" cy="2989072"/>
+          </a:xfrm>
+          <a:prstGeom prst="roundRect">
+            <a:avLst>
+              <a:gd name="adj" fmla="val 2859"/>
+            </a:avLst>
+          </a:prstGeom>
+          <a:solidFill>
+            <a:srgbClr val="F2F5F6"/>
+          </a:solidFill>
+          <a:ln w="12700">
+            <a:solidFill>
+              <a:srgbClr val="F2F5F6"/>
+            </a:solidFill>
+            <a:prstDash val="solid"/>
+          </a:ln>
+        </p:spPr>
+      </p:sp>
+      <p:sp>
+        <p:nvSpPr>
+          <p:cNvPr id="15" name="Shape 13"/>
+          <p:cNvSpPr/>
+          <p:nvPr/>
+        </p:nvSpPr>
+        <p:spPr>
+          <a:xfrm>
+            <a:off x="6470752" y="2231136"/>
+            <a:ext cx="420624" cy="420624"/>
+          </a:xfrm>
+          <a:prstGeom prst="ellipse">
+            <a:avLst/>
+          </a:prstGeom>
+          <a:solidFill>
+            <a:srgbClr val="2E7D7D"/>
+          </a:solidFill>
+          <a:ln w="12700">
+            <a:solidFill>
+              <a:srgbClr val="2E7D7D"/>
+            </a:solidFill>
+            <a:prstDash val="solid"/>
+          </a:ln>
+        </p:spPr>
+      </p:sp>
+      <p:sp>
+        <p:nvSpPr>
+          <p:cNvPr id="16" name="Text 14"/>
+          <p:cNvSpPr txBox="1"/>
+          <p:nvPr/>
+        </p:nvSpPr>
+        <p:spPr>
+          <a:xfrm>
+            <a:off x="6470752" y="2231136"/>
+            <a:ext cx="420624" cy="420624"/>
+          </a:xfrm>
+          <a:prstGeom prst="rect">
+            <a:avLst/>
+          </a:prstGeom>
+          <a:noFill/>
+          <a:ln/>
+        </p:spPr>
+        <p:txBody>
+          <a:bodyPr wrap="square" lIns="0" tIns="0" rIns="0" bIns="0" rtlCol="0" anchor="ctr"/>
+          <a:lstStyle/>
+          <a:p>
+            <a:pPr algn="ctr" indent="0" marL="0">
+              <a:buNone/>
+            </a:pPr>
+            <a:r>
+              <a:rPr lang="en-US" sz="1400" b="1" dirty="0">
+                <a:solidFill>
+                  <a:srgbClr val="FFFFFF"/>
+                </a:solidFill>
+                <a:latin typeface="Arial" pitchFamily="34" charset="0"/>
+                <a:ea typeface="Arial" pitchFamily="34" charset="-122"/>
+                <a:cs typeface="Arial" pitchFamily="34" charset="-120"/>
+              </a:rPr>
+              <a:t>3</a:t>
+            </a:r>
+            <a:endParaRPr lang="en-US" sz="1400" dirty="0"/>
+          </a:p>
+        </p:txBody>
+      </p:sp>
+      <p:sp>
+        <p:nvSpPr>
+          <p:cNvPr id="17" name="Text 15"/>
+          <p:cNvSpPr txBox="1"/>
+          <p:nvPr/>
+        </p:nvSpPr>
+        <p:spPr>
+          <a:xfrm>
+            <a:off x="6470752" y="2798064"/>
+            <a:ext cx="2083232" cy="583184"/>
+          </a:xfrm>
+          <a:prstGeom prst="rect">
+            <a:avLst/>
+          </a:prstGeom>
+          <a:noFill/>
+          <a:ln/>
+        </p:spPr>
+        <p:txBody>
+          <a:bodyPr wrap="square" lIns="0" tIns="0" rIns="0" bIns="0" rtlCol="0" anchor="t"/>
+          <a:lstStyle/>
+          <a:p>
+            <a:pPr indent="0" marL="0">
+              <a:buNone/>
+            </a:pPr>
+            <a:r>
+              <a:rPr lang="en-US" sz="1600" b="1" dirty="0">
+                <a:solidFill>
+                  <a:srgbClr val="16262E"/>
+                </a:solidFill>
+                <a:latin typeface="Arial" pitchFamily="34" charset="0"/>
+                <a:ea typeface="Arial" pitchFamily="34" charset="-122"/>
+                <a:cs typeface="Arial" pitchFamily="34" charset="-120"/>
+              </a:rPr>
+              <a:t>¿Qué te pidió a cambio?</a:t>
+            </a:r>
+            <a:endParaRPr lang="en-US" sz="1600" dirty="0"/>
+          </a:p>
+        </p:txBody>
+      </p:sp>
+      <p:sp>
+        <p:nvSpPr>
+          <p:cNvPr id="18" name="Text 16"/>
+          <p:cNvSpPr txBox="1"/>
+          <p:nvPr/>
+        </p:nvSpPr>
+        <p:spPr>
+          <a:xfrm>
+            <a:off x="6470752" y="3527552"/>
+            <a:ext cx="2083232" cy="1272032"/>
+          </a:xfrm>
+          <a:prstGeom prst="rect">
+            <a:avLst/>
+          </a:prstGeom>
+          <a:noFill/>
+          <a:ln/>
+        </p:spPr>
+        <p:txBody>
+          <a:bodyPr wrap="square" lIns="0" tIns="0" rIns="0" bIns="0" rtlCol="0" anchor="t"/>
+          <a:lstStyle/>
+          <a:p>
+            <a:pPr indent="0" marL="0">
+              <a:lnSpc>
+                <a:spcPct val="110000"/>
+              </a:lnSpc>
+              <a:buNone/>
+            </a:pPr>
+            <a:r>
+              <a:rPr lang="en-US" sz="1300" dirty="0">
+                <a:solidFill>
+                  <a:srgbClr val="16262E"/>
+                </a:solidFill>
+                <a:latin typeface="Calibri" pitchFamily="34" charset="0"/>
+                <a:ea typeface="Calibri" pitchFamily="34" charset="-122"/>
+                <a:cs typeface="Calibri" pitchFamily="34" charset="-120"/>
+              </a:rPr>
+              <a:t>Cuenta, costo si se quisiera en serio, tiempo de aprendizaje, y qué información habría que darle.</a:t>
+            </a:r>
+            <a:endParaRPr lang="en-US" sz="1300" dirty="0"/>
+          </a:p>
+        </p:txBody>
+      </p:sp>
+      <p:sp>
+        <p:nvSpPr>
+          <p:cNvPr id="19" name="Shape 17"/>
+          <p:cNvSpPr/>
+          <p:nvPr/>
+        </p:nvSpPr>
+        <p:spPr>
+          <a:xfrm>
+            <a:off x="9066047" y="2011680"/>
+            <a:ext cx="2558720" cy="2989072"/>
+          </a:xfrm>
+          <a:prstGeom prst="roundRect">
+            <a:avLst>
+              <a:gd name="adj" fmla="val 2859"/>
+            </a:avLst>
+          </a:prstGeom>
+          <a:solidFill>
+            <a:srgbClr val="F7E4D8"/>
+          </a:solidFill>
+          <a:ln w="12700">
+            <a:solidFill>
+              <a:srgbClr val="F7E4D8"/>
+            </a:solidFill>
+            <a:prstDash val="solid"/>
+          </a:ln>
+        </p:spPr>
+      </p:sp>
+      <p:sp>
+        <p:nvSpPr>
+          <p:cNvPr id="20" name="Shape 18"/>
+          <p:cNvSpPr/>
+          <p:nvPr/>
+        </p:nvSpPr>
+        <p:spPr>
+          <a:xfrm>
+            <a:off x="9303791" y="2231136"/>
+            <a:ext cx="420624" cy="420624"/>
+          </a:xfrm>
+          <a:prstGeom prst="ellipse">
+            <a:avLst/>
+          </a:prstGeom>
+          <a:solidFill>
+            <a:srgbClr val="C85A28"/>
+          </a:solidFill>
+          <a:ln w="12700">
+            <a:solidFill>
+              <a:srgbClr val="C85A28"/>
+            </a:solidFill>
+            <a:prstDash val="solid"/>
+          </a:ln>
+        </p:spPr>
+      </p:sp>
+      <p:sp>
+        <p:nvSpPr>
+          <p:cNvPr id="21" name="Text 19"/>
+          <p:cNvSpPr txBox="1"/>
+          <p:nvPr/>
+        </p:nvSpPr>
+        <p:spPr>
+          <a:xfrm>
+            <a:off x="9303791" y="2231136"/>
+            <a:ext cx="420624" cy="420624"/>
+          </a:xfrm>
+          <a:prstGeom prst="rect">
+            <a:avLst/>
+          </a:prstGeom>
+          <a:noFill/>
+          <a:ln/>
+        </p:spPr>
+        <p:txBody>
+          <a:bodyPr wrap="square" lIns="0" tIns="0" rIns="0" bIns="0" rtlCol="0" anchor="ctr"/>
+          <a:lstStyle/>
+          <a:p>
+            <a:pPr algn="ctr" indent="0" marL="0">
+              <a:buNone/>
+            </a:pPr>
+            <a:r>
+              <a:rPr lang="en-US" sz="1400" b="1" dirty="0">
+                <a:solidFill>
+                  <a:srgbClr val="FFFFFF"/>
+                </a:solidFill>
+                <a:latin typeface="Arial" pitchFamily="34" charset="0"/>
+                <a:ea typeface="Arial" pitchFamily="34" charset="-122"/>
+                <a:cs typeface="Arial" pitchFamily="34" charset="-120"/>
+              </a:rPr>
+              <a:t>4</a:t>
+            </a:r>
+            <a:endParaRPr lang="en-US" sz="1400" dirty="0"/>
+          </a:p>
+        </p:txBody>
+      </p:sp>
+      <p:sp>
+        <p:nvSpPr>
+          <p:cNvPr id="22" name="Text 20"/>
+          <p:cNvSpPr txBox="1"/>
+          <p:nvPr/>
+        </p:nvSpPr>
+        <p:spPr>
+          <a:xfrm>
+            <a:off x="9303791" y="2798064"/>
+            <a:ext cx="2083232" cy="583184"/>
+          </a:xfrm>
+          <a:prstGeom prst="rect">
+            <a:avLst/>
+          </a:prstGeom>
+          <a:noFill/>
+          <a:ln/>
+        </p:spPr>
+        <p:txBody>
+          <a:bodyPr wrap="square" lIns="0" tIns="0" rIns="0" bIns="0" rtlCol="0" anchor="t"/>
+          <a:lstStyle/>
+          <a:p>
+            <a:pPr indent="0" marL="0">
+              <a:buNone/>
+            </a:pPr>
+            <a:r>
+              <a:rPr lang="en-US" sz="1600" b="1" dirty="0">
+                <a:solidFill>
+                  <a:srgbClr val="16262E"/>
+                </a:solidFill>
+                <a:latin typeface="Arial" pitchFamily="34" charset="0"/>
+                <a:ea typeface="Arial" pitchFamily="34" charset="-122"/>
+                <a:cs typeface="Arial" pitchFamily="34" charset="-120"/>
+              </a:rPr>
+              <a:t>¿Para qué tarea la recomendarías?</a:t>
+            </a:r>
+            <a:endParaRPr lang="en-US" sz="1600" dirty="0"/>
+          </a:p>
+        </p:txBody>
+      </p:sp>
+      <p:sp>
+        <p:nvSpPr>
+          <p:cNvPr id="23" name="Text 21"/>
+          <p:cNvSpPr txBox="1"/>
+          <p:nvPr/>
+        </p:nvSpPr>
+        <p:spPr>
+          <a:xfrm>
+            <a:off x="9303791" y="3527552"/>
+            <a:ext cx="2083232" cy="1272032"/>
+          </a:xfrm>
+          <a:prstGeom prst="rect">
+            <a:avLst/>
+          </a:prstGeom>
+          <a:noFill/>
+          <a:ln/>
+        </p:spPr>
+        <p:txBody>
+          <a:bodyPr wrap="square" lIns="0" tIns="0" rIns="0" bIns="0" rtlCol="0" anchor="t"/>
+          <a:lstStyle/>
+          <a:p>
+            <a:pPr indent="0" marL="0">
+              <a:lnSpc>
+                <a:spcPct val="110000"/>
+              </a:lnSpc>
+              <a:buNone/>
+            </a:pPr>
+            <a:r>
+              <a:rPr lang="en-US" sz="1300" dirty="0">
+                <a:solidFill>
+                  <a:srgbClr val="16262E"/>
+                </a:solidFill>
+                <a:latin typeface="Calibri" pitchFamily="34" charset="0"/>
+                <a:ea typeface="Calibri" pitchFamily="34" charset="-122"/>
+                <a:cs typeface="Calibri" pitchFamily="34" charset="-120"/>
+              </a:rPr>
+              <a:t>Una tarea concreta de esta área. Si no encuentras ninguna, eso es lo que hay que reportar.</a:t>
+            </a:r>
+            <a:endParaRPr lang="en-US" sz="1300" dirty="0"/>
+          </a:p>
+        </p:txBody>
+      </p:sp>
+      <p:sp>
+        <p:nvSpPr>
+          <p:cNvPr id="24" name="Text 22"/>
+          <p:cNvSpPr txBox="1"/>
+          <p:nvPr/>
+        </p:nvSpPr>
+        <p:spPr>
+          <a:xfrm>
+            <a:off x="566928" y="6327648"/>
+            <a:ext cx="11057839" cy="292608"/>
+          </a:xfrm>
+          <a:prstGeom prst="rect">
+            <a:avLst/>
+          </a:prstGeom>
+          <a:noFill/>
+          <a:ln/>
+        </p:spPr>
+        <p:txBody>
+          <a:bodyPr wrap="square" lIns="0" tIns="0" rIns="0" bIns="0" rtlCol="0" anchor="ctr"/>
+          <a:lstStyle/>
+          <a:p>
+            <a:pPr indent="0" marL="0">
+              <a:buNone/>
+            </a:pPr>
+            <a:r>
+              <a:rPr lang="en-US" sz="1000" dirty="0">
+                <a:solidFill>
+                  <a:srgbClr val="5A6B73"/>
+                </a:solidFill>
+                <a:latin typeface="Calibri" pitchFamily="34" charset="0"/>
+                <a:ea typeface="Calibri" pitchFamily="34" charset="-122"/>
+                <a:cs typeface="Calibri" pitchFamily="34" charset="-120"/>
+              </a:rPr>
+              <a:t>Al terminar las seis presentaciones, el cuadro comparativo queda lleno con evaluación de uso propio, no de demostración.</a:t>
+            </a:r>
+            <a:endParaRPr lang="en-US" sz="1000" dirty="0"/>
           </a:p>
         </p:txBody>
       </p:sp>
@@ -3590,6 +4453,1058 @@
 <file path=ppt/slides/slide13.xml><?xml version="1.0" encoding="utf-8"?>
 <p:sld xmlns:a="http://schemas.openxmlformats.org/drawingml/2006/main" xmlns:r="http://schemas.openxmlformats.org/officeDocument/2006/relationships" xmlns:p="http://schemas.openxmlformats.org/presentationml/2006/main">
   <p:cSld name="Slide 13">
+    <p:bg>
+      <p:bgPr>
+        <a:solidFill>
+          <a:srgbClr val="16262E"/>
+        </a:solidFill>
+      </p:bgPr>
+    </p:bg>
+    <p:spTree>
+      <p:nvGrpSpPr>
+        <p:cNvPr id="1" name=""/>
+        <p:cNvGrpSpPr/>
+        <p:nvPr/>
+      </p:nvGrpSpPr>
+      <p:grpSpPr>
+        <a:xfrm>
+          <a:off x="0" y="0"/>
+          <a:ext cx="0" cy="0"/>
+          <a:chOff x="0" y="0"/>
+          <a:chExt cx="0" cy="0"/>
+        </a:xfrm>
+      </p:grpSpPr>
+      <p:sp>
+        <p:nvSpPr>
+          <p:cNvPr id="2" name="Shape 0"/>
+          <p:cNvSpPr/>
+          <p:nvPr/>
+        </p:nvSpPr>
+        <p:spPr>
+          <a:xfrm>
+            <a:off x="566928" y="2331720"/>
+            <a:ext cx="1371600" cy="1371600"/>
+          </a:xfrm>
+          <a:prstGeom prst="ellipse">
+            <a:avLst/>
+          </a:prstGeom>
+          <a:solidFill>
+            <a:srgbClr val="C85A28"/>
+          </a:solidFill>
+          <a:ln w="12700">
+            <a:solidFill>
+              <a:srgbClr val="C85A28"/>
+            </a:solidFill>
+            <a:prstDash val="solid"/>
+          </a:ln>
+        </p:spPr>
+      </p:sp>
+      <p:sp>
+        <p:nvSpPr>
+          <p:cNvPr id="3" name="Text 1"/>
+          <p:cNvSpPr txBox="1"/>
+          <p:nvPr/>
+        </p:nvSpPr>
+        <p:spPr>
+          <a:xfrm>
+            <a:off x="566928" y="2331720"/>
+            <a:ext cx="1371600" cy="1371600"/>
+          </a:xfrm>
+          <a:prstGeom prst="rect">
+            <a:avLst/>
+          </a:prstGeom>
+          <a:noFill/>
+          <a:ln/>
+        </p:spPr>
+        <p:txBody>
+          <a:bodyPr wrap="square" lIns="0" tIns="0" rIns="0" bIns="0" rtlCol="0" anchor="ctr"/>
+          <a:lstStyle/>
+          <a:p>
+            <a:pPr algn="ctr" indent="0" marL="0">
+              <a:buNone/>
+            </a:pPr>
+            <a:r>
+              <a:rPr lang="en-US" sz="4400" b="1" dirty="0">
+                <a:solidFill>
+                  <a:srgbClr val="FFFFFF"/>
+                </a:solidFill>
+                <a:latin typeface="Arial" pitchFamily="34" charset="0"/>
+                <a:ea typeface="Arial" pitchFamily="34" charset="-122"/>
+                <a:cs typeface="Arial" pitchFamily="34" charset="-120"/>
+              </a:rPr>
+              <a:t>4</a:t>
+            </a:r>
+            <a:endParaRPr lang="en-US" sz="4400" dirty="0"/>
+          </a:p>
+        </p:txBody>
+      </p:sp>
+      <p:sp>
+        <p:nvSpPr>
+          <p:cNvPr id="4" name="Text 2"/>
+          <p:cNvSpPr txBox="1"/>
+          <p:nvPr/>
+        </p:nvSpPr>
+        <p:spPr>
+          <a:xfrm>
+            <a:off x="2487168" y="2331720"/>
+            <a:ext cx="8778240" cy="365760"/>
+          </a:xfrm>
+          <a:prstGeom prst="rect">
+            <a:avLst/>
+          </a:prstGeom>
+          <a:noFill/>
+          <a:ln/>
+        </p:spPr>
+        <p:txBody>
+          <a:bodyPr wrap="square" lIns="0" tIns="0" rIns="0" bIns="0" rtlCol="0" anchor="ctr"/>
+          <a:lstStyle/>
+          <a:p>
+            <a:pPr indent="0" marL="0">
+              <a:buNone/>
+            </a:pPr>
+            <a:r>
+              <a:rPr lang="en-US" sz="1400" b="1" spc="200" kern="0" dirty="0">
+                <a:solidFill>
+                  <a:srgbClr val="D7E7E7"/>
+                </a:solidFill>
+                <a:latin typeface="Calibri" pitchFamily="34" charset="0"/>
+                <a:ea typeface="Calibri" pitchFamily="34" charset="-122"/>
+                <a:cs typeface="Calibri" pitchFamily="34" charset="-120"/>
+              </a:rPr>
+              <a:t>DEMOSTRACIÓN</a:t>
+            </a:r>
+            <a:endParaRPr lang="en-US" sz="1400" dirty="0"/>
+          </a:p>
+        </p:txBody>
+      </p:sp>
+      <p:sp>
+        <p:nvSpPr>
+          <p:cNvPr id="5" name="Text 3"/>
+          <p:cNvSpPr txBox="1"/>
+          <p:nvPr/>
+        </p:nvSpPr>
+        <p:spPr>
+          <a:xfrm>
+            <a:off x="2487168" y="2697480"/>
+            <a:ext cx="8961120" cy="1188720"/>
+          </a:xfrm>
+          <a:prstGeom prst="rect">
+            <a:avLst/>
+          </a:prstGeom>
+          <a:noFill/>
+          <a:ln/>
+        </p:spPr>
+        <p:txBody>
+          <a:bodyPr wrap="square" lIns="0" tIns="0" rIns="0" bIns="0" rtlCol="0" anchor="t"/>
+          <a:lstStyle/>
+          <a:p>
+            <a:pPr indent="0" marL="0">
+              <a:buNone/>
+            </a:pPr>
+            <a:r>
+              <a:rPr lang="en-US" sz="3400" b="1" dirty="0">
+                <a:solidFill>
+                  <a:srgbClr val="FFFFFF"/>
+                </a:solidFill>
+                <a:latin typeface="Arial" pitchFamily="34" charset="0"/>
+                <a:ea typeface="Arial" pitchFamily="34" charset="-122"/>
+                <a:cs typeface="Arial" pitchFamily="34" charset="-120"/>
+              </a:rPr>
+              <a:t>Lo que no se resuelve con permisos de red</a:t>
+            </a:r>
+            <a:endParaRPr lang="en-US" sz="3400" dirty="0"/>
+          </a:p>
+        </p:txBody>
+      </p:sp>
+      <p:sp>
+        <p:nvSpPr>
+          <p:cNvPr id="6" name="Shape 4"/>
+          <p:cNvSpPr/>
+          <p:nvPr/>
+        </p:nvSpPr>
+        <p:spPr>
+          <a:xfrm>
+            <a:off x="9338767" y="457200"/>
+            <a:ext cx="2286000" cy="347472"/>
+          </a:xfrm>
+          <a:prstGeom prst="roundRect">
+            <a:avLst>
+              <a:gd name="adj" fmla="val 50000"/>
+            </a:avLst>
+          </a:prstGeom>
+          <a:solidFill>
+            <a:srgbClr val="24404E"/>
+          </a:solidFill>
+          <a:ln w="12700">
+            <a:solidFill>
+              <a:srgbClr val="24404E"/>
+            </a:solidFill>
+            <a:prstDash val="solid"/>
+          </a:ln>
+        </p:spPr>
+      </p:sp>
+      <p:sp>
+        <p:nvSpPr>
+          <p:cNvPr id="7" name="Text 5"/>
+          <p:cNvSpPr txBox="1"/>
+          <p:nvPr/>
+        </p:nvSpPr>
+        <p:spPr>
+          <a:xfrm>
+            <a:off x="9338767" y="457200"/>
+            <a:ext cx="2286000" cy="347472"/>
+          </a:xfrm>
+          <a:prstGeom prst="rect">
+            <a:avLst/>
+          </a:prstGeom>
+          <a:noFill/>
+          <a:ln/>
+        </p:spPr>
+        <p:txBody>
+          <a:bodyPr wrap="square" lIns="0" tIns="0" rIns="0" bIns="0" rtlCol="0" anchor="ctr"/>
+          <a:lstStyle/>
+          <a:p>
+            <a:pPr algn="ctr" indent="0" marL="0">
+              <a:buNone/>
+            </a:pPr>
+            <a:r>
+              <a:rPr lang="en-US" sz="1200" b="1" dirty="0">
+                <a:solidFill>
+                  <a:srgbClr val="FFFFFF"/>
+                </a:solidFill>
+                <a:latin typeface="Calibri" pitchFamily="34" charset="0"/>
+                <a:ea typeface="Calibri" pitchFamily="34" charset="-122"/>
+                <a:cs typeface="Calibri" pitchFamily="34" charset="-120"/>
+              </a:rPr>
+              <a:t>10:50 a 11:10</a:t>
+            </a:r>
+            <a:endParaRPr lang="en-US" sz="1200" dirty="0"/>
+          </a:p>
+        </p:txBody>
+      </p:sp>
+    </p:spTree>
+  </p:cSld>
+  <p:clrMapOvr>
+    <a:masterClrMapping/>
+  </p:clrMapOvr>
+</p:sld>
+</file>
+
+<file path=ppt/slides/slide14.xml><?xml version="1.0" encoding="utf-8"?>
+<p:sld xmlns:a="http://schemas.openxmlformats.org/drawingml/2006/main" xmlns:r="http://schemas.openxmlformats.org/officeDocument/2006/relationships" xmlns:p="http://schemas.openxmlformats.org/presentationml/2006/main">
+  <p:cSld name="Slide 14">
+    <p:spTree>
+      <p:nvGrpSpPr>
+        <p:cNvPr id="1" name=""/>
+        <p:cNvGrpSpPr/>
+        <p:nvPr/>
+      </p:nvGrpSpPr>
+      <p:grpSpPr>
+        <a:xfrm>
+          <a:off x="0" y="0"/>
+          <a:ext cx="0" cy="0"/>
+          <a:chOff x="0" y="0"/>
+          <a:chExt cx="0" cy="0"/>
+        </a:xfrm>
+      </p:grpSpPr>
+      <p:sp>
+        <p:nvSpPr>
+          <p:cNvPr id="2" name="Text 0"/>
+          <p:cNvSpPr txBox="1"/>
+          <p:nvPr/>
+        </p:nvSpPr>
+        <p:spPr>
+          <a:xfrm>
+            <a:off x="566928" y="402336"/>
+            <a:ext cx="9229039" cy="749808"/>
+          </a:xfrm>
+          <a:prstGeom prst="rect">
+            <a:avLst/>
+          </a:prstGeom>
+          <a:noFill/>
+          <a:ln/>
+        </p:spPr>
+        <p:txBody>
+          <a:bodyPr wrap="square" lIns="0" tIns="0" rIns="0" bIns="0" rtlCol="0" anchor="t"/>
+          <a:lstStyle/>
+          <a:p>
+            <a:pPr algn="l" indent="0" marL="0">
+              <a:buNone/>
+            </a:pPr>
+            <a:r>
+              <a:rPr lang="en-US" sz="2600" b="1" dirty="0">
+                <a:solidFill>
+                  <a:srgbClr val="16262E"/>
+                </a:solidFill>
+                <a:latin typeface="Arial" pitchFamily="34" charset="0"/>
+                <a:ea typeface="Arial" pitchFamily="34" charset="-122"/>
+                <a:cs typeface="Arial" pitchFamily="34" charset="-120"/>
+              </a:rPr>
+              <a:t>Tres herramientas que no puedes usar hoy, y por qué importan</a:t>
+            </a:r>
+            <a:endParaRPr lang="en-US" sz="2600" dirty="0"/>
+          </a:p>
+        </p:txBody>
+      </p:sp>
+      <p:sp>
+        <p:nvSpPr>
+          <p:cNvPr id="3" name="Text 1"/>
+          <p:cNvSpPr txBox="1"/>
+          <p:nvPr/>
+        </p:nvSpPr>
+        <p:spPr>
+          <a:xfrm>
+            <a:off x="566928" y="1280160"/>
+            <a:ext cx="9960559" cy="365760"/>
+          </a:xfrm>
+          <a:prstGeom prst="rect">
+            <a:avLst/>
+          </a:prstGeom>
+          <a:noFill/>
+          <a:ln/>
+        </p:spPr>
+        <p:txBody>
+          <a:bodyPr wrap="square" lIns="0" tIns="0" rIns="0" bIns="0" rtlCol="0" anchor="t"/>
+          <a:lstStyle/>
+          <a:p>
+            <a:pPr indent="0" marL="0">
+              <a:buNone/>
+            </a:pPr>
+            <a:r>
+              <a:rPr lang="en-US" sz="1500" dirty="0">
+                <a:solidFill>
+                  <a:srgbClr val="5A6B73"/>
+                </a:solidFill>
+                <a:latin typeface="Calibri" pitchFamily="34" charset="0"/>
+                <a:ea typeface="Calibri" pitchFamily="34" charset="-122"/>
+                <a:cs typeface="Calibri" pitchFamily="34" charset="-120"/>
+              </a:rPr>
+              <a:t>Dos requieren licencia de paga y una está bloqueada. Las veo en pantalla, con el mismo corpus que acabas de trabajar.</a:t>
+            </a:r>
+            <a:endParaRPr lang="en-US" sz="1500" dirty="0"/>
+          </a:p>
+        </p:txBody>
+      </p:sp>
+      <p:sp>
+        <p:nvSpPr>
+          <p:cNvPr id="4" name="Shape 2"/>
+          <p:cNvSpPr/>
+          <p:nvPr/>
+        </p:nvSpPr>
+        <p:spPr>
+          <a:xfrm>
+            <a:off x="566928" y="2011680"/>
+            <a:ext cx="3503066" cy="3563112"/>
+          </a:xfrm>
+          <a:prstGeom prst="roundRect">
+            <a:avLst>
+              <a:gd name="adj" fmla="val 2088"/>
+            </a:avLst>
+          </a:prstGeom>
+          <a:solidFill>
+            <a:srgbClr val="D7E7E7"/>
+          </a:solidFill>
+          <a:ln w="12700">
+            <a:solidFill>
+              <a:srgbClr val="D7E7E7"/>
+            </a:solidFill>
+            <a:prstDash val="solid"/>
+          </a:ln>
+        </p:spPr>
+      </p:sp>
+      <p:sp>
+        <p:nvSpPr>
+          <p:cNvPr id="5" name="Text 3"/>
+          <p:cNvSpPr txBox="1"/>
+          <p:nvPr/>
+        </p:nvSpPr>
+        <p:spPr>
+          <a:xfrm>
+            <a:off x="804672" y="2249424"/>
+            <a:ext cx="3027578" cy="319024"/>
+          </a:xfrm>
+          <a:prstGeom prst="rect">
+            <a:avLst/>
+          </a:prstGeom>
+          <a:noFill/>
+          <a:ln/>
+        </p:spPr>
+        <p:txBody>
+          <a:bodyPr wrap="square" lIns="0" tIns="0" rIns="0" bIns="0" rtlCol="0" anchor="t"/>
+          <a:lstStyle/>
+          <a:p>
+            <a:pPr indent="0" marL="0">
+              <a:buNone/>
+            </a:pPr>
+            <a:r>
+              <a:rPr lang="en-US" sz="1600" b="1" dirty="0">
+                <a:solidFill>
+                  <a:srgbClr val="16262E"/>
+                </a:solidFill>
+                <a:latin typeface="Arial" pitchFamily="34" charset="0"/>
+                <a:ea typeface="Arial" pitchFamily="34" charset="-122"/>
+                <a:cs typeface="Arial" pitchFamily="34" charset="-120"/>
+              </a:rPr>
+              <a:t>Atlas.ti y MAXQDA</a:t>
+            </a:r>
+            <a:endParaRPr lang="en-US" sz="1600" dirty="0"/>
+          </a:p>
+        </p:txBody>
+      </p:sp>
+      <p:sp>
+        <p:nvSpPr>
+          <p:cNvPr id="6" name="Text 4"/>
+          <p:cNvSpPr txBox="1"/>
+          <p:nvPr/>
+        </p:nvSpPr>
+        <p:spPr>
+          <a:xfrm>
+            <a:off x="804672" y="2714752"/>
+            <a:ext cx="3027578" cy="2658872"/>
+          </a:xfrm>
+          <a:prstGeom prst="rect">
+            <a:avLst/>
+          </a:prstGeom>
+          <a:noFill/>
+          <a:ln/>
+        </p:spPr>
+        <p:txBody>
+          <a:bodyPr wrap="square" lIns="0" tIns="0" rIns="0" bIns="0" rtlCol="0" anchor="t"/>
+          <a:lstStyle/>
+          <a:p>
+            <a:pPr indent="0" marL="0">
+              <a:lnSpc>
+                <a:spcPct val="110000"/>
+              </a:lnSpc>
+              <a:buNone/>
+            </a:pPr>
+            <a:r>
+              <a:rPr lang="en-US" sz="1300" dirty="0">
+                <a:solidFill>
+                  <a:srgbClr val="16262E"/>
+                </a:solidFill>
+                <a:latin typeface="Calibri" pitchFamily="34" charset="0"/>
+                <a:ea typeface="Calibri" pitchFamily="34" charset="-122"/>
+                <a:cs typeface="Calibri" pitchFamily="34" charset="-120"/>
+              </a:rPr>
+              <a:t>Son el estándar de la investigación cualitativa formal.</a:t>
+            </a:r>
+            <a:endParaRPr lang="en-US" sz="1300" dirty="0"/>
+          </a:p>
+          <a:p>
+            <a:pPr indent="0" marL="0">
+              <a:lnSpc>
+                <a:spcPct val="110000"/>
+              </a:lnSpc>
+              <a:buNone/>
+            </a:pPr>
+            <a:endParaRPr lang="en-US" sz="1300" dirty="0"/>
+          </a:p>
+          <a:p>
+            <a:pPr indent="0" marL="0">
+              <a:lnSpc>
+                <a:spcPct val="110000"/>
+              </a:lnSpc>
+              <a:buNone/>
+            </a:pPr>
+            <a:r>
+              <a:rPr lang="en-US" sz="1300" dirty="0">
+                <a:solidFill>
+                  <a:srgbClr val="16262E"/>
+                </a:solidFill>
+                <a:latin typeface="Calibri" pitchFamily="34" charset="0"/>
+                <a:ea typeface="Calibri" pitchFamily="34" charset="-122"/>
+                <a:cs typeface="Calibri" pitchFamily="34" charset="-120"/>
+              </a:rPr>
+              <a:t>Lo que hacen distinto no es codificar mejor: es dejar constancia de cómo codificaron. Generan un reporte de codificación auditable.</a:t>
+            </a:r>
+            <a:endParaRPr lang="en-US" sz="1300" dirty="0"/>
+          </a:p>
+          <a:p>
+            <a:pPr indent="0" marL="0">
+              <a:lnSpc>
+                <a:spcPct val="110000"/>
+              </a:lnSpc>
+              <a:buNone/>
+            </a:pPr>
+            <a:endParaRPr lang="en-US" sz="1300" dirty="0"/>
+          </a:p>
+          <a:p>
+            <a:pPr indent="0" marL="0">
+              <a:lnSpc>
+                <a:spcPct val="110000"/>
+              </a:lnSpc>
+              <a:buNone/>
+            </a:pPr>
+            <a:r>
+              <a:rPr lang="en-US" sz="1300" dirty="0">
+                <a:solidFill>
+                  <a:srgbClr val="16262E"/>
+                </a:solidFill>
+                <a:latin typeface="Calibri" pitchFamily="34" charset="0"/>
+                <a:ea typeface="Calibri" pitchFamily="34" charset="-122"/>
+                <a:cs typeface="Calibri" pitchFamily="34" charset="-120"/>
+              </a:rPr>
+              <a:t>Si algún día tienes que defender un análisis cualitativo ante un comité, esa es la diferencia.</a:t>
+            </a:r>
+            <a:endParaRPr lang="en-US" sz="1300" dirty="0"/>
+          </a:p>
+        </p:txBody>
+      </p:sp>
+      <p:sp>
+        <p:nvSpPr>
+          <p:cNvPr id="7" name="Shape 5"/>
+          <p:cNvSpPr/>
+          <p:nvPr/>
+        </p:nvSpPr>
+        <p:spPr>
+          <a:xfrm>
+            <a:off x="4344314" y="2011680"/>
+            <a:ext cx="3503066" cy="3563112"/>
+          </a:xfrm>
+          <a:prstGeom prst="roundRect">
+            <a:avLst>
+              <a:gd name="adj" fmla="val 2088"/>
+            </a:avLst>
+          </a:prstGeom>
+          <a:solidFill>
+            <a:srgbClr val="F7E4D8"/>
+          </a:solidFill>
+          <a:ln w="12700">
+            <a:solidFill>
+              <a:srgbClr val="F7E4D8"/>
+            </a:solidFill>
+            <a:prstDash val="solid"/>
+          </a:ln>
+        </p:spPr>
+      </p:sp>
+      <p:sp>
+        <p:nvSpPr>
+          <p:cNvPr id="8" name="Text 6"/>
+          <p:cNvSpPr txBox="1"/>
+          <p:nvPr/>
+        </p:nvSpPr>
+        <p:spPr>
+          <a:xfrm>
+            <a:off x="4582058" y="2249424"/>
+            <a:ext cx="3027578" cy="319024"/>
+          </a:xfrm>
+          <a:prstGeom prst="rect">
+            <a:avLst/>
+          </a:prstGeom>
+          <a:noFill/>
+          <a:ln/>
+        </p:spPr>
+        <p:txBody>
+          <a:bodyPr wrap="square" lIns="0" tIns="0" rIns="0" bIns="0" rtlCol="0" anchor="t"/>
+          <a:lstStyle/>
+          <a:p>
+            <a:pPr indent="0" marL="0">
+              <a:buNone/>
+            </a:pPr>
+            <a:r>
+              <a:rPr lang="en-US" sz="1600" b="1" dirty="0">
+                <a:solidFill>
+                  <a:srgbClr val="16262E"/>
+                </a:solidFill>
+                <a:latin typeface="Arial" pitchFamily="34" charset="0"/>
+                <a:ea typeface="Arial" pitchFamily="34" charset="-122"/>
+                <a:cs typeface="Arial" pitchFamily="34" charset="-120"/>
+              </a:rPr>
+              <a:t>NotebookLM</a:t>
+            </a:r>
+            <a:endParaRPr lang="en-US" sz="1600" dirty="0"/>
+          </a:p>
+        </p:txBody>
+      </p:sp>
+      <p:sp>
+        <p:nvSpPr>
+          <p:cNvPr id="9" name="Text 7"/>
+          <p:cNvSpPr txBox="1"/>
+          <p:nvPr/>
+        </p:nvSpPr>
+        <p:spPr>
+          <a:xfrm>
+            <a:off x="4582058" y="2714752"/>
+            <a:ext cx="3027578" cy="2658872"/>
+          </a:xfrm>
+          <a:prstGeom prst="rect">
+            <a:avLst/>
+          </a:prstGeom>
+          <a:noFill/>
+          <a:ln/>
+        </p:spPr>
+        <p:txBody>
+          <a:bodyPr wrap="square" lIns="0" tIns="0" rIns="0" bIns="0" rtlCol="0" anchor="t"/>
+          <a:lstStyle/>
+          <a:p>
+            <a:pPr indent="0" marL="0">
+              <a:lnSpc>
+                <a:spcPct val="110000"/>
+              </a:lnSpc>
+              <a:buNone/>
+            </a:pPr>
+            <a:r>
+              <a:rPr lang="en-US" sz="1300" dirty="0">
+                <a:solidFill>
+                  <a:srgbClr val="16262E"/>
+                </a:solidFill>
+                <a:latin typeface="Calibri" pitchFamily="34" charset="0"/>
+                <a:ea typeface="Calibri" pitchFamily="34" charset="-122"/>
+                <a:cs typeface="Calibri" pitchFamily="34" charset="-120"/>
+              </a:rPr>
+              <a:t>Responde citando el párrafo exacto de cada documento fuente.</a:t>
+            </a:r>
+            <a:endParaRPr lang="en-US" sz="1300" dirty="0"/>
+          </a:p>
+          <a:p>
+            <a:pPr indent="0" marL="0">
+              <a:lnSpc>
+                <a:spcPct val="110000"/>
+              </a:lnSpc>
+              <a:buNone/>
+            </a:pPr>
+            <a:endParaRPr lang="en-US" sz="1300" dirty="0"/>
+          </a:p>
+          <a:p>
+            <a:pPr indent="0" marL="0">
+              <a:lnSpc>
+                <a:spcPct val="110000"/>
+              </a:lnSpc>
+              <a:buNone/>
+            </a:pPr>
+            <a:r>
+              <a:rPr lang="en-US" sz="1300" dirty="0">
+                <a:solidFill>
+                  <a:srgbClr val="16262E"/>
+                </a:solidFill>
+                <a:latin typeface="Calibri" pitchFamily="34" charset="0"/>
+                <a:ea typeface="Calibri" pitchFamily="34" charset="-122"/>
+                <a:cs typeface="Calibri" pitchFamily="34" charset="-120"/>
+              </a:rPr>
+              <a:t>Es justo lo que vas a construir a mano mañana en la matriz de evidencia.</a:t>
+            </a:r>
+            <a:endParaRPr lang="en-US" sz="1300" dirty="0"/>
+          </a:p>
+          <a:p>
+            <a:pPr indent="0" marL="0">
+              <a:lnSpc>
+                <a:spcPct val="110000"/>
+              </a:lnSpc>
+              <a:buNone/>
+            </a:pPr>
+            <a:endParaRPr lang="en-US" sz="1300" dirty="0"/>
+          </a:p>
+          <a:p>
+            <a:pPr indent="0" marL="0">
+              <a:lnSpc>
+                <a:spcPct val="110000"/>
+              </a:lnSpc>
+              <a:buNone/>
+            </a:pPr>
+            <a:r>
+              <a:rPr lang="en-US" sz="1300" dirty="0">
+                <a:solidFill>
+                  <a:srgbClr val="16262E"/>
+                </a:solidFill>
+                <a:latin typeface="Calibri" pitchFamily="34" charset="0"/>
+                <a:ea typeface="Calibri" pitchFamily="34" charset="-122"/>
+                <a:cs typeface="Calibri" pitchFamily="34" charset="-120"/>
+              </a:rPr>
+              <a:t>Está bloqueada y vale la pena pedirla: es del mismo proveedor que Gemini, que sí liberaron.</a:t>
+            </a:r>
+            <a:endParaRPr lang="en-US" sz="1300" dirty="0"/>
+          </a:p>
+        </p:txBody>
+      </p:sp>
+      <p:sp>
+        <p:nvSpPr>
+          <p:cNvPr id="10" name="Shape 8"/>
+          <p:cNvSpPr/>
+          <p:nvPr/>
+        </p:nvSpPr>
+        <p:spPr>
+          <a:xfrm>
+            <a:off x="8121701" y="2011680"/>
+            <a:ext cx="3503066" cy="3563112"/>
+          </a:xfrm>
+          <a:prstGeom prst="roundRect">
+            <a:avLst>
+              <a:gd name="adj" fmla="val 2088"/>
+            </a:avLst>
+          </a:prstGeom>
+          <a:solidFill>
+            <a:srgbClr val="F2F5F6"/>
+          </a:solidFill>
+          <a:ln w="12700">
+            <a:solidFill>
+              <a:srgbClr val="F2F5F6"/>
+            </a:solidFill>
+            <a:prstDash val="solid"/>
+          </a:ln>
+        </p:spPr>
+      </p:sp>
+      <p:sp>
+        <p:nvSpPr>
+          <p:cNvPr id="11" name="Text 9"/>
+          <p:cNvSpPr txBox="1"/>
+          <p:nvPr/>
+        </p:nvSpPr>
+        <p:spPr>
+          <a:xfrm>
+            <a:off x="8359445" y="2249424"/>
+            <a:ext cx="3027578" cy="319024"/>
+          </a:xfrm>
+          <a:prstGeom prst="rect">
+            <a:avLst/>
+          </a:prstGeom>
+          <a:noFill/>
+          <a:ln/>
+        </p:spPr>
+        <p:txBody>
+          <a:bodyPr wrap="square" lIns="0" tIns="0" rIns="0" bIns="0" rtlCol="0" anchor="t"/>
+          <a:lstStyle/>
+          <a:p>
+            <a:pPr indent="0" marL="0">
+              <a:buNone/>
+            </a:pPr>
+            <a:r>
+              <a:rPr lang="en-US" sz="1600" b="1" dirty="0">
+                <a:solidFill>
+                  <a:srgbClr val="16262E"/>
+                </a:solidFill>
+                <a:latin typeface="Arial" pitchFamily="34" charset="0"/>
+                <a:ea typeface="Arial" pitchFamily="34" charset="-122"/>
+                <a:cs typeface="Arial" pitchFamily="34" charset="-120"/>
+              </a:rPr>
+              <a:t>Qué tienen en común</a:t>
+            </a:r>
+            <a:endParaRPr lang="en-US" sz="1600" dirty="0"/>
+          </a:p>
+        </p:txBody>
+      </p:sp>
+      <p:sp>
+        <p:nvSpPr>
+          <p:cNvPr id="12" name="Text 10"/>
+          <p:cNvSpPr txBox="1"/>
+          <p:nvPr/>
+        </p:nvSpPr>
+        <p:spPr>
+          <a:xfrm>
+            <a:off x="8359445" y="2714752"/>
+            <a:ext cx="3027578" cy="2658872"/>
+          </a:xfrm>
+          <a:prstGeom prst="rect">
+            <a:avLst/>
+          </a:prstGeom>
+          <a:noFill/>
+          <a:ln/>
+        </p:spPr>
+        <p:txBody>
+          <a:bodyPr wrap="square" lIns="0" tIns="0" rIns="0" bIns="0" rtlCol="0" anchor="t"/>
+          <a:lstStyle/>
+          <a:p>
+            <a:pPr indent="0" marL="0">
+              <a:lnSpc>
+                <a:spcPct val="110000"/>
+              </a:lnSpc>
+              <a:buNone/>
+            </a:pPr>
+            <a:r>
+              <a:rPr lang="en-US" sz="1300" dirty="0">
+                <a:solidFill>
+                  <a:srgbClr val="16262E"/>
+                </a:solidFill>
+                <a:latin typeface="Calibri" pitchFamily="34" charset="0"/>
+                <a:ea typeface="Calibri" pitchFamily="34" charset="-122"/>
+                <a:cs typeface="Calibri" pitchFamily="34" charset="-120"/>
+              </a:rPr>
+              <a:t>Las tres resuelven el mismo problema: dejar rastro de cómo se llegó al resultado.</a:t>
+            </a:r>
+            <a:endParaRPr lang="en-US" sz="1300" dirty="0"/>
+          </a:p>
+          <a:p>
+            <a:pPr indent="0" marL="0">
+              <a:lnSpc>
+                <a:spcPct val="110000"/>
+              </a:lnSpc>
+              <a:buNone/>
+            </a:pPr>
+            <a:endParaRPr lang="en-US" sz="1300" dirty="0"/>
+          </a:p>
+          <a:p>
+            <a:pPr indent="0" marL="0">
+              <a:lnSpc>
+                <a:spcPct val="110000"/>
+              </a:lnSpc>
+              <a:buNone/>
+            </a:pPr>
+            <a:r>
+              <a:rPr lang="en-US" sz="1300" dirty="0">
+                <a:solidFill>
+                  <a:srgbClr val="16262E"/>
+                </a:solidFill>
+                <a:latin typeface="Calibri" pitchFamily="34" charset="0"/>
+                <a:ea typeface="Calibri" pitchFamily="34" charset="-122"/>
+                <a:cs typeface="Calibri" pitchFamily="34" charset="-120"/>
+              </a:rPr>
+              <a:t>Ese problema no desaparece porque no tengas la herramienta. Solo cambia quién lo resuelve: mañana lo vas a resolver tú, a mano.</a:t>
+            </a:r>
+            <a:endParaRPr lang="en-US" sz="1300" dirty="0"/>
+          </a:p>
+        </p:txBody>
+      </p:sp>
+    </p:spTree>
+  </p:cSld>
+  <p:clrMapOvr>
+    <a:masterClrMapping/>
+  </p:clrMapOvr>
+</p:sld>
+</file>
+
+<file path=ppt/slides/slide15.xml><?xml version="1.0" encoding="utf-8"?>
+<p:sld xmlns:a="http://schemas.openxmlformats.org/drawingml/2006/main" xmlns:r="http://schemas.openxmlformats.org/officeDocument/2006/relationships" xmlns:p="http://schemas.openxmlformats.org/presentationml/2006/main">
+  <p:cSld name="Slide 15">
+    <p:bg>
+      <p:bgPr>
+        <a:solidFill>
+          <a:srgbClr val="16262E"/>
+        </a:solidFill>
+      </p:bgPr>
+    </p:bg>
+    <p:spTree>
+      <p:nvGrpSpPr>
+        <p:cNvPr id="1" name=""/>
+        <p:cNvGrpSpPr/>
+        <p:nvPr/>
+      </p:nvGrpSpPr>
+      <p:grpSpPr>
+        <a:xfrm>
+          <a:off x="0" y="0"/>
+          <a:ext cx="0" cy="0"/>
+          <a:chOff x="0" y="0"/>
+          <a:chExt cx="0" cy="0"/>
+        </a:xfrm>
+      </p:grpSpPr>
+      <p:sp>
+        <p:nvSpPr>
+          <p:cNvPr id="2" name="Shape 0"/>
+          <p:cNvSpPr/>
+          <p:nvPr/>
+        </p:nvSpPr>
+        <p:spPr>
+          <a:xfrm>
+            <a:off x="566928" y="2331720"/>
+            <a:ext cx="1371600" cy="1371600"/>
+          </a:xfrm>
+          <a:prstGeom prst="ellipse">
+            <a:avLst/>
+          </a:prstGeom>
+          <a:solidFill>
+            <a:srgbClr val="C85A28"/>
+          </a:solidFill>
+          <a:ln w="12700">
+            <a:solidFill>
+              <a:srgbClr val="C85A28"/>
+            </a:solidFill>
+            <a:prstDash val="solid"/>
+          </a:ln>
+        </p:spPr>
+      </p:sp>
+      <p:sp>
+        <p:nvSpPr>
+          <p:cNvPr id="3" name="Text 1"/>
+          <p:cNvSpPr txBox="1"/>
+          <p:nvPr/>
+        </p:nvSpPr>
+        <p:spPr>
+          <a:xfrm>
+            <a:off x="566928" y="2331720"/>
+            <a:ext cx="1371600" cy="1371600"/>
+          </a:xfrm>
+          <a:prstGeom prst="rect">
+            <a:avLst/>
+          </a:prstGeom>
+          <a:noFill/>
+          <a:ln/>
+        </p:spPr>
+        <p:txBody>
+          <a:bodyPr wrap="square" lIns="0" tIns="0" rIns="0" bIns="0" rtlCol="0" anchor="ctr"/>
+          <a:lstStyle/>
+          <a:p>
+            <a:pPr algn="ctr" indent="0" marL="0">
+              <a:buNone/>
+            </a:pPr>
+            <a:r>
+              <a:rPr lang="en-US" sz="4400" b="1" dirty="0">
+                <a:solidFill>
+                  <a:srgbClr val="FFFFFF"/>
+                </a:solidFill>
+                <a:latin typeface="Arial" pitchFamily="34" charset="0"/>
+                <a:ea typeface="Arial" pitchFamily="34" charset="-122"/>
+                <a:cs typeface="Arial" pitchFamily="34" charset="-120"/>
+              </a:rPr>
+              <a:t>5</a:t>
+            </a:r>
+            <a:endParaRPr lang="en-US" sz="4400" dirty="0"/>
+          </a:p>
+        </p:txBody>
+      </p:sp>
+      <p:sp>
+        <p:nvSpPr>
+          <p:cNvPr id="4" name="Text 2"/>
+          <p:cNvSpPr txBox="1"/>
+          <p:nvPr/>
+        </p:nvSpPr>
+        <p:spPr>
+          <a:xfrm>
+            <a:off x="2487168" y="2331720"/>
+            <a:ext cx="8778240" cy="365760"/>
+          </a:xfrm>
+          <a:prstGeom prst="rect">
+            <a:avLst/>
+          </a:prstGeom>
+          <a:noFill/>
+          <a:ln/>
+        </p:spPr>
+        <p:txBody>
+          <a:bodyPr wrap="square" lIns="0" tIns="0" rIns="0" bIns="0" rtlCol="0" anchor="ctr"/>
+          <a:lstStyle/>
+          <a:p>
+            <a:pPr indent="0" marL="0">
+              <a:buNone/>
+            </a:pPr>
+            <a:r>
+              <a:rPr lang="en-US" sz="1400" b="1" spc="200" kern="0" dirty="0">
+                <a:solidFill>
+                  <a:srgbClr val="D7E7E7"/>
+                </a:solidFill>
+                <a:latin typeface="Calibri" pitchFamily="34" charset="0"/>
+                <a:ea typeface="Calibri" pitchFamily="34" charset="-122"/>
+                <a:cs typeface="Calibri" pitchFamily="34" charset="-120"/>
+              </a:rPr>
+              <a:t>LA RESPUESTA PRÁCTICA</a:t>
+            </a:r>
+            <a:endParaRPr lang="en-US" sz="1400" dirty="0"/>
+          </a:p>
+        </p:txBody>
+      </p:sp>
+      <p:sp>
+        <p:nvSpPr>
+          <p:cNvPr id="5" name="Text 3"/>
+          <p:cNvSpPr txBox="1"/>
+          <p:nvPr/>
+        </p:nvSpPr>
+        <p:spPr>
+          <a:xfrm>
+            <a:off x="2487168" y="2697480"/>
+            <a:ext cx="8961120" cy="1188720"/>
+          </a:xfrm>
+          <a:prstGeom prst="rect">
+            <a:avLst/>
+          </a:prstGeom>
+          <a:noFill/>
+          <a:ln/>
+        </p:spPr>
+        <p:txBody>
+          <a:bodyPr wrap="square" lIns="0" tIns="0" rIns="0" bIns="0" rtlCol="0" anchor="t"/>
+          <a:lstStyle/>
+          <a:p>
+            <a:pPr indent="0" marL="0">
+              <a:buNone/>
+            </a:pPr>
+            <a:r>
+              <a:rPr lang="en-US" sz="3400" b="1" dirty="0">
+                <a:solidFill>
+                  <a:srgbClr val="FFFFFF"/>
+                </a:solidFill>
+                <a:latin typeface="Arial" pitchFamily="34" charset="0"/>
+                <a:ea typeface="Arial" pitchFamily="34" charset="-122"/>
+                <a:cs typeface="Arial" pitchFamily="34" charset="-120"/>
+              </a:rPr>
+              <a:t>El RAG que sí puedes operar hoy</a:t>
+            </a:r>
+            <a:endParaRPr lang="en-US" sz="3400" dirty="0"/>
+          </a:p>
+        </p:txBody>
+      </p:sp>
+      <p:sp>
+        <p:nvSpPr>
+          <p:cNvPr id="6" name="Shape 4"/>
+          <p:cNvSpPr/>
+          <p:nvPr/>
+        </p:nvSpPr>
+        <p:spPr>
+          <a:xfrm>
+            <a:off x="9338767" y="457200"/>
+            <a:ext cx="2286000" cy="347472"/>
+          </a:xfrm>
+          <a:prstGeom prst="roundRect">
+            <a:avLst>
+              <a:gd name="adj" fmla="val 50000"/>
+            </a:avLst>
+          </a:prstGeom>
+          <a:solidFill>
+            <a:srgbClr val="24404E"/>
+          </a:solidFill>
+          <a:ln w="12700">
+            <a:solidFill>
+              <a:srgbClr val="24404E"/>
+            </a:solidFill>
+            <a:prstDash val="solid"/>
+          </a:ln>
+        </p:spPr>
+      </p:sp>
+      <p:sp>
+        <p:nvSpPr>
+          <p:cNvPr id="7" name="Text 5"/>
+          <p:cNvSpPr txBox="1"/>
+          <p:nvPr/>
+        </p:nvSpPr>
+        <p:spPr>
+          <a:xfrm>
+            <a:off x="9338767" y="457200"/>
+            <a:ext cx="2286000" cy="347472"/>
+          </a:xfrm>
+          <a:prstGeom prst="rect">
+            <a:avLst/>
+          </a:prstGeom>
+          <a:noFill/>
+          <a:ln/>
+        </p:spPr>
+        <p:txBody>
+          <a:bodyPr wrap="square" lIns="0" tIns="0" rIns="0" bIns="0" rtlCol="0" anchor="ctr"/>
+          <a:lstStyle/>
+          <a:p>
+            <a:pPr algn="ctr" indent="0" marL="0">
+              <a:buNone/>
+            </a:pPr>
+            <a:r>
+              <a:rPr lang="en-US" sz="1200" b="1" dirty="0">
+                <a:solidFill>
+                  <a:srgbClr val="FFFFFF"/>
+                </a:solidFill>
+                <a:latin typeface="Calibri" pitchFamily="34" charset="0"/>
+                <a:ea typeface="Calibri" pitchFamily="34" charset="-122"/>
+                <a:cs typeface="Calibri" pitchFamily="34" charset="-120"/>
+              </a:rPr>
+              <a:t>11:10 a 11:25</a:t>
+            </a:r>
+            <a:endParaRPr lang="en-US" sz="1200" dirty="0"/>
+          </a:p>
+        </p:txBody>
+      </p:sp>
+    </p:spTree>
+  </p:cSld>
+  <p:clrMapOvr>
+    <a:masterClrMapping/>
+  </p:clrMapOvr>
+</p:sld>
+</file>
+
+<file path=ppt/slides/slide16.xml><?xml version="1.0" encoding="utf-8"?>
+<p:sld xmlns:a="http://schemas.openxmlformats.org/drawingml/2006/main" xmlns:r="http://schemas.openxmlformats.org/officeDocument/2006/relationships" xmlns:p="http://schemas.openxmlformats.org/presentationml/2006/main">
+  <p:cSld name="Slide 16">
     <p:bg>
       <p:bgPr>
         <a:solidFill>
@@ -3671,7 +5586,7 @@
                 <a:ea typeface="Arial" pitchFamily="34" charset="-122"/>
                 <a:cs typeface="Arial" pitchFamily="34" charset="-120"/>
               </a:rPr>
-              <a:t>AHORA USTEDES</a:t>
+              <a:t>TU TURNO</a:t>
             </a:r>
             <a:endParaRPr lang="en-US" sz="1300" dirty="0"/>
           </a:p>
@@ -3909,7 +5824,7 @@
                 <a:ea typeface="Calibri" pitchFamily="34" charset="-122"/>
                 <a:cs typeface="Calibri" pitchFamily="34" charset="-120"/>
               </a:rPr>
-              <a:t>Organicen una carpeta de SharePoint como base documental del tema que trabajan. Una carpeta por asunto, no una por año.</a:t>
+              <a:t>RAG quiere decir que la herramienta busca en tus documentos antes de responder, en lugar de contestar de memoria. Eso es lo que hace NotebookLM, y es lo que puedes armar con lo que ya tienes.</a:t>
             </a:r>
             <a:endParaRPr lang="en-US" sz="1450" dirty="0"/>
           </a:p>
@@ -4042,7 +5957,7 @@
                 <a:ea typeface="Calibri" pitchFamily="34" charset="-122"/>
                 <a:cs typeface="Calibri" pitchFamily="34" charset="-120"/>
               </a:rPr>
-              <a:t>Nombren los archivos de manera que el nombre diga qué contiene. Copilot busca por nombre antes que por contenido.</a:t>
+              <a:t>Organiza una carpeta de SharePoint como base documental de tu tema. Una carpeta por asunto, no una por año.</a:t>
             </a:r>
             <a:endParaRPr lang="en-US" sz="1450" dirty="0"/>
           </a:p>
@@ -4175,7 +6090,7 @@
                 <a:ea typeface="Calibri" pitchFamily="34" charset="-122"/>
                 <a:cs typeface="Calibri" pitchFamily="34" charset="-120"/>
               </a:rPr>
-              <a:t>Formulen la pregunta señalando la carpeta expresamente. Sin eso, Copilot busca en todo su espacio y devuelve ruido.</a:t>
+              <a:t>Nombra los archivos de manera que el nombre diga qué contiene. Copilot busca por nombre antes que por contenido.</a:t>
             </a:r>
             <a:endParaRPr lang="en-US" sz="1450" dirty="0"/>
           </a:p>
@@ -4308,7 +6223,7 @@
                 <a:ea typeface="Calibri" pitchFamily="34" charset="-122"/>
                 <a:cs typeface="Calibri" pitchFamily="34" charset="-120"/>
               </a:rPr>
-              <a:t>Comparen contra lo que les dio la misma pregunta sin anclar. La diferencia suele ser grande.</a:t>
+              <a:t>Formula la pregunta señalando la carpeta expresamente, y compara contra la misma pregunta sin anclar. La diferencia suele ser grande.</a:t>
             </a:r>
             <a:endParaRPr lang="en-US" sz="1450" dirty="0"/>
           </a:p>
@@ -4374,7 +6289,7 @@
                 <a:ea typeface="Calibri" pitchFamily="34" charset="-122"/>
                 <a:cs typeface="Calibri" pitchFamily="34" charset="-120"/>
               </a:rPr>
-              <a:t>Esto es lo único que funciona hoy con información amarilla. Todo lo demás que vieron hoy es solo para información pública.</a:t>
+              <a:t>Esto es lo único de hoy que funciona con información amarilla. Todo lo demás que probaste es solo para información pública.</a:t>
             </a:r>
             <a:endParaRPr lang="en-US" sz="1350" dirty="0"/>
           </a:p>
@@ -4388,9 +6303,9 @@
 </p:sld>
 </file>
 
-<file path=ppt/slides/slide14.xml><?xml version="1.0" encoding="utf-8"?>
+<file path=ppt/slides/slide17.xml><?xml version="1.0" encoding="utf-8"?>
 <p:sld xmlns:a="http://schemas.openxmlformats.org/drawingml/2006/main" xmlns:r="http://schemas.openxmlformats.org/officeDocument/2006/relationships" xmlns:p="http://schemas.openxmlformats.org/presentationml/2006/main">
-  <p:cSld name="Slide 14">
+  <p:cSld name="Slide 17">
     <p:bg>
       <p:bgPr>
         <a:solidFill>
@@ -4509,7 +6424,7 @@
                 <a:ea typeface="Arial" pitchFamily="34" charset="-122"/>
                 <a:cs typeface="Arial" pitchFamily="34" charset="-120"/>
               </a:rPr>
-              <a:t>Entregable de la sesión 5</a:t>
+              <a:t>Lo que entregas hoy</a:t>
             </a:r>
             <a:endParaRPr lang="en-US" sz="3000" dirty="0"/>
           </a:p>
@@ -4631,7 +6546,7 @@
                 <a:ea typeface="Calibri" pitchFamily="34" charset="-122"/>
                 <a:cs typeface="Calibri" pitchFamily="34" charset="-120"/>
               </a:rPr>
-              <a:t>El cuadro comparativo consolidado, con las ocho herramientas y las columnas de juicio propio de todos los equipos.</a:t>
+              <a:t>El cuadro comparativo consolidado, con las ocho herramientas evaluadas por uso propio de los seis equipos.</a:t>
             </a:r>
             <a:endParaRPr lang="en-US" sz="1450" dirty="0"/>
           </a:p>
@@ -4753,7 +6668,7 @@
                 <a:ea typeface="Calibri" pitchFamily="34" charset="-122"/>
                 <a:cs typeface="Calibri" pitchFamily="34" charset="-120"/>
               </a:rPr>
-              <a:t>Una justificación escrita de una cuartilla por equipo sobre cuál herramienta valdría la pena contratar o solicitar, con costo estimado.</a:t>
+              <a:t>Una cuartilla por equipo: cuál herramienta valdría la pena contratar o solicitar, con costo estimado y para qué tarea.</a:t>
             </a:r>
             <a:endParaRPr lang="en-US" sz="1450" dirty="0"/>
           </a:p>
@@ -4875,7 +6790,7 @@
                 <a:ea typeface="Calibri" pitchFamily="34" charset="-122"/>
                 <a:cs typeface="Calibri" pitchFamily="34" charset="-120"/>
               </a:rPr>
-              <a:t>Esa cuartilla no es un ejercicio de curso. Es el borrador de una solicitud real que su área puede presentar.</a:t>
+              <a:t>Esa cuartilla no es un ejercicio de curso. Es el borrador de una solicitud real que tu área puede presentar.</a:t>
             </a:r>
             <a:endParaRPr lang="en-US" sz="1450" dirty="0"/>
           </a:p>
@@ -4997,7 +6912,7 @@
                 <a:ea typeface="Calibri" pitchFamily="34" charset="-122"/>
                 <a:cs typeface="Calibri" pitchFamily="34" charset="-120"/>
               </a:rPr>
-              <a:t>Para mañana: revisen su bitácora completa y lean su expediente del Laboratorio 2 si todavía no lo han hecho.</a:t>
+              <a:t>Para mañana: revisa tu bitácora completa y lee el expediente del Laboratorio 2 si todavía no lo haces.</a:t>
             </a:r>
             <a:endParaRPr lang="en-US" sz="1450" dirty="0"/>
           </a:p>
@@ -5274,7 +7189,7 @@
                 <a:ea typeface="Calibri" pitchFamily="34" charset="-122"/>
                 <a:cs typeface="Calibri" pitchFamily="34" charset="-120"/>
               </a:rPr>
-              <a:t>Mapa del ecosistema, organizado por tarea y no por marca</a:t>
+              <a:t>El mapa del ecosistema, con las categorías del Instituto</a:t>
             </a:r>
             <a:endParaRPr lang="en-US" sz="1350" dirty="0"/>
           </a:p>
@@ -5382,7 +7297,7 @@
                 <a:ea typeface="Calibri" pitchFamily="34" charset="-122"/>
                 <a:cs typeface="Calibri" pitchFamily="34" charset="-120"/>
               </a:rPr>
-              <a:t>El reparto por equipos y el protocolo de prueba</a:t>
+              <a:t>El reparto por equipos y la tarea de hoy</a:t>
             </a:r>
             <a:endParaRPr lang="en-US" sz="1350" dirty="0"/>
           </a:p>
@@ -5490,7 +7405,7 @@
                 <a:ea typeface="Calibri" pitchFamily="34" charset="-122"/>
                 <a:cs typeface="Calibri" pitchFamily="34" charset="-120"/>
               </a:rPr>
-              <a:t>Práctica: la misma pregunta, la herramienta asignada</a:t>
+              <a:t>Práctica: codifica y sustenta con tu herramienta asignada</a:t>
             </a:r>
             <a:endParaRPr lang="en-US" sz="1350" dirty="0"/>
           </a:p>
@@ -5772,7 +7687,7 @@
                 <a:ea typeface="Arial" pitchFamily="34" charset="-122"/>
                 <a:cs typeface="Arial" pitchFamily="34" charset="-120"/>
               </a:rPr>
-              <a:t>10:55</a:t>
+              <a:t>10:50</a:t>
             </a:r>
             <a:endParaRPr lang="en-US" sz="1300" dirty="0"/>
           </a:p>
@@ -5922,7 +7837,7 @@
                 <a:ea typeface="Calibri" pitchFamily="34" charset="-122"/>
                 <a:cs typeface="Calibri" pitchFamily="34" charset="-120"/>
               </a:rPr>
-              <a:t>Cómo armar un ambiente de trabajo con lo que ya tenemos</a:t>
+              <a:t>El RAG que sí puedes operar hoy</a:t>
             </a:r>
             <a:endParaRPr lang="en-US" sz="1350" dirty="0"/>
           </a:p>
@@ -6030,7 +7945,7 @@
                 <a:ea typeface="Calibri" pitchFamily="34" charset="-122"/>
                 <a:cs typeface="Calibri" pitchFamily="34" charset="-120"/>
               </a:rPr>
-              <a:t>Cierre y consolidación del cuadro comparativo</a:t>
+              <a:t>Cierre y cuadro comparativo</a:t>
             </a:r>
             <a:endParaRPr lang="en-US" sz="1350" dirty="0"/>
           </a:p>
@@ -6069,7 +7984,7 @@
                 <a:ea typeface="Calibri" pitchFamily="34" charset="-122"/>
                 <a:cs typeface="Calibri" pitchFamily="34" charset="-120"/>
               </a:rPr>
-              <a:t>El Instituto liberó acceso a ocho herramientas. Hoy las evaluamos entre todos y consolidamos un solo cuadro.</a:t>
+              <a:t>Hoy no empiezas de cero. Trabajas sobre el corpus y el libro de códigos que ratificaste el viernes.</a:t>
             </a:r>
             <a:endParaRPr lang="en-US" sz="1000" dirty="0"/>
           </a:p>
@@ -6086,6 +8001,625 @@
 <file path=ppt/slides/slide3.xml><?xml version="1.0" encoding="utf-8"?>
 <p:sld xmlns:a="http://schemas.openxmlformats.org/drawingml/2006/main" xmlns:r="http://schemas.openxmlformats.org/officeDocument/2006/relationships" xmlns:p="http://schemas.openxmlformats.org/presentationml/2006/main">
   <p:cSld name="Slide 3">
+    <p:spTree>
+      <p:nvGrpSpPr>
+        <p:cNvPr id="1" name=""/>
+        <p:cNvGrpSpPr/>
+        <p:nvPr/>
+      </p:nvGrpSpPr>
+      <p:grpSpPr>
+        <a:xfrm>
+          <a:off x="0" y="0"/>
+          <a:ext cx="0" cy="0"/>
+          <a:chOff x="0" y="0"/>
+          <a:chExt cx="0" cy="0"/>
+        </a:xfrm>
+      </p:grpSpPr>
+      <p:sp>
+        <p:nvSpPr>
+          <p:cNvPr id="2" name="Text 0"/>
+          <p:cNvSpPr txBox="1"/>
+          <p:nvPr/>
+        </p:nvSpPr>
+        <p:spPr>
+          <a:xfrm>
+            <a:off x="566928" y="402336"/>
+            <a:ext cx="9229039" cy="749808"/>
+          </a:xfrm>
+          <a:prstGeom prst="rect">
+            <a:avLst/>
+          </a:prstGeom>
+          <a:noFill/>
+          <a:ln/>
+        </p:spPr>
+        <p:txBody>
+          <a:bodyPr wrap="square" lIns="0" tIns="0" rIns="0" bIns="0" rtlCol="0" anchor="t"/>
+          <a:lstStyle/>
+          <a:p>
+            <a:pPr algn="l" indent="0" marL="0">
+              <a:buNone/>
+            </a:pPr>
+            <a:r>
+              <a:rPr lang="en-US" sz="3200" b="1" dirty="0">
+                <a:solidFill>
+                  <a:srgbClr val="16262E"/>
+                </a:solidFill>
+                <a:latin typeface="Arial" pitchFamily="34" charset="0"/>
+                <a:ea typeface="Arial" pitchFamily="34" charset="-122"/>
+                <a:cs typeface="Arial" pitchFamily="34" charset="-120"/>
+              </a:rPr>
+              <a:t>Lo que hoy tenemos que contestar</a:t>
+            </a:r>
+            <a:endParaRPr lang="en-US" sz="3200" dirty="0"/>
+          </a:p>
+        </p:txBody>
+      </p:sp>
+      <p:sp>
+        <p:nvSpPr>
+          <p:cNvPr id="3" name="Text 1"/>
+          <p:cNvSpPr txBox="1"/>
+          <p:nvPr/>
+        </p:nvSpPr>
+        <p:spPr>
+          <a:xfrm>
+            <a:off x="566928" y="1280160"/>
+            <a:ext cx="9960559" cy="365760"/>
+          </a:xfrm>
+          <a:prstGeom prst="rect">
+            <a:avLst/>
+          </a:prstGeom>
+          <a:noFill/>
+          <a:ln/>
+        </p:spPr>
+        <p:txBody>
+          <a:bodyPr wrap="square" lIns="0" tIns="0" rIns="0" bIns="0" rtlCol="0" anchor="t"/>
+          <a:lstStyle/>
+          <a:p>
+            <a:pPr indent="0" marL="0">
+              <a:buNone/>
+            </a:pPr>
+            <a:r>
+              <a:rPr lang="en-US" sz="1500" dirty="0">
+                <a:solidFill>
+                  <a:srgbClr val="5A6B73"/>
+                </a:solidFill>
+                <a:latin typeface="Calibri" pitchFamily="34" charset="0"/>
+                <a:ea typeface="Calibri" pitchFamily="34" charset="-122"/>
+                <a:cs typeface="Calibri" pitchFamily="34" charset="-120"/>
+              </a:rPr>
+              <a:t>Tres preguntas que vienen del contrato del curso. Al cerrar la sesión las tres quedan respondidas con tu propio trabajo.</a:t>
+            </a:r>
+            <a:endParaRPr lang="en-US" sz="1500" dirty="0"/>
+          </a:p>
+        </p:txBody>
+      </p:sp>
+      <p:sp>
+        <p:nvSpPr>
+          <p:cNvPr id="4" name="Shape 2"/>
+          <p:cNvSpPr/>
+          <p:nvPr/>
+        </p:nvSpPr>
+        <p:spPr>
+          <a:xfrm>
+            <a:off x="566928" y="2011680"/>
+            <a:ext cx="3503066" cy="2757932"/>
+          </a:xfrm>
+          <a:prstGeom prst="roundRect">
+            <a:avLst>
+              <a:gd name="adj" fmla="val 2652"/>
+            </a:avLst>
+          </a:prstGeom>
+          <a:solidFill>
+            <a:srgbClr val="D7E7E7"/>
+          </a:solidFill>
+          <a:ln w="12700">
+            <a:solidFill>
+              <a:srgbClr val="D7E7E7"/>
+            </a:solidFill>
+            <a:prstDash val="solid"/>
+          </a:ln>
+        </p:spPr>
+      </p:sp>
+      <p:sp>
+        <p:nvSpPr>
+          <p:cNvPr id="5" name="Shape 3"/>
+          <p:cNvSpPr/>
+          <p:nvPr/>
+        </p:nvSpPr>
+        <p:spPr>
+          <a:xfrm>
+            <a:off x="804672" y="2231136"/>
+            <a:ext cx="420624" cy="420624"/>
+          </a:xfrm>
+          <a:prstGeom prst="ellipse">
+            <a:avLst/>
+          </a:prstGeom>
+          <a:solidFill>
+            <a:srgbClr val="2E7D7D"/>
+          </a:solidFill>
+          <a:ln w="12700">
+            <a:solidFill>
+              <a:srgbClr val="2E7D7D"/>
+            </a:solidFill>
+            <a:prstDash val="solid"/>
+          </a:ln>
+        </p:spPr>
+      </p:sp>
+      <p:sp>
+        <p:nvSpPr>
+          <p:cNvPr id="6" name="Text 4"/>
+          <p:cNvSpPr txBox="1"/>
+          <p:nvPr/>
+        </p:nvSpPr>
+        <p:spPr>
+          <a:xfrm>
+            <a:off x="804672" y="2231136"/>
+            <a:ext cx="420624" cy="420624"/>
+          </a:xfrm>
+          <a:prstGeom prst="rect">
+            <a:avLst/>
+          </a:prstGeom>
+          <a:noFill/>
+          <a:ln/>
+        </p:spPr>
+        <p:txBody>
+          <a:bodyPr wrap="square" lIns="0" tIns="0" rIns="0" bIns="0" rtlCol="0" anchor="ctr"/>
+          <a:lstStyle/>
+          <a:p>
+            <a:pPr algn="ctr" indent="0" marL="0">
+              <a:buNone/>
+            </a:pPr>
+            <a:r>
+              <a:rPr lang="en-US" sz="1400" b="1" dirty="0">
+                <a:solidFill>
+                  <a:srgbClr val="FFFFFF"/>
+                </a:solidFill>
+                <a:latin typeface="Arial" pitchFamily="34" charset="0"/>
+                <a:ea typeface="Arial" pitchFamily="34" charset="-122"/>
+                <a:cs typeface="Arial" pitchFamily="34" charset="-120"/>
+              </a:rPr>
+              <a:t>1</a:t>
+            </a:r>
+            <a:endParaRPr lang="en-US" sz="1400" dirty="0"/>
+          </a:p>
+        </p:txBody>
+      </p:sp>
+      <p:sp>
+        <p:nvSpPr>
+          <p:cNvPr id="7" name="Text 5"/>
+          <p:cNvSpPr txBox="1"/>
+          <p:nvPr/>
+        </p:nvSpPr>
+        <p:spPr>
+          <a:xfrm>
+            <a:off x="804672" y="2798064"/>
+            <a:ext cx="3027578" cy="583184"/>
+          </a:xfrm>
+          <a:prstGeom prst="rect">
+            <a:avLst/>
+          </a:prstGeom>
+          <a:noFill/>
+          <a:ln/>
+        </p:spPr>
+        <p:txBody>
+          <a:bodyPr wrap="square" lIns="0" tIns="0" rIns="0" bIns="0" rtlCol="0" anchor="t"/>
+          <a:lstStyle/>
+          <a:p>
+            <a:pPr indent="0" marL="0">
+              <a:buNone/>
+            </a:pPr>
+            <a:r>
+              <a:rPr lang="en-US" sz="1600" b="1" dirty="0">
+                <a:solidFill>
+                  <a:srgbClr val="16262E"/>
+                </a:solidFill>
+                <a:latin typeface="Arial" pitchFamily="34" charset="0"/>
+                <a:ea typeface="Arial" pitchFamily="34" charset="-122"/>
+                <a:cs typeface="Arial" pitchFamily="34" charset="-120"/>
+              </a:rPr>
+              <a:t>¿Qué tan bien codifica cada herramienta?</a:t>
+            </a:r>
+            <a:endParaRPr lang="en-US" sz="1600" dirty="0"/>
+          </a:p>
+        </p:txBody>
+      </p:sp>
+      <p:sp>
+        <p:nvSpPr>
+          <p:cNvPr id="8" name="Text 6"/>
+          <p:cNvSpPr txBox="1"/>
+          <p:nvPr/>
+        </p:nvSpPr>
+        <p:spPr>
+          <a:xfrm>
+            <a:off x="804672" y="3527552"/>
+            <a:ext cx="3027578" cy="1040892"/>
+          </a:xfrm>
+          <a:prstGeom prst="rect">
+            <a:avLst/>
+          </a:prstGeom>
+          <a:noFill/>
+          <a:ln/>
+        </p:spPr>
+        <p:txBody>
+          <a:bodyPr wrap="square" lIns="0" tIns="0" rIns="0" bIns="0" rtlCol="0" anchor="t"/>
+          <a:lstStyle/>
+          <a:p>
+            <a:pPr indent="0" marL="0">
+              <a:lnSpc>
+                <a:spcPct val="110000"/>
+              </a:lnSpc>
+              <a:buNone/>
+            </a:pPr>
+            <a:r>
+              <a:rPr lang="en-US" sz="1300" dirty="0">
+                <a:solidFill>
+                  <a:srgbClr val="16262E"/>
+                </a:solidFill>
+                <a:latin typeface="Calibri" pitchFamily="34" charset="0"/>
+                <a:ea typeface="Calibri" pitchFamily="34" charset="-122"/>
+                <a:cs typeface="Calibri" pitchFamily="34" charset="-120"/>
+              </a:rPr>
+              <a:t>Aplicar tu libro de códigos ratificado sobre el mismo corpus, con una herramienta distinta a Copilot.</a:t>
+            </a:r>
+            <a:endParaRPr lang="en-US" sz="1300" dirty="0"/>
+          </a:p>
+        </p:txBody>
+      </p:sp>
+      <p:sp>
+        <p:nvSpPr>
+          <p:cNvPr id="9" name="Shape 7"/>
+          <p:cNvSpPr/>
+          <p:nvPr/>
+        </p:nvSpPr>
+        <p:spPr>
+          <a:xfrm>
+            <a:off x="4344314" y="2011680"/>
+            <a:ext cx="3503066" cy="2757932"/>
+          </a:xfrm>
+          <a:prstGeom prst="roundRect">
+            <a:avLst>
+              <a:gd name="adj" fmla="val 2652"/>
+            </a:avLst>
+          </a:prstGeom>
+          <a:solidFill>
+            <a:srgbClr val="D7E7E7"/>
+          </a:solidFill>
+          <a:ln w="12700">
+            <a:solidFill>
+              <a:srgbClr val="D7E7E7"/>
+            </a:solidFill>
+            <a:prstDash val="solid"/>
+          </a:ln>
+        </p:spPr>
+      </p:sp>
+      <p:sp>
+        <p:nvSpPr>
+          <p:cNvPr id="10" name="Shape 8"/>
+          <p:cNvSpPr/>
+          <p:nvPr/>
+        </p:nvSpPr>
+        <p:spPr>
+          <a:xfrm>
+            <a:off x="4582058" y="2231136"/>
+            <a:ext cx="420624" cy="420624"/>
+          </a:xfrm>
+          <a:prstGeom prst="ellipse">
+            <a:avLst/>
+          </a:prstGeom>
+          <a:solidFill>
+            <a:srgbClr val="2E7D7D"/>
+          </a:solidFill>
+          <a:ln w="12700">
+            <a:solidFill>
+              <a:srgbClr val="2E7D7D"/>
+            </a:solidFill>
+            <a:prstDash val="solid"/>
+          </a:ln>
+        </p:spPr>
+      </p:sp>
+      <p:sp>
+        <p:nvSpPr>
+          <p:cNvPr id="11" name="Text 9"/>
+          <p:cNvSpPr txBox="1"/>
+          <p:nvPr/>
+        </p:nvSpPr>
+        <p:spPr>
+          <a:xfrm>
+            <a:off x="4582058" y="2231136"/>
+            <a:ext cx="420624" cy="420624"/>
+          </a:xfrm>
+          <a:prstGeom prst="rect">
+            <a:avLst/>
+          </a:prstGeom>
+          <a:noFill/>
+          <a:ln/>
+        </p:spPr>
+        <p:txBody>
+          <a:bodyPr wrap="square" lIns="0" tIns="0" rIns="0" bIns="0" rtlCol="0" anchor="ctr"/>
+          <a:lstStyle/>
+          <a:p>
+            <a:pPr algn="ctr" indent="0" marL="0">
+              <a:buNone/>
+            </a:pPr>
+            <a:r>
+              <a:rPr lang="en-US" sz="1400" b="1" dirty="0">
+                <a:solidFill>
+                  <a:srgbClr val="FFFFFF"/>
+                </a:solidFill>
+                <a:latin typeface="Arial" pitchFamily="34" charset="0"/>
+                <a:ea typeface="Arial" pitchFamily="34" charset="-122"/>
+                <a:cs typeface="Arial" pitchFamily="34" charset="-120"/>
+              </a:rPr>
+              <a:t>2</a:t>
+            </a:r>
+            <a:endParaRPr lang="en-US" sz="1400" dirty="0"/>
+          </a:p>
+        </p:txBody>
+      </p:sp>
+      <p:sp>
+        <p:nvSpPr>
+          <p:cNvPr id="12" name="Text 10"/>
+          <p:cNvSpPr txBox="1"/>
+          <p:nvPr/>
+        </p:nvSpPr>
+        <p:spPr>
+          <a:xfrm>
+            <a:off x="4582058" y="2798064"/>
+            <a:ext cx="3027578" cy="319024"/>
+          </a:xfrm>
+          <a:prstGeom prst="rect">
+            <a:avLst/>
+          </a:prstGeom>
+          <a:noFill/>
+          <a:ln/>
+        </p:spPr>
+        <p:txBody>
+          <a:bodyPr wrap="square" lIns="0" tIns="0" rIns="0" bIns="0" rtlCol="0" anchor="t"/>
+          <a:lstStyle/>
+          <a:p>
+            <a:pPr indent="0" marL="0">
+              <a:buNone/>
+            </a:pPr>
+            <a:r>
+              <a:rPr lang="en-US" sz="1600" b="1" dirty="0">
+                <a:solidFill>
+                  <a:srgbClr val="16262E"/>
+                </a:solidFill>
+                <a:latin typeface="Arial" pitchFamily="34" charset="0"/>
+                <a:ea typeface="Arial" pitchFamily="34" charset="-122"/>
+                <a:cs typeface="Arial" pitchFamily="34" charset="-120"/>
+              </a:rPr>
+              <a:t>¿Y qué tan bien mide postura?</a:t>
+            </a:r>
+            <a:endParaRPr lang="en-US" sz="1600" dirty="0"/>
+          </a:p>
+        </p:txBody>
+      </p:sp>
+      <p:sp>
+        <p:nvSpPr>
+          <p:cNvPr id="13" name="Text 11"/>
+          <p:cNvSpPr txBox="1"/>
+          <p:nvPr/>
+        </p:nvSpPr>
+        <p:spPr>
+          <a:xfrm>
+            <a:off x="4582058" y="3263392"/>
+            <a:ext cx="3027578" cy="1305052"/>
+          </a:xfrm>
+          <a:prstGeom prst="rect">
+            <a:avLst/>
+          </a:prstGeom>
+          <a:noFill/>
+          <a:ln/>
+        </p:spPr>
+        <p:txBody>
+          <a:bodyPr wrap="square" lIns="0" tIns="0" rIns="0" bIns="0" rtlCol="0" anchor="t"/>
+          <a:lstStyle/>
+          <a:p>
+            <a:pPr indent="0" marL="0">
+              <a:lnSpc>
+                <a:spcPct val="110000"/>
+              </a:lnSpc>
+              <a:buNone/>
+            </a:pPr>
+            <a:r>
+              <a:rPr lang="en-US" sz="1300" dirty="0">
+                <a:solidFill>
+                  <a:srgbClr val="16262E"/>
+                </a:solidFill>
+                <a:latin typeface="Calibri" pitchFamily="34" charset="0"/>
+                <a:ea typeface="Calibri" pitchFamily="34" charset="-122"/>
+                <a:cs typeface="Calibri" pitchFamily="34" charset="-120"/>
+              </a:rPr>
+              <a:t>Clasificar polaridad y causa raíz sobre las transcripciones de foro, otra vez con tu herramienta asignada.</a:t>
+            </a:r>
+            <a:endParaRPr lang="en-US" sz="1300" dirty="0"/>
+          </a:p>
+        </p:txBody>
+      </p:sp>
+      <p:sp>
+        <p:nvSpPr>
+          <p:cNvPr id="14" name="Shape 12"/>
+          <p:cNvSpPr/>
+          <p:nvPr/>
+        </p:nvSpPr>
+        <p:spPr>
+          <a:xfrm>
+            <a:off x="8121701" y="2011680"/>
+            <a:ext cx="3503066" cy="2757932"/>
+          </a:xfrm>
+          <a:prstGeom prst="roundRect">
+            <a:avLst>
+              <a:gd name="adj" fmla="val 2652"/>
+            </a:avLst>
+          </a:prstGeom>
+          <a:solidFill>
+            <a:srgbClr val="F7E4D8"/>
+          </a:solidFill>
+          <a:ln w="12700">
+            <a:solidFill>
+              <a:srgbClr val="F7E4D8"/>
+            </a:solidFill>
+            <a:prstDash val="solid"/>
+          </a:ln>
+        </p:spPr>
+      </p:sp>
+      <p:sp>
+        <p:nvSpPr>
+          <p:cNvPr id="15" name="Shape 13"/>
+          <p:cNvSpPr/>
+          <p:nvPr/>
+        </p:nvSpPr>
+        <p:spPr>
+          <a:xfrm>
+            <a:off x="8359445" y="2231136"/>
+            <a:ext cx="420624" cy="420624"/>
+          </a:xfrm>
+          <a:prstGeom prst="ellipse">
+            <a:avLst/>
+          </a:prstGeom>
+          <a:solidFill>
+            <a:srgbClr val="C85A28"/>
+          </a:solidFill>
+          <a:ln w="12700">
+            <a:solidFill>
+              <a:srgbClr val="C85A28"/>
+            </a:solidFill>
+            <a:prstDash val="solid"/>
+          </a:ln>
+        </p:spPr>
+      </p:sp>
+      <p:sp>
+        <p:nvSpPr>
+          <p:cNvPr id="16" name="Text 14"/>
+          <p:cNvSpPr txBox="1"/>
+          <p:nvPr/>
+        </p:nvSpPr>
+        <p:spPr>
+          <a:xfrm>
+            <a:off x="8359445" y="2231136"/>
+            <a:ext cx="420624" cy="420624"/>
+          </a:xfrm>
+          <a:prstGeom prst="rect">
+            <a:avLst/>
+          </a:prstGeom>
+          <a:noFill/>
+          <a:ln/>
+        </p:spPr>
+        <p:txBody>
+          <a:bodyPr wrap="square" lIns="0" tIns="0" rIns="0" bIns="0" rtlCol="0" anchor="ctr"/>
+          <a:lstStyle/>
+          <a:p>
+            <a:pPr algn="ctr" indent="0" marL="0">
+              <a:buNone/>
+            </a:pPr>
+            <a:r>
+              <a:rPr lang="en-US" sz="1400" b="1" dirty="0">
+                <a:solidFill>
+                  <a:srgbClr val="FFFFFF"/>
+                </a:solidFill>
+                <a:latin typeface="Arial" pitchFamily="34" charset="0"/>
+                <a:ea typeface="Arial" pitchFamily="34" charset="-122"/>
+                <a:cs typeface="Arial" pitchFamily="34" charset="-120"/>
+              </a:rPr>
+              <a:t>3</a:t>
+            </a:r>
+            <a:endParaRPr lang="en-US" sz="1400" dirty="0"/>
+          </a:p>
+        </p:txBody>
+      </p:sp>
+      <p:sp>
+        <p:nvSpPr>
+          <p:cNvPr id="17" name="Text 15"/>
+          <p:cNvSpPr txBox="1"/>
+          <p:nvPr/>
+        </p:nvSpPr>
+        <p:spPr>
+          <a:xfrm>
+            <a:off x="8359445" y="2798064"/>
+            <a:ext cx="3027578" cy="583184"/>
+          </a:xfrm>
+          <a:prstGeom prst="rect">
+            <a:avLst/>
+          </a:prstGeom>
+          <a:noFill/>
+          <a:ln/>
+        </p:spPr>
+        <p:txBody>
+          <a:bodyPr wrap="square" lIns="0" tIns="0" rIns="0" bIns="0" rtlCol="0" anchor="t"/>
+          <a:lstStyle/>
+          <a:p>
+            <a:pPr indent="0" marL="0">
+              <a:buNone/>
+            </a:pPr>
+            <a:r>
+              <a:rPr lang="en-US" sz="1600" b="1" dirty="0">
+                <a:solidFill>
+                  <a:srgbClr val="16262E"/>
+                </a:solidFill>
+                <a:latin typeface="Arial" pitchFamily="34" charset="0"/>
+                <a:ea typeface="Arial" pitchFamily="34" charset="-122"/>
+                <a:cs typeface="Arial" pitchFamily="34" charset="-120"/>
+              </a:rPr>
+              <a:t>¿En qué es mejor o peor que Copilot?</a:t>
+            </a:r>
+            <a:endParaRPr lang="en-US" sz="1600" dirty="0"/>
+          </a:p>
+        </p:txBody>
+      </p:sp>
+      <p:sp>
+        <p:nvSpPr>
+          <p:cNvPr id="18" name="Text 16"/>
+          <p:cNvSpPr txBox="1"/>
+          <p:nvPr/>
+        </p:nvSpPr>
+        <p:spPr>
+          <a:xfrm>
+            <a:off x="8359445" y="3527552"/>
+            <a:ext cx="3027578" cy="1040892"/>
+          </a:xfrm>
+          <a:prstGeom prst="rect">
+            <a:avLst/>
+          </a:prstGeom>
+          <a:noFill/>
+          <a:ln/>
+        </p:spPr>
+        <p:txBody>
+          <a:bodyPr wrap="square" lIns="0" tIns="0" rIns="0" bIns="0" rtlCol="0" anchor="t"/>
+          <a:lstStyle/>
+          <a:p>
+            <a:pPr indent="0" marL="0">
+              <a:lnSpc>
+                <a:spcPct val="110000"/>
+              </a:lnSpc>
+              <a:buNone/>
+            </a:pPr>
+            <a:r>
+              <a:rPr lang="en-US" sz="1300" dirty="0">
+                <a:solidFill>
+                  <a:srgbClr val="16262E"/>
+                </a:solidFill>
+                <a:latin typeface="Calibri" pitchFamily="34" charset="0"/>
+                <a:ea typeface="Calibri" pitchFamily="34" charset="-122"/>
+                <a:cs typeface="Calibri" pitchFamily="34" charset="-120"/>
+              </a:rPr>
+              <a:t>Esa comparación es el entregable de hoy y es lo que el curso se comprometió a producir.</a:t>
+            </a:r>
+            <a:endParaRPr lang="en-US" sz="1300" dirty="0"/>
+          </a:p>
+        </p:txBody>
+      </p:sp>
+    </p:spTree>
+  </p:cSld>
+  <p:clrMapOvr>
+    <a:masterClrMapping/>
+  </p:clrMapOvr>
+</p:sld>
+</file>
+
+<file path=ppt/slides/slide4.xml><?xml version="1.0" encoding="utf-8"?>
+<p:sld xmlns:a="http://schemas.openxmlformats.org/drawingml/2006/main" xmlns:r="http://schemas.openxmlformats.org/officeDocument/2006/relationships" xmlns:p="http://schemas.openxmlformats.org/presentationml/2006/main">
+  <p:cSld name="Slide 4">
     <p:bg>
       <p:bgPr>
         <a:solidFill>
@@ -6115,11 +8649,155 @@
         </p:nvSpPr>
         <p:spPr>
           <a:xfrm>
-            <a:off x="10058400" y="-1463040"/>
-            <a:ext cx="4023360" cy="4023360"/>
+            <a:off x="566928" y="2331720"/>
+            <a:ext cx="1371600" cy="1371600"/>
           </a:xfrm>
           <a:prstGeom prst="ellipse">
             <a:avLst/>
+          </a:prstGeom>
+          <a:solidFill>
+            <a:srgbClr val="C85A28"/>
+          </a:solidFill>
+          <a:ln w="12700">
+            <a:solidFill>
+              <a:srgbClr val="C85A28"/>
+            </a:solidFill>
+            <a:prstDash val="solid"/>
+          </a:ln>
+        </p:spPr>
+      </p:sp>
+      <p:sp>
+        <p:nvSpPr>
+          <p:cNvPr id="3" name="Text 1"/>
+          <p:cNvSpPr txBox="1"/>
+          <p:nvPr/>
+        </p:nvSpPr>
+        <p:spPr>
+          <a:xfrm>
+            <a:off x="566928" y="2331720"/>
+            <a:ext cx="1371600" cy="1371600"/>
+          </a:xfrm>
+          <a:prstGeom prst="rect">
+            <a:avLst/>
+          </a:prstGeom>
+          <a:noFill/>
+          <a:ln/>
+        </p:spPr>
+        <p:txBody>
+          <a:bodyPr wrap="square" lIns="0" tIns="0" rIns="0" bIns="0" rtlCol="0" anchor="ctr"/>
+          <a:lstStyle/>
+          <a:p>
+            <a:pPr algn="ctr" indent="0" marL="0">
+              <a:buNone/>
+            </a:pPr>
+            <a:r>
+              <a:rPr lang="en-US" sz="4400" b="1" dirty="0">
+                <a:solidFill>
+                  <a:srgbClr val="FFFFFF"/>
+                </a:solidFill>
+                <a:latin typeface="Arial" pitchFamily="34" charset="0"/>
+                <a:ea typeface="Arial" pitchFamily="34" charset="-122"/>
+                <a:cs typeface="Arial" pitchFamily="34" charset="-120"/>
+              </a:rPr>
+              <a:t>1</a:t>
+            </a:r>
+            <a:endParaRPr lang="en-US" sz="4400" dirty="0"/>
+          </a:p>
+        </p:txBody>
+      </p:sp>
+      <p:sp>
+        <p:nvSpPr>
+          <p:cNvPr id="4" name="Text 2"/>
+          <p:cNvSpPr txBox="1"/>
+          <p:nvPr/>
+        </p:nvSpPr>
+        <p:spPr>
+          <a:xfrm>
+            <a:off x="2487168" y="2331720"/>
+            <a:ext cx="8778240" cy="365760"/>
+          </a:xfrm>
+          <a:prstGeom prst="rect">
+            <a:avLst/>
+          </a:prstGeom>
+          <a:noFill/>
+          <a:ln/>
+        </p:spPr>
+        <p:txBody>
+          <a:bodyPr wrap="square" lIns="0" tIns="0" rIns="0" bIns="0" rtlCol="0" anchor="ctr"/>
+          <a:lstStyle/>
+          <a:p>
+            <a:pPr indent="0" marL="0">
+              <a:buNone/>
+            </a:pPr>
+            <a:r>
+              <a:rPr lang="en-US" sz="1400" b="1" spc="200" kern="0" dirty="0">
+                <a:solidFill>
+                  <a:srgbClr val="D7E7E7"/>
+                </a:solidFill>
+                <a:latin typeface="Calibri" pitchFamily="34" charset="0"/>
+                <a:ea typeface="Calibri" pitchFamily="34" charset="-122"/>
+                <a:cs typeface="Calibri" pitchFamily="34" charset="-120"/>
+              </a:rPr>
+              <a:t>PRIMER BLOQUE</a:t>
+            </a:r>
+            <a:endParaRPr lang="en-US" sz="1400" dirty="0"/>
+          </a:p>
+        </p:txBody>
+      </p:sp>
+      <p:sp>
+        <p:nvSpPr>
+          <p:cNvPr id="5" name="Text 3"/>
+          <p:cNvSpPr txBox="1"/>
+          <p:nvPr/>
+        </p:nvSpPr>
+        <p:spPr>
+          <a:xfrm>
+            <a:off x="2487168" y="2697480"/>
+            <a:ext cx="8961120" cy="1188720"/>
+          </a:xfrm>
+          <a:prstGeom prst="rect">
+            <a:avLst/>
+          </a:prstGeom>
+          <a:noFill/>
+          <a:ln/>
+        </p:spPr>
+        <p:txBody>
+          <a:bodyPr wrap="square" lIns="0" tIns="0" rIns="0" bIns="0" rtlCol="0" anchor="t"/>
+          <a:lstStyle/>
+          <a:p>
+            <a:pPr indent="0" marL="0">
+              <a:buNone/>
+            </a:pPr>
+            <a:r>
+              <a:rPr lang="en-US" sz="3400" b="1" dirty="0">
+                <a:solidFill>
+                  <a:srgbClr val="FFFFFF"/>
+                </a:solidFill>
+                <a:latin typeface="Arial" pitchFamily="34" charset="0"/>
+                <a:ea typeface="Arial" pitchFamily="34" charset="-122"/>
+                <a:cs typeface="Arial" pitchFamily="34" charset="-120"/>
+              </a:rPr>
+              <a:t>El mapa del ecosistema</a:t>
+            </a:r>
+            <a:endParaRPr lang="en-US" sz="3400" dirty="0"/>
+          </a:p>
+        </p:txBody>
+      </p:sp>
+      <p:sp>
+        <p:nvSpPr>
+          <p:cNvPr id="6" name="Shape 4"/>
+          <p:cNvSpPr/>
+          <p:nvPr/>
+        </p:nvSpPr>
+        <p:spPr>
+          <a:xfrm>
+            <a:off x="9631375" y="457200"/>
+            <a:ext cx="1993392" cy="347472"/>
+          </a:xfrm>
+          <a:prstGeom prst="roundRect">
+            <a:avLst>
+              <a:gd name="adj" fmla="val 50000"/>
+            </a:avLst>
           </a:prstGeom>
           <a:solidFill>
             <a:srgbClr val="24404E"/>
@@ -6134,14 +8812,14 @@
       </p:sp>
       <p:sp>
         <p:nvSpPr>
-          <p:cNvPr id="3" name="Text 1"/>
+          <p:cNvPr id="7" name="Text 5"/>
           <p:cNvSpPr txBox="1"/>
           <p:nvPr/>
         </p:nvSpPr>
         <p:spPr>
           <a:xfrm>
-            <a:off x="932688" y="1371600"/>
-            <a:ext cx="10424160" cy="365760"/>
+            <a:off x="9631375" y="457200"/>
+            <a:ext cx="1993392" cy="347472"/>
           </a:xfrm>
           <a:prstGeom prst="rect">
             <a:avLst/>
@@ -6153,105 +8831,21 @@
           <a:bodyPr wrap="square" lIns="0" tIns="0" rIns="0" bIns="0" rtlCol="0" anchor="ctr"/>
           <a:lstStyle/>
           <a:p>
-            <a:pPr indent="0" marL="0">
-              <a:buNone/>
-            </a:pPr>
-            <a:r>
-              <a:rPr lang="en-US" sz="1400" b="1" spc="200" kern="0" dirty="0">
+            <a:pPr algn="ctr" indent="0" marL="0">
+              <a:buNone/>
+            </a:pPr>
+            <a:r>
+              <a:rPr lang="en-US" sz="1200" b="1" dirty="0">
                 <a:solidFill>
-                  <a:srgbClr val="C85A28"/>
+                  <a:srgbClr val="FFFFFF"/>
                 </a:solidFill>
                 <a:latin typeface="Calibri" pitchFamily="34" charset="0"/>
                 <a:ea typeface="Calibri" pitchFamily="34" charset="-122"/>
                 <a:cs typeface="Calibri" pitchFamily="34" charset="-120"/>
               </a:rPr>
-              <a:t>CÓMO ESTÁ ORGANIZADA ESTA SESIÓN</a:t>
-            </a:r>
-            <a:endParaRPr lang="en-US" sz="1400" dirty="0"/>
-          </a:p>
-        </p:txBody>
-      </p:sp>
-      <p:sp>
-        <p:nvSpPr>
-          <p:cNvPr id="4" name="Text 2"/>
-          <p:cNvSpPr txBox="1"/>
-          <p:nvPr/>
-        </p:nvSpPr>
-        <p:spPr>
-          <a:xfrm>
-            <a:off x="932688" y="1828800"/>
-            <a:ext cx="10241280" cy="2377440"/>
-          </a:xfrm>
-          <a:prstGeom prst="rect">
-            <a:avLst/>
-          </a:prstGeom>
-          <a:noFill/>
-          <a:ln/>
-        </p:spPr>
-        <p:txBody>
-          <a:bodyPr wrap="square" lIns="0" tIns="0" rIns="0" bIns="0" rtlCol="0" anchor="t"/>
-          <a:lstStyle/>
-          <a:p>
-            <a:pPr indent="0" marL="0">
-              <a:lnSpc>
-                <a:spcPct val="112000"/>
-              </a:lnSpc>
-              <a:buNone/>
-            </a:pPr>
-            <a:r>
-              <a:rPr lang="en-US" sz="3000" b="1" dirty="0">
-                <a:solidFill>
-                  <a:srgbClr val="FFFFFF"/>
-                </a:solidFill>
-                <a:latin typeface="Arial" pitchFamily="34" charset="0"/>
-                <a:ea typeface="Arial" pitchFamily="34" charset="-122"/>
-                <a:cs typeface="Arial" pitchFamily="34" charset="-120"/>
-              </a:rPr>
-              <a:t>Por tarea, no por marca. Es la única forma de que el mapa siga siendo útil dentro de seis meses.</a:t>
-            </a:r>
-            <a:endParaRPr lang="en-US" sz="3000" dirty="0"/>
-          </a:p>
-        </p:txBody>
-      </p:sp>
-      <p:sp>
-        <p:nvSpPr>
-          <p:cNvPr id="5" name="Text 3"/>
-          <p:cNvSpPr txBox="1"/>
-          <p:nvPr/>
-        </p:nvSpPr>
-        <p:spPr>
-          <a:xfrm>
-            <a:off x="932688" y="4343400"/>
-            <a:ext cx="10058400" cy="1371600"/>
-          </a:xfrm>
-          <a:prstGeom prst="rect">
-            <a:avLst/>
-          </a:prstGeom>
-          <a:noFill/>
-          <a:ln/>
-        </p:spPr>
-        <p:txBody>
-          <a:bodyPr wrap="square" lIns="0" tIns="0" rIns="0" bIns="0" rtlCol="0" anchor="t"/>
-          <a:lstStyle/>
-          <a:p>
-            <a:pPr indent="0" marL="0">
-              <a:lnSpc>
-                <a:spcPct val="115000"/>
-              </a:lnSpc>
-              <a:buNone/>
-            </a:pPr>
-            <a:r>
-              <a:rPr lang="en-US" sz="1600" dirty="0">
-                <a:solidFill>
-                  <a:srgbClr val="D7E7E7"/>
-                </a:solidFill>
-                <a:latin typeface="Calibri" pitchFamily="34" charset="0"/>
-                <a:ea typeface="Calibri" pitchFamily="34" charset="-122"/>
-                <a:cs typeface="Calibri" pitchFamily="34" charset="-120"/>
-              </a:rPr>
-              <a:t>Las marcas de hoy van a cambiar antes de que termine el año. Lo que no va a cambiar son las tareas. Si ustedes saben qué tarea tienen enfrente, van a poder evaluar cualquier herramienta que salga después de este curso, incluidas las que todavía no existen.</a:t>
-            </a:r>
-            <a:endParaRPr lang="en-US" sz="1600" dirty="0"/>
+              <a:t>9:00 a 9:15</a:t>
+            </a:r>
+            <a:endParaRPr lang="en-US" sz="1200" dirty="0"/>
           </a:p>
         </p:txBody>
       </p:sp>
@@ -6263,9 +8857,9 @@
 </p:sld>
 </file>
 
-<file path=ppt/slides/slide4.xml><?xml version="1.0" encoding="utf-8"?>
+<file path=ppt/slides/slide5.xml><?xml version="1.0" encoding="utf-8"?>
 <p:sld xmlns:a="http://schemas.openxmlformats.org/drawingml/2006/main" xmlns:r="http://schemas.openxmlformats.org/officeDocument/2006/relationships" xmlns:p="http://schemas.openxmlformats.org/presentationml/2006/main">
-  <p:cSld name="Slide 4">
+  <p:cSld name="Slide 5">
     <p:spTree>
       <p:nvGrpSpPr>
         <p:cNvPr id="1" name=""/>
@@ -6313,7 +8907,7 @@
                 <a:ea typeface="Arial" pitchFamily="34" charset="-122"/>
                 <a:cs typeface="Arial" pitchFamily="34" charset="-120"/>
               </a:rPr>
-              <a:t>Las herramientas liberadas, agrupadas por tarea</a:t>
+              <a:t>Las categorías son las del Instituto, no las mías</a:t>
             </a:r>
             <a:endParaRPr lang="en-US" sz="3200" dirty="0"/>
           </a:p>
@@ -6352,563 +8946,1488 @@
                 <a:ea typeface="Calibri" pitchFamily="34" charset="-122"/>
                 <a:cs typeface="Calibri" pitchFamily="34" charset="-120"/>
               </a:rPr>
-              <a:t>El Instituto habilitó el acceso de red a todas estas. Microsoft 365 Copilot sigue siendo la base institucional y la única con contrato.</a:t>
+              <a:t>Vienen de la lista de verificación de acceso que elaboró el propio INEGI. Así queda claro qué cubre el curso de esa lista.</a:t>
             </a:r>
             <a:endParaRPr lang="en-US" sz="1500" dirty="0"/>
           </a:p>
         </p:txBody>
       </p:sp>
-      <p:sp>
-        <p:nvSpPr>
-          <p:cNvPr id="4" name="Shape 2"/>
-          <p:cNvSpPr/>
-          <p:nvPr/>
-        </p:nvSpPr>
-        <p:spPr>
-          <a:xfrm>
-            <a:off x="566928" y="2011680"/>
-            <a:ext cx="2558720" cy="2074418"/>
-          </a:xfrm>
-          <a:prstGeom prst="roundRect">
-            <a:avLst>
-              <a:gd name="adj" fmla="val 3526"/>
-            </a:avLst>
-          </a:prstGeom>
-          <a:solidFill>
-            <a:srgbClr val="D7E7E7"/>
-          </a:solidFill>
-          <a:ln w="12700">
-            <a:solidFill>
-              <a:srgbClr val="D7E7E7"/>
-            </a:solidFill>
-            <a:prstDash val="solid"/>
-          </a:ln>
-        </p:spPr>
-      </p:sp>
-      <p:sp>
-        <p:nvSpPr>
-          <p:cNvPr id="5" name="Text 3"/>
-          <p:cNvSpPr txBox="1"/>
-          <p:nvPr/>
-        </p:nvSpPr>
-        <p:spPr>
-          <a:xfrm>
-            <a:off x="804672" y="2249424"/>
-            <a:ext cx="2083232" cy="457200"/>
-          </a:xfrm>
-          <a:prstGeom prst="rect">
-            <a:avLst/>
-          </a:prstGeom>
-          <a:noFill/>
-          <a:ln/>
-        </p:spPr>
-        <p:txBody>
-          <a:bodyPr wrap="square" lIns="0" tIns="0" rIns="0" bIns="0" rtlCol="0" anchor="t"/>
-          <a:lstStyle/>
-          <a:p>
-            <a:pPr indent="0" marL="0">
-              <a:buNone/>
-            </a:pPr>
-            <a:r>
-              <a:rPr lang="en-US" sz="1600" b="1" dirty="0">
-                <a:solidFill>
-                  <a:srgbClr val="16262E"/>
-                </a:solidFill>
-                <a:latin typeface="Arial" pitchFamily="34" charset="0"/>
-                <a:ea typeface="Arial" pitchFamily="34" charset="-122"/>
-                <a:cs typeface="Arial" pitchFamily="34" charset="-120"/>
-              </a:rPr>
-              <a:t>Base institucional</a:t>
-            </a:r>
-            <a:endParaRPr lang="en-US" sz="1600" dirty="0"/>
-          </a:p>
-        </p:txBody>
-      </p:sp>
-      <p:sp>
-        <p:nvSpPr>
-          <p:cNvPr id="6" name="Text 4"/>
-          <p:cNvSpPr txBox="1"/>
-          <p:nvPr/>
-        </p:nvSpPr>
-        <p:spPr>
-          <a:xfrm>
-            <a:off x="804672" y="2724912"/>
-            <a:ext cx="2083232" cy="1123442"/>
-          </a:xfrm>
-          <a:prstGeom prst="rect">
-            <a:avLst/>
-          </a:prstGeom>
-          <a:noFill/>
-          <a:ln/>
-        </p:spPr>
-        <p:txBody>
-          <a:bodyPr wrap="square" lIns="0" tIns="0" rIns="0" bIns="0" rtlCol="0" anchor="t"/>
-          <a:lstStyle/>
-          <a:p>
-            <a:pPr indent="0" marL="0">
-              <a:lnSpc>
-                <a:spcPct val="110000"/>
-              </a:lnSpc>
-              <a:buNone/>
-            </a:pPr>
-            <a:r>
-              <a:rPr lang="en-US" sz="1300" dirty="0">
-                <a:solidFill>
-                  <a:srgbClr val="16262E"/>
-                </a:solidFill>
-                <a:latin typeface="Calibri" pitchFamily="34" charset="0"/>
-                <a:ea typeface="Calibri" pitchFamily="34" charset="-122"/>
-                <a:cs typeface="Calibri" pitchFamily="34" charset="-120"/>
-              </a:rPr>
-              <a:t>Microsoft 365 Copilot.</a:t>
-            </a:r>
-            <a:endParaRPr lang="en-US" sz="1300" dirty="0"/>
-          </a:p>
-          <a:p>
-            <a:pPr indent="0" marL="0">
-              <a:lnSpc>
-                <a:spcPct val="110000"/>
-              </a:lnSpc>
-              <a:buNone/>
-            </a:pPr>
-            <a:endParaRPr lang="en-US" sz="1300" dirty="0"/>
-          </a:p>
-          <a:p>
-            <a:pPr indent="0" marL="0">
-              <a:lnSpc>
-                <a:spcPct val="110000"/>
-              </a:lnSpc>
-              <a:buNone/>
-            </a:pPr>
-            <a:r>
-              <a:rPr lang="en-US" sz="1300" dirty="0">
-                <a:solidFill>
-                  <a:srgbClr val="16262E"/>
-                </a:solidFill>
-                <a:latin typeface="Calibri" pitchFamily="34" charset="0"/>
-                <a:ea typeface="Calibri" pitchFamily="34" charset="-122"/>
-                <a:cs typeface="Calibri" pitchFamily="34" charset="-120"/>
-              </a:rPr>
-              <a:t>Es la única cubierta por contrato del Instituto y la única donde se puede trabajar con información amarilla.</a:t>
-            </a:r>
-            <a:endParaRPr lang="en-US" sz="1300" dirty="0"/>
-          </a:p>
-        </p:txBody>
-      </p:sp>
-      <p:sp>
-        <p:nvSpPr>
-          <p:cNvPr id="7" name="Shape 5"/>
-          <p:cNvSpPr/>
-          <p:nvPr/>
-        </p:nvSpPr>
-        <p:spPr>
-          <a:xfrm>
-            <a:off x="3399968" y="2011680"/>
-            <a:ext cx="2558720" cy="2074418"/>
-          </a:xfrm>
-          <a:prstGeom prst="roundRect">
-            <a:avLst>
-              <a:gd name="adj" fmla="val 3526"/>
-            </a:avLst>
-          </a:prstGeom>
-          <a:solidFill>
-            <a:srgbClr val="F2F5F6"/>
-          </a:solidFill>
-          <a:ln w="12700">
-            <a:solidFill>
-              <a:srgbClr val="F2F5F6"/>
-            </a:solidFill>
-            <a:prstDash val="solid"/>
-          </a:ln>
-        </p:spPr>
-      </p:sp>
-      <p:sp>
-        <p:nvSpPr>
-          <p:cNvPr id="8" name="Text 6"/>
-          <p:cNvSpPr txBox="1"/>
-          <p:nvPr/>
-        </p:nvSpPr>
-        <p:spPr>
-          <a:xfrm>
-            <a:off x="3637712" y="2249424"/>
-            <a:ext cx="2083232" cy="457200"/>
-          </a:xfrm>
-          <a:prstGeom prst="rect">
-            <a:avLst/>
-          </a:prstGeom>
-          <a:noFill/>
-          <a:ln/>
-        </p:spPr>
-        <p:txBody>
-          <a:bodyPr wrap="square" lIns="0" tIns="0" rIns="0" bIns="0" rtlCol="0" anchor="t"/>
-          <a:lstStyle/>
-          <a:p>
-            <a:pPr indent="0" marL="0">
-              <a:buNone/>
-            </a:pPr>
-            <a:r>
-              <a:rPr lang="en-US" sz="1600" b="1" dirty="0">
-                <a:solidFill>
-                  <a:srgbClr val="16262E"/>
-                </a:solidFill>
-                <a:latin typeface="Arial" pitchFamily="34" charset="0"/>
-                <a:ea typeface="Arial" pitchFamily="34" charset="-122"/>
-                <a:cs typeface="Arial" pitchFamily="34" charset="-120"/>
-              </a:rPr>
-              <a:t>Asistentes generales</a:t>
-            </a:r>
-            <a:endParaRPr lang="en-US" sz="1600" dirty="0"/>
-          </a:p>
-        </p:txBody>
-      </p:sp>
-      <p:sp>
-        <p:nvSpPr>
-          <p:cNvPr id="9" name="Text 7"/>
-          <p:cNvSpPr txBox="1"/>
-          <p:nvPr/>
-        </p:nvSpPr>
-        <p:spPr>
-          <a:xfrm>
-            <a:off x="3637712" y="2724912"/>
-            <a:ext cx="2083232" cy="1123442"/>
-          </a:xfrm>
-          <a:prstGeom prst="rect">
-            <a:avLst/>
-          </a:prstGeom>
-          <a:noFill/>
-          <a:ln/>
-        </p:spPr>
-        <p:txBody>
-          <a:bodyPr wrap="square" lIns="0" tIns="0" rIns="0" bIns="0" rtlCol="0" anchor="t"/>
-          <a:lstStyle/>
-          <a:p>
-            <a:pPr indent="0" marL="0">
-              <a:lnSpc>
-                <a:spcPct val="110000"/>
-              </a:lnSpc>
-              <a:buNone/>
-            </a:pPr>
-            <a:r>
-              <a:rPr lang="en-US" sz="1300" dirty="0">
-                <a:solidFill>
-                  <a:srgbClr val="16262E"/>
-                </a:solidFill>
-                <a:latin typeface="Calibri" pitchFamily="34" charset="0"/>
-                <a:ea typeface="Calibri" pitchFamily="34" charset="-122"/>
-                <a:cs typeface="Calibri" pitchFamily="34" charset="-120"/>
-              </a:rPr>
-              <a:t>ChatGPT, Claude y Gemini.</a:t>
-            </a:r>
-            <a:endParaRPr lang="en-US" sz="1300" dirty="0"/>
-          </a:p>
-          <a:p>
-            <a:pPr indent="0" marL="0">
-              <a:lnSpc>
-                <a:spcPct val="110000"/>
-              </a:lnSpc>
-              <a:buNone/>
-            </a:pPr>
-            <a:endParaRPr lang="en-US" sz="1300" dirty="0"/>
-          </a:p>
-          <a:p>
-            <a:pPr indent="0" marL="0">
-              <a:lnSpc>
-                <a:spcPct val="110000"/>
-              </a:lnSpc>
-              <a:buNone/>
-            </a:pPr>
-            <a:r>
-              <a:rPr lang="en-US" sz="1300" dirty="0">
-                <a:solidFill>
-                  <a:srgbClr val="16262E"/>
-                </a:solidFill>
-                <a:latin typeface="Calibri" pitchFamily="34" charset="0"/>
-                <a:ea typeface="Calibri" pitchFamily="34" charset="-122"/>
-                <a:cs typeface="Calibri" pitchFamily="34" charset="-120"/>
-              </a:rPr>
-              <a:t>Sirven para verificación cruzada y para tareas donde el volumen de texto supera lo que Copilot maneja cómodamente.</a:t>
-            </a:r>
-            <a:endParaRPr lang="en-US" sz="1300" dirty="0"/>
-          </a:p>
-        </p:txBody>
-      </p:sp>
-      <p:sp>
-        <p:nvSpPr>
-          <p:cNvPr id="10" name="Shape 8"/>
-          <p:cNvSpPr/>
-          <p:nvPr/>
-        </p:nvSpPr>
-        <p:spPr>
-          <a:xfrm>
-            <a:off x="6233008" y="2011680"/>
-            <a:ext cx="2558720" cy="2074418"/>
-          </a:xfrm>
-          <a:prstGeom prst="roundRect">
-            <a:avLst>
-              <a:gd name="adj" fmla="val 3526"/>
-            </a:avLst>
-          </a:prstGeom>
-          <a:solidFill>
-            <a:srgbClr val="F2F5F6"/>
-          </a:solidFill>
-          <a:ln w="12700">
-            <a:solidFill>
-              <a:srgbClr val="F2F5F6"/>
-            </a:solidFill>
-            <a:prstDash val="solid"/>
-          </a:ln>
-        </p:spPr>
-      </p:sp>
-      <p:sp>
-        <p:nvSpPr>
-          <p:cNvPr id="11" name="Text 9"/>
-          <p:cNvSpPr txBox="1"/>
-          <p:nvPr/>
-        </p:nvSpPr>
-        <p:spPr>
-          <a:xfrm>
-            <a:off x="6470752" y="2249424"/>
-            <a:ext cx="2083232" cy="457200"/>
-          </a:xfrm>
-          <a:prstGeom prst="rect">
-            <a:avLst/>
-          </a:prstGeom>
-          <a:noFill/>
-          <a:ln/>
-        </p:spPr>
-        <p:txBody>
-          <a:bodyPr wrap="square" lIns="0" tIns="0" rIns="0" bIns="0" rtlCol="0" anchor="t"/>
-          <a:lstStyle/>
-          <a:p>
-            <a:pPr indent="0" marL="0">
-              <a:buNone/>
-            </a:pPr>
-            <a:r>
-              <a:rPr lang="en-US" sz="1600" b="1" dirty="0">
-                <a:solidFill>
-                  <a:srgbClr val="16262E"/>
-                </a:solidFill>
-                <a:latin typeface="Arial" pitchFamily="34" charset="0"/>
-                <a:ea typeface="Arial" pitchFamily="34" charset="-122"/>
-                <a:cs typeface="Arial" pitchFamily="34" charset="-120"/>
-              </a:rPr>
-              <a:t>Búsqueda con fuentes</a:t>
-            </a:r>
-            <a:endParaRPr lang="en-US" sz="1600" dirty="0"/>
-          </a:p>
-        </p:txBody>
-      </p:sp>
-      <p:sp>
-        <p:nvSpPr>
-          <p:cNvPr id="12" name="Text 10"/>
-          <p:cNvSpPr txBox="1"/>
-          <p:nvPr/>
-        </p:nvSpPr>
-        <p:spPr>
-          <a:xfrm>
-            <a:off x="6470752" y="2724912"/>
-            <a:ext cx="2083232" cy="1123442"/>
-          </a:xfrm>
-          <a:prstGeom prst="rect">
-            <a:avLst/>
-          </a:prstGeom>
-          <a:noFill/>
-          <a:ln/>
-        </p:spPr>
-        <p:txBody>
-          <a:bodyPr wrap="square" lIns="0" tIns="0" rIns="0" bIns="0" rtlCol="0" anchor="t"/>
-          <a:lstStyle/>
-          <a:p>
-            <a:pPr indent="0" marL="0">
-              <a:lnSpc>
-                <a:spcPct val="110000"/>
-              </a:lnSpc>
-              <a:buNone/>
-            </a:pPr>
-            <a:r>
-              <a:rPr lang="en-US" sz="1300" dirty="0">
-                <a:solidFill>
-                  <a:srgbClr val="16262E"/>
-                </a:solidFill>
-                <a:latin typeface="Calibri" pitchFamily="34" charset="0"/>
-                <a:ea typeface="Calibri" pitchFamily="34" charset="-122"/>
-                <a:cs typeface="Calibri" pitchFamily="34" charset="-120"/>
-              </a:rPr>
-              <a:t>Perplexity y You.com.</a:t>
-            </a:r>
-            <a:endParaRPr lang="en-US" sz="1300" dirty="0"/>
-          </a:p>
-          <a:p>
-            <a:pPr indent="0" marL="0">
-              <a:lnSpc>
-                <a:spcPct val="110000"/>
-              </a:lnSpc>
-              <a:buNone/>
-            </a:pPr>
-            <a:endParaRPr lang="en-US" sz="1300" dirty="0"/>
-          </a:p>
-          <a:p>
-            <a:pPr indent="0" marL="0">
-              <a:lnSpc>
-                <a:spcPct val="110000"/>
-              </a:lnSpc>
-              <a:buNone/>
-            </a:pPr>
-            <a:r>
-              <a:rPr lang="en-US" sz="1300" dirty="0">
-                <a:solidFill>
-                  <a:srgbClr val="16262E"/>
-                </a:solidFill>
-                <a:latin typeface="Calibri" pitchFamily="34" charset="0"/>
-                <a:ea typeface="Calibri" pitchFamily="34" charset="-122"/>
-                <a:cs typeface="Calibri" pitchFamily="34" charset="-120"/>
-              </a:rPr>
-              <a:t>Devuelven respuestas con las ligas de donde salió cada afirmación, que es lo que un chat general no hace.</a:t>
-            </a:r>
-            <a:endParaRPr lang="en-US" sz="1300" dirty="0"/>
-          </a:p>
-        </p:txBody>
-      </p:sp>
-      <p:sp>
-        <p:nvSpPr>
-          <p:cNvPr id="13" name="Shape 11"/>
-          <p:cNvSpPr/>
-          <p:nvPr/>
-        </p:nvSpPr>
-        <p:spPr>
-          <a:xfrm>
-            <a:off x="9066047" y="2011680"/>
-            <a:ext cx="2558720" cy="2074418"/>
-          </a:xfrm>
-          <a:prstGeom prst="roundRect">
-            <a:avLst>
-              <a:gd name="adj" fmla="val 3526"/>
-            </a:avLst>
-          </a:prstGeom>
-          <a:solidFill>
-            <a:srgbClr val="F2F5F6"/>
-          </a:solidFill>
-          <a:ln w="12700">
-            <a:solidFill>
-              <a:srgbClr val="F2F5F6"/>
-            </a:solidFill>
-            <a:prstDash val="solid"/>
-          </a:ln>
-        </p:spPr>
-      </p:sp>
-      <p:sp>
-        <p:nvSpPr>
-          <p:cNvPr id="14" name="Text 12"/>
-          <p:cNvSpPr txBox="1"/>
-          <p:nvPr/>
-        </p:nvSpPr>
-        <p:spPr>
-          <a:xfrm>
-            <a:off x="9303791" y="2249424"/>
-            <a:ext cx="2083232" cy="457200"/>
-          </a:xfrm>
-          <a:prstGeom prst="rect">
-            <a:avLst/>
-          </a:prstGeom>
-          <a:noFill/>
-          <a:ln/>
-        </p:spPr>
-        <p:txBody>
-          <a:bodyPr wrap="square" lIns="0" tIns="0" rIns="0" bIns="0" rtlCol="0" anchor="t"/>
-          <a:lstStyle/>
-          <a:p>
-            <a:pPr indent="0" marL="0">
-              <a:buNone/>
-            </a:pPr>
-            <a:r>
-              <a:rPr lang="en-US" sz="1600" b="1" dirty="0">
-                <a:solidFill>
-                  <a:srgbClr val="16262E"/>
-                </a:solidFill>
-                <a:latin typeface="Arial" pitchFamily="34" charset="0"/>
-                <a:ea typeface="Arial" pitchFamily="34" charset="-122"/>
-                <a:cs typeface="Arial" pitchFamily="34" charset="-120"/>
-              </a:rPr>
-              <a:t>Literatura académica</a:t>
-            </a:r>
-            <a:endParaRPr lang="en-US" sz="1600" dirty="0"/>
-          </a:p>
-        </p:txBody>
-      </p:sp>
-      <p:sp>
-        <p:nvSpPr>
-          <p:cNvPr id="15" name="Text 13"/>
-          <p:cNvSpPr txBox="1"/>
-          <p:nvPr/>
-        </p:nvSpPr>
-        <p:spPr>
-          <a:xfrm>
-            <a:off x="9303791" y="2724912"/>
-            <a:ext cx="2083232" cy="1123442"/>
-          </a:xfrm>
-          <a:prstGeom prst="rect">
-            <a:avLst/>
-          </a:prstGeom>
-          <a:noFill/>
-          <a:ln/>
-        </p:spPr>
-        <p:txBody>
-          <a:bodyPr wrap="square" lIns="0" tIns="0" rIns="0" bIns="0" rtlCol="0" anchor="t"/>
-          <a:lstStyle/>
-          <a:p>
-            <a:pPr indent="0" marL="0">
-              <a:lnSpc>
-                <a:spcPct val="110000"/>
-              </a:lnSpc>
-              <a:buNone/>
-            </a:pPr>
-            <a:r>
-              <a:rPr lang="en-US" sz="1300" dirty="0">
-                <a:solidFill>
-                  <a:srgbClr val="16262E"/>
-                </a:solidFill>
-                <a:latin typeface="Calibri" pitchFamily="34" charset="0"/>
-                <a:ea typeface="Calibri" pitchFamily="34" charset="-122"/>
-                <a:cs typeface="Calibri" pitchFamily="34" charset="-120"/>
-              </a:rPr>
-              <a:t>Elicit y Consensus.</a:t>
-            </a:r>
-            <a:endParaRPr lang="en-US" sz="1300" dirty="0"/>
-          </a:p>
-          <a:p>
-            <a:pPr indent="0" marL="0">
-              <a:lnSpc>
-                <a:spcPct val="110000"/>
-              </a:lnSpc>
-              <a:buNone/>
-            </a:pPr>
-            <a:endParaRPr lang="en-US" sz="1300" dirty="0"/>
-          </a:p>
-          <a:p>
-            <a:pPr indent="0" marL="0">
-              <a:lnSpc>
-                <a:spcPct val="110000"/>
-              </a:lnSpc>
-              <a:buNone/>
-            </a:pPr>
-            <a:r>
-              <a:rPr lang="en-US" sz="1300" dirty="0">
-                <a:solidFill>
-                  <a:srgbClr val="16262E"/>
-                </a:solidFill>
-                <a:latin typeface="Calibri" pitchFamily="34" charset="0"/>
-                <a:ea typeface="Calibri" pitchFamily="34" charset="-122"/>
-                <a:cs typeface="Calibri" pitchFamily="34" charset="-120"/>
-              </a:rPr>
-              <a:t>Buscan sobre bases de artículos revisados por pares. Las referencias que devuelven existen y se pueden abrir.</a:t>
-            </a:r>
-            <a:endParaRPr lang="en-US" sz="1300" dirty="0"/>
-          </a:p>
-        </p:txBody>
-      </p:sp>
-      <p:sp>
-        <p:nvSpPr>
-          <p:cNvPr id="16" name="Text 14"/>
+      <p:graphicFrame>
+        <p:nvGraphicFramePr>
+          <p:cNvPr id="6" name="Table 0"/>
+          <p:cNvGraphicFramePr>
+            <a:graphicFrameLocks noGrp="1"/>
+          </p:cNvGraphicFramePr>
+          <p:nvPr>
+            <p:extLst>
+              <p:ext uri="{D42A27DB-BD31-4B8C-83A1-F6EECF244321}">
+                <p14:modId xmlns:p14="http://schemas.microsoft.com/office/powerpoint/2010/main" val="1579011935"/>
+              </p:ext>
+            </p:extLst>
+          </p:nvPr>
+        </p:nvGraphicFramePr>
+        <p:xfrm>
+          <a:off x="566928" y="1901952"/>
+          <a:ext cx="11057839" cy="914400"/>
+        </p:xfrm>
+        <a:graphic>
+          <a:graphicData uri="http://schemas.openxmlformats.org/drawingml/2006/table">
+            <a:tbl>
+              <a:tblPr/>
+              <a:tblGrid>
+                <a:gridCol w="2743200"/>
+                <a:gridCol w="3931920"/>
+                <a:gridCol w="4389120"/>
+              </a:tblGrid>
+              <a:tr h="457200">
+                <a:tc>
+                  <a:txBody>
+                    <a:bodyPr/>
+                    <a:lstStyle/>
+                    <a:p>
+                      <a:pPr algn="ctr" indent="0" marL="0">
+                        <a:buNone/>
+                      </a:pPr>
+                      <a:r>
+                        <a:rPr lang="en-US" sz="1300" b="1" dirty="0">
+                          <a:solidFill>
+                            <a:srgbClr val="FFFFFF"/>
+                          </a:solidFill>
+                          <a:latin typeface="Arial" pitchFamily="34" charset="0"/>
+                          <a:ea typeface="Arial" pitchFamily="34" charset="-122"/>
+                          <a:cs typeface="Arial" pitchFamily="34" charset="-120"/>
+                        </a:rPr>
+                        <a:t>Categoría</a:t>
+                      </a:r>
+                      <a:endParaRPr lang="en-US" sz="1300" dirty="0">
+                        <a:latin typeface="Arial" charset="0"/>
+                        <a:ea typeface="Arial" charset="0"/>
+                        <a:cs typeface="Arial" charset="0"/>
+                      </a:endParaRPr>
+                    </a:p>
+                  </a:txBody>
+                  <a:tcPr marL="76200" marR="76200" marT="76200" marB="76200" anchor="ctr">
+                    <a:lnL w="12700" cap="flat" cmpd="sng" algn="ctr">
+                      <a:solidFill>
+                        <a:srgbClr val="D5DDE0"/>
+                      </a:solidFill>
+                      <a:prstDash val="solid"/>
+                      <a:round/>
+                      <a:headEnd type="none" w="med" len="med"/>
+                      <a:tailEnd type="none" w="med" len="med"/>
+                    </a:lnL>
+                    <a:lnR w="12700" cap="flat" cmpd="sng" algn="ctr">
+                      <a:solidFill>
+                        <a:srgbClr val="D5DDE0"/>
+                      </a:solidFill>
+                      <a:prstDash val="solid"/>
+                      <a:round/>
+                      <a:headEnd type="none" w="med" len="med"/>
+                      <a:tailEnd type="none" w="med" len="med"/>
+                    </a:lnR>
+                    <a:lnT w="12700" cap="flat" cmpd="sng" algn="ctr">
+                      <a:solidFill>
+                        <a:srgbClr val="D5DDE0"/>
+                      </a:solidFill>
+                      <a:prstDash val="solid"/>
+                      <a:round/>
+                      <a:headEnd type="none" w="med" len="med"/>
+                      <a:tailEnd type="none" w="med" len="med"/>
+                    </a:lnT>
+                    <a:lnB w="12700" cap="flat" cmpd="sng" algn="ctr">
+                      <a:solidFill>
+                        <a:srgbClr val="D5DDE0"/>
+                      </a:solidFill>
+                      <a:prstDash val="solid"/>
+                      <a:round/>
+                      <a:headEnd type="none" w="med" len="med"/>
+                      <a:tailEnd type="none" w="med" len="med"/>
+                    </a:lnB>
+                    <a:solidFill>
+                      <a:srgbClr val="16262E"/>
+                    </a:solidFill>
+                  </a:tcPr>
+                </a:tc>
+                <a:tc>
+                  <a:txBody>
+                    <a:bodyPr/>
+                    <a:lstStyle/>
+                    <a:p>
+                      <a:pPr algn="ctr" indent="0" marL="0">
+                        <a:buNone/>
+                      </a:pPr>
+                      <a:r>
+                        <a:rPr lang="en-US" sz="1300" b="1" dirty="0">
+                          <a:solidFill>
+                            <a:srgbClr val="FFFFFF"/>
+                          </a:solidFill>
+                          <a:latin typeface="Arial" pitchFamily="34" charset="0"/>
+                          <a:ea typeface="Arial" pitchFamily="34" charset="-122"/>
+                          <a:cs typeface="Arial" pitchFamily="34" charset="-120"/>
+                        </a:rPr>
+                        <a:t>Abre desde la red</a:t>
+                      </a:r>
+                      <a:endParaRPr lang="en-US" sz="1300" dirty="0">
+                        <a:latin typeface="Arial" charset="0"/>
+                        <a:ea typeface="Arial" charset="0"/>
+                        <a:cs typeface="Arial" charset="0"/>
+                      </a:endParaRPr>
+                    </a:p>
+                  </a:txBody>
+                  <a:tcPr marL="76200" marR="76200" marT="76200" marB="76200" anchor="ctr">
+                    <a:lnL w="12700" cap="flat" cmpd="sng" algn="ctr">
+                      <a:solidFill>
+                        <a:srgbClr val="D5DDE0"/>
+                      </a:solidFill>
+                      <a:prstDash val="solid"/>
+                      <a:round/>
+                      <a:headEnd type="none" w="med" len="med"/>
+                      <a:tailEnd type="none" w="med" len="med"/>
+                    </a:lnL>
+                    <a:lnR w="12700" cap="flat" cmpd="sng" algn="ctr">
+                      <a:solidFill>
+                        <a:srgbClr val="D5DDE0"/>
+                      </a:solidFill>
+                      <a:prstDash val="solid"/>
+                      <a:round/>
+                      <a:headEnd type="none" w="med" len="med"/>
+                      <a:tailEnd type="none" w="med" len="med"/>
+                    </a:lnR>
+                    <a:lnT w="12700" cap="flat" cmpd="sng" algn="ctr">
+                      <a:solidFill>
+                        <a:srgbClr val="D5DDE0"/>
+                      </a:solidFill>
+                      <a:prstDash val="solid"/>
+                      <a:round/>
+                      <a:headEnd type="none" w="med" len="med"/>
+                      <a:tailEnd type="none" w="med" len="med"/>
+                    </a:lnT>
+                    <a:lnB w="12700" cap="flat" cmpd="sng" algn="ctr">
+                      <a:solidFill>
+                        <a:srgbClr val="D5DDE0"/>
+                      </a:solidFill>
+                      <a:prstDash val="solid"/>
+                      <a:round/>
+                      <a:headEnd type="none" w="med" len="med"/>
+                      <a:tailEnd type="none" w="med" len="med"/>
+                    </a:lnB>
+                    <a:solidFill>
+                      <a:srgbClr val="16262E"/>
+                    </a:solidFill>
+                  </a:tcPr>
+                </a:tc>
+                <a:tc>
+                  <a:txBody>
+                    <a:bodyPr/>
+                    <a:lstStyle/>
+                    <a:p>
+                      <a:pPr algn="ctr" indent="0" marL="0">
+                        <a:buNone/>
+                      </a:pPr>
+                      <a:r>
+                        <a:rPr lang="en-US" sz="1300" b="1" dirty="0">
+                          <a:solidFill>
+                            <a:srgbClr val="FFFFFF"/>
+                          </a:solidFill>
+                          <a:latin typeface="Arial" pitchFamily="34" charset="0"/>
+                          <a:ea typeface="Arial" pitchFamily="34" charset="-122"/>
+                          <a:cs typeface="Arial" pitchFamily="34" charset="-120"/>
+                        </a:rPr>
+                        <a:t>Dónde se usa en el curso</a:t>
+                      </a:r>
+                      <a:endParaRPr lang="en-US" sz="1300" dirty="0">
+                        <a:latin typeface="Arial" charset="0"/>
+                        <a:ea typeface="Arial" charset="0"/>
+                        <a:cs typeface="Arial" charset="0"/>
+                      </a:endParaRPr>
+                    </a:p>
+                  </a:txBody>
+                  <a:tcPr marL="76200" marR="76200" marT="76200" marB="76200" anchor="ctr">
+                    <a:lnL w="12700" cap="flat" cmpd="sng" algn="ctr">
+                      <a:solidFill>
+                        <a:srgbClr val="D5DDE0"/>
+                      </a:solidFill>
+                      <a:prstDash val="solid"/>
+                      <a:round/>
+                      <a:headEnd type="none" w="med" len="med"/>
+                      <a:tailEnd type="none" w="med" len="med"/>
+                    </a:lnL>
+                    <a:lnR w="12700" cap="flat" cmpd="sng" algn="ctr">
+                      <a:solidFill>
+                        <a:srgbClr val="D5DDE0"/>
+                      </a:solidFill>
+                      <a:prstDash val="solid"/>
+                      <a:round/>
+                      <a:headEnd type="none" w="med" len="med"/>
+                      <a:tailEnd type="none" w="med" len="med"/>
+                    </a:lnR>
+                    <a:lnT w="12700" cap="flat" cmpd="sng" algn="ctr">
+                      <a:solidFill>
+                        <a:srgbClr val="D5DDE0"/>
+                      </a:solidFill>
+                      <a:prstDash val="solid"/>
+                      <a:round/>
+                      <a:headEnd type="none" w="med" len="med"/>
+                      <a:tailEnd type="none" w="med" len="med"/>
+                    </a:lnT>
+                    <a:lnB w="12700" cap="flat" cmpd="sng" algn="ctr">
+                      <a:solidFill>
+                        <a:srgbClr val="D5DDE0"/>
+                      </a:solidFill>
+                      <a:prstDash val="solid"/>
+                      <a:round/>
+                      <a:headEnd type="none" w="med" len="med"/>
+                      <a:tailEnd type="none" w="med" len="med"/>
+                    </a:lnB>
+                    <a:solidFill>
+                      <a:srgbClr val="16262E"/>
+                    </a:solidFill>
+                  </a:tcPr>
+                </a:tc>
+              </a:tr>
+              <a:tr h="457200">
+                <a:tc>
+                  <a:txBody>
+                    <a:bodyPr/>
+                    <a:lstStyle/>
+                    <a:p>
+                      <a:pPr algn="l" indent="0" marL="0">
+                        <a:buNone/>
+                      </a:pPr>
+                      <a:r>
+                        <a:rPr lang="en-US" sz="1250" b="1" dirty="0">
+                          <a:solidFill>
+                            <a:srgbClr val="16262E"/>
+                          </a:solidFill>
+                          <a:latin typeface="Calibri" pitchFamily="34" charset="0"/>
+                          <a:ea typeface="Calibri" pitchFamily="34" charset="-122"/>
+                          <a:cs typeface="Calibri" pitchFamily="34" charset="-120"/>
+                        </a:rPr>
+                        <a:t>Asistentes generales</a:t>
+                      </a:r>
+                      <a:endParaRPr lang="en-US" sz="1250" dirty="0">
+                        <a:latin typeface="Calibri" charset="0"/>
+                        <a:ea typeface="Calibri" charset="0"/>
+                        <a:cs typeface="Calibri" charset="0"/>
+                      </a:endParaRPr>
+                    </a:p>
+                  </a:txBody>
+                  <a:tcPr marL="76200" marR="76200" marT="76200" marB="76200" anchor="ctr">
+                    <a:lnL w="12700" cap="flat" cmpd="sng" algn="ctr">
+                      <a:solidFill>
+                        <a:srgbClr val="D5DDE0"/>
+                      </a:solidFill>
+                      <a:prstDash val="solid"/>
+                      <a:round/>
+                      <a:headEnd type="none" w="med" len="med"/>
+                      <a:tailEnd type="none" w="med" len="med"/>
+                    </a:lnL>
+                    <a:lnR w="12700" cap="flat" cmpd="sng" algn="ctr">
+                      <a:solidFill>
+                        <a:srgbClr val="D5DDE0"/>
+                      </a:solidFill>
+                      <a:prstDash val="solid"/>
+                      <a:round/>
+                      <a:headEnd type="none" w="med" len="med"/>
+                      <a:tailEnd type="none" w="med" len="med"/>
+                    </a:lnR>
+                    <a:lnT w="12700" cap="flat" cmpd="sng" algn="ctr">
+                      <a:solidFill>
+                        <a:srgbClr val="D5DDE0"/>
+                      </a:solidFill>
+                      <a:prstDash val="solid"/>
+                      <a:round/>
+                      <a:headEnd type="none" w="med" len="med"/>
+                      <a:tailEnd type="none" w="med" len="med"/>
+                    </a:lnT>
+                    <a:lnB w="12700" cap="flat" cmpd="sng" algn="ctr">
+                      <a:solidFill>
+                        <a:srgbClr val="D5DDE0"/>
+                      </a:solidFill>
+                      <a:prstDash val="solid"/>
+                      <a:round/>
+                      <a:headEnd type="none" w="med" len="med"/>
+                      <a:tailEnd type="none" w="med" len="med"/>
+                    </a:lnB>
+                    <a:solidFill>
+                      <a:srgbClr val="F2F5F6"/>
+                    </a:solidFill>
+                  </a:tcPr>
+                </a:tc>
+                <a:tc>
+                  <a:txBody>
+                    <a:bodyPr/>
+                    <a:lstStyle/>
+                    <a:p>
+                      <a:pPr algn="l" indent="0" marL="0">
+                        <a:buNone/>
+                      </a:pPr>
+                      <a:r>
+                        <a:rPr lang="en-US" sz="1250" dirty="0">
+                          <a:solidFill>
+                            <a:srgbClr val="16262E"/>
+                          </a:solidFill>
+                          <a:latin typeface="Calibri" pitchFamily="34" charset="0"/>
+                          <a:ea typeface="Calibri" pitchFamily="34" charset="-122"/>
+                          <a:cs typeface="Calibri" pitchFamily="34" charset="-120"/>
+                        </a:rPr>
+                        <a:t>Copilot, ChatGPT, Claude, Gemini</a:t>
+                      </a:r>
+                      <a:endParaRPr lang="en-US" sz="1250" dirty="0">
+                        <a:latin typeface="Calibri" charset="0"/>
+                        <a:ea typeface="Calibri" charset="0"/>
+                        <a:cs typeface="Calibri" charset="0"/>
+                      </a:endParaRPr>
+                    </a:p>
+                  </a:txBody>
+                  <a:tcPr marL="76200" marR="76200" marT="76200" marB="76200" anchor="ctr">
+                    <a:lnL w="12700" cap="flat" cmpd="sng" algn="ctr">
+                      <a:solidFill>
+                        <a:srgbClr val="D5DDE0"/>
+                      </a:solidFill>
+                      <a:prstDash val="solid"/>
+                      <a:round/>
+                      <a:headEnd type="none" w="med" len="med"/>
+                      <a:tailEnd type="none" w="med" len="med"/>
+                    </a:lnL>
+                    <a:lnR w="12700" cap="flat" cmpd="sng" algn="ctr">
+                      <a:solidFill>
+                        <a:srgbClr val="D5DDE0"/>
+                      </a:solidFill>
+                      <a:prstDash val="solid"/>
+                      <a:round/>
+                      <a:headEnd type="none" w="med" len="med"/>
+                      <a:tailEnd type="none" w="med" len="med"/>
+                    </a:lnR>
+                    <a:lnT w="12700" cap="flat" cmpd="sng" algn="ctr">
+                      <a:solidFill>
+                        <a:srgbClr val="D5DDE0"/>
+                      </a:solidFill>
+                      <a:prstDash val="solid"/>
+                      <a:round/>
+                      <a:headEnd type="none" w="med" len="med"/>
+                      <a:tailEnd type="none" w="med" len="med"/>
+                    </a:lnT>
+                    <a:lnB w="12700" cap="flat" cmpd="sng" algn="ctr">
+                      <a:solidFill>
+                        <a:srgbClr val="D5DDE0"/>
+                      </a:solidFill>
+                      <a:prstDash val="solid"/>
+                      <a:round/>
+                      <a:headEnd type="none" w="med" len="med"/>
+                      <a:tailEnd type="none" w="med" len="med"/>
+                    </a:lnB>
+                    <a:solidFill>
+                      <a:srgbClr val="F2F5F6"/>
+                    </a:solidFill>
+                  </a:tcPr>
+                </a:tc>
+                <a:tc>
+                  <a:txBody>
+                    <a:bodyPr/>
+                    <a:lstStyle/>
+                    <a:p>
+                      <a:pPr algn="l" indent="0" marL="0">
+                        <a:buNone/>
+                      </a:pPr>
+                      <a:r>
+                        <a:rPr lang="en-US" sz="1250" dirty="0">
+                          <a:solidFill>
+                            <a:srgbClr val="16262E"/>
+                          </a:solidFill>
+                          <a:latin typeface="Calibri" pitchFamily="34" charset="0"/>
+                          <a:ea typeface="Calibri" pitchFamily="34" charset="-122"/>
+                          <a:cs typeface="Calibri" pitchFamily="34" charset="-120"/>
+                        </a:rPr>
+                        <a:t>Todo el curso. Hoy, para codificar.</a:t>
+                      </a:r>
+                      <a:endParaRPr lang="en-US" sz="1250" dirty="0">
+                        <a:latin typeface="Calibri" charset="0"/>
+                        <a:ea typeface="Calibri" charset="0"/>
+                        <a:cs typeface="Calibri" charset="0"/>
+                      </a:endParaRPr>
+                    </a:p>
+                  </a:txBody>
+                  <a:tcPr marL="76200" marR="76200" marT="76200" marB="76200" anchor="ctr">
+                    <a:lnL w="12700" cap="flat" cmpd="sng" algn="ctr">
+                      <a:solidFill>
+                        <a:srgbClr val="D5DDE0"/>
+                      </a:solidFill>
+                      <a:prstDash val="solid"/>
+                      <a:round/>
+                      <a:headEnd type="none" w="med" len="med"/>
+                      <a:tailEnd type="none" w="med" len="med"/>
+                    </a:lnL>
+                    <a:lnR w="12700" cap="flat" cmpd="sng" algn="ctr">
+                      <a:solidFill>
+                        <a:srgbClr val="D5DDE0"/>
+                      </a:solidFill>
+                      <a:prstDash val="solid"/>
+                      <a:round/>
+                      <a:headEnd type="none" w="med" len="med"/>
+                      <a:tailEnd type="none" w="med" len="med"/>
+                    </a:lnR>
+                    <a:lnT w="12700" cap="flat" cmpd="sng" algn="ctr">
+                      <a:solidFill>
+                        <a:srgbClr val="D5DDE0"/>
+                      </a:solidFill>
+                      <a:prstDash val="solid"/>
+                      <a:round/>
+                      <a:headEnd type="none" w="med" len="med"/>
+                      <a:tailEnd type="none" w="med" len="med"/>
+                    </a:lnT>
+                    <a:lnB w="12700" cap="flat" cmpd="sng" algn="ctr">
+                      <a:solidFill>
+                        <a:srgbClr val="D5DDE0"/>
+                      </a:solidFill>
+                      <a:prstDash val="solid"/>
+                      <a:round/>
+                      <a:headEnd type="none" w="med" len="med"/>
+                      <a:tailEnd type="none" w="med" len="med"/>
+                    </a:lnB>
+                    <a:solidFill>
+                      <a:srgbClr val="F2F5F6"/>
+                    </a:solidFill>
+                  </a:tcPr>
+                </a:tc>
+              </a:tr>
+              <a:tr h="457200">
+                <a:tc>
+                  <a:txBody>
+                    <a:bodyPr/>
+                    <a:lstStyle/>
+                    <a:p>
+                      <a:pPr algn="l" indent="0" marL="0">
+                        <a:buNone/>
+                      </a:pPr>
+                      <a:r>
+                        <a:rPr lang="en-US" sz="1250" b="1" dirty="0">
+                          <a:solidFill>
+                            <a:srgbClr val="16262E"/>
+                          </a:solidFill>
+                          <a:latin typeface="Calibri" pitchFamily="34" charset="0"/>
+                          <a:ea typeface="Calibri" pitchFamily="34" charset="-122"/>
+                          <a:cs typeface="Calibri" pitchFamily="34" charset="-120"/>
+                        </a:rPr>
+                        <a:t>Búsqueda e investigación</a:t>
+                      </a:r>
+                      <a:endParaRPr lang="en-US" sz="1250" dirty="0">
+                        <a:latin typeface="Calibri" charset="0"/>
+                        <a:ea typeface="Calibri" charset="0"/>
+                        <a:cs typeface="Calibri" charset="0"/>
+                      </a:endParaRPr>
+                    </a:p>
+                  </a:txBody>
+                  <a:tcPr marL="76200" marR="76200" marT="76200" marB="76200" anchor="ctr">
+                    <a:lnL w="12700" cap="flat" cmpd="sng" algn="ctr">
+                      <a:solidFill>
+                        <a:srgbClr val="D5DDE0"/>
+                      </a:solidFill>
+                      <a:prstDash val="solid"/>
+                      <a:round/>
+                      <a:headEnd type="none" w="med" len="med"/>
+                      <a:tailEnd type="none" w="med" len="med"/>
+                    </a:lnL>
+                    <a:lnR w="12700" cap="flat" cmpd="sng" algn="ctr">
+                      <a:solidFill>
+                        <a:srgbClr val="D5DDE0"/>
+                      </a:solidFill>
+                      <a:prstDash val="solid"/>
+                      <a:round/>
+                      <a:headEnd type="none" w="med" len="med"/>
+                      <a:tailEnd type="none" w="med" len="med"/>
+                    </a:lnR>
+                    <a:lnT w="12700" cap="flat" cmpd="sng" algn="ctr">
+                      <a:solidFill>
+                        <a:srgbClr val="D5DDE0"/>
+                      </a:solidFill>
+                      <a:prstDash val="solid"/>
+                      <a:round/>
+                      <a:headEnd type="none" w="med" len="med"/>
+                      <a:tailEnd type="none" w="med" len="med"/>
+                    </a:lnT>
+                    <a:lnB w="12700" cap="flat" cmpd="sng" algn="ctr">
+                      <a:solidFill>
+                        <a:srgbClr val="D5DDE0"/>
+                      </a:solidFill>
+                      <a:prstDash val="solid"/>
+                      <a:round/>
+                      <a:headEnd type="none" w="med" len="med"/>
+                      <a:tailEnd type="none" w="med" len="med"/>
+                    </a:lnB>
+                    <a:solidFill>
+                      <a:srgbClr val="FFFFFF"/>
+                    </a:solidFill>
+                  </a:tcPr>
+                </a:tc>
+                <a:tc>
+                  <a:txBody>
+                    <a:bodyPr/>
+                    <a:lstStyle/>
+                    <a:p>
+                      <a:pPr algn="l" indent="0" marL="0">
+                        <a:buNone/>
+                      </a:pPr>
+                      <a:r>
+                        <a:rPr lang="en-US" sz="1250" dirty="0">
+                          <a:solidFill>
+                            <a:srgbClr val="16262E"/>
+                          </a:solidFill>
+                          <a:latin typeface="Calibri" pitchFamily="34" charset="0"/>
+                          <a:ea typeface="Calibri" pitchFamily="34" charset="-122"/>
+                          <a:cs typeface="Calibri" pitchFamily="34" charset="-120"/>
+                        </a:rPr>
+                        <a:t>Perplexity, You.com</a:t>
+                      </a:r>
+                      <a:endParaRPr lang="en-US" sz="1250" dirty="0">
+                        <a:latin typeface="Calibri" charset="0"/>
+                        <a:ea typeface="Calibri" charset="0"/>
+                        <a:cs typeface="Calibri" charset="0"/>
+                      </a:endParaRPr>
+                    </a:p>
+                  </a:txBody>
+                  <a:tcPr marL="76200" marR="76200" marT="76200" marB="76200" anchor="ctr">
+                    <a:lnL w="12700" cap="flat" cmpd="sng" algn="ctr">
+                      <a:solidFill>
+                        <a:srgbClr val="D5DDE0"/>
+                      </a:solidFill>
+                      <a:prstDash val="solid"/>
+                      <a:round/>
+                      <a:headEnd type="none" w="med" len="med"/>
+                      <a:tailEnd type="none" w="med" len="med"/>
+                    </a:lnL>
+                    <a:lnR w="12700" cap="flat" cmpd="sng" algn="ctr">
+                      <a:solidFill>
+                        <a:srgbClr val="D5DDE0"/>
+                      </a:solidFill>
+                      <a:prstDash val="solid"/>
+                      <a:round/>
+                      <a:headEnd type="none" w="med" len="med"/>
+                      <a:tailEnd type="none" w="med" len="med"/>
+                    </a:lnR>
+                    <a:lnT w="12700" cap="flat" cmpd="sng" algn="ctr">
+                      <a:solidFill>
+                        <a:srgbClr val="D5DDE0"/>
+                      </a:solidFill>
+                      <a:prstDash val="solid"/>
+                      <a:round/>
+                      <a:headEnd type="none" w="med" len="med"/>
+                      <a:tailEnd type="none" w="med" len="med"/>
+                    </a:lnT>
+                    <a:lnB w="12700" cap="flat" cmpd="sng" algn="ctr">
+                      <a:solidFill>
+                        <a:srgbClr val="D5DDE0"/>
+                      </a:solidFill>
+                      <a:prstDash val="solid"/>
+                      <a:round/>
+                      <a:headEnd type="none" w="med" len="med"/>
+                      <a:tailEnd type="none" w="med" len="med"/>
+                    </a:lnB>
+                    <a:solidFill>
+                      <a:srgbClr val="FFFFFF"/>
+                    </a:solidFill>
+                  </a:tcPr>
+                </a:tc>
+                <a:tc>
+                  <a:txBody>
+                    <a:bodyPr/>
+                    <a:lstStyle/>
+                    <a:p>
+                      <a:pPr algn="l" indent="0" marL="0">
+                        <a:buNone/>
+                      </a:pPr>
+                      <a:r>
+                        <a:rPr lang="en-US" sz="1250" dirty="0">
+                          <a:solidFill>
+                            <a:srgbClr val="16262E"/>
+                          </a:solidFill>
+                          <a:latin typeface="Calibri" pitchFamily="34" charset="0"/>
+                          <a:ea typeface="Calibri" pitchFamily="34" charset="-122"/>
+                          <a:cs typeface="Calibri" pitchFamily="34" charset="-120"/>
+                        </a:rPr>
+                        <a:t>Hoy, para sustentar hallazgos con fuentes.</a:t>
+                      </a:r>
+                      <a:endParaRPr lang="en-US" sz="1250" dirty="0">
+                        <a:latin typeface="Calibri" charset="0"/>
+                        <a:ea typeface="Calibri" charset="0"/>
+                        <a:cs typeface="Calibri" charset="0"/>
+                      </a:endParaRPr>
+                    </a:p>
+                  </a:txBody>
+                  <a:tcPr marL="76200" marR="76200" marT="76200" marB="76200" anchor="ctr">
+                    <a:lnL w="12700" cap="flat" cmpd="sng" algn="ctr">
+                      <a:solidFill>
+                        <a:srgbClr val="D5DDE0"/>
+                      </a:solidFill>
+                      <a:prstDash val="solid"/>
+                      <a:round/>
+                      <a:headEnd type="none" w="med" len="med"/>
+                      <a:tailEnd type="none" w="med" len="med"/>
+                    </a:lnL>
+                    <a:lnR w="12700" cap="flat" cmpd="sng" algn="ctr">
+                      <a:solidFill>
+                        <a:srgbClr val="D5DDE0"/>
+                      </a:solidFill>
+                      <a:prstDash val="solid"/>
+                      <a:round/>
+                      <a:headEnd type="none" w="med" len="med"/>
+                      <a:tailEnd type="none" w="med" len="med"/>
+                    </a:lnR>
+                    <a:lnT w="12700" cap="flat" cmpd="sng" algn="ctr">
+                      <a:solidFill>
+                        <a:srgbClr val="D5DDE0"/>
+                      </a:solidFill>
+                      <a:prstDash val="solid"/>
+                      <a:round/>
+                      <a:headEnd type="none" w="med" len="med"/>
+                      <a:tailEnd type="none" w="med" len="med"/>
+                    </a:lnT>
+                    <a:lnB w="12700" cap="flat" cmpd="sng" algn="ctr">
+                      <a:solidFill>
+                        <a:srgbClr val="D5DDE0"/>
+                      </a:solidFill>
+                      <a:prstDash val="solid"/>
+                      <a:round/>
+                      <a:headEnd type="none" w="med" len="med"/>
+                      <a:tailEnd type="none" w="med" len="med"/>
+                    </a:lnB>
+                    <a:solidFill>
+                      <a:srgbClr val="FFFFFF"/>
+                    </a:solidFill>
+                  </a:tcPr>
+                </a:tc>
+              </a:tr>
+              <a:tr h="457200">
+                <a:tc>
+                  <a:txBody>
+                    <a:bodyPr/>
+                    <a:lstStyle/>
+                    <a:p>
+                      <a:pPr algn="l" indent="0" marL="0">
+                        <a:buNone/>
+                      </a:pPr>
+                      <a:r>
+                        <a:rPr lang="en-US" sz="1250" b="1" dirty="0">
+                          <a:solidFill>
+                            <a:srgbClr val="16262E"/>
+                          </a:solidFill>
+                          <a:latin typeface="Calibri" pitchFamily="34" charset="0"/>
+                          <a:ea typeface="Calibri" pitchFamily="34" charset="-122"/>
+                          <a:cs typeface="Calibri" pitchFamily="34" charset="-120"/>
+                        </a:rPr>
+                        <a:t>Investigación académica</a:t>
+                      </a:r>
+                      <a:endParaRPr lang="en-US" sz="1250" dirty="0">
+                        <a:latin typeface="Calibri" charset="0"/>
+                        <a:ea typeface="Calibri" charset="0"/>
+                        <a:cs typeface="Calibri" charset="0"/>
+                      </a:endParaRPr>
+                    </a:p>
+                  </a:txBody>
+                  <a:tcPr marL="76200" marR="76200" marT="76200" marB="76200" anchor="ctr">
+                    <a:lnL w="12700" cap="flat" cmpd="sng" algn="ctr">
+                      <a:solidFill>
+                        <a:srgbClr val="D5DDE0"/>
+                      </a:solidFill>
+                      <a:prstDash val="solid"/>
+                      <a:round/>
+                      <a:headEnd type="none" w="med" len="med"/>
+                      <a:tailEnd type="none" w="med" len="med"/>
+                    </a:lnL>
+                    <a:lnR w="12700" cap="flat" cmpd="sng" algn="ctr">
+                      <a:solidFill>
+                        <a:srgbClr val="D5DDE0"/>
+                      </a:solidFill>
+                      <a:prstDash val="solid"/>
+                      <a:round/>
+                      <a:headEnd type="none" w="med" len="med"/>
+                      <a:tailEnd type="none" w="med" len="med"/>
+                    </a:lnR>
+                    <a:lnT w="12700" cap="flat" cmpd="sng" algn="ctr">
+                      <a:solidFill>
+                        <a:srgbClr val="D5DDE0"/>
+                      </a:solidFill>
+                      <a:prstDash val="solid"/>
+                      <a:round/>
+                      <a:headEnd type="none" w="med" len="med"/>
+                      <a:tailEnd type="none" w="med" len="med"/>
+                    </a:lnT>
+                    <a:lnB w="12700" cap="flat" cmpd="sng" algn="ctr">
+                      <a:solidFill>
+                        <a:srgbClr val="D5DDE0"/>
+                      </a:solidFill>
+                      <a:prstDash val="solid"/>
+                      <a:round/>
+                      <a:headEnd type="none" w="med" len="med"/>
+                      <a:tailEnd type="none" w="med" len="med"/>
+                    </a:lnB>
+                    <a:solidFill>
+                      <a:srgbClr val="F2F5F6"/>
+                    </a:solidFill>
+                  </a:tcPr>
+                </a:tc>
+                <a:tc>
+                  <a:txBody>
+                    <a:bodyPr/>
+                    <a:lstStyle/>
+                    <a:p>
+                      <a:pPr algn="l" indent="0" marL="0">
+                        <a:buNone/>
+                      </a:pPr>
+                      <a:r>
+                        <a:rPr lang="en-US" sz="1250" dirty="0">
+                          <a:solidFill>
+                            <a:srgbClr val="16262E"/>
+                          </a:solidFill>
+                          <a:latin typeface="Calibri" pitchFamily="34" charset="0"/>
+                          <a:ea typeface="Calibri" pitchFamily="34" charset="-122"/>
+                          <a:cs typeface="Calibri" pitchFamily="34" charset="-120"/>
+                        </a:rPr>
+                        <a:t>Elicit, Consensus</a:t>
+                      </a:r>
+                      <a:endParaRPr lang="en-US" sz="1250" dirty="0">
+                        <a:latin typeface="Calibri" charset="0"/>
+                        <a:ea typeface="Calibri" charset="0"/>
+                        <a:cs typeface="Calibri" charset="0"/>
+                      </a:endParaRPr>
+                    </a:p>
+                  </a:txBody>
+                  <a:tcPr marL="76200" marR="76200" marT="76200" marB="76200" anchor="ctr">
+                    <a:lnL w="12700" cap="flat" cmpd="sng" algn="ctr">
+                      <a:solidFill>
+                        <a:srgbClr val="D5DDE0"/>
+                      </a:solidFill>
+                      <a:prstDash val="solid"/>
+                      <a:round/>
+                      <a:headEnd type="none" w="med" len="med"/>
+                      <a:tailEnd type="none" w="med" len="med"/>
+                    </a:lnL>
+                    <a:lnR w="12700" cap="flat" cmpd="sng" algn="ctr">
+                      <a:solidFill>
+                        <a:srgbClr val="D5DDE0"/>
+                      </a:solidFill>
+                      <a:prstDash val="solid"/>
+                      <a:round/>
+                      <a:headEnd type="none" w="med" len="med"/>
+                      <a:tailEnd type="none" w="med" len="med"/>
+                    </a:lnR>
+                    <a:lnT w="12700" cap="flat" cmpd="sng" algn="ctr">
+                      <a:solidFill>
+                        <a:srgbClr val="D5DDE0"/>
+                      </a:solidFill>
+                      <a:prstDash val="solid"/>
+                      <a:round/>
+                      <a:headEnd type="none" w="med" len="med"/>
+                      <a:tailEnd type="none" w="med" len="med"/>
+                    </a:lnT>
+                    <a:lnB w="12700" cap="flat" cmpd="sng" algn="ctr">
+                      <a:solidFill>
+                        <a:srgbClr val="D5DDE0"/>
+                      </a:solidFill>
+                      <a:prstDash val="solid"/>
+                      <a:round/>
+                      <a:headEnd type="none" w="med" len="med"/>
+                      <a:tailEnd type="none" w="med" len="med"/>
+                    </a:lnB>
+                    <a:solidFill>
+                      <a:srgbClr val="F2F5F6"/>
+                    </a:solidFill>
+                  </a:tcPr>
+                </a:tc>
+                <a:tc>
+                  <a:txBody>
+                    <a:bodyPr/>
+                    <a:lstStyle/>
+                    <a:p>
+                      <a:pPr algn="l" indent="0" marL="0">
+                        <a:buNone/>
+                      </a:pPr>
+                      <a:r>
+                        <a:rPr lang="en-US" sz="1250" dirty="0">
+                          <a:solidFill>
+                            <a:srgbClr val="16262E"/>
+                          </a:solidFill>
+                          <a:latin typeface="Calibri" pitchFamily="34" charset="0"/>
+                          <a:ea typeface="Calibri" pitchFamily="34" charset="-122"/>
+                          <a:cs typeface="Calibri" pitchFamily="34" charset="-120"/>
+                        </a:rPr>
+                        <a:t>Hoy, para buscar literatura de evaluación.</a:t>
+                      </a:r>
+                      <a:endParaRPr lang="en-US" sz="1250" dirty="0">
+                        <a:latin typeface="Calibri" charset="0"/>
+                        <a:ea typeface="Calibri" charset="0"/>
+                        <a:cs typeface="Calibri" charset="0"/>
+                      </a:endParaRPr>
+                    </a:p>
+                  </a:txBody>
+                  <a:tcPr marL="76200" marR="76200" marT="76200" marB="76200" anchor="ctr">
+                    <a:lnL w="12700" cap="flat" cmpd="sng" algn="ctr">
+                      <a:solidFill>
+                        <a:srgbClr val="D5DDE0"/>
+                      </a:solidFill>
+                      <a:prstDash val="solid"/>
+                      <a:round/>
+                      <a:headEnd type="none" w="med" len="med"/>
+                      <a:tailEnd type="none" w="med" len="med"/>
+                    </a:lnL>
+                    <a:lnR w="12700" cap="flat" cmpd="sng" algn="ctr">
+                      <a:solidFill>
+                        <a:srgbClr val="D5DDE0"/>
+                      </a:solidFill>
+                      <a:prstDash val="solid"/>
+                      <a:round/>
+                      <a:headEnd type="none" w="med" len="med"/>
+                      <a:tailEnd type="none" w="med" len="med"/>
+                    </a:lnR>
+                    <a:lnT w="12700" cap="flat" cmpd="sng" algn="ctr">
+                      <a:solidFill>
+                        <a:srgbClr val="D5DDE0"/>
+                      </a:solidFill>
+                      <a:prstDash val="solid"/>
+                      <a:round/>
+                      <a:headEnd type="none" w="med" len="med"/>
+                      <a:tailEnd type="none" w="med" len="med"/>
+                    </a:lnT>
+                    <a:lnB w="12700" cap="flat" cmpd="sng" algn="ctr">
+                      <a:solidFill>
+                        <a:srgbClr val="D5DDE0"/>
+                      </a:solidFill>
+                      <a:prstDash val="solid"/>
+                      <a:round/>
+                      <a:headEnd type="none" w="med" len="med"/>
+                      <a:tailEnd type="none" w="med" len="med"/>
+                    </a:lnB>
+                    <a:solidFill>
+                      <a:srgbClr val="F2F5F6"/>
+                    </a:solidFill>
+                  </a:tcPr>
+                </a:tc>
+              </a:tr>
+              <a:tr h="457200">
+                <a:tc>
+                  <a:txBody>
+                    <a:bodyPr/>
+                    <a:lstStyle/>
+                    <a:p>
+                      <a:pPr algn="l" indent="0" marL="0">
+                        <a:buNone/>
+                      </a:pPr>
+                      <a:r>
+                        <a:rPr lang="en-US" sz="1250" b="1" dirty="0">
+                          <a:solidFill>
+                            <a:srgbClr val="16262E"/>
+                          </a:solidFill>
+                          <a:latin typeface="Calibri" pitchFamily="34" charset="0"/>
+                          <a:ea typeface="Calibri" pitchFamily="34" charset="-122"/>
+                          <a:cs typeface="Calibri" pitchFamily="34" charset="-120"/>
+                        </a:rPr>
+                        <a:t>Productividad e investigación</a:t>
+                      </a:r>
+                      <a:endParaRPr lang="en-US" sz="1250" dirty="0">
+                        <a:latin typeface="Calibri" charset="0"/>
+                        <a:ea typeface="Calibri" charset="0"/>
+                        <a:cs typeface="Calibri" charset="0"/>
+                      </a:endParaRPr>
+                    </a:p>
+                  </a:txBody>
+                  <a:tcPr marL="76200" marR="76200" marT="76200" marB="76200" anchor="ctr">
+                    <a:lnL w="12700" cap="flat" cmpd="sng" algn="ctr">
+                      <a:solidFill>
+                        <a:srgbClr val="D5DDE0"/>
+                      </a:solidFill>
+                      <a:prstDash val="solid"/>
+                      <a:round/>
+                      <a:headEnd type="none" w="med" len="med"/>
+                      <a:tailEnd type="none" w="med" len="med"/>
+                    </a:lnL>
+                    <a:lnR w="12700" cap="flat" cmpd="sng" algn="ctr">
+                      <a:solidFill>
+                        <a:srgbClr val="D5DDE0"/>
+                      </a:solidFill>
+                      <a:prstDash val="solid"/>
+                      <a:round/>
+                      <a:headEnd type="none" w="med" len="med"/>
+                      <a:tailEnd type="none" w="med" len="med"/>
+                    </a:lnR>
+                    <a:lnT w="12700" cap="flat" cmpd="sng" algn="ctr">
+                      <a:solidFill>
+                        <a:srgbClr val="D5DDE0"/>
+                      </a:solidFill>
+                      <a:prstDash val="solid"/>
+                      <a:round/>
+                      <a:headEnd type="none" w="med" len="med"/>
+                      <a:tailEnd type="none" w="med" len="med"/>
+                    </a:lnT>
+                    <a:lnB w="12700" cap="flat" cmpd="sng" algn="ctr">
+                      <a:solidFill>
+                        <a:srgbClr val="D5DDE0"/>
+                      </a:solidFill>
+                      <a:prstDash val="solid"/>
+                      <a:round/>
+                      <a:headEnd type="none" w="med" len="med"/>
+                      <a:tailEnd type="none" w="med" len="med"/>
+                    </a:lnB>
+                    <a:solidFill>
+                      <a:srgbClr val="FFFFFF"/>
+                    </a:solidFill>
+                  </a:tcPr>
+                </a:tc>
+                <a:tc>
+                  <a:txBody>
+                    <a:bodyPr/>
+                    <a:lstStyle/>
+                    <a:p>
+                      <a:pPr algn="l" indent="0" marL="0">
+                        <a:buNone/>
+                      </a:pPr>
+                      <a:r>
+                        <a:rPr lang="en-US" sz="1250" dirty="0">
+                          <a:solidFill>
+                            <a:srgbClr val="16262E"/>
+                          </a:solidFill>
+                          <a:latin typeface="Calibri" pitchFamily="34" charset="0"/>
+                          <a:ea typeface="Calibri" pitchFamily="34" charset="-122"/>
+                          <a:cs typeface="Calibri" pitchFamily="34" charset="-120"/>
+                        </a:rPr>
+                        <a:t>NotebookLM, bloqueada</a:t>
+                      </a:r>
+                      <a:endParaRPr lang="en-US" sz="1250" dirty="0">
+                        <a:latin typeface="Calibri" charset="0"/>
+                        <a:ea typeface="Calibri" charset="0"/>
+                        <a:cs typeface="Calibri" charset="0"/>
+                      </a:endParaRPr>
+                    </a:p>
+                  </a:txBody>
+                  <a:tcPr marL="76200" marR="76200" marT="76200" marB="76200" anchor="ctr">
+                    <a:lnL w="12700" cap="flat" cmpd="sng" algn="ctr">
+                      <a:solidFill>
+                        <a:srgbClr val="D5DDE0"/>
+                      </a:solidFill>
+                      <a:prstDash val="solid"/>
+                      <a:round/>
+                      <a:headEnd type="none" w="med" len="med"/>
+                      <a:tailEnd type="none" w="med" len="med"/>
+                    </a:lnL>
+                    <a:lnR w="12700" cap="flat" cmpd="sng" algn="ctr">
+                      <a:solidFill>
+                        <a:srgbClr val="D5DDE0"/>
+                      </a:solidFill>
+                      <a:prstDash val="solid"/>
+                      <a:round/>
+                      <a:headEnd type="none" w="med" len="med"/>
+                      <a:tailEnd type="none" w="med" len="med"/>
+                    </a:lnR>
+                    <a:lnT w="12700" cap="flat" cmpd="sng" algn="ctr">
+                      <a:solidFill>
+                        <a:srgbClr val="D5DDE0"/>
+                      </a:solidFill>
+                      <a:prstDash val="solid"/>
+                      <a:round/>
+                      <a:headEnd type="none" w="med" len="med"/>
+                      <a:tailEnd type="none" w="med" len="med"/>
+                    </a:lnT>
+                    <a:lnB w="12700" cap="flat" cmpd="sng" algn="ctr">
+                      <a:solidFill>
+                        <a:srgbClr val="D5DDE0"/>
+                      </a:solidFill>
+                      <a:prstDash val="solid"/>
+                      <a:round/>
+                      <a:headEnd type="none" w="med" len="med"/>
+                      <a:tailEnd type="none" w="med" len="med"/>
+                    </a:lnB>
+                    <a:solidFill>
+                      <a:srgbClr val="FFFFFF"/>
+                    </a:solidFill>
+                  </a:tcPr>
+                </a:tc>
+                <a:tc>
+                  <a:txBody>
+                    <a:bodyPr/>
+                    <a:lstStyle/>
+                    <a:p>
+                      <a:pPr algn="l" indent="0" marL="0">
+                        <a:buNone/>
+                      </a:pPr>
+                      <a:r>
+                        <a:rPr lang="en-US" sz="1250" dirty="0">
+                          <a:solidFill>
+                            <a:srgbClr val="16262E"/>
+                          </a:solidFill>
+                          <a:latin typeface="Calibri" pitchFamily="34" charset="0"/>
+                          <a:ea typeface="Calibri" pitchFamily="34" charset="-122"/>
+                          <a:cs typeface="Calibri" pitchFamily="34" charset="-120"/>
+                        </a:rPr>
+                        <a:t>Hoy, en demostración.</a:t>
+                      </a:r>
+                      <a:endParaRPr lang="en-US" sz="1250" dirty="0">
+                        <a:latin typeface="Calibri" charset="0"/>
+                        <a:ea typeface="Calibri" charset="0"/>
+                        <a:cs typeface="Calibri" charset="0"/>
+                      </a:endParaRPr>
+                    </a:p>
+                  </a:txBody>
+                  <a:tcPr marL="76200" marR="76200" marT="76200" marB="76200" anchor="ctr">
+                    <a:lnL w="12700" cap="flat" cmpd="sng" algn="ctr">
+                      <a:solidFill>
+                        <a:srgbClr val="D5DDE0"/>
+                      </a:solidFill>
+                      <a:prstDash val="solid"/>
+                      <a:round/>
+                      <a:headEnd type="none" w="med" len="med"/>
+                      <a:tailEnd type="none" w="med" len="med"/>
+                    </a:lnL>
+                    <a:lnR w="12700" cap="flat" cmpd="sng" algn="ctr">
+                      <a:solidFill>
+                        <a:srgbClr val="D5DDE0"/>
+                      </a:solidFill>
+                      <a:prstDash val="solid"/>
+                      <a:round/>
+                      <a:headEnd type="none" w="med" len="med"/>
+                      <a:tailEnd type="none" w="med" len="med"/>
+                    </a:lnR>
+                    <a:lnT w="12700" cap="flat" cmpd="sng" algn="ctr">
+                      <a:solidFill>
+                        <a:srgbClr val="D5DDE0"/>
+                      </a:solidFill>
+                      <a:prstDash val="solid"/>
+                      <a:round/>
+                      <a:headEnd type="none" w="med" len="med"/>
+                      <a:tailEnd type="none" w="med" len="med"/>
+                    </a:lnT>
+                    <a:lnB w="12700" cap="flat" cmpd="sng" algn="ctr">
+                      <a:solidFill>
+                        <a:srgbClr val="D5DDE0"/>
+                      </a:solidFill>
+                      <a:prstDash val="solid"/>
+                      <a:round/>
+                      <a:headEnd type="none" w="med" len="med"/>
+                      <a:tailEnd type="none" w="med" len="med"/>
+                    </a:lnB>
+                    <a:solidFill>
+                      <a:srgbClr val="FFFFFF"/>
+                    </a:solidFill>
+                  </a:tcPr>
+                </a:tc>
+              </a:tr>
+              <a:tr h="457200">
+                <a:tc>
+                  <a:txBody>
+                    <a:bodyPr/>
+                    <a:lstStyle/>
+                    <a:p>
+                      <a:pPr algn="l" indent="0" marL="0">
+                        <a:buNone/>
+                      </a:pPr>
+                      <a:r>
+                        <a:rPr lang="en-US" sz="1250" b="1" dirty="0">
+                          <a:solidFill>
+                            <a:srgbClr val="16262E"/>
+                          </a:solidFill>
+                          <a:latin typeface="Calibri" pitchFamily="34" charset="0"/>
+                          <a:ea typeface="Calibri" pitchFamily="34" charset="-122"/>
+                          <a:cs typeface="Calibri" pitchFamily="34" charset="-120"/>
+                        </a:rPr>
+                        <a:t>Código</a:t>
+                      </a:r>
+                      <a:endParaRPr lang="en-US" sz="1250" dirty="0">
+                        <a:latin typeface="Calibri" charset="0"/>
+                        <a:ea typeface="Calibri" charset="0"/>
+                        <a:cs typeface="Calibri" charset="0"/>
+                      </a:endParaRPr>
+                    </a:p>
+                  </a:txBody>
+                  <a:tcPr marL="76200" marR="76200" marT="76200" marB="76200" anchor="ctr">
+                    <a:lnL w="12700" cap="flat" cmpd="sng" algn="ctr">
+                      <a:solidFill>
+                        <a:srgbClr val="D5DDE0"/>
+                      </a:solidFill>
+                      <a:prstDash val="solid"/>
+                      <a:round/>
+                      <a:headEnd type="none" w="med" len="med"/>
+                      <a:tailEnd type="none" w="med" len="med"/>
+                    </a:lnL>
+                    <a:lnR w="12700" cap="flat" cmpd="sng" algn="ctr">
+                      <a:solidFill>
+                        <a:srgbClr val="D5DDE0"/>
+                      </a:solidFill>
+                      <a:prstDash val="solid"/>
+                      <a:round/>
+                      <a:headEnd type="none" w="med" len="med"/>
+                      <a:tailEnd type="none" w="med" len="med"/>
+                    </a:lnR>
+                    <a:lnT w="12700" cap="flat" cmpd="sng" algn="ctr">
+                      <a:solidFill>
+                        <a:srgbClr val="D5DDE0"/>
+                      </a:solidFill>
+                      <a:prstDash val="solid"/>
+                      <a:round/>
+                      <a:headEnd type="none" w="med" len="med"/>
+                      <a:tailEnd type="none" w="med" len="med"/>
+                    </a:lnT>
+                    <a:lnB w="12700" cap="flat" cmpd="sng" algn="ctr">
+                      <a:solidFill>
+                        <a:srgbClr val="D5DDE0"/>
+                      </a:solidFill>
+                      <a:prstDash val="solid"/>
+                      <a:round/>
+                      <a:headEnd type="none" w="med" len="med"/>
+                      <a:tailEnd type="none" w="med" len="med"/>
+                    </a:lnB>
+                    <a:solidFill>
+                      <a:srgbClr val="F2F5F6"/>
+                    </a:solidFill>
+                  </a:tcPr>
+                </a:tc>
+                <a:tc>
+                  <a:txBody>
+                    <a:bodyPr/>
+                    <a:lstStyle/>
+                    <a:p>
+                      <a:pPr algn="l" indent="0" marL="0">
+                        <a:buNone/>
+                      </a:pPr>
+                      <a:r>
+                        <a:rPr lang="en-US" sz="1250" dirty="0">
+                          <a:solidFill>
+                            <a:srgbClr val="16262E"/>
+                          </a:solidFill>
+                          <a:latin typeface="Calibri" pitchFamily="34" charset="0"/>
+                          <a:ea typeface="Calibri" pitchFamily="34" charset="-122"/>
+                          <a:cs typeface="Calibri" pitchFamily="34" charset="-120"/>
+                        </a:rPr>
+                        <a:t>Colab, Replit, GitHub Copilot, v0, Bolt</a:t>
+                      </a:r>
+                      <a:endParaRPr lang="en-US" sz="1250" dirty="0">
+                        <a:latin typeface="Calibri" charset="0"/>
+                        <a:ea typeface="Calibri" charset="0"/>
+                        <a:cs typeface="Calibri" charset="0"/>
+                      </a:endParaRPr>
+                    </a:p>
+                  </a:txBody>
+                  <a:tcPr marL="76200" marR="76200" marT="76200" marB="76200" anchor="ctr">
+                    <a:lnL w="12700" cap="flat" cmpd="sng" algn="ctr">
+                      <a:solidFill>
+                        <a:srgbClr val="D5DDE0"/>
+                      </a:solidFill>
+                      <a:prstDash val="solid"/>
+                      <a:round/>
+                      <a:headEnd type="none" w="med" len="med"/>
+                      <a:tailEnd type="none" w="med" len="med"/>
+                    </a:lnL>
+                    <a:lnR w="12700" cap="flat" cmpd="sng" algn="ctr">
+                      <a:solidFill>
+                        <a:srgbClr val="D5DDE0"/>
+                      </a:solidFill>
+                      <a:prstDash val="solid"/>
+                      <a:round/>
+                      <a:headEnd type="none" w="med" len="med"/>
+                      <a:tailEnd type="none" w="med" len="med"/>
+                    </a:lnR>
+                    <a:lnT w="12700" cap="flat" cmpd="sng" algn="ctr">
+                      <a:solidFill>
+                        <a:srgbClr val="D5DDE0"/>
+                      </a:solidFill>
+                      <a:prstDash val="solid"/>
+                      <a:round/>
+                      <a:headEnd type="none" w="med" len="med"/>
+                      <a:tailEnd type="none" w="med" len="med"/>
+                    </a:lnT>
+                    <a:lnB w="12700" cap="flat" cmpd="sng" algn="ctr">
+                      <a:solidFill>
+                        <a:srgbClr val="D5DDE0"/>
+                      </a:solidFill>
+                      <a:prstDash val="solid"/>
+                      <a:round/>
+                      <a:headEnd type="none" w="med" len="med"/>
+                      <a:tailEnd type="none" w="med" len="med"/>
+                    </a:lnB>
+                    <a:solidFill>
+                      <a:srgbClr val="F2F5F6"/>
+                    </a:solidFill>
+                  </a:tcPr>
+                </a:tc>
+                <a:tc>
+                  <a:txBody>
+                    <a:bodyPr/>
+                    <a:lstStyle/>
+                    <a:p>
+                      <a:pPr algn="l" indent="0" marL="0">
+                        <a:buNone/>
+                      </a:pPr>
+                      <a:r>
+                        <a:rPr lang="en-US" sz="1250" dirty="0">
+                          <a:solidFill>
+                            <a:srgbClr val="16262E"/>
+                          </a:solidFill>
+                          <a:latin typeface="Calibri" pitchFamily="34" charset="0"/>
+                          <a:ea typeface="Calibri" pitchFamily="34" charset="-122"/>
+                          <a:cs typeface="Calibri" pitchFamily="34" charset="-120"/>
+                        </a:rPr>
+                        <a:t>Módulos III y IV.</a:t>
+                      </a:r>
+                      <a:endParaRPr lang="en-US" sz="1250" dirty="0">
+                        <a:latin typeface="Calibri" charset="0"/>
+                        <a:ea typeface="Calibri" charset="0"/>
+                        <a:cs typeface="Calibri" charset="0"/>
+                      </a:endParaRPr>
+                    </a:p>
+                  </a:txBody>
+                  <a:tcPr marL="76200" marR="76200" marT="76200" marB="76200" anchor="ctr">
+                    <a:lnL w="12700" cap="flat" cmpd="sng" algn="ctr">
+                      <a:solidFill>
+                        <a:srgbClr val="D5DDE0"/>
+                      </a:solidFill>
+                      <a:prstDash val="solid"/>
+                      <a:round/>
+                      <a:headEnd type="none" w="med" len="med"/>
+                      <a:tailEnd type="none" w="med" len="med"/>
+                    </a:lnL>
+                    <a:lnR w="12700" cap="flat" cmpd="sng" algn="ctr">
+                      <a:solidFill>
+                        <a:srgbClr val="D5DDE0"/>
+                      </a:solidFill>
+                      <a:prstDash val="solid"/>
+                      <a:round/>
+                      <a:headEnd type="none" w="med" len="med"/>
+                      <a:tailEnd type="none" w="med" len="med"/>
+                    </a:lnR>
+                    <a:lnT w="12700" cap="flat" cmpd="sng" algn="ctr">
+                      <a:solidFill>
+                        <a:srgbClr val="D5DDE0"/>
+                      </a:solidFill>
+                      <a:prstDash val="solid"/>
+                      <a:round/>
+                      <a:headEnd type="none" w="med" len="med"/>
+                      <a:tailEnd type="none" w="med" len="med"/>
+                    </a:lnT>
+                    <a:lnB w="12700" cap="flat" cmpd="sng" algn="ctr">
+                      <a:solidFill>
+                        <a:srgbClr val="D5DDE0"/>
+                      </a:solidFill>
+                      <a:prstDash val="solid"/>
+                      <a:round/>
+                      <a:headEnd type="none" w="med" len="med"/>
+                      <a:tailEnd type="none" w="med" len="med"/>
+                    </a:lnB>
+                    <a:solidFill>
+                      <a:srgbClr val="F2F5F6"/>
+                    </a:solidFill>
+                  </a:tcPr>
+                </a:tc>
+              </a:tr>
+              <a:tr h="457200">
+                <a:tc>
+                  <a:txBody>
+                    <a:bodyPr/>
+                    <a:lstStyle/>
+                    <a:p>
+                      <a:pPr algn="l" indent="0" marL="0">
+                        <a:buNone/>
+                      </a:pPr>
+                      <a:r>
+                        <a:rPr lang="en-US" sz="1250" b="1" dirty="0">
+                          <a:solidFill>
+                            <a:srgbClr val="16262E"/>
+                          </a:solidFill>
+                          <a:latin typeface="Calibri" pitchFamily="34" charset="0"/>
+                          <a:ea typeface="Calibri" pitchFamily="34" charset="-122"/>
+                          <a:cs typeface="Calibri" pitchFamily="34" charset="-120"/>
+                        </a:rPr>
+                        <a:t>Imagen, presentaciones y video</a:t>
+                      </a:r>
+                      <a:endParaRPr lang="en-US" sz="1250" dirty="0">
+                        <a:latin typeface="Calibri" charset="0"/>
+                        <a:ea typeface="Calibri" charset="0"/>
+                        <a:cs typeface="Calibri" charset="0"/>
+                      </a:endParaRPr>
+                    </a:p>
+                  </a:txBody>
+                  <a:tcPr marL="76200" marR="76200" marT="76200" marB="76200" anchor="ctr">
+                    <a:lnL w="12700" cap="flat" cmpd="sng" algn="ctr">
+                      <a:solidFill>
+                        <a:srgbClr val="D5DDE0"/>
+                      </a:solidFill>
+                      <a:prstDash val="solid"/>
+                      <a:round/>
+                      <a:headEnd type="none" w="med" len="med"/>
+                      <a:tailEnd type="none" w="med" len="med"/>
+                    </a:lnL>
+                    <a:lnR w="12700" cap="flat" cmpd="sng" algn="ctr">
+                      <a:solidFill>
+                        <a:srgbClr val="D5DDE0"/>
+                      </a:solidFill>
+                      <a:prstDash val="solid"/>
+                      <a:round/>
+                      <a:headEnd type="none" w="med" len="med"/>
+                      <a:tailEnd type="none" w="med" len="med"/>
+                    </a:lnR>
+                    <a:lnT w="12700" cap="flat" cmpd="sng" algn="ctr">
+                      <a:solidFill>
+                        <a:srgbClr val="D5DDE0"/>
+                      </a:solidFill>
+                      <a:prstDash val="solid"/>
+                      <a:round/>
+                      <a:headEnd type="none" w="med" len="med"/>
+                      <a:tailEnd type="none" w="med" len="med"/>
+                    </a:lnT>
+                    <a:lnB w="12700" cap="flat" cmpd="sng" algn="ctr">
+                      <a:solidFill>
+                        <a:srgbClr val="D5DDE0"/>
+                      </a:solidFill>
+                      <a:prstDash val="solid"/>
+                      <a:round/>
+                      <a:headEnd type="none" w="med" len="med"/>
+                      <a:tailEnd type="none" w="med" len="med"/>
+                    </a:lnB>
+                    <a:solidFill>
+                      <a:srgbClr val="FFFFFF"/>
+                    </a:solidFill>
+                  </a:tcPr>
+                </a:tc>
+                <a:tc>
+                  <a:txBody>
+                    <a:bodyPr/>
+                    <a:lstStyle/>
+                    <a:p>
+                      <a:pPr algn="l" indent="0" marL="0">
+                        <a:buNone/>
+                      </a:pPr>
+                      <a:r>
+                        <a:rPr lang="en-US" sz="1250" dirty="0">
+                          <a:solidFill>
+                            <a:srgbClr val="16262E"/>
+                          </a:solidFill>
+                          <a:latin typeface="Calibri" pitchFamily="34" charset="0"/>
+                          <a:ea typeface="Calibri" pitchFamily="34" charset="-122"/>
+                          <a:cs typeface="Calibri" pitchFamily="34" charset="-120"/>
+                        </a:rPr>
+                        <a:t>Firefly y Luma abren. Gamma no.</a:t>
+                      </a:r>
+                      <a:endParaRPr lang="en-US" sz="1250" dirty="0">
+                        <a:latin typeface="Calibri" charset="0"/>
+                        <a:ea typeface="Calibri" charset="0"/>
+                        <a:cs typeface="Calibri" charset="0"/>
+                      </a:endParaRPr>
+                    </a:p>
+                  </a:txBody>
+                  <a:tcPr marL="76200" marR="76200" marT="76200" marB="76200" anchor="ctr">
+                    <a:lnL w="12700" cap="flat" cmpd="sng" algn="ctr">
+                      <a:solidFill>
+                        <a:srgbClr val="D5DDE0"/>
+                      </a:solidFill>
+                      <a:prstDash val="solid"/>
+                      <a:round/>
+                      <a:headEnd type="none" w="med" len="med"/>
+                      <a:tailEnd type="none" w="med" len="med"/>
+                    </a:lnL>
+                    <a:lnR w="12700" cap="flat" cmpd="sng" algn="ctr">
+                      <a:solidFill>
+                        <a:srgbClr val="D5DDE0"/>
+                      </a:solidFill>
+                      <a:prstDash val="solid"/>
+                      <a:round/>
+                      <a:headEnd type="none" w="med" len="med"/>
+                      <a:tailEnd type="none" w="med" len="med"/>
+                    </a:lnR>
+                    <a:lnT w="12700" cap="flat" cmpd="sng" algn="ctr">
+                      <a:solidFill>
+                        <a:srgbClr val="D5DDE0"/>
+                      </a:solidFill>
+                      <a:prstDash val="solid"/>
+                      <a:round/>
+                      <a:headEnd type="none" w="med" len="med"/>
+                      <a:tailEnd type="none" w="med" len="med"/>
+                    </a:lnT>
+                    <a:lnB w="12700" cap="flat" cmpd="sng" algn="ctr">
+                      <a:solidFill>
+                        <a:srgbClr val="D5DDE0"/>
+                      </a:solidFill>
+                      <a:prstDash val="solid"/>
+                      <a:round/>
+                      <a:headEnd type="none" w="med" len="med"/>
+                      <a:tailEnd type="none" w="med" len="med"/>
+                    </a:lnB>
+                    <a:solidFill>
+                      <a:srgbClr val="FFFFFF"/>
+                    </a:solidFill>
+                  </a:tcPr>
+                </a:tc>
+                <a:tc>
+                  <a:txBody>
+                    <a:bodyPr/>
+                    <a:lstStyle/>
+                    <a:p>
+                      <a:pPr algn="l" indent="0" marL="0">
+                        <a:buNone/>
+                      </a:pPr>
+                      <a:r>
+                        <a:rPr lang="en-US" sz="1250" dirty="0">
+                          <a:solidFill>
+                            <a:srgbClr val="16262E"/>
+                          </a:solidFill>
+                          <a:latin typeface="Calibri" pitchFamily="34" charset="0"/>
+                          <a:ea typeface="Calibri" pitchFamily="34" charset="-122"/>
+                          <a:cs typeface="Calibri" pitchFamily="34" charset="-120"/>
+                        </a:rPr>
+                        <a:t>Módulo IV.</a:t>
+                      </a:r>
+                      <a:endParaRPr lang="en-US" sz="1250" dirty="0">
+                        <a:latin typeface="Calibri" charset="0"/>
+                        <a:ea typeface="Calibri" charset="0"/>
+                        <a:cs typeface="Calibri" charset="0"/>
+                      </a:endParaRPr>
+                    </a:p>
+                  </a:txBody>
+                  <a:tcPr marL="76200" marR="76200" marT="76200" marB="76200" anchor="ctr">
+                    <a:lnL w="12700" cap="flat" cmpd="sng" algn="ctr">
+                      <a:solidFill>
+                        <a:srgbClr val="D5DDE0"/>
+                      </a:solidFill>
+                      <a:prstDash val="solid"/>
+                      <a:round/>
+                      <a:headEnd type="none" w="med" len="med"/>
+                      <a:tailEnd type="none" w="med" len="med"/>
+                    </a:lnL>
+                    <a:lnR w="12700" cap="flat" cmpd="sng" algn="ctr">
+                      <a:solidFill>
+                        <a:srgbClr val="D5DDE0"/>
+                      </a:solidFill>
+                      <a:prstDash val="solid"/>
+                      <a:round/>
+                      <a:headEnd type="none" w="med" len="med"/>
+                      <a:tailEnd type="none" w="med" len="med"/>
+                    </a:lnR>
+                    <a:lnT w="12700" cap="flat" cmpd="sng" algn="ctr">
+                      <a:solidFill>
+                        <a:srgbClr val="D5DDE0"/>
+                      </a:solidFill>
+                      <a:prstDash val="solid"/>
+                      <a:round/>
+                      <a:headEnd type="none" w="med" len="med"/>
+                      <a:tailEnd type="none" w="med" len="med"/>
+                    </a:lnT>
+                    <a:lnB w="12700" cap="flat" cmpd="sng" algn="ctr">
+                      <a:solidFill>
+                        <a:srgbClr val="D5DDE0"/>
+                      </a:solidFill>
+                      <a:prstDash val="solid"/>
+                      <a:round/>
+                      <a:headEnd type="none" w="med" len="med"/>
+                      <a:tailEnd type="none" w="med" len="med"/>
+                    </a:lnB>
+                    <a:solidFill>
+                      <a:srgbClr val="FFFFFF"/>
+                    </a:solidFill>
+                  </a:tcPr>
+                </a:tc>
+              </a:tr>
+            </a:tbl>
+          </a:graphicData>
+        </a:graphic>
+      </p:graphicFrame>
+      <p:sp>
+        <p:nvSpPr>
+          <p:cNvPr id="5" name="Text 2"/>
           <p:cNvSpPr txBox="1"/>
           <p:nvPr/>
         </p:nvSpPr>
@@ -6939,7 +10458,7 @@
                 <a:ea typeface="Calibri" pitchFamily="34" charset="-122"/>
                 <a:cs typeface="Calibri" pitchFamily="34" charset="-120"/>
               </a:rPr>
-              <a:t>Todas operan con plan gratuito, sin suscripción institucional. Eso las deja en nivel verde del semáforo: solo información pública.</a:t>
+              <a:t>De las 31 herramientas de la lista del Instituto, el curso usa 15 en ejercicio y cubre 4 más por demostración.</a:t>
             </a:r>
             <a:endParaRPr lang="en-US" sz="1000" dirty="0"/>
           </a:p>
@@ -6953,9 +10472,9 @@
 </p:sld>
 </file>
 
-<file path=ppt/slides/slide5.xml><?xml version="1.0" encoding="utf-8"?>
+<file path=ppt/slides/slide6.xml><?xml version="1.0" encoding="utf-8"?>
 <p:sld xmlns:a="http://schemas.openxmlformats.org/drawingml/2006/main" xmlns:r="http://schemas.openxmlformats.org/officeDocument/2006/relationships" xmlns:p="http://schemas.openxmlformats.org/presentationml/2006/main">
-  <p:cSld name="Slide 5">
+  <p:cSld name="Slide 6">
     <p:bg>
       <p:bgPr>
         <a:solidFill>
@@ -6985,155 +10504,11 @@
         </p:nvSpPr>
         <p:spPr>
           <a:xfrm>
-            <a:off x="566928" y="2331720"/>
-            <a:ext cx="1371600" cy="1371600"/>
+            <a:off x="10058400" y="-1463040"/>
+            <a:ext cx="4023360" cy="4023360"/>
           </a:xfrm>
           <a:prstGeom prst="ellipse">
             <a:avLst/>
-          </a:prstGeom>
-          <a:solidFill>
-            <a:srgbClr val="C85A28"/>
-          </a:solidFill>
-          <a:ln w="12700">
-            <a:solidFill>
-              <a:srgbClr val="C85A28"/>
-            </a:solidFill>
-            <a:prstDash val="solid"/>
-          </a:ln>
-        </p:spPr>
-      </p:sp>
-      <p:sp>
-        <p:nvSpPr>
-          <p:cNvPr id="3" name="Text 1"/>
-          <p:cNvSpPr txBox="1"/>
-          <p:nvPr/>
-        </p:nvSpPr>
-        <p:spPr>
-          <a:xfrm>
-            <a:off x="566928" y="2331720"/>
-            <a:ext cx="1371600" cy="1371600"/>
-          </a:xfrm>
-          <a:prstGeom prst="rect">
-            <a:avLst/>
-          </a:prstGeom>
-          <a:noFill/>
-          <a:ln/>
-        </p:spPr>
-        <p:txBody>
-          <a:bodyPr wrap="square" lIns="0" tIns="0" rIns="0" bIns="0" rtlCol="0" anchor="ctr"/>
-          <a:lstStyle/>
-          <a:p>
-            <a:pPr algn="ctr" indent="0" marL="0">
-              <a:buNone/>
-            </a:pPr>
-            <a:r>
-              <a:rPr lang="en-US" sz="4400" b="1" dirty="0">
-                <a:solidFill>
-                  <a:srgbClr val="FFFFFF"/>
-                </a:solidFill>
-                <a:latin typeface="Arial" pitchFamily="34" charset="0"/>
-                <a:ea typeface="Arial" pitchFamily="34" charset="-122"/>
-                <a:cs typeface="Arial" pitchFamily="34" charset="-120"/>
-              </a:rPr>
-              <a:t>1</a:t>
-            </a:r>
-            <a:endParaRPr lang="en-US" sz="4400" dirty="0"/>
-          </a:p>
-        </p:txBody>
-      </p:sp>
-      <p:sp>
-        <p:nvSpPr>
-          <p:cNvPr id="4" name="Text 2"/>
-          <p:cNvSpPr txBox="1"/>
-          <p:nvPr/>
-        </p:nvSpPr>
-        <p:spPr>
-          <a:xfrm>
-            <a:off x="2487168" y="2331720"/>
-            <a:ext cx="8778240" cy="365760"/>
-          </a:xfrm>
-          <a:prstGeom prst="rect">
-            <a:avLst/>
-          </a:prstGeom>
-          <a:noFill/>
-          <a:ln/>
-        </p:spPr>
-        <p:txBody>
-          <a:bodyPr wrap="square" lIns="0" tIns="0" rIns="0" bIns="0" rtlCol="0" anchor="ctr"/>
-          <a:lstStyle/>
-          <a:p>
-            <a:pPr indent="0" marL="0">
-              <a:buNone/>
-            </a:pPr>
-            <a:r>
-              <a:rPr lang="en-US" sz="1400" b="1" spc="200" kern="0" dirty="0">
-                <a:solidFill>
-                  <a:srgbClr val="D7E7E7"/>
-                </a:solidFill>
-                <a:latin typeface="Calibri" pitchFamily="34" charset="0"/>
-                <a:ea typeface="Calibri" pitchFamily="34" charset="-122"/>
-                <a:cs typeface="Calibri" pitchFamily="34" charset="-120"/>
-              </a:rPr>
-              <a:t>CÓMO VAMOS A TRABAJAR HOY</a:t>
-            </a:r>
-            <a:endParaRPr lang="en-US" sz="1400" dirty="0"/>
-          </a:p>
-        </p:txBody>
-      </p:sp>
-      <p:sp>
-        <p:nvSpPr>
-          <p:cNvPr id="5" name="Text 3"/>
-          <p:cNvSpPr txBox="1"/>
-          <p:nvPr/>
-        </p:nvSpPr>
-        <p:spPr>
-          <a:xfrm>
-            <a:off x="2487168" y="2697480"/>
-            <a:ext cx="8961120" cy="1188720"/>
-          </a:xfrm>
-          <a:prstGeom prst="rect">
-            <a:avLst/>
-          </a:prstGeom>
-          <a:noFill/>
-          <a:ln/>
-        </p:spPr>
-        <p:txBody>
-          <a:bodyPr wrap="square" lIns="0" tIns="0" rIns="0" bIns="0" rtlCol="0" anchor="t"/>
-          <a:lstStyle/>
-          <a:p>
-            <a:pPr indent="0" marL="0">
-              <a:buNone/>
-            </a:pPr>
-            <a:r>
-              <a:rPr lang="en-US" sz="3400" b="1" dirty="0">
-                <a:solidFill>
-                  <a:srgbClr val="FFFFFF"/>
-                </a:solidFill>
-                <a:latin typeface="Arial" pitchFamily="34" charset="0"/>
-                <a:ea typeface="Arial" pitchFamily="34" charset="-122"/>
-                <a:cs typeface="Arial" pitchFamily="34" charset="-120"/>
-              </a:rPr>
-              <a:t>Ocho herramientas, seis equipos, una sola pregunta</a:t>
-            </a:r>
-            <a:endParaRPr lang="en-US" sz="3400" dirty="0"/>
-          </a:p>
-        </p:txBody>
-      </p:sp>
-      <p:sp>
-        <p:nvSpPr>
-          <p:cNvPr id="6" name="Shape 4"/>
-          <p:cNvSpPr/>
-          <p:nvPr/>
-        </p:nvSpPr>
-        <p:spPr>
-          <a:xfrm>
-            <a:off x="9631375" y="457200"/>
-            <a:ext cx="1993392" cy="347472"/>
-          </a:xfrm>
-          <a:prstGeom prst="roundRect">
-            <a:avLst>
-              <a:gd name="adj" fmla="val 50000"/>
-            </a:avLst>
           </a:prstGeom>
           <a:solidFill>
             <a:srgbClr val="24404E"/>
@@ -7148,14 +10523,14 @@
       </p:sp>
       <p:sp>
         <p:nvSpPr>
-          <p:cNvPr id="7" name="Text 5"/>
+          <p:cNvPr id="3" name="Text 1"/>
           <p:cNvSpPr txBox="1"/>
           <p:nvPr/>
         </p:nvSpPr>
         <p:spPr>
           <a:xfrm>
-            <a:off x="9631375" y="457200"/>
-            <a:ext cx="1993392" cy="347472"/>
+            <a:off x="932688" y="1371600"/>
+            <a:ext cx="10424160" cy="365760"/>
           </a:xfrm>
           <a:prstGeom prst="rect">
             <a:avLst/>
@@ -7167,21 +10542,105 @@
           <a:bodyPr wrap="square" lIns="0" tIns="0" rIns="0" bIns="0" rtlCol="0" anchor="ctr"/>
           <a:lstStyle/>
           <a:p>
-            <a:pPr algn="ctr" indent="0" marL="0">
-              <a:buNone/>
-            </a:pPr>
-            <a:r>
-              <a:rPr lang="en-US" sz="1200" b="1" dirty="0">
+            <a:pPr indent="0" marL="0">
+              <a:buNone/>
+            </a:pPr>
+            <a:r>
+              <a:rPr lang="en-US" sz="1400" b="1" spc="200" kern="0" dirty="0">
                 <a:solidFill>
-                  <a:srgbClr val="FFFFFF"/>
+                  <a:srgbClr val="C85A28"/>
                 </a:solidFill>
                 <a:latin typeface="Calibri" pitchFamily="34" charset="0"/>
                 <a:ea typeface="Calibri" pitchFamily="34" charset="-122"/>
                 <a:cs typeface="Calibri" pitchFamily="34" charset="-120"/>
               </a:rPr>
-              <a:t>9:15 a 9:25</a:t>
-            </a:r>
-            <a:endParaRPr lang="en-US" sz="1200" dirty="0"/>
+              <a:t>CÓMO LEER ESTE MAPA</a:t>
+            </a:r>
+            <a:endParaRPr lang="en-US" sz="1400" dirty="0"/>
+          </a:p>
+        </p:txBody>
+      </p:sp>
+      <p:sp>
+        <p:nvSpPr>
+          <p:cNvPr id="4" name="Text 2"/>
+          <p:cNvSpPr txBox="1"/>
+          <p:nvPr/>
+        </p:nvSpPr>
+        <p:spPr>
+          <a:xfrm>
+            <a:off x="932688" y="1828800"/>
+            <a:ext cx="10241280" cy="2377440"/>
+          </a:xfrm>
+          <a:prstGeom prst="rect">
+            <a:avLst/>
+          </a:prstGeom>
+          <a:noFill/>
+          <a:ln/>
+        </p:spPr>
+        <p:txBody>
+          <a:bodyPr wrap="square" lIns="0" tIns="0" rIns="0" bIns="0" rtlCol="0" anchor="t"/>
+          <a:lstStyle/>
+          <a:p>
+            <a:pPr indent="0" marL="0">
+              <a:lnSpc>
+                <a:spcPct val="112000"/>
+              </a:lnSpc>
+              <a:buNone/>
+            </a:pPr>
+            <a:r>
+              <a:rPr lang="en-US" sz="3000" b="1" dirty="0">
+                <a:solidFill>
+                  <a:srgbClr val="FFFFFF"/>
+                </a:solidFill>
+                <a:latin typeface="Arial" pitchFamily="34" charset="0"/>
+                <a:ea typeface="Arial" pitchFamily="34" charset="-122"/>
+                <a:cs typeface="Arial" pitchFamily="34" charset="-120"/>
+              </a:rPr>
+              <a:t>Por tarea, no por marca. Es la única forma de que te siga sirviendo dentro de seis meses.</a:t>
+            </a:r>
+            <a:endParaRPr lang="en-US" sz="3000" dirty="0"/>
+          </a:p>
+        </p:txBody>
+      </p:sp>
+      <p:sp>
+        <p:nvSpPr>
+          <p:cNvPr id="5" name="Text 3"/>
+          <p:cNvSpPr txBox="1"/>
+          <p:nvPr/>
+        </p:nvSpPr>
+        <p:spPr>
+          <a:xfrm>
+            <a:off x="932688" y="4343400"/>
+            <a:ext cx="10058400" cy="1371600"/>
+          </a:xfrm>
+          <a:prstGeom prst="rect">
+            <a:avLst/>
+          </a:prstGeom>
+          <a:noFill/>
+          <a:ln/>
+        </p:spPr>
+        <p:txBody>
+          <a:bodyPr wrap="square" lIns="0" tIns="0" rIns="0" bIns="0" rtlCol="0" anchor="t"/>
+          <a:lstStyle/>
+          <a:p>
+            <a:pPr indent="0" marL="0">
+              <a:lnSpc>
+                <a:spcPct val="115000"/>
+              </a:lnSpc>
+              <a:buNone/>
+            </a:pPr>
+            <a:r>
+              <a:rPr lang="en-US" sz="1600" dirty="0">
+                <a:solidFill>
+                  <a:srgbClr val="D7E7E7"/>
+                </a:solidFill>
+                <a:latin typeface="Calibri" pitchFamily="34" charset="0"/>
+                <a:ea typeface="Calibri" pitchFamily="34" charset="-122"/>
+                <a:cs typeface="Calibri" pitchFamily="34" charset="-120"/>
+              </a:rPr>
+              <a:t>Las marcas van a cambiar antes de que termine el año. Lo que no va a cambiar son las tareas. Si sabes qué tarea tienes enfrente, vas a poder evaluar cualquier herramienta que salga después de este curso.</a:t>
+            </a:r>
+            <a:endParaRPr lang="en-US" sz="1600" dirty="0"/>
           </a:p>
         </p:txBody>
       </p:sp>
@@ -7193,9 +10652,16 @@
 </p:sld>
 </file>
 
-<file path=ppt/slides/slide6.xml><?xml version="1.0" encoding="utf-8"?>
+<file path=ppt/slides/slide7.xml><?xml version="1.0" encoding="utf-8"?>
 <p:sld xmlns:a="http://schemas.openxmlformats.org/drawingml/2006/main" xmlns:r="http://schemas.openxmlformats.org/officeDocument/2006/relationships" xmlns:p="http://schemas.openxmlformats.org/presentationml/2006/main">
-  <p:cSld name="Slide 6">
+  <p:cSld name="Slide 7">
+    <p:bg>
+      <p:bgPr>
+        <a:solidFill>
+          <a:srgbClr val="16262E"/>
+        </a:solidFill>
+      </p:bgPr>
+    </p:bg>
     <p:spTree>
       <p:nvGrpSpPr>
         <p:cNvPr id="1" name=""/>
@@ -7212,6 +10678,239 @@
       </p:grpSpPr>
       <p:sp>
         <p:nvSpPr>
+          <p:cNvPr id="2" name="Shape 0"/>
+          <p:cNvSpPr/>
+          <p:nvPr/>
+        </p:nvSpPr>
+        <p:spPr>
+          <a:xfrm>
+            <a:off x="566928" y="2331720"/>
+            <a:ext cx="1371600" cy="1371600"/>
+          </a:xfrm>
+          <a:prstGeom prst="ellipse">
+            <a:avLst/>
+          </a:prstGeom>
+          <a:solidFill>
+            <a:srgbClr val="C85A28"/>
+          </a:solidFill>
+          <a:ln w="12700">
+            <a:solidFill>
+              <a:srgbClr val="C85A28"/>
+            </a:solidFill>
+            <a:prstDash val="solid"/>
+          </a:ln>
+        </p:spPr>
+      </p:sp>
+      <p:sp>
+        <p:nvSpPr>
+          <p:cNvPr id="3" name="Text 1"/>
+          <p:cNvSpPr txBox="1"/>
+          <p:nvPr/>
+        </p:nvSpPr>
+        <p:spPr>
+          <a:xfrm>
+            <a:off x="566928" y="2331720"/>
+            <a:ext cx="1371600" cy="1371600"/>
+          </a:xfrm>
+          <a:prstGeom prst="rect">
+            <a:avLst/>
+          </a:prstGeom>
+          <a:noFill/>
+          <a:ln/>
+        </p:spPr>
+        <p:txBody>
+          <a:bodyPr wrap="square" lIns="0" tIns="0" rIns="0" bIns="0" rtlCol="0" anchor="ctr"/>
+          <a:lstStyle/>
+          <a:p>
+            <a:pPr algn="ctr" indent="0" marL="0">
+              <a:buNone/>
+            </a:pPr>
+            <a:r>
+              <a:rPr lang="en-US" sz="4400" b="1" dirty="0">
+                <a:solidFill>
+                  <a:srgbClr val="FFFFFF"/>
+                </a:solidFill>
+                <a:latin typeface="Arial" pitchFamily="34" charset="0"/>
+                <a:ea typeface="Arial" pitchFamily="34" charset="-122"/>
+                <a:cs typeface="Arial" pitchFamily="34" charset="-120"/>
+              </a:rPr>
+              <a:t>2</a:t>
+            </a:r>
+            <a:endParaRPr lang="en-US" sz="4400" dirty="0"/>
+          </a:p>
+        </p:txBody>
+      </p:sp>
+      <p:sp>
+        <p:nvSpPr>
+          <p:cNvPr id="4" name="Text 2"/>
+          <p:cNvSpPr txBox="1"/>
+          <p:nvPr/>
+        </p:nvSpPr>
+        <p:spPr>
+          <a:xfrm>
+            <a:off x="2487168" y="2331720"/>
+            <a:ext cx="8778240" cy="365760"/>
+          </a:xfrm>
+          <a:prstGeom prst="rect">
+            <a:avLst/>
+          </a:prstGeom>
+          <a:noFill/>
+          <a:ln/>
+        </p:spPr>
+        <p:txBody>
+          <a:bodyPr wrap="square" lIns="0" tIns="0" rIns="0" bIns="0" rtlCol="0" anchor="ctr"/>
+          <a:lstStyle/>
+          <a:p>
+            <a:pPr indent="0" marL="0">
+              <a:buNone/>
+            </a:pPr>
+            <a:r>
+              <a:rPr lang="en-US" sz="1400" b="1" spc="200" kern="0" dirty="0">
+                <a:solidFill>
+                  <a:srgbClr val="D7E7E7"/>
+                </a:solidFill>
+                <a:latin typeface="Calibri" pitchFamily="34" charset="0"/>
+                <a:ea typeface="Calibri" pitchFamily="34" charset="-122"/>
+                <a:cs typeface="Calibri" pitchFamily="34" charset="-120"/>
+              </a:rPr>
+              <a:t>SEGUNDO BLOQUE</a:t>
+            </a:r>
+            <a:endParaRPr lang="en-US" sz="1400" dirty="0"/>
+          </a:p>
+        </p:txBody>
+      </p:sp>
+      <p:sp>
+        <p:nvSpPr>
+          <p:cNvPr id="5" name="Text 3"/>
+          <p:cNvSpPr txBox="1"/>
+          <p:nvPr/>
+        </p:nvSpPr>
+        <p:spPr>
+          <a:xfrm>
+            <a:off x="2487168" y="2697480"/>
+            <a:ext cx="8961120" cy="1188720"/>
+          </a:xfrm>
+          <a:prstGeom prst="rect">
+            <a:avLst/>
+          </a:prstGeom>
+          <a:noFill/>
+          <a:ln/>
+        </p:spPr>
+        <p:txBody>
+          <a:bodyPr wrap="square" lIns="0" tIns="0" rIns="0" bIns="0" rtlCol="0" anchor="t"/>
+          <a:lstStyle/>
+          <a:p>
+            <a:pPr indent="0" marL="0">
+              <a:buNone/>
+            </a:pPr>
+            <a:r>
+              <a:rPr lang="en-US" sz="3400" b="1" dirty="0">
+                <a:solidFill>
+                  <a:srgbClr val="FFFFFF"/>
+                </a:solidFill>
+                <a:latin typeface="Arial" pitchFamily="34" charset="0"/>
+                <a:ea typeface="Arial" pitchFamily="34" charset="-122"/>
+                <a:cs typeface="Arial" pitchFamily="34" charset="-120"/>
+              </a:rPr>
+              <a:t>El reparto y la tarea</a:t>
+            </a:r>
+            <a:endParaRPr lang="en-US" sz="3400" dirty="0"/>
+          </a:p>
+        </p:txBody>
+      </p:sp>
+      <p:sp>
+        <p:nvSpPr>
+          <p:cNvPr id="6" name="Shape 4"/>
+          <p:cNvSpPr/>
+          <p:nvPr/>
+        </p:nvSpPr>
+        <p:spPr>
+          <a:xfrm>
+            <a:off x="9631375" y="457200"/>
+            <a:ext cx="1993392" cy="347472"/>
+          </a:xfrm>
+          <a:prstGeom prst="roundRect">
+            <a:avLst>
+              <a:gd name="adj" fmla="val 50000"/>
+            </a:avLst>
+          </a:prstGeom>
+          <a:solidFill>
+            <a:srgbClr val="24404E"/>
+          </a:solidFill>
+          <a:ln w="12700">
+            <a:solidFill>
+              <a:srgbClr val="24404E"/>
+            </a:solidFill>
+            <a:prstDash val="solid"/>
+          </a:ln>
+        </p:spPr>
+      </p:sp>
+      <p:sp>
+        <p:nvSpPr>
+          <p:cNvPr id="7" name="Text 5"/>
+          <p:cNvSpPr txBox="1"/>
+          <p:nvPr/>
+        </p:nvSpPr>
+        <p:spPr>
+          <a:xfrm>
+            <a:off x="9631375" y="457200"/>
+            <a:ext cx="1993392" cy="347472"/>
+          </a:xfrm>
+          <a:prstGeom prst="rect">
+            <a:avLst/>
+          </a:prstGeom>
+          <a:noFill/>
+          <a:ln/>
+        </p:spPr>
+        <p:txBody>
+          <a:bodyPr wrap="square" lIns="0" tIns="0" rIns="0" bIns="0" rtlCol="0" anchor="ctr"/>
+          <a:lstStyle/>
+          <a:p>
+            <a:pPr algn="ctr" indent="0" marL="0">
+              <a:buNone/>
+            </a:pPr>
+            <a:r>
+              <a:rPr lang="en-US" sz="1200" b="1" dirty="0">
+                <a:solidFill>
+                  <a:srgbClr val="FFFFFF"/>
+                </a:solidFill>
+                <a:latin typeface="Calibri" pitchFamily="34" charset="0"/>
+                <a:ea typeface="Calibri" pitchFamily="34" charset="-122"/>
+                <a:cs typeface="Calibri" pitchFamily="34" charset="-120"/>
+              </a:rPr>
+              <a:t>9:15 a 9:25</a:t>
+            </a:r>
+            <a:endParaRPr lang="en-US" sz="1200" dirty="0"/>
+          </a:p>
+        </p:txBody>
+      </p:sp>
+    </p:spTree>
+  </p:cSld>
+  <p:clrMapOvr>
+    <a:masterClrMapping/>
+  </p:clrMapOvr>
+</p:sld>
+</file>
+
+<file path=ppt/slides/slide8.xml><?xml version="1.0" encoding="utf-8"?>
+<p:sld xmlns:a="http://schemas.openxmlformats.org/drawingml/2006/main" xmlns:r="http://schemas.openxmlformats.org/officeDocument/2006/relationships" xmlns:p="http://schemas.openxmlformats.org/presentationml/2006/main">
+  <p:cSld name="Slide 8">
+    <p:spTree>
+      <p:nvGrpSpPr>
+        <p:cNvPr id="1" name=""/>
+        <p:cNvGrpSpPr/>
+        <p:nvPr/>
+      </p:nvGrpSpPr>
+      <p:grpSpPr>
+        <a:xfrm>
+          <a:off x="0" y="0"/>
+          <a:ext cx="0" cy="0"/>
+          <a:chOff x="0" y="0"/>
+          <a:chExt cx="0" cy="0"/>
+        </a:xfrm>
+      </p:grpSpPr>
+      <p:sp>
+        <p:nvSpPr>
           <p:cNvPr id="2" name="Text 0"/>
           <p:cNvSpPr txBox="1"/>
           <p:nvPr/>
@@ -7243,7 +10942,7 @@
                 <a:ea typeface="Arial" pitchFamily="34" charset="-122"/>
                 <a:cs typeface="Arial" pitchFamily="34" charset="-120"/>
               </a:rPr>
-              <a:t>El reparto</a:t>
+              <a:t>Cada equipo evalúa una herramienta a fondo</a:t>
             </a:r>
             <a:endParaRPr lang="en-US" sz="3200" dirty="0"/>
           </a:p>
@@ -7282,7 +10981,7 @@
                 <a:ea typeface="Calibri" pitchFamily="34" charset="-122"/>
                 <a:cs typeface="Calibri" pitchFamily="34" charset="-120"/>
               </a:rPr>
-              <a:t>Nadie prueba las ocho. Cada equipo prueba a fondo la suya y todos prueban Copilot como punto de comparación.</a:t>
+              <a:t>Nadie prueba las ocho. Todos hacen la misma tarea con Copilot como punto de comparación común.</a:t>
             </a:r>
             <a:endParaRPr lang="en-US" sz="1500" dirty="0"/>
           </a:p>
@@ -7290,7 +10989,7 @@
       </p:sp>
       <p:graphicFrame>
         <p:nvGraphicFramePr>
-          <p:cNvPr id="7" name="Table 0"/>
+          <p:cNvPr id="9" name="Table 0"/>
           <p:cNvGraphicFramePr>
             <a:graphicFrameLocks noGrp="1"/>
           </p:cNvGraphicFramePr>
@@ -7311,11 +11010,12 @@
             <a:tbl>
               <a:tblPr/>
               <a:tblGrid>
-                <a:gridCol w="1463040"/>
-                <a:gridCol w="2926080"/>
-                <a:gridCol w="6675120"/>
+                <a:gridCol w="1188720"/>
+                <a:gridCol w="2743200"/>
+                <a:gridCol w="2286000"/>
+                <a:gridCol w="4846320"/>
               </a:tblGrid>
-              <a:tr h="502920">
+              <a:tr h="457200">
                 <a:tc>
                   <a:txBody>
                     <a:bodyPr/>
@@ -7401,7 +11101,7 @@
                           <a:ea typeface="Arial" pitchFamily="34" charset="-122"/>
                           <a:cs typeface="Arial" pitchFamily="34" charset="-120"/>
                         </a:rPr>
-                        <a:t>Herramienta asignada</a:t>
+                        <a:t>Categoría del Instituto</a:t>
                       </a:r>
                       <a:endParaRPr lang="en-US" sz="1300" dirty="0">
                         <a:latin typeface="Arial" charset="0"/>
@@ -7469,7 +11169,7 @@
                           <a:ea typeface="Arial" pitchFamily="34" charset="-122"/>
                           <a:cs typeface="Arial" pitchFamily="34" charset="-120"/>
                         </a:rPr>
-                        <a:t>Qué tiene que averiguar</a:t>
+                        <a:t>Herramienta</a:t>
                       </a:r>
                       <a:endParaRPr lang="en-US" sz="1300" dirty="0">
                         <a:latin typeface="Arial" charset="0"/>
@@ -7520,14 +11220,82 @@
                     </a:solidFill>
                   </a:tcPr>
                 </a:tc>
-              </a:tr>
-              <a:tr h="502920">
                 <a:tc>
                   <a:txBody>
                     <a:bodyPr/>
                     <a:lstStyle/>
                     <a:p>
-                      <a:pPr algn="l" indent="0" marL="0">
+                      <a:pPr algn="ctr" indent="0" marL="0">
+                        <a:buNone/>
+                      </a:pPr>
+                      <a:r>
+                        <a:rPr lang="en-US" sz="1300" b="1" dirty="0">
+                          <a:solidFill>
+                            <a:srgbClr val="FFFFFF"/>
+                          </a:solidFill>
+                          <a:latin typeface="Arial" pitchFamily="34" charset="0"/>
+                          <a:ea typeface="Arial" pitchFamily="34" charset="-122"/>
+                          <a:cs typeface="Arial" pitchFamily="34" charset="-120"/>
+                        </a:rPr>
+                        <a:t>Tarea</a:t>
+                      </a:r>
+                      <a:endParaRPr lang="en-US" sz="1300" dirty="0">
+                        <a:latin typeface="Arial" charset="0"/>
+                        <a:ea typeface="Arial" charset="0"/>
+                        <a:cs typeface="Arial" charset="0"/>
+                      </a:endParaRPr>
+                    </a:p>
+                  </a:txBody>
+                  <a:tcPr marL="76200" marR="76200" marT="76200" marB="76200" anchor="ctr">
+                    <a:lnL w="12700" cap="flat" cmpd="sng" algn="ctr">
+                      <a:solidFill>
+                        <a:srgbClr val="D5DDE0"/>
+                      </a:solidFill>
+                      <a:prstDash val="solid"/>
+                      <a:round/>
+                      <a:headEnd type="none" w="med" len="med"/>
+                      <a:tailEnd type="none" w="med" len="med"/>
+                    </a:lnL>
+                    <a:lnR w="12700" cap="flat" cmpd="sng" algn="ctr">
+                      <a:solidFill>
+                        <a:srgbClr val="D5DDE0"/>
+                      </a:solidFill>
+                      <a:prstDash val="solid"/>
+                      <a:round/>
+                      <a:headEnd type="none" w="med" len="med"/>
+                      <a:tailEnd type="none" w="med" len="med"/>
+                    </a:lnR>
+                    <a:lnT w="12700" cap="flat" cmpd="sng" algn="ctr">
+                      <a:solidFill>
+                        <a:srgbClr val="D5DDE0"/>
+                      </a:solidFill>
+                      <a:prstDash val="solid"/>
+                      <a:round/>
+                      <a:headEnd type="none" w="med" len="med"/>
+                      <a:tailEnd type="none" w="med" len="med"/>
+                    </a:lnT>
+                    <a:lnB w="12700" cap="flat" cmpd="sng" algn="ctr">
+                      <a:solidFill>
+                        <a:srgbClr val="D5DDE0"/>
+                      </a:solidFill>
+                      <a:prstDash val="solid"/>
+                      <a:round/>
+                      <a:headEnd type="none" w="med" len="med"/>
+                      <a:tailEnd type="none" w="med" len="med"/>
+                    </a:lnB>
+                    <a:solidFill>
+                      <a:srgbClr val="16262E"/>
+                    </a:solidFill>
+                  </a:tcPr>
+                </a:tc>
+              </a:tr>
+              <a:tr h="457200">
+                <a:tc>
+                  <a:txBody>
+                    <a:bodyPr/>
+                    <a:lstStyle/>
+                    <a:p>
+                      <a:pPr algn="ctr" indent="0" marL="0">
                         <a:buNone/>
                       </a:pPr>
                       <a:r>
@@ -7540,6 +11308,74 @@
                           <a:cs typeface="Calibri" pitchFamily="34" charset="-120"/>
                         </a:rPr>
                         <a:t>1</a:t>
+                      </a:r>
+                      <a:endParaRPr lang="en-US" sz="1250" dirty="0">
+                        <a:latin typeface="Calibri" charset="0"/>
+                        <a:ea typeface="Calibri" charset="0"/>
+                        <a:cs typeface="Calibri" charset="0"/>
+                      </a:endParaRPr>
+                    </a:p>
+                  </a:txBody>
+                  <a:tcPr marL="76200" marR="76200" marT="76200" marB="76200" anchor="ctr">
+                    <a:lnL w="12700" cap="flat" cmpd="sng" algn="ctr">
+                      <a:solidFill>
+                        <a:srgbClr val="D5DDE0"/>
+                      </a:solidFill>
+                      <a:prstDash val="solid"/>
+                      <a:round/>
+                      <a:headEnd type="none" w="med" len="med"/>
+                      <a:tailEnd type="none" w="med" len="med"/>
+                    </a:lnL>
+                    <a:lnR w="12700" cap="flat" cmpd="sng" algn="ctr">
+                      <a:solidFill>
+                        <a:srgbClr val="D5DDE0"/>
+                      </a:solidFill>
+                      <a:prstDash val="solid"/>
+                      <a:round/>
+                      <a:headEnd type="none" w="med" len="med"/>
+                      <a:tailEnd type="none" w="med" len="med"/>
+                    </a:lnR>
+                    <a:lnT w="12700" cap="flat" cmpd="sng" algn="ctr">
+                      <a:solidFill>
+                        <a:srgbClr val="D5DDE0"/>
+                      </a:solidFill>
+                      <a:prstDash val="solid"/>
+                      <a:round/>
+                      <a:headEnd type="none" w="med" len="med"/>
+                      <a:tailEnd type="none" w="med" len="med"/>
+                    </a:lnT>
+                    <a:lnB w="12700" cap="flat" cmpd="sng" algn="ctr">
+                      <a:solidFill>
+                        <a:srgbClr val="D5DDE0"/>
+                      </a:solidFill>
+                      <a:prstDash val="solid"/>
+                      <a:round/>
+                      <a:headEnd type="none" w="med" len="med"/>
+                      <a:tailEnd type="none" w="med" len="med"/>
+                    </a:lnB>
+                    <a:solidFill>
+                      <a:srgbClr val="F2F5F6"/>
+                    </a:solidFill>
+                  </a:tcPr>
+                </a:tc>
+                <a:tc>
+                  <a:txBody>
+                    <a:bodyPr/>
+                    <a:lstStyle/>
+                    <a:p>
+                      <a:pPr algn="l" indent="0" marL="0">
+                        <a:buNone/>
+                      </a:pPr>
+                      <a:r>
+                        <a:rPr lang="en-US" sz="1250" dirty="0">
+                          <a:solidFill>
+                            <a:srgbClr val="16262E"/>
+                          </a:solidFill>
+                          <a:latin typeface="Calibri" pitchFamily="34" charset="0"/>
+                          <a:ea typeface="Calibri" pitchFamily="34" charset="-122"/>
+                          <a:cs typeface="Calibri" pitchFamily="34" charset="-120"/>
+                        </a:rPr>
+                        <a:t>Asistentes generales</a:t>
                       </a:r>
                       <a:endParaRPr lang="en-US" sz="1250" dirty="0">
                         <a:latin typeface="Calibri" charset="0"/>
@@ -7675,7 +11511,7 @@
                           <a:ea typeface="Calibri" pitchFamily="34" charset="-122"/>
                           <a:cs typeface="Calibri" pitchFamily="34" charset="-120"/>
                         </a:rPr>
-                        <a:t>Cómo maneja documentos largos y qué tan confiables son sus referencias.</a:t>
+                        <a:t>Codificar el corpus con tu libro de códigos y clasificar postura.</a:t>
                       </a:r>
                       <a:endParaRPr lang="en-US" sz="1250" dirty="0">
                         <a:latin typeface="Calibri" charset="0"/>
@@ -7727,13 +11563,13 @@
                   </a:tcPr>
                 </a:tc>
               </a:tr>
-              <a:tr h="502920">
+              <a:tr h="457200">
                 <a:tc>
                   <a:txBody>
                     <a:bodyPr/>
                     <a:lstStyle/>
                     <a:p>
-                      <a:pPr algn="l" indent="0" marL="0">
+                      <a:pPr algn="ctr" indent="0" marL="0">
                         <a:buNone/>
                       </a:pPr>
                       <a:r>
@@ -7746,6 +11582,74 @@
                           <a:cs typeface="Calibri" pitchFamily="34" charset="-120"/>
                         </a:rPr>
                         <a:t>2</a:t>
+                      </a:r>
+                      <a:endParaRPr lang="en-US" sz="1250" dirty="0">
+                        <a:latin typeface="Calibri" charset="0"/>
+                        <a:ea typeface="Calibri" charset="0"/>
+                        <a:cs typeface="Calibri" charset="0"/>
+                      </a:endParaRPr>
+                    </a:p>
+                  </a:txBody>
+                  <a:tcPr marL="76200" marR="76200" marT="76200" marB="76200" anchor="ctr">
+                    <a:lnL w="12700" cap="flat" cmpd="sng" algn="ctr">
+                      <a:solidFill>
+                        <a:srgbClr val="D5DDE0"/>
+                      </a:solidFill>
+                      <a:prstDash val="solid"/>
+                      <a:round/>
+                      <a:headEnd type="none" w="med" len="med"/>
+                      <a:tailEnd type="none" w="med" len="med"/>
+                    </a:lnL>
+                    <a:lnR w="12700" cap="flat" cmpd="sng" algn="ctr">
+                      <a:solidFill>
+                        <a:srgbClr val="D5DDE0"/>
+                      </a:solidFill>
+                      <a:prstDash val="solid"/>
+                      <a:round/>
+                      <a:headEnd type="none" w="med" len="med"/>
+                      <a:tailEnd type="none" w="med" len="med"/>
+                    </a:lnR>
+                    <a:lnT w="12700" cap="flat" cmpd="sng" algn="ctr">
+                      <a:solidFill>
+                        <a:srgbClr val="D5DDE0"/>
+                      </a:solidFill>
+                      <a:prstDash val="solid"/>
+                      <a:round/>
+                      <a:headEnd type="none" w="med" len="med"/>
+                      <a:tailEnd type="none" w="med" len="med"/>
+                    </a:lnT>
+                    <a:lnB w="12700" cap="flat" cmpd="sng" algn="ctr">
+                      <a:solidFill>
+                        <a:srgbClr val="D5DDE0"/>
+                      </a:solidFill>
+                      <a:prstDash val="solid"/>
+                      <a:round/>
+                      <a:headEnd type="none" w="med" len="med"/>
+                      <a:tailEnd type="none" w="med" len="med"/>
+                    </a:lnB>
+                    <a:solidFill>
+                      <a:srgbClr val="FFFFFF"/>
+                    </a:solidFill>
+                  </a:tcPr>
+                </a:tc>
+                <a:tc>
+                  <a:txBody>
+                    <a:bodyPr/>
+                    <a:lstStyle/>
+                    <a:p>
+                      <a:pPr algn="l" indent="0" marL="0">
+                        <a:buNone/>
+                      </a:pPr>
+                      <a:r>
+                        <a:rPr lang="en-US" sz="1250" dirty="0">
+                          <a:solidFill>
+                            <a:srgbClr val="16262E"/>
+                          </a:solidFill>
+                          <a:latin typeface="Calibri" pitchFamily="34" charset="0"/>
+                          <a:ea typeface="Calibri" pitchFamily="34" charset="-122"/>
+                          <a:cs typeface="Calibri" pitchFamily="34" charset="-120"/>
+                        </a:rPr>
+                        <a:t>Asistentes generales</a:t>
                       </a:r>
                       <a:endParaRPr lang="en-US" sz="1250" dirty="0">
                         <a:latin typeface="Calibri" charset="0"/>
@@ -7881,7 +11785,7 @@
                           <a:ea typeface="Calibri" pitchFamily="34" charset="-122"/>
                           <a:cs typeface="Calibri" pitchFamily="34" charset="-120"/>
                         </a:rPr>
-                        <a:t>Hasta qué tamaño de documento aguanta sin partirlo y cómo cita lo que lee.</a:t>
+                        <a:t>Lo mismo.</a:t>
                       </a:r>
                       <a:endParaRPr lang="en-US" sz="1250" dirty="0">
                         <a:latin typeface="Calibri" charset="0"/>
@@ -7933,13 +11837,13 @@
                   </a:tcPr>
                 </a:tc>
               </a:tr>
-              <a:tr h="502920">
+              <a:tr h="457200">
                 <a:tc>
                   <a:txBody>
                     <a:bodyPr/>
                     <a:lstStyle/>
                     <a:p>
-                      <a:pPr algn="l" indent="0" marL="0">
+                      <a:pPr algn="ctr" indent="0" marL="0">
                         <a:buNone/>
                       </a:pPr>
                       <a:r>
@@ -7952,6 +11856,74 @@
                           <a:cs typeface="Calibri" pitchFamily="34" charset="-120"/>
                         </a:rPr>
                         <a:t>3</a:t>
+                      </a:r>
+                      <a:endParaRPr lang="en-US" sz="1250" dirty="0">
+                        <a:latin typeface="Calibri" charset="0"/>
+                        <a:ea typeface="Calibri" charset="0"/>
+                        <a:cs typeface="Calibri" charset="0"/>
+                      </a:endParaRPr>
+                    </a:p>
+                  </a:txBody>
+                  <a:tcPr marL="76200" marR="76200" marT="76200" marB="76200" anchor="ctr">
+                    <a:lnL w="12700" cap="flat" cmpd="sng" algn="ctr">
+                      <a:solidFill>
+                        <a:srgbClr val="D5DDE0"/>
+                      </a:solidFill>
+                      <a:prstDash val="solid"/>
+                      <a:round/>
+                      <a:headEnd type="none" w="med" len="med"/>
+                      <a:tailEnd type="none" w="med" len="med"/>
+                    </a:lnL>
+                    <a:lnR w="12700" cap="flat" cmpd="sng" algn="ctr">
+                      <a:solidFill>
+                        <a:srgbClr val="D5DDE0"/>
+                      </a:solidFill>
+                      <a:prstDash val="solid"/>
+                      <a:round/>
+                      <a:headEnd type="none" w="med" len="med"/>
+                      <a:tailEnd type="none" w="med" len="med"/>
+                    </a:lnR>
+                    <a:lnT w="12700" cap="flat" cmpd="sng" algn="ctr">
+                      <a:solidFill>
+                        <a:srgbClr val="D5DDE0"/>
+                      </a:solidFill>
+                      <a:prstDash val="solid"/>
+                      <a:round/>
+                      <a:headEnd type="none" w="med" len="med"/>
+                      <a:tailEnd type="none" w="med" len="med"/>
+                    </a:lnT>
+                    <a:lnB w="12700" cap="flat" cmpd="sng" algn="ctr">
+                      <a:solidFill>
+                        <a:srgbClr val="D5DDE0"/>
+                      </a:solidFill>
+                      <a:prstDash val="solid"/>
+                      <a:round/>
+                      <a:headEnd type="none" w="med" len="med"/>
+                      <a:tailEnd type="none" w="med" len="med"/>
+                    </a:lnB>
+                    <a:solidFill>
+                      <a:srgbClr val="F2F5F6"/>
+                    </a:solidFill>
+                  </a:tcPr>
+                </a:tc>
+                <a:tc>
+                  <a:txBody>
+                    <a:bodyPr/>
+                    <a:lstStyle/>
+                    <a:p>
+                      <a:pPr algn="l" indent="0" marL="0">
+                        <a:buNone/>
+                      </a:pPr>
+                      <a:r>
+                        <a:rPr lang="en-US" sz="1250" dirty="0">
+                          <a:solidFill>
+                            <a:srgbClr val="16262E"/>
+                          </a:solidFill>
+                          <a:latin typeface="Calibri" pitchFamily="34" charset="0"/>
+                          <a:ea typeface="Calibri" pitchFamily="34" charset="-122"/>
+                          <a:cs typeface="Calibri" pitchFamily="34" charset="-120"/>
+                        </a:rPr>
+                        <a:t>Asistentes generales</a:t>
                       </a:r>
                       <a:endParaRPr lang="en-US" sz="1250" dirty="0">
                         <a:latin typeface="Calibri" charset="0"/>
@@ -8087,7 +12059,7 @@
                           <a:ea typeface="Calibri" pitchFamily="34" charset="-122"/>
                           <a:cs typeface="Calibri" pitchFamily="34" charset="-120"/>
                         </a:rPr>
-                        <a:t>Qué tan bien se integra con documentos y qué hace distinto de los otros dos.</a:t>
+                        <a:t>Lo mismo.</a:t>
                       </a:r>
                       <a:endParaRPr lang="en-US" sz="1250" dirty="0">
                         <a:latin typeface="Calibri" charset="0"/>
@@ -8139,13 +12111,13 @@
                   </a:tcPr>
                 </a:tc>
               </a:tr>
-              <a:tr h="502920">
+              <a:tr h="457200">
                 <a:tc>
                   <a:txBody>
                     <a:bodyPr/>
                     <a:lstStyle/>
                     <a:p>
-                      <a:pPr algn="l" indent="0" marL="0">
+                      <a:pPr algn="ctr" indent="0" marL="0">
                         <a:buNone/>
                       </a:pPr>
                       <a:r>
@@ -8158,6 +12130,74 @@
                           <a:cs typeface="Calibri" pitchFamily="34" charset="-120"/>
                         </a:rPr>
                         <a:t>4</a:t>
+                      </a:r>
+                      <a:endParaRPr lang="en-US" sz="1250" dirty="0">
+                        <a:latin typeface="Calibri" charset="0"/>
+                        <a:ea typeface="Calibri" charset="0"/>
+                        <a:cs typeface="Calibri" charset="0"/>
+                      </a:endParaRPr>
+                    </a:p>
+                  </a:txBody>
+                  <a:tcPr marL="76200" marR="76200" marT="76200" marB="76200" anchor="ctr">
+                    <a:lnL w="12700" cap="flat" cmpd="sng" algn="ctr">
+                      <a:solidFill>
+                        <a:srgbClr val="D5DDE0"/>
+                      </a:solidFill>
+                      <a:prstDash val="solid"/>
+                      <a:round/>
+                      <a:headEnd type="none" w="med" len="med"/>
+                      <a:tailEnd type="none" w="med" len="med"/>
+                    </a:lnL>
+                    <a:lnR w="12700" cap="flat" cmpd="sng" algn="ctr">
+                      <a:solidFill>
+                        <a:srgbClr val="D5DDE0"/>
+                      </a:solidFill>
+                      <a:prstDash val="solid"/>
+                      <a:round/>
+                      <a:headEnd type="none" w="med" len="med"/>
+                      <a:tailEnd type="none" w="med" len="med"/>
+                    </a:lnR>
+                    <a:lnT w="12700" cap="flat" cmpd="sng" algn="ctr">
+                      <a:solidFill>
+                        <a:srgbClr val="D5DDE0"/>
+                      </a:solidFill>
+                      <a:prstDash val="solid"/>
+                      <a:round/>
+                      <a:headEnd type="none" w="med" len="med"/>
+                      <a:tailEnd type="none" w="med" len="med"/>
+                    </a:lnT>
+                    <a:lnB w="12700" cap="flat" cmpd="sng" algn="ctr">
+                      <a:solidFill>
+                        <a:srgbClr val="D5DDE0"/>
+                      </a:solidFill>
+                      <a:prstDash val="solid"/>
+                      <a:round/>
+                      <a:headEnd type="none" w="med" len="med"/>
+                      <a:tailEnd type="none" w="med" len="med"/>
+                    </a:lnB>
+                    <a:solidFill>
+                      <a:srgbClr val="FFFFFF"/>
+                    </a:solidFill>
+                  </a:tcPr>
+                </a:tc>
+                <a:tc>
+                  <a:txBody>
+                    <a:bodyPr/>
+                    <a:lstStyle/>
+                    <a:p>
+                      <a:pPr algn="l" indent="0" marL="0">
+                        <a:buNone/>
+                      </a:pPr>
+                      <a:r>
+                        <a:rPr lang="en-US" sz="1250" dirty="0">
+                          <a:solidFill>
+                            <a:srgbClr val="16262E"/>
+                          </a:solidFill>
+                          <a:latin typeface="Calibri" pitchFamily="34" charset="0"/>
+                          <a:ea typeface="Calibri" pitchFamily="34" charset="-122"/>
+                          <a:cs typeface="Calibri" pitchFamily="34" charset="-120"/>
+                        </a:rPr>
+                        <a:t>Búsqueda e investigación</a:t>
                       </a:r>
                       <a:endParaRPr lang="en-US" sz="1250" dirty="0">
                         <a:latin typeface="Calibri" charset="0"/>
@@ -8293,7 +12333,7 @@
                           <a:ea typeface="Calibri" pitchFamily="34" charset="-122"/>
                           <a:cs typeface="Calibri" pitchFamily="34" charset="-120"/>
                         </a:rPr>
-                        <a:t>Si las fuentes que devuelven existen y si son las que uno hubiera elegido.</a:t>
+                        <a:t>Sustentar un hallazgo del corpus con fuentes verificables.</a:t>
                       </a:r>
                       <a:endParaRPr lang="en-US" sz="1250" dirty="0">
                         <a:latin typeface="Calibri" charset="0"/>
@@ -8345,13 +12385,13 @@
                   </a:tcPr>
                 </a:tc>
               </a:tr>
-              <a:tr h="502920">
+              <a:tr h="457200">
                 <a:tc>
                   <a:txBody>
                     <a:bodyPr/>
                     <a:lstStyle/>
                     <a:p>
-                      <a:pPr algn="l" indent="0" marL="0">
+                      <a:pPr algn="ctr" indent="0" marL="0">
                         <a:buNone/>
                       </a:pPr>
                       <a:r>
@@ -8364,6 +12404,74 @@
                           <a:cs typeface="Calibri" pitchFamily="34" charset="-120"/>
                         </a:rPr>
                         <a:t>5</a:t>
+                      </a:r>
+                      <a:endParaRPr lang="en-US" sz="1250" dirty="0">
+                        <a:latin typeface="Calibri" charset="0"/>
+                        <a:ea typeface="Calibri" charset="0"/>
+                        <a:cs typeface="Calibri" charset="0"/>
+                      </a:endParaRPr>
+                    </a:p>
+                  </a:txBody>
+                  <a:tcPr marL="76200" marR="76200" marT="76200" marB="76200" anchor="ctr">
+                    <a:lnL w="12700" cap="flat" cmpd="sng" algn="ctr">
+                      <a:solidFill>
+                        <a:srgbClr val="D5DDE0"/>
+                      </a:solidFill>
+                      <a:prstDash val="solid"/>
+                      <a:round/>
+                      <a:headEnd type="none" w="med" len="med"/>
+                      <a:tailEnd type="none" w="med" len="med"/>
+                    </a:lnL>
+                    <a:lnR w="12700" cap="flat" cmpd="sng" algn="ctr">
+                      <a:solidFill>
+                        <a:srgbClr val="D5DDE0"/>
+                      </a:solidFill>
+                      <a:prstDash val="solid"/>
+                      <a:round/>
+                      <a:headEnd type="none" w="med" len="med"/>
+                      <a:tailEnd type="none" w="med" len="med"/>
+                    </a:lnR>
+                    <a:lnT w="12700" cap="flat" cmpd="sng" algn="ctr">
+                      <a:solidFill>
+                        <a:srgbClr val="D5DDE0"/>
+                      </a:solidFill>
+                      <a:prstDash val="solid"/>
+                      <a:round/>
+                      <a:headEnd type="none" w="med" len="med"/>
+                      <a:tailEnd type="none" w="med" len="med"/>
+                    </a:lnT>
+                    <a:lnB w="12700" cap="flat" cmpd="sng" algn="ctr">
+                      <a:solidFill>
+                        <a:srgbClr val="D5DDE0"/>
+                      </a:solidFill>
+                      <a:prstDash val="solid"/>
+                      <a:round/>
+                      <a:headEnd type="none" w="med" len="med"/>
+                      <a:tailEnd type="none" w="med" len="med"/>
+                    </a:lnB>
+                    <a:solidFill>
+                      <a:srgbClr val="F2F5F6"/>
+                    </a:solidFill>
+                  </a:tcPr>
+                </a:tc>
+                <a:tc>
+                  <a:txBody>
+                    <a:bodyPr/>
+                    <a:lstStyle/>
+                    <a:p>
+                      <a:pPr algn="l" indent="0" marL="0">
+                        <a:buNone/>
+                      </a:pPr>
+                      <a:r>
+                        <a:rPr lang="en-US" sz="1250" dirty="0">
+                          <a:solidFill>
+                            <a:srgbClr val="16262E"/>
+                          </a:solidFill>
+                          <a:latin typeface="Calibri" pitchFamily="34" charset="0"/>
+                          <a:ea typeface="Calibri" pitchFamily="34" charset="-122"/>
+                          <a:cs typeface="Calibri" pitchFamily="34" charset="-120"/>
+                        </a:rPr>
+                        <a:t>Investigación académica</a:t>
                       </a:r>
                       <a:endParaRPr lang="en-US" sz="1250" dirty="0">
                         <a:latin typeface="Calibri" charset="0"/>
@@ -8499,7 +12607,7 @@
                           <a:ea typeface="Calibri" pitchFamily="34" charset="-122"/>
                           <a:cs typeface="Calibri" pitchFamily="34" charset="-120"/>
                         </a:rPr>
-                        <a:t>Qué tan útil es para literatura de evaluación y qué le pide al usuario a cambio.</a:t>
+                        <a:t>Buscar literatura que sostenga o contradiga ese hallazgo.</a:t>
                       </a:r>
                       <a:endParaRPr lang="en-US" sz="1250" dirty="0">
                         <a:latin typeface="Calibri" charset="0"/>
@@ -8551,13 +12659,13 @@
                   </a:tcPr>
                 </a:tc>
               </a:tr>
-              <a:tr h="502920">
+              <a:tr h="457200">
                 <a:tc>
                   <a:txBody>
                     <a:bodyPr/>
                     <a:lstStyle/>
                     <a:p>
-                      <a:pPr algn="l" indent="0" marL="0">
+                      <a:pPr algn="ctr" indent="0" marL="0">
                         <a:buNone/>
                       </a:pPr>
                       <a:r>
@@ -8570,6 +12678,74 @@
                           <a:cs typeface="Calibri" pitchFamily="34" charset="-120"/>
                         </a:rPr>
                         <a:t>6</a:t>
+                      </a:r>
+                      <a:endParaRPr lang="en-US" sz="1250" dirty="0">
+                        <a:latin typeface="Calibri" charset="0"/>
+                        <a:ea typeface="Calibri" charset="0"/>
+                        <a:cs typeface="Calibri" charset="0"/>
+                      </a:endParaRPr>
+                    </a:p>
+                  </a:txBody>
+                  <a:tcPr marL="76200" marR="76200" marT="76200" marB="76200" anchor="ctr">
+                    <a:lnL w="12700" cap="flat" cmpd="sng" algn="ctr">
+                      <a:solidFill>
+                        <a:srgbClr val="D5DDE0"/>
+                      </a:solidFill>
+                      <a:prstDash val="solid"/>
+                      <a:round/>
+                      <a:headEnd type="none" w="med" len="med"/>
+                      <a:tailEnd type="none" w="med" len="med"/>
+                    </a:lnL>
+                    <a:lnR w="12700" cap="flat" cmpd="sng" algn="ctr">
+                      <a:solidFill>
+                        <a:srgbClr val="D5DDE0"/>
+                      </a:solidFill>
+                      <a:prstDash val="solid"/>
+                      <a:round/>
+                      <a:headEnd type="none" w="med" len="med"/>
+                      <a:tailEnd type="none" w="med" len="med"/>
+                    </a:lnR>
+                    <a:lnT w="12700" cap="flat" cmpd="sng" algn="ctr">
+                      <a:solidFill>
+                        <a:srgbClr val="D5DDE0"/>
+                      </a:solidFill>
+                      <a:prstDash val="solid"/>
+                      <a:round/>
+                      <a:headEnd type="none" w="med" len="med"/>
+                      <a:tailEnd type="none" w="med" len="med"/>
+                    </a:lnT>
+                    <a:lnB w="12700" cap="flat" cmpd="sng" algn="ctr">
+                      <a:solidFill>
+                        <a:srgbClr val="D5DDE0"/>
+                      </a:solidFill>
+                      <a:prstDash val="solid"/>
+                      <a:round/>
+                      <a:headEnd type="none" w="med" len="med"/>
+                      <a:tailEnd type="none" w="med" len="med"/>
+                    </a:lnB>
+                    <a:solidFill>
+                      <a:srgbClr val="FFFFFF"/>
+                    </a:solidFill>
+                  </a:tcPr>
+                </a:tc>
+                <a:tc>
+                  <a:txBody>
+                    <a:bodyPr/>
+                    <a:lstStyle/>
+                    <a:p>
+                      <a:pPr algn="l" indent="0" marL="0">
+                        <a:buNone/>
+                      </a:pPr>
+                      <a:r>
+                        <a:rPr lang="en-US" sz="1250" dirty="0">
+                          <a:solidFill>
+                            <a:srgbClr val="16262E"/>
+                          </a:solidFill>
+                          <a:latin typeface="Calibri" pitchFamily="34" charset="0"/>
+                          <a:ea typeface="Calibri" pitchFamily="34" charset="-122"/>
+                          <a:cs typeface="Calibri" pitchFamily="34" charset="-120"/>
+                        </a:rPr>
+                        <a:t>Investigación académica</a:t>
                       </a:r>
                       <a:endParaRPr lang="en-US" sz="1250" dirty="0">
                         <a:latin typeface="Calibri" charset="0"/>
@@ -8705,7 +12881,7 @@
                           <a:ea typeface="Calibri" pitchFamily="34" charset="-122"/>
                           <a:cs typeface="Calibri" pitchFamily="34" charset="-120"/>
                         </a:rPr>
-                        <a:t>En qué se diferencia de Elicit y cuándo convendría cada una.</a:t>
+                        <a:t>Lo mismo, y explicar en qué se diferencia de Elicit.</a:t>
                       </a:r>
                       <a:endParaRPr lang="en-US" sz="1250" dirty="0">
                         <a:latin typeface="Calibri" charset="0"/>
@@ -8794,7 +12970,7 @@
                 <a:ea typeface="Calibri" pitchFamily="34" charset="-122"/>
                 <a:cs typeface="Calibri" pitchFamily="34" charset="-120"/>
               </a:rPr>
-              <a:t>Equipo 5: activen la prueba de Elicit hoy y no antes. Son siete días y se acaban el 28 de septiembre.</a:t>
+              <a:t>Equipo 5: activa la prueba de Elicit hoy y no antes. Son siete días y se vencen el 28.</a:t>
             </a:r>
             <a:endParaRPr lang="en-US" sz="1000" dirty="0"/>
           </a:p>
@@ -8808,9 +12984,9 @@
 </p:sld>
 </file>
 
-<file path=ppt/slides/slide7.xml><?xml version="1.0" encoding="utf-8"?>
+<file path=ppt/slides/slide9.xml><?xml version="1.0" encoding="utf-8"?>
 <p:sld xmlns:a="http://schemas.openxmlformats.org/drawingml/2006/main" xmlns:r="http://schemas.openxmlformats.org/officeDocument/2006/relationships" xmlns:p="http://schemas.openxmlformats.org/presentationml/2006/main">
-  <p:cSld name="Slide 7">
+  <p:cSld name="Slide 9">
     <p:spTree>
       <p:nvGrpSpPr>
         <p:cNvPr id="1" name=""/>
@@ -8858,7 +13034,7 @@
                 <a:ea typeface="Arial" pitchFamily="34" charset="-122"/>
                 <a:cs typeface="Arial" pitchFamily="34" charset="-120"/>
               </a:rPr>
-              <a:t>El protocolo de prueba, igual para todos</a:t>
+              <a:t>Las dos mitades del mismo trabajo</a:t>
             </a:r>
             <a:endParaRPr lang="en-US" sz="3200" dirty="0"/>
           </a:p>
@@ -8897,7 +13073,7 @@
                 <a:ea typeface="Calibri" pitchFamily="34" charset="-122"/>
                 <a:cs typeface="Calibri" pitchFamily="34" charset="-120"/>
               </a:rPr>
-              <a:t>Si cada equipo prueba con una pregunta distinta, el cuadro comparativo no compara nada.</a:t>
+              <a:t>No son tareas distintas. Son los dos pasos de cualquier análisis cualitativo serio.</a:t>
             </a:r>
             <a:endParaRPr lang="en-US" sz="1500" dirty="0"/>
           </a:p>
@@ -8911,12 +13087,12 @@
         </p:nvSpPr>
         <p:spPr>
           <a:xfrm>
-            <a:off x="566928" y="2011680"/>
-            <a:ext cx="2558720" cy="2296160"/>
+            <a:off x="566928" y="1810512"/>
+            <a:ext cx="5364328" cy="3152394"/>
           </a:xfrm>
           <a:prstGeom prst="roundRect">
             <a:avLst>
-              <a:gd name="adj" fmla="val 3186"/>
+              <a:gd name="adj" fmla="val 2321"/>
             </a:avLst>
           </a:prstGeom>
           <a:solidFill>
@@ -8938,11 +13114,13 @@
         </p:nvSpPr>
         <p:spPr>
           <a:xfrm>
-            <a:off x="804672" y="2231136"/>
-            <a:ext cx="420624" cy="420624"/>
-          </a:xfrm>
-          <a:prstGeom prst="ellipse">
-            <a:avLst/>
+            <a:off x="566928" y="1810512"/>
+            <a:ext cx="5364328" cy="658368"/>
+          </a:xfrm>
+          <a:prstGeom prst="roundRect">
+            <a:avLst>
+              <a:gd name="adj" fmla="val 11111"/>
+            </a:avLst>
           </a:prstGeom>
           <a:solidFill>
             <a:srgbClr val="2E7D7D"/>
@@ -8957,163 +13135,16 @@
       </p:sp>
       <p:sp>
         <p:nvSpPr>
-          <p:cNvPr id="6" name="Text 4"/>
-          <p:cNvSpPr txBox="1"/>
-          <p:nvPr/>
-        </p:nvSpPr>
-        <p:spPr>
-          <a:xfrm>
-            <a:off x="804672" y="2231136"/>
-            <a:ext cx="420624" cy="420624"/>
+          <p:cNvPr id="6" name="Shape 4"/>
+          <p:cNvSpPr/>
+          <p:nvPr/>
+        </p:nvSpPr>
+        <p:spPr>
+          <a:xfrm>
+            <a:off x="566928" y="2176272"/>
+            <a:ext cx="5364328" cy="292608"/>
           </a:xfrm>
           <a:prstGeom prst="rect">
-            <a:avLst/>
-          </a:prstGeom>
-          <a:noFill/>
-          <a:ln/>
-        </p:spPr>
-        <p:txBody>
-          <a:bodyPr wrap="square" lIns="0" tIns="0" rIns="0" bIns="0" rtlCol="0" anchor="ctr"/>
-          <a:lstStyle/>
-          <a:p>
-            <a:pPr algn="ctr" indent="0" marL="0">
-              <a:buNone/>
-            </a:pPr>
-            <a:r>
-              <a:rPr lang="en-US" sz="1400" b="1" dirty="0">
-                <a:solidFill>
-                  <a:srgbClr val="FFFFFF"/>
-                </a:solidFill>
-                <a:latin typeface="Arial" pitchFamily="34" charset="0"/>
-                <a:ea typeface="Arial" pitchFamily="34" charset="-122"/>
-                <a:cs typeface="Arial" pitchFamily="34" charset="-120"/>
-              </a:rPr>
-              <a:t>1</a:t>
-            </a:r>
-            <a:endParaRPr lang="en-US" sz="1400" dirty="0"/>
-          </a:p>
-        </p:txBody>
-      </p:sp>
-      <p:sp>
-        <p:nvSpPr>
-          <p:cNvPr id="7" name="Text 5"/>
-          <p:cNvSpPr txBox="1"/>
-          <p:nvPr/>
-        </p:nvSpPr>
-        <p:spPr>
-          <a:xfrm>
-            <a:off x="804672" y="2798064"/>
-            <a:ext cx="2083232" cy="457200"/>
-          </a:xfrm>
-          <a:prstGeom prst="rect">
-            <a:avLst/>
-          </a:prstGeom>
-          <a:noFill/>
-          <a:ln/>
-        </p:spPr>
-        <p:txBody>
-          <a:bodyPr wrap="square" lIns="0" tIns="0" rIns="0" bIns="0" rtlCol="0" anchor="t"/>
-          <a:lstStyle/>
-          <a:p>
-            <a:pPr indent="0" marL="0">
-              <a:buNone/>
-            </a:pPr>
-            <a:r>
-              <a:rPr lang="en-US" sz="1600" b="1" dirty="0">
-                <a:solidFill>
-                  <a:srgbClr val="16262E"/>
-                </a:solidFill>
-                <a:latin typeface="Arial" pitchFamily="34" charset="0"/>
-                <a:ea typeface="Arial" pitchFamily="34" charset="-122"/>
-                <a:cs typeface="Arial" pitchFamily="34" charset="-120"/>
-              </a:rPr>
-              <a:t>Una sola pregunta</a:t>
-            </a:r>
-            <a:endParaRPr lang="en-US" sz="1600" dirty="0"/>
-          </a:p>
-        </p:txBody>
-      </p:sp>
-      <p:sp>
-        <p:nvSpPr>
-          <p:cNvPr id="8" name="Text 6"/>
-          <p:cNvSpPr txBox="1"/>
-          <p:nvPr/>
-        </p:nvSpPr>
-        <p:spPr>
-          <a:xfrm>
-            <a:off x="804672" y="3273552"/>
-            <a:ext cx="2083232" cy="796544"/>
-          </a:xfrm>
-          <a:prstGeom prst="rect">
-            <a:avLst/>
-          </a:prstGeom>
-          <a:noFill/>
-          <a:ln/>
-        </p:spPr>
-        <p:txBody>
-          <a:bodyPr wrap="square" lIns="0" tIns="0" rIns="0" bIns="0" rtlCol="0" anchor="t"/>
-          <a:lstStyle/>
-          <a:p>
-            <a:pPr indent="0" marL="0">
-              <a:lnSpc>
-                <a:spcPct val="110000"/>
-              </a:lnSpc>
-              <a:buNone/>
-            </a:pPr>
-            <a:r>
-              <a:rPr lang="en-US" sz="1300" dirty="0">
-                <a:solidFill>
-                  <a:srgbClr val="16262E"/>
-                </a:solidFill>
-                <a:latin typeface="Calibri" pitchFamily="34" charset="0"/>
-                <a:ea typeface="Calibri" pitchFamily="34" charset="-122"/>
-                <a:cs typeface="Calibri" pitchFamily="34" charset="-120"/>
-              </a:rPr>
-              <a:t>La acordamos entre todos ahora y todos los equipos usan exactamente la misma, con Copilot y con su herramienta asignada.</a:t>
-            </a:r>
-            <a:endParaRPr lang="en-US" sz="1300" dirty="0"/>
-          </a:p>
-        </p:txBody>
-      </p:sp>
-      <p:sp>
-        <p:nvSpPr>
-          <p:cNvPr id="9" name="Shape 7"/>
-          <p:cNvSpPr/>
-          <p:nvPr/>
-        </p:nvSpPr>
-        <p:spPr>
-          <a:xfrm>
-            <a:off x="3399968" y="2011680"/>
-            <a:ext cx="2558720" cy="2296160"/>
-          </a:xfrm>
-          <a:prstGeom prst="roundRect">
-            <a:avLst>
-              <a:gd name="adj" fmla="val 3186"/>
-            </a:avLst>
-          </a:prstGeom>
-          <a:solidFill>
-            <a:srgbClr val="F2F5F6"/>
-          </a:solidFill>
-          <a:ln w="12700">
-            <a:solidFill>
-              <a:srgbClr val="F2F5F6"/>
-            </a:solidFill>
-            <a:prstDash val="solid"/>
-          </a:ln>
-        </p:spPr>
-      </p:sp>
-      <p:sp>
-        <p:nvSpPr>
-          <p:cNvPr id="10" name="Shape 8"/>
-          <p:cNvSpPr/>
-          <p:nvPr/>
-        </p:nvSpPr>
-        <p:spPr>
-          <a:xfrm>
-            <a:off x="3637712" y="2231136"/>
-            <a:ext cx="420624" cy="420624"/>
-          </a:xfrm>
-          <a:prstGeom prst="ellipse">
             <a:avLst/>
           </a:prstGeom>
           <a:solidFill>
@@ -9129,14 +13160,14 @@
       </p:sp>
       <p:sp>
         <p:nvSpPr>
-          <p:cNvPr id="11" name="Text 9"/>
+          <p:cNvPr id="7" name="Text 5"/>
           <p:cNvSpPr txBox="1"/>
           <p:nvPr/>
         </p:nvSpPr>
         <p:spPr>
           <a:xfrm>
-            <a:off x="3637712" y="2231136"/>
-            <a:ext cx="420624" cy="420624"/>
+            <a:off x="822960" y="1810512"/>
+            <a:ext cx="4852264" cy="658368"/>
           </a:xfrm>
           <a:prstGeom prst="rect">
             <a:avLst/>
@@ -9148,11 +13179,11 @@
           <a:bodyPr wrap="square" lIns="0" tIns="0" rIns="0" bIns="0" rtlCol="0" anchor="ctr"/>
           <a:lstStyle/>
           <a:p>
-            <a:pPr algn="ctr" indent="0" marL="0">
-              <a:buNone/>
-            </a:pPr>
-            <a:r>
-              <a:rPr lang="en-US" sz="1400" b="1" dirty="0">
+            <a:pPr indent="0" marL="0">
+              <a:buNone/>
+            </a:pPr>
+            <a:r>
+              <a:rPr lang="en-US" sz="1700" b="1" dirty="0">
                 <a:solidFill>
                   <a:srgbClr val="FFFFFF"/>
                 </a:solidFill>
@@ -9160,22 +13191,22 @@
                 <a:ea typeface="Arial" pitchFamily="34" charset="-122"/>
                 <a:cs typeface="Arial" pitchFamily="34" charset="-120"/>
               </a:rPr>
-              <a:t>2</a:t>
-            </a:r>
-            <a:endParaRPr lang="en-US" sz="1400" dirty="0"/>
-          </a:p>
-        </p:txBody>
-      </p:sp>
-      <p:sp>
-        <p:nvSpPr>
-          <p:cNvPr id="12" name="Text 10"/>
+              <a:t>Equipos 1 a 3: codificar</a:t>
+            </a:r>
+            <a:endParaRPr lang="en-US" sz="1700" dirty="0"/>
+          </a:p>
+        </p:txBody>
+      </p:sp>
+      <p:sp>
+        <p:nvSpPr>
+          <p:cNvPr id="8" name="Text 6"/>
           <p:cNvSpPr txBox="1"/>
           <p:nvPr/>
         </p:nvSpPr>
         <p:spPr>
           <a:xfrm>
-            <a:off x="3637712" y="2798064"/>
-            <a:ext cx="2083232" cy="457200"/>
+            <a:off x="822960" y="2679192"/>
+            <a:ext cx="4852264" cy="2055114"/>
           </a:xfrm>
           <a:prstGeom prst="rect">
             <a:avLst/>
@@ -9188,52 +13219,16 @@
           <a:lstStyle/>
           <a:p>
             <a:pPr indent="0" marL="0">
-              <a:buNone/>
-            </a:pPr>
-            <a:r>
-              <a:rPr lang="en-US" sz="1600" b="1" dirty="0">
-                <a:solidFill>
-                  <a:srgbClr val="16262E"/>
-                </a:solidFill>
-                <a:latin typeface="Arial" pitchFamily="34" charset="0"/>
-                <a:ea typeface="Arial" pitchFamily="34" charset="-122"/>
-                <a:cs typeface="Arial" pitchFamily="34" charset="-120"/>
-              </a:rPr>
-              <a:t>Copilot primero</a:t>
-            </a:r>
-            <a:endParaRPr lang="en-US" sz="1600" dirty="0"/>
-          </a:p>
-        </p:txBody>
-      </p:sp>
-      <p:sp>
-        <p:nvSpPr>
-          <p:cNvPr id="13" name="Text 11"/>
-          <p:cNvSpPr txBox="1"/>
-          <p:nvPr/>
-        </p:nvSpPr>
-        <p:spPr>
-          <a:xfrm>
-            <a:off x="3637712" y="3273552"/>
-            <a:ext cx="2083232" cy="796544"/>
-          </a:xfrm>
-          <a:prstGeom prst="rect">
-            <a:avLst/>
-          </a:prstGeom>
-          <a:noFill/>
-          <a:ln/>
-        </p:spPr>
-        <p:txBody>
-          <a:bodyPr wrap="square" lIns="0" tIns="0" rIns="0" bIns="0" rtlCol="0" anchor="t"/>
-          <a:lstStyle/>
-          <a:p>
-            <a:pPr indent="0" marL="0">
               <a:lnSpc>
-                <a:spcPct val="110000"/>
+                <a:spcPct val="115000"/>
               </a:lnSpc>
-              <a:buNone/>
-            </a:pPr>
-            <a:r>
-              <a:rPr lang="en-US" sz="1300" dirty="0">
+              <a:spcAft>
+                <a:spcPts val="600"/>
+              </a:spcAft>
+              <a:buNone/>
+            </a:pPr>
+            <a:r>
+              <a:rPr lang="en-US" sz="1400" dirty="0">
                 <a:solidFill>
                   <a:srgbClr val="16262E"/>
                 </a:solidFill>
@@ -9241,171 +13236,22 @@
                 <a:ea typeface="Calibri" pitchFamily="34" charset="-122"/>
                 <a:cs typeface="Calibri" pitchFamily="34" charset="-120"/>
               </a:rPr>
-              <a:t>Quince minutos. Es el punto de comparación de todos. Anoten qué les devolvió y cuánto tardaron.</a:t>
-            </a:r>
-            <a:endParaRPr lang="en-US" sz="1300" dirty="0"/>
-          </a:p>
-        </p:txBody>
-      </p:sp>
-      <p:sp>
-        <p:nvSpPr>
-          <p:cNvPr id="14" name="Shape 12"/>
-          <p:cNvSpPr/>
-          <p:nvPr/>
-        </p:nvSpPr>
-        <p:spPr>
-          <a:xfrm>
-            <a:off x="6233008" y="2011680"/>
-            <a:ext cx="2558720" cy="2296160"/>
-          </a:xfrm>
-          <a:prstGeom prst="roundRect">
-            <a:avLst>
-              <a:gd name="adj" fmla="val 3186"/>
-            </a:avLst>
-          </a:prstGeom>
-          <a:solidFill>
-            <a:srgbClr val="F2F5F6"/>
-          </a:solidFill>
-          <a:ln w="12700">
-            <a:solidFill>
-              <a:srgbClr val="F2F5F6"/>
-            </a:solidFill>
-            <a:prstDash val="solid"/>
-          </a:ln>
-        </p:spPr>
-      </p:sp>
-      <p:sp>
-        <p:nvSpPr>
-          <p:cNvPr id="15" name="Shape 13"/>
-          <p:cNvSpPr/>
-          <p:nvPr/>
-        </p:nvSpPr>
-        <p:spPr>
-          <a:xfrm>
-            <a:off x="6470752" y="2231136"/>
-            <a:ext cx="420624" cy="420624"/>
-          </a:xfrm>
-          <a:prstGeom prst="ellipse">
-            <a:avLst/>
-          </a:prstGeom>
-          <a:solidFill>
-            <a:srgbClr val="2E7D7D"/>
-          </a:solidFill>
-          <a:ln w="12700">
-            <a:solidFill>
-              <a:srgbClr val="2E7D7D"/>
-            </a:solidFill>
-            <a:prstDash val="solid"/>
-          </a:ln>
-        </p:spPr>
-      </p:sp>
-      <p:sp>
-        <p:nvSpPr>
-          <p:cNvPr id="16" name="Text 14"/>
-          <p:cNvSpPr txBox="1"/>
-          <p:nvPr/>
-        </p:nvSpPr>
-        <p:spPr>
-          <a:xfrm>
-            <a:off x="6470752" y="2231136"/>
-            <a:ext cx="420624" cy="420624"/>
-          </a:xfrm>
-          <a:prstGeom prst="rect">
-            <a:avLst/>
-          </a:prstGeom>
-          <a:noFill/>
-          <a:ln/>
-        </p:spPr>
-        <p:txBody>
-          <a:bodyPr wrap="square" lIns="0" tIns="0" rIns="0" bIns="0" rtlCol="0" anchor="ctr"/>
-          <a:lstStyle/>
-          <a:p>
-            <a:pPr algn="ctr" indent="0" marL="0">
-              <a:buNone/>
-            </a:pPr>
-            <a:r>
-              <a:rPr lang="en-US" sz="1400" b="1" dirty="0">
-                <a:solidFill>
-                  <a:srgbClr val="FFFFFF"/>
-                </a:solidFill>
-                <a:latin typeface="Arial" pitchFamily="34" charset="0"/>
-                <a:ea typeface="Arial" pitchFamily="34" charset="-122"/>
-                <a:cs typeface="Arial" pitchFamily="34" charset="-120"/>
-              </a:rPr>
-              <a:t>3</a:t>
+              <a:t>Toman el corpus de 118 registros del viernes y su libro de códigos ya ratificado.</a:t>
             </a:r>
             <a:endParaRPr lang="en-US" sz="1400" dirty="0"/>
           </a:p>
-        </p:txBody>
-      </p:sp>
-      <p:sp>
-        <p:nvSpPr>
-          <p:cNvPr id="17" name="Text 15"/>
-          <p:cNvSpPr txBox="1"/>
-          <p:nvPr/>
-        </p:nvSpPr>
-        <p:spPr>
-          <a:xfrm>
-            <a:off x="6470752" y="2798064"/>
-            <a:ext cx="2083232" cy="457200"/>
-          </a:xfrm>
-          <a:prstGeom prst="rect">
-            <a:avLst/>
-          </a:prstGeom>
-          <a:noFill/>
-          <a:ln/>
-        </p:spPr>
-        <p:txBody>
-          <a:bodyPr wrap="square" lIns="0" tIns="0" rIns="0" bIns="0" rtlCol="0" anchor="t"/>
-          <a:lstStyle/>
-          <a:p>
-            <a:pPr indent="0" marL="0">
-              <a:buNone/>
-            </a:pPr>
-            <a:r>
-              <a:rPr lang="en-US" sz="1600" b="1" dirty="0">
-                <a:solidFill>
-                  <a:srgbClr val="16262E"/>
-                </a:solidFill>
-                <a:latin typeface="Arial" pitchFamily="34" charset="0"/>
-                <a:ea typeface="Arial" pitchFamily="34" charset="-122"/>
-                <a:cs typeface="Arial" pitchFamily="34" charset="-120"/>
-              </a:rPr>
-              <a:t>Su herramienta después</a:t>
-            </a:r>
-            <a:endParaRPr lang="en-US" sz="1600" dirty="0"/>
-          </a:p>
-        </p:txBody>
-      </p:sp>
-      <p:sp>
-        <p:nvSpPr>
-          <p:cNvPr id="18" name="Text 16"/>
-          <p:cNvSpPr txBox="1"/>
-          <p:nvPr/>
-        </p:nvSpPr>
-        <p:spPr>
-          <a:xfrm>
-            <a:off x="6470752" y="3273552"/>
-            <a:ext cx="2083232" cy="796544"/>
-          </a:xfrm>
-          <a:prstGeom prst="rect">
-            <a:avLst/>
-          </a:prstGeom>
-          <a:noFill/>
-          <a:ln/>
-        </p:spPr>
-        <p:txBody>
-          <a:bodyPr wrap="square" lIns="0" tIns="0" rIns="0" bIns="0" rtlCol="0" anchor="t"/>
-          <a:lstStyle/>
           <a:p>
             <a:pPr indent="0" marL="0">
               <a:lnSpc>
-                <a:spcPct val="110000"/>
+                <a:spcPct val="115000"/>
               </a:lnSpc>
-              <a:buNone/>
-            </a:pPr>
-            <a:r>
-              <a:rPr lang="en-US" sz="1300" dirty="0">
+              <a:spcAft>
+                <a:spcPts val="600"/>
+              </a:spcAft>
+              <a:buNone/>
+            </a:pPr>
+            <a:r>
+              <a:rPr lang="en-US" sz="1400" dirty="0">
                 <a:solidFill>
                   <a:srgbClr val="16262E"/>
                 </a:solidFill>
@@ -9413,26 +13259,72 @@
                 <a:ea typeface="Calibri" pitchFamily="34" charset="-122"/>
                 <a:cs typeface="Calibri" pitchFamily="34" charset="-120"/>
               </a:rPr>
-              <a:t>Treinta minutos. La misma pregunta, el mismo insumo. Busquen la diferencia, no la repetición.</a:t>
-            </a:r>
-            <a:endParaRPr lang="en-US" sz="1300" dirty="0"/>
-          </a:p>
-        </p:txBody>
-      </p:sp>
-      <p:sp>
-        <p:nvSpPr>
-          <p:cNvPr id="19" name="Shape 17"/>
+              <a:t>Lo aplican con su herramienta asignada, no con Copilot.</a:t>
+            </a:r>
+            <a:endParaRPr lang="en-US" sz="1400" dirty="0"/>
+          </a:p>
+          <a:p>
+            <a:pPr indent="0" marL="0">
+              <a:lnSpc>
+                <a:spcPct val="115000"/>
+              </a:lnSpc>
+              <a:spcAft>
+                <a:spcPts val="600"/>
+              </a:spcAft>
+              <a:buNone/>
+            </a:pPr>
+            <a:r>
+              <a:rPr lang="en-US" sz="1400" dirty="0">
+                <a:solidFill>
+                  <a:srgbClr val="16262E"/>
+                </a:solidFill>
+                <a:latin typeface="Calibri" pitchFamily="34" charset="0"/>
+                <a:ea typeface="Calibri" pitchFamily="34" charset="-122"/>
+                <a:cs typeface="Calibri" pitchFamily="34" charset="-120"/>
+              </a:rPr>
+              <a:t>Después clasifican postura y causa raíz sobre las transcripciones de foro.</a:t>
+            </a:r>
+            <a:endParaRPr lang="en-US" sz="1400" dirty="0"/>
+          </a:p>
+          <a:p>
+            <a:pPr indent="0" marL="0">
+              <a:lnSpc>
+                <a:spcPct val="115000"/>
+              </a:lnSpc>
+              <a:spcAft>
+                <a:spcPts val="600"/>
+              </a:spcAft>
+              <a:buNone/>
+            </a:pPr>
+            <a:r>
+              <a:rPr lang="en-US" sz="1400" dirty="0">
+                <a:solidFill>
+                  <a:srgbClr val="16262E"/>
+                </a:solidFill>
+                <a:latin typeface="Calibri" pitchFamily="34" charset="0"/>
+                <a:ea typeface="Calibri" pitchFamily="34" charset="-122"/>
+                <a:cs typeface="Calibri" pitchFamily="34" charset="-120"/>
+              </a:rPr>
+              <a:t>Y comparan, registro por registro, contra lo que les dio Copilot el viernes.</a:t>
+            </a:r>
+            <a:endParaRPr lang="en-US" sz="1400" dirty="0"/>
+          </a:p>
+        </p:txBody>
+      </p:sp>
+      <p:sp>
+        <p:nvSpPr>
+          <p:cNvPr id="9" name="Shape 7"/>
           <p:cNvSpPr/>
           <p:nvPr/>
         </p:nvSpPr>
         <p:spPr>
           <a:xfrm>
-            <a:off x="9066047" y="2011680"/>
-            <a:ext cx="2558720" cy="2296160"/>
+            <a:off x="6260440" y="1810512"/>
+            <a:ext cx="5364328" cy="3152394"/>
           </a:xfrm>
           <a:prstGeom prst="roundRect">
             <a:avLst>
-              <a:gd name="adj" fmla="val 3186"/>
+              <a:gd name="adj" fmla="val 2321"/>
             </a:avLst>
           </a:prstGeom>
           <a:solidFill>
@@ -9448,17 +13340,19 @@
       </p:sp>
       <p:sp>
         <p:nvSpPr>
-          <p:cNvPr id="20" name="Shape 18"/>
+          <p:cNvPr id="10" name="Shape 8"/>
           <p:cNvSpPr/>
           <p:nvPr/>
         </p:nvSpPr>
         <p:spPr>
           <a:xfrm>
-            <a:off x="9303791" y="2231136"/>
-            <a:ext cx="420624" cy="420624"/>
-          </a:xfrm>
-          <a:prstGeom prst="ellipse">
-            <a:avLst/>
+            <a:off x="6260440" y="1810512"/>
+            <a:ext cx="5364328" cy="658368"/>
+          </a:xfrm>
+          <a:prstGeom prst="roundRect">
+            <a:avLst>
+              <a:gd name="adj" fmla="val 11111"/>
+            </a:avLst>
           </a:prstGeom>
           <a:solidFill>
             <a:srgbClr val="C85A28"/>
@@ -9473,237 +13367,17 @@
       </p:sp>
       <p:sp>
         <p:nvSpPr>
-          <p:cNvPr id="21" name="Text 19"/>
-          <p:cNvSpPr txBox="1"/>
-          <p:nvPr/>
-        </p:nvSpPr>
-        <p:spPr>
-          <a:xfrm>
-            <a:off x="9303791" y="2231136"/>
-            <a:ext cx="420624" cy="420624"/>
+          <p:cNvPr id="11" name="Shape 9"/>
+          <p:cNvSpPr/>
+          <p:nvPr/>
+        </p:nvSpPr>
+        <p:spPr>
+          <a:xfrm>
+            <a:off x="6260440" y="2176272"/>
+            <a:ext cx="5364328" cy="292608"/>
           </a:xfrm>
           <a:prstGeom prst="rect">
             <a:avLst/>
-          </a:prstGeom>
-          <a:noFill/>
-          <a:ln/>
-        </p:spPr>
-        <p:txBody>
-          <a:bodyPr wrap="square" lIns="0" tIns="0" rIns="0" bIns="0" rtlCol="0" anchor="ctr"/>
-          <a:lstStyle/>
-          <a:p>
-            <a:pPr algn="ctr" indent="0" marL="0">
-              <a:buNone/>
-            </a:pPr>
-            <a:r>
-              <a:rPr lang="en-US" sz="1400" b="1" dirty="0">
-                <a:solidFill>
-                  <a:srgbClr val="FFFFFF"/>
-                </a:solidFill>
-                <a:latin typeface="Arial" pitchFamily="34" charset="0"/>
-                <a:ea typeface="Arial" pitchFamily="34" charset="-122"/>
-                <a:cs typeface="Arial" pitchFamily="34" charset="-120"/>
-              </a:rPr>
-              <a:t>4</a:t>
-            </a:r>
-            <a:endParaRPr lang="en-US" sz="1400" dirty="0"/>
-          </a:p>
-        </p:txBody>
-      </p:sp>
-      <p:sp>
-        <p:nvSpPr>
-          <p:cNvPr id="22" name="Text 20"/>
-          <p:cNvSpPr txBox="1"/>
-          <p:nvPr/>
-        </p:nvSpPr>
-        <p:spPr>
-          <a:xfrm>
-            <a:off x="9303791" y="2798064"/>
-            <a:ext cx="2083232" cy="457200"/>
-          </a:xfrm>
-          <a:prstGeom prst="rect">
-            <a:avLst/>
-          </a:prstGeom>
-          <a:noFill/>
-          <a:ln/>
-        </p:spPr>
-        <p:txBody>
-          <a:bodyPr wrap="square" lIns="0" tIns="0" rIns="0" bIns="0" rtlCol="0" anchor="t"/>
-          <a:lstStyle/>
-          <a:p>
-            <a:pPr indent="0" marL="0">
-              <a:buNone/>
-            </a:pPr>
-            <a:r>
-              <a:rPr lang="en-US" sz="1600" b="1" dirty="0">
-                <a:solidFill>
-                  <a:srgbClr val="16262E"/>
-                </a:solidFill>
-                <a:latin typeface="Arial" pitchFamily="34" charset="0"/>
-                <a:ea typeface="Arial" pitchFamily="34" charset="-122"/>
-                <a:cs typeface="Arial" pitchFamily="34" charset="-120"/>
-              </a:rPr>
-              <a:t>Verifiquen una fuente</a:t>
-            </a:r>
-            <a:endParaRPr lang="en-US" sz="1600" dirty="0"/>
-          </a:p>
-        </p:txBody>
-      </p:sp>
-      <p:sp>
-        <p:nvSpPr>
-          <p:cNvPr id="23" name="Text 21"/>
-          <p:cNvSpPr txBox="1"/>
-          <p:nvPr/>
-        </p:nvSpPr>
-        <p:spPr>
-          <a:xfrm>
-            <a:off x="9303791" y="3273552"/>
-            <a:ext cx="2083232" cy="796544"/>
-          </a:xfrm>
-          <a:prstGeom prst="rect">
-            <a:avLst/>
-          </a:prstGeom>
-          <a:noFill/>
-          <a:ln/>
-        </p:spPr>
-        <p:txBody>
-          <a:bodyPr wrap="square" lIns="0" tIns="0" rIns="0" bIns="0" rtlCol="0" anchor="t"/>
-          <a:lstStyle/>
-          <a:p>
-            <a:pPr indent="0" marL="0">
-              <a:lnSpc>
-                <a:spcPct val="110000"/>
-              </a:lnSpc>
-              <a:buNone/>
-            </a:pPr>
-            <a:r>
-              <a:rPr lang="en-US" sz="1300" dirty="0">
-                <a:solidFill>
-                  <a:srgbClr val="16262E"/>
-                </a:solidFill>
-                <a:latin typeface="Calibri" pitchFamily="34" charset="0"/>
-                <a:ea typeface="Calibri" pitchFamily="34" charset="-122"/>
-                <a:cs typeface="Calibri" pitchFamily="34" charset="-120"/>
-              </a:rPr>
-              <a:t>De cada herramienta, tomen una referencia que les haya dado y búsquenla. Anoten si existía.</a:t>
-            </a:r>
-            <a:endParaRPr lang="en-US" sz="1300" dirty="0"/>
-          </a:p>
-        </p:txBody>
-      </p:sp>
-    </p:spTree>
-  </p:cSld>
-  <p:clrMapOvr>
-    <a:masterClrMapping/>
-  </p:clrMapOvr>
-</p:sld>
-</file>
-
-<file path=ppt/slides/slide8.xml><?xml version="1.0" encoding="utf-8"?>
-<p:sld xmlns:a="http://schemas.openxmlformats.org/drawingml/2006/main" xmlns:r="http://schemas.openxmlformats.org/officeDocument/2006/relationships" xmlns:p="http://schemas.openxmlformats.org/presentationml/2006/main">
-  <p:cSld name="Slide 8">
-    <p:bg>
-      <p:bgPr>
-        <a:solidFill>
-          <a:srgbClr val="D7E7E7"/>
-        </a:solidFill>
-      </p:bgPr>
-    </p:bg>
-    <p:spTree>
-      <p:nvGrpSpPr>
-        <p:cNvPr id="1" name=""/>
-        <p:cNvGrpSpPr/>
-        <p:nvPr/>
-      </p:nvGrpSpPr>
-      <p:grpSpPr>
-        <a:xfrm>
-          <a:off x="0" y="0"/>
-          <a:ext cx="0" cy="0"/>
-          <a:chOff x="0" y="0"/>
-          <a:chExt cx="0" cy="0"/>
-        </a:xfrm>
-      </p:grpSpPr>
-      <p:sp>
-        <p:nvSpPr>
-          <p:cNvPr id="2" name="Shape 0"/>
-          <p:cNvSpPr/>
-          <p:nvPr/>
-        </p:nvSpPr>
-        <p:spPr>
-          <a:xfrm>
-            <a:off x="566928" y="457200"/>
-            <a:ext cx="2788920" cy="457200"/>
-          </a:xfrm>
-          <a:prstGeom prst="roundRect">
-            <a:avLst>
-              <a:gd name="adj" fmla="val 50000"/>
-            </a:avLst>
-          </a:prstGeom>
-          <a:solidFill>
-            <a:srgbClr val="2E7D7D"/>
-          </a:solidFill>
-          <a:ln w="12700">
-            <a:solidFill>
-              <a:srgbClr val="2E7D7D"/>
-            </a:solidFill>
-            <a:prstDash val="solid"/>
-          </a:ln>
-        </p:spPr>
-      </p:sp>
-      <p:sp>
-        <p:nvSpPr>
-          <p:cNvPr id="3" name="Text 1"/>
-          <p:cNvSpPr txBox="1"/>
-          <p:nvPr/>
-        </p:nvSpPr>
-        <p:spPr>
-          <a:xfrm>
-            <a:off x="566928" y="457200"/>
-            <a:ext cx="2788920" cy="457200"/>
-          </a:xfrm>
-          <a:prstGeom prst="rect">
-            <a:avLst/>
-          </a:prstGeom>
-          <a:noFill/>
-          <a:ln/>
-        </p:spPr>
-        <p:txBody>
-          <a:bodyPr wrap="square" lIns="0" tIns="0" rIns="0" bIns="0" rtlCol="0" anchor="ctr"/>
-          <a:lstStyle/>
-          <a:p>
-            <a:pPr algn="ctr" indent="0" marL="0">
-              <a:buNone/>
-            </a:pPr>
-            <a:r>
-              <a:rPr lang="en-US" sz="1300" b="1" spc="200" kern="0" dirty="0">
-                <a:solidFill>
-                  <a:srgbClr val="FFFFFF"/>
-                </a:solidFill>
-                <a:latin typeface="Arial" pitchFamily="34" charset="0"/>
-                <a:ea typeface="Arial" pitchFamily="34" charset="-122"/>
-                <a:cs typeface="Arial" pitchFamily="34" charset="-120"/>
-              </a:rPr>
-              <a:t>AHORA USTEDES</a:t>
-            </a:r>
-            <a:endParaRPr lang="en-US" sz="1300" dirty="0"/>
-          </a:p>
-        </p:txBody>
-      </p:sp>
-      <p:sp>
-        <p:nvSpPr>
-          <p:cNvPr id="4" name="Shape 2"/>
-          <p:cNvSpPr/>
-          <p:nvPr/>
-        </p:nvSpPr>
-        <p:spPr>
-          <a:xfrm>
-            <a:off x="9704527" y="457200"/>
-            <a:ext cx="1920240" cy="457200"/>
-          </a:xfrm>
-          <a:prstGeom prst="roundRect">
-            <a:avLst>
-              <a:gd name="adj" fmla="val 50000"/>
-            </a:avLst>
           </a:prstGeom>
           <a:solidFill>
             <a:srgbClr val="C85A28"/>
@@ -9718,14 +13392,14 @@
       </p:sp>
       <p:sp>
         <p:nvSpPr>
-          <p:cNvPr id="5" name="Text 3"/>
+          <p:cNvPr id="12" name="Text 10"/>
           <p:cNvSpPr txBox="1"/>
           <p:nvPr/>
         </p:nvSpPr>
         <p:spPr>
           <a:xfrm>
-            <a:off x="9704527" y="457200"/>
-            <a:ext cx="1920240" cy="457200"/>
+            <a:off x="6516472" y="1810512"/>
+            <a:ext cx="4852264" cy="658368"/>
           </a:xfrm>
           <a:prstGeom prst="rect">
             <a:avLst/>
@@ -9737,11 +13411,11 @@
           <a:bodyPr wrap="square" lIns="0" tIns="0" rIns="0" bIns="0" rtlCol="0" anchor="ctr"/>
           <a:lstStyle/>
           <a:p>
-            <a:pPr algn="ctr" indent="0" marL="0">
-              <a:buNone/>
-            </a:pPr>
-            <a:r>
-              <a:rPr lang="en-US" sz="1300" b="1" dirty="0">
+            <a:pPr indent="0" marL="0">
+              <a:buNone/>
+            </a:pPr>
+            <a:r>
+              <a:rPr lang="en-US" sz="1700" b="1" dirty="0">
                 <a:solidFill>
                   <a:srgbClr val="FFFFFF"/>
                 </a:solidFill>
@@ -9749,22 +13423,22 @@
                 <a:ea typeface="Arial" pitchFamily="34" charset="-122"/>
                 <a:cs typeface="Arial" pitchFamily="34" charset="-120"/>
               </a:rPr>
-              <a:t>45 minutos</a:t>
-            </a:r>
-            <a:endParaRPr lang="en-US" sz="1300" dirty="0"/>
-          </a:p>
-        </p:txBody>
-      </p:sp>
-      <p:sp>
-        <p:nvSpPr>
-          <p:cNvPr id="6" name="Text 4"/>
+              <a:t>Equipos 4 a 6: sustentar</a:t>
+            </a:r>
+            <a:endParaRPr lang="en-US" sz="1700" dirty="0"/>
+          </a:p>
+        </p:txBody>
+      </p:sp>
+      <p:sp>
+        <p:nvSpPr>
+          <p:cNvPr id="13" name="Text 11"/>
           <p:cNvSpPr txBox="1"/>
           <p:nvPr/>
         </p:nvSpPr>
         <p:spPr>
           <a:xfrm>
-            <a:off x="566928" y="1078992"/>
-            <a:ext cx="11057839" cy="685800"/>
+            <a:off x="6516472" y="2679192"/>
+            <a:ext cx="4852264" cy="2055114"/>
           </a:xfrm>
           <a:prstGeom prst="rect">
             <a:avLst/>
@@ -9773,147 +13447,20 @@
           <a:ln/>
         </p:spPr>
         <p:txBody>
-          <a:bodyPr wrap="square" lIns="0" tIns="0" rIns="0" bIns="0" rtlCol="0" anchor="ctr"/>
-          <a:lstStyle/>
-          <a:p>
-            <a:pPr indent="0" marL="0">
-              <a:buNone/>
-            </a:pPr>
-            <a:r>
-              <a:rPr lang="en-US" sz="2900" b="1" dirty="0">
-                <a:solidFill>
-                  <a:srgbClr val="16262E"/>
-                </a:solidFill>
-                <a:latin typeface="Arial" pitchFamily="34" charset="0"/>
-                <a:ea typeface="Arial" pitchFamily="34" charset="-122"/>
-                <a:cs typeface="Arial" pitchFamily="34" charset="-120"/>
-              </a:rPr>
-              <a:t>La misma pregunta, dos herramientas</a:t>
-            </a:r>
-            <a:endParaRPr lang="en-US" sz="2900" dirty="0"/>
-          </a:p>
-        </p:txBody>
-      </p:sp>
-      <p:sp>
-        <p:nvSpPr>
-          <p:cNvPr id="7" name="Shape 5"/>
-          <p:cNvSpPr/>
-          <p:nvPr/>
-        </p:nvSpPr>
-        <p:spPr>
-          <a:xfrm>
-            <a:off x="566928" y="1920240"/>
-            <a:ext cx="11057839" cy="628650"/>
-          </a:xfrm>
-          <a:prstGeom prst="roundRect">
-            <a:avLst>
-              <a:gd name="adj" fmla="val 10182"/>
-            </a:avLst>
-          </a:prstGeom>
-          <a:solidFill>
-            <a:srgbClr val="FFFFFF"/>
-          </a:solidFill>
-          <a:ln w="12700">
-            <a:solidFill>
-              <a:srgbClr val="FFFFFF"/>
-            </a:solidFill>
-            <a:prstDash val="solid"/>
-          </a:ln>
-        </p:spPr>
-      </p:sp>
-      <p:sp>
-        <p:nvSpPr>
-          <p:cNvPr id="8" name="Shape 6"/>
-          <p:cNvSpPr/>
-          <p:nvPr/>
-        </p:nvSpPr>
-        <p:spPr>
-          <a:xfrm>
-            <a:off x="786384" y="2024253"/>
-            <a:ext cx="420624" cy="420624"/>
-          </a:xfrm>
-          <a:prstGeom prst="ellipse">
-            <a:avLst/>
-          </a:prstGeom>
-          <a:solidFill>
-            <a:srgbClr val="2E7D7D"/>
-          </a:solidFill>
-          <a:ln w="12700">
-            <a:solidFill>
-              <a:srgbClr val="2E7D7D"/>
-            </a:solidFill>
-            <a:prstDash val="solid"/>
-          </a:ln>
-        </p:spPr>
-      </p:sp>
-      <p:sp>
-        <p:nvSpPr>
-          <p:cNvPr id="9" name="Text 7"/>
-          <p:cNvSpPr txBox="1"/>
-          <p:nvPr/>
-        </p:nvSpPr>
-        <p:spPr>
-          <a:xfrm>
-            <a:off x="786384" y="2024253"/>
-            <a:ext cx="420624" cy="420624"/>
-          </a:xfrm>
-          <a:prstGeom prst="rect">
-            <a:avLst/>
-          </a:prstGeom>
-          <a:noFill/>
-          <a:ln/>
-        </p:spPr>
-        <p:txBody>
-          <a:bodyPr wrap="square" lIns="0" tIns="0" rIns="0" bIns="0" rtlCol="0" anchor="ctr"/>
-          <a:lstStyle/>
-          <a:p>
-            <a:pPr algn="ctr" indent="0" marL="0">
-              <a:buNone/>
-            </a:pPr>
-            <a:r>
-              <a:rPr lang="en-US" sz="1400" b="1" dirty="0">
-                <a:solidFill>
-                  <a:srgbClr val="FFFFFF"/>
-                </a:solidFill>
-                <a:latin typeface="Arial" pitchFamily="34" charset="0"/>
-                <a:ea typeface="Arial" pitchFamily="34" charset="-122"/>
-                <a:cs typeface="Arial" pitchFamily="34" charset="-120"/>
-              </a:rPr>
-              <a:t>1</a:t>
-            </a:r>
-            <a:endParaRPr lang="en-US" sz="1400" dirty="0"/>
-          </a:p>
-        </p:txBody>
-      </p:sp>
-      <p:sp>
-        <p:nvSpPr>
-          <p:cNvPr id="10" name="Text 8"/>
-          <p:cNvSpPr txBox="1"/>
-          <p:nvPr/>
-        </p:nvSpPr>
-        <p:spPr>
-          <a:xfrm>
-            <a:off x="1408176" y="2011680"/>
-            <a:ext cx="9960559" cy="445770"/>
-          </a:xfrm>
-          <a:prstGeom prst="rect">
-            <a:avLst/>
-          </a:prstGeom>
-          <a:noFill/>
-          <a:ln/>
-        </p:spPr>
-        <p:txBody>
-          <a:bodyPr wrap="square" lIns="0" tIns="0" rIns="0" bIns="0" rtlCol="0" anchor="ctr"/>
+          <a:bodyPr wrap="square" lIns="0" tIns="0" rIns="0" bIns="0" rtlCol="0" anchor="t"/>
           <a:lstStyle/>
           <a:p>
             <a:pPr indent="0" marL="0">
               <a:lnSpc>
-                <a:spcPct val="110000"/>
+                <a:spcPct val="115000"/>
               </a:lnSpc>
-              <a:buNone/>
-            </a:pPr>
-            <a:r>
-              <a:rPr lang="en-US" sz="1450" dirty="0">
+              <a:spcAft>
+                <a:spcPts val="600"/>
+              </a:spcAft>
+              <a:buNone/>
+            </a:pPr>
+            <a:r>
+              <a:rPr lang="en-US" sz="1400" dirty="0">
                 <a:solidFill>
                   <a:srgbClr val="16262E"/>
                 </a:solidFill>
@@ -9921,132 +13468,22 @@
                 <a:ea typeface="Calibri" pitchFamily="34" charset="-122"/>
                 <a:cs typeface="Calibri" pitchFamily="34" charset="-120"/>
               </a:rPr>
-              <a:t>Quince minutos con Copilot sobre documentos institucionales de SharePoint. Este es el punto de comparación de todos los equipos.</a:t>
-            </a:r>
-            <a:endParaRPr lang="en-US" sz="1450" dirty="0"/>
-          </a:p>
-        </p:txBody>
-      </p:sp>
-      <p:sp>
-        <p:nvSpPr>
-          <p:cNvPr id="11" name="Shape 9"/>
-          <p:cNvSpPr/>
-          <p:nvPr/>
-        </p:nvSpPr>
-        <p:spPr>
-          <a:xfrm>
-            <a:off x="566928" y="2731770"/>
-            <a:ext cx="11057839" cy="628650"/>
-          </a:xfrm>
-          <a:prstGeom prst="roundRect">
-            <a:avLst>
-              <a:gd name="adj" fmla="val 10182"/>
-            </a:avLst>
-          </a:prstGeom>
-          <a:solidFill>
-            <a:srgbClr val="FFFFFF"/>
-          </a:solidFill>
-          <a:ln w="12700">
-            <a:solidFill>
-              <a:srgbClr val="FFFFFF"/>
-            </a:solidFill>
-            <a:prstDash val="solid"/>
-          </a:ln>
-        </p:spPr>
-      </p:sp>
-      <p:sp>
-        <p:nvSpPr>
-          <p:cNvPr id="12" name="Shape 10"/>
-          <p:cNvSpPr/>
-          <p:nvPr/>
-        </p:nvSpPr>
-        <p:spPr>
-          <a:xfrm>
-            <a:off x="786384" y="2835783"/>
-            <a:ext cx="420624" cy="420624"/>
-          </a:xfrm>
-          <a:prstGeom prst="ellipse">
-            <a:avLst/>
-          </a:prstGeom>
-          <a:solidFill>
-            <a:srgbClr val="2E7D7D"/>
-          </a:solidFill>
-          <a:ln w="12700">
-            <a:solidFill>
-              <a:srgbClr val="2E7D7D"/>
-            </a:solidFill>
-            <a:prstDash val="solid"/>
-          </a:ln>
-        </p:spPr>
-      </p:sp>
-      <p:sp>
-        <p:nvSpPr>
-          <p:cNvPr id="13" name="Text 11"/>
-          <p:cNvSpPr txBox="1"/>
-          <p:nvPr/>
-        </p:nvSpPr>
-        <p:spPr>
-          <a:xfrm>
-            <a:off x="786384" y="2835783"/>
-            <a:ext cx="420624" cy="420624"/>
-          </a:xfrm>
-          <a:prstGeom prst="rect">
-            <a:avLst/>
-          </a:prstGeom>
-          <a:noFill/>
-          <a:ln/>
-        </p:spPr>
-        <p:txBody>
-          <a:bodyPr wrap="square" lIns="0" tIns="0" rIns="0" bIns="0" rtlCol="0" anchor="ctr"/>
-          <a:lstStyle/>
-          <a:p>
-            <a:pPr algn="ctr" indent="0" marL="0">
-              <a:buNone/>
-            </a:pPr>
-            <a:r>
-              <a:rPr lang="en-US" sz="1400" b="1" dirty="0">
-                <a:solidFill>
-                  <a:srgbClr val="FFFFFF"/>
-                </a:solidFill>
-                <a:latin typeface="Arial" pitchFamily="34" charset="0"/>
-                <a:ea typeface="Arial" pitchFamily="34" charset="-122"/>
-                <a:cs typeface="Arial" pitchFamily="34" charset="-120"/>
-              </a:rPr>
-              <a:t>2</a:t>
+              <a:t>Toman un hallazgo que salió de la codificación del viernes.</a:t>
             </a:r>
             <a:endParaRPr lang="en-US" sz="1400" dirty="0"/>
           </a:p>
-        </p:txBody>
-      </p:sp>
-      <p:sp>
-        <p:nvSpPr>
-          <p:cNvPr id="14" name="Text 12"/>
-          <p:cNvSpPr txBox="1"/>
-          <p:nvPr/>
-        </p:nvSpPr>
-        <p:spPr>
-          <a:xfrm>
-            <a:off x="1408176" y="2823210"/>
-            <a:ext cx="9960559" cy="445770"/>
-          </a:xfrm>
-          <a:prstGeom prst="rect">
-            <a:avLst/>
-          </a:prstGeom>
-          <a:noFill/>
-          <a:ln/>
-        </p:spPr>
-        <p:txBody>
-          <a:bodyPr wrap="square" lIns="0" tIns="0" rIns="0" bIns="0" rtlCol="0" anchor="ctr"/>
-          <a:lstStyle/>
           <a:p>
             <a:pPr indent="0" marL="0">
               <a:lnSpc>
-                <a:spcPct val="110000"/>
+                <a:spcPct val="115000"/>
               </a:lnSpc>
-              <a:buNone/>
-            </a:pPr>
-            <a:r>
-              <a:rPr lang="en-US" sz="1450" dirty="0">
+              <a:spcAft>
+                <a:spcPts val="600"/>
+              </a:spcAft>
+              <a:buNone/>
+            </a:pPr>
+            <a:r>
+              <a:rPr lang="en-US" sz="1400" dirty="0">
                 <a:solidFill>
                   <a:srgbClr val="16262E"/>
                 </a:solidFill>
@@ -10054,132 +13491,22 @@
                 <a:ea typeface="Calibri" pitchFamily="34" charset="-122"/>
                 <a:cs typeface="Calibri" pitchFamily="34" charset="-120"/>
               </a:rPr>
-              <a:t>Treinta minutos con su herramienta asignada, con la misma pregunta y el mismo insumo. Recuerden que estas operan con plan gratuito: solo información pública.</a:t>
-            </a:r>
-            <a:endParaRPr lang="en-US" sz="1450" dirty="0"/>
-          </a:p>
-        </p:txBody>
-      </p:sp>
-      <p:sp>
-        <p:nvSpPr>
-          <p:cNvPr id="15" name="Shape 13"/>
-          <p:cNvSpPr/>
-          <p:nvPr/>
-        </p:nvSpPr>
-        <p:spPr>
-          <a:xfrm>
-            <a:off x="566928" y="3543300"/>
-            <a:ext cx="11057839" cy="628650"/>
-          </a:xfrm>
-          <a:prstGeom prst="roundRect">
-            <a:avLst>
-              <a:gd name="adj" fmla="val 10182"/>
-            </a:avLst>
-          </a:prstGeom>
-          <a:solidFill>
-            <a:srgbClr val="FFFFFF"/>
-          </a:solidFill>
-          <a:ln w="12700">
-            <a:solidFill>
-              <a:srgbClr val="FFFFFF"/>
-            </a:solidFill>
-            <a:prstDash val="solid"/>
-          </a:ln>
-        </p:spPr>
-      </p:sp>
-      <p:sp>
-        <p:nvSpPr>
-          <p:cNvPr id="16" name="Shape 14"/>
-          <p:cNvSpPr/>
-          <p:nvPr/>
-        </p:nvSpPr>
-        <p:spPr>
-          <a:xfrm>
-            <a:off x="786384" y="3647313"/>
-            <a:ext cx="420624" cy="420624"/>
-          </a:xfrm>
-          <a:prstGeom prst="ellipse">
-            <a:avLst/>
-          </a:prstGeom>
-          <a:solidFill>
-            <a:srgbClr val="2E7D7D"/>
-          </a:solidFill>
-          <a:ln w="12700">
-            <a:solidFill>
-              <a:srgbClr val="2E7D7D"/>
-            </a:solidFill>
-            <a:prstDash val="solid"/>
-          </a:ln>
-        </p:spPr>
-      </p:sp>
-      <p:sp>
-        <p:nvSpPr>
-          <p:cNvPr id="17" name="Text 15"/>
-          <p:cNvSpPr txBox="1"/>
-          <p:nvPr/>
-        </p:nvSpPr>
-        <p:spPr>
-          <a:xfrm>
-            <a:off x="786384" y="3647313"/>
-            <a:ext cx="420624" cy="420624"/>
-          </a:xfrm>
-          <a:prstGeom prst="rect">
-            <a:avLst/>
-          </a:prstGeom>
-          <a:noFill/>
-          <a:ln/>
-        </p:spPr>
-        <p:txBody>
-          <a:bodyPr wrap="square" lIns="0" tIns="0" rIns="0" bIns="0" rtlCol="0" anchor="ctr"/>
-          <a:lstStyle/>
-          <a:p>
-            <a:pPr algn="ctr" indent="0" marL="0">
-              <a:buNone/>
-            </a:pPr>
-            <a:r>
-              <a:rPr lang="en-US" sz="1400" b="1" dirty="0">
-                <a:solidFill>
-                  <a:srgbClr val="FFFFFF"/>
-                </a:solidFill>
-                <a:latin typeface="Arial" pitchFamily="34" charset="0"/>
-                <a:ea typeface="Arial" pitchFamily="34" charset="-122"/>
-                <a:cs typeface="Arial" pitchFamily="34" charset="-120"/>
-              </a:rPr>
-              <a:t>3</a:t>
+              <a:t>Buscan si la evidencia lo sostiene o lo contradice, con su herramienta asignada.</a:t>
             </a:r>
             <a:endParaRPr lang="en-US" sz="1400" dirty="0"/>
           </a:p>
-        </p:txBody>
-      </p:sp>
-      <p:sp>
-        <p:nvSpPr>
-          <p:cNvPr id="18" name="Text 16"/>
-          <p:cNvSpPr txBox="1"/>
-          <p:nvPr/>
-        </p:nvSpPr>
-        <p:spPr>
-          <a:xfrm>
-            <a:off x="1408176" y="3634740"/>
-            <a:ext cx="9960559" cy="445770"/>
-          </a:xfrm>
-          <a:prstGeom prst="rect">
-            <a:avLst/>
-          </a:prstGeom>
-          <a:noFill/>
-          <a:ln/>
-        </p:spPr>
-        <p:txBody>
-          <a:bodyPr wrap="square" lIns="0" tIns="0" rIns="0" bIns="0" rtlCol="0" anchor="ctr"/>
-          <a:lstStyle/>
           <a:p>
             <a:pPr indent="0" marL="0">
               <a:lnSpc>
-                <a:spcPct val="110000"/>
+                <a:spcPct val="115000"/>
               </a:lnSpc>
-              <a:buNone/>
-            </a:pPr>
-            <a:r>
-              <a:rPr lang="en-US" sz="1450" dirty="0">
+              <a:spcAft>
+                <a:spcPts val="600"/>
+              </a:spcAft>
+              <a:buNone/>
+            </a:pPr>
+            <a:r>
+              <a:rPr lang="en-US" sz="1400" dirty="0">
                 <a:solidFill>
                   <a:srgbClr val="16262E"/>
                 </a:solidFill>
@@ -10187,132 +13514,22 @@
                 <a:ea typeface="Calibri" pitchFamily="34" charset="-122"/>
                 <a:cs typeface="Calibri" pitchFamily="34" charset="-120"/>
               </a:rPr>
-              <a:t>Verifiquen al menos una referencia de cada herramienta. Ese dato solo suele ser el hallazgo más útil del ejercicio.</a:t>
-            </a:r>
-            <a:endParaRPr lang="en-US" sz="1450" dirty="0"/>
-          </a:p>
-        </p:txBody>
-      </p:sp>
-      <p:sp>
-        <p:nvSpPr>
-          <p:cNvPr id="19" name="Shape 17"/>
-          <p:cNvSpPr/>
-          <p:nvPr/>
-        </p:nvSpPr>
-        <p:spPr>
-          <a:xfrm>
-            <a:off x="566928" y="4354830"/>
-            <a:ext cx="11057839" cy="628650"/>
-          </a:xfrm>
-          <a:prstGeom prst="roundRect">
-            <a:avLst>
-              <a:gd name="adj" fmla="val 10182"/>
-            </a:avLst>
-          </a:prstGeom>
-          <a:solidFill>
-            <a:srgbClr val="FFFFFF"/>
-          </a:solidFill>
-          <a:ln w="12700">
-            <a:solidFill>
-              <a:srgbClr val="FFFFFF"/>
-            </a:solidFill>
-            <a:prstDash val="solid"/>
-          </a:ln>
-        </p:spPr>
-      </p:sp>
-      <p:sp>
-        <p:nvSpPr>
-          <p:cNvPr id="20" name="Shape 18"/>
-          <p:cNvSpPr/>
-          <p:nvPr/>
-        </p:nvSpPr>
-        <p:spPr>
-          <a:xfrm>
-            <a:off x="786384" y="4458843"/>
-            <a:ext cx="420624" cy="420624"/>
-          </a:xfrm>
-          <a:prstGeom prst="ellipse">
-            <a:avLst/>
-          </a:prstGeom>
-          <a:solidFill>
-            <a:srgbClr val="2E7D7D"/>
-          </a:solidFill>
-          <a:ln w="12700">
-            <a:solidFill>
-              <a:srgbClr val="2E7D7D"/>
-            </a:solidFill>
-            <a:prstDash val="solid"/>
-          </a:ln>
-        </p:spPr>
-      </p:sp>
-      <p:sp>
-        <p:nvSpPr>
-          <p:cNvPr id="21" name="Text 19"/>
-          <p:cNvSpPr txBox="1"/>
-          <p:nvPr/>
-        </p:nvSpPr>
-        <p:spPr>
-          <a:xfrm>
-            <a:off x="786384" y="4458843"/>
-            <a:ext cx="420624" cy="420624"/>
-          </a:xfrm>
-          <a:prstGeom prst="rect">
-            <a:avLst/>
-          </a:prstGeom>
-          <a:noFill/>
-          <a:ln/>
-        </p:spPr>
-        <p:txBody>
-          <a:bodyPr wrap="square" lIns="0" tIns="0" rIns="0" bIns="0" rtlCol="0" anchor="ctr"/>
-          <a:lstStyle/>
-          <a:p>
-            <a:pPr algn="ctr" indent="0" marL="0">
-              <a:buNone/>
-            </a:pPr>
-            <a:r>
-              <a:rPr lang="en-US" sz="1400" b="1" dirty="0">
-                <a:solidFill>
-                  <a:srgbClr val="FFFFFF"/>
-                </a:solidFill>
-                <a:latin typeface="Arial" pitchFamily="34" charset="0"/>
-                <a:ea typeface="Arial" pitchFamily="34" charset="-122"/>
-                <a:cs typeface="Arial" pitchFamily="34" charset="-120"/>
-              </a:rPr>
-              <a:t>4</a:t>
+              <a:t>Verifican que las referencias que les dio existan de verdad. Ese dato solo suele ser el hallazgo del día.</a:t>
             </a:r>
             <a:endParaRPr lang="en-US" sz="1400" dirty="0"/>
           </a:p>
-        </p:txBody>
-      </p:sp>
-      <p:sp>
-        <p:nvSpPr>
-          <p:cNvPr id="22" name="Text 20"/>
-          <p:cNvSpPr txBox="1"/>
-          <p:nvPr/>
-        </p:nvSpPr>
-        <p:spPr>
-          <a:xfrm>
-            <a:off x="1408176" y="4446270"/>
-            <a:ext cx="9960559" cy="445770"/>
-          </a:xfrm>
-          <a:prstGeom prst="rect">
-            <a:avLst/>
-          </a:prstGeom>
-          <a:noFill/>
-          <a:ln/>
-        </p:spPr>
-        <p:txBody>
-          <a:bodyPr wrap="square" lIns="0" tIns="0" rIns="0" bIns="0" rtlCol="0" anchor="ctr"/>
-          <a:lstStyle/>
           <a:p>
             <a:pPr indent="0" marL="0">
               <a:lnSpc>
-                <a:spcPct val="110000"/>
+                <a:spcPct val="115000"/>
               </a:lnSpc>
-              <a:buNone/>
-            </a:pPr>
-            <a:r>
-              <a:rPr lang="en-US" sz="1450" dirty="0">
+              <a:spcAft>
+                <a:spcPts val="600"/>
+              </a:spcAft>
+              <a:buNone/>
+            </a:pPr>
+            <a:r>
+              <a:rPr lang="en-US" sz="1400" dirty="0">
                 <a:solidFill>
                   <a:srgbClr val="16262E"/>
                 </a:solidFill>
@@ -10320,49 +13537,22 @@
                 <a:ea typeface="Calibri" pitchFamily="34" charset="-122"/>
                 <a:cs typeface="Calibri" pitchFamily="34" charset="-120"/>
               </a:rPr>
-              <a:t>Llenen su renglón del cuadro comparativo. Preparen cinco minutos de presentación, no más.</a:t>
-            </a:r>
-            <a:endParaRPr lang="en-US" sz="1450" dirty="0"/>
-          </a:p>
-        </p:txBody>
-      </p:sp>
-      <p:sp>
-        <p:nvSpPr>
-          <p:cNvPr id="23" name="Shape 21"/>
-          <p:cNvSpPr/>
-          <p:nvPr/>
-        </p:nvSpPr>
-        <p:spPr>
-          <a:xfrm>
-            <a:off x="566928" y="5193792"/>
-            <a:ext cx="11057839" cy="777240"/>
-          </a:xfrm>
-          <a:prstGeom prst="roundRect">
-            <a:avLst>
-              <a:gd name="adj" fmla="val 8235"/>
-            </a:avLst>
-          </a:prstGeom>
-          <a:solidFill>
-            <a:srgbClr val="16262E"/>
-          </a:solidFill>
-          <a:ln w="12700">
-            <a:solidFill>
-              <a:srgbClr val="16262E"/>
-            </a:solidFill>
-            <a:prstDash val="solid"/>
-          </a:ln>
-        </p:spPr>
-      </p:sp>
-      <p:sp>
-        <p:nvSpPr>
-          <p:cNvPr id="24" name="Text 22"/>
+              <a:t>Y comparan contra lo que da Copilot con la misma pregunta.</a:t>
+            </a:r>
+            <a:endParaRPr lang="en-US" sz="1400" dirty="0"/>
+          </a:p>
+        </p:txBody>
+      </p:sp>
+      <p:sp>
+        <p:nvSpPr>
+          <p:cNvPr id="14" name="Text 12"/>
           <p:cNvSpPr txBox="1"/>
           <p:nvPr/>
         </p:nvSpPr>
         <p:spPr>
           <a:xfrm>
-            <a:off x="841248" y="5193792"/>
-            <a:ext cx="10509199" cy="777240"/>
+            <a:off x="566928" y="6327648"/>
+            <a:ext cx="11057839" cy="292608"/>
           </a:xfrm>
           <a:prstGeom prst="rect">
             <a:avLst/>
@@ -10378,257 +13568,17 @@
               <a:buNone/>
             </a:pPr>
             <a:r>
-              <a:rPr lang="en-US" sz="1350" dirty="0">
+              <a:rPr lang="en-US" sz="1000" dirty="0">
                 <a:solidFill>
-                  <a:srgbClr val="FFFFFF"/>
+                  <a:srgbClr val="5A6B73"/>
                 </a:solidFill>
                 <a:latin typeface="Calibri" pitchFamily="34" charset="0"/>
                 <a:ea typeface="Calibri" pitchFamily="34" charset="-122"/>
                 <a:cs typeface="Calibri" pitchFamily="34" charset="-120"/>
               </a:rPr>
-              <a:t>Cuadro comparativo: Plantillas_tabulares_curso_IA.xlsx, hoja Cuadro comparativo.</a:t>
-            </a:r>
-            <a:endParaRPr lang="en-US" sz="1350" dirty="0"/>
-          </a:p>
-        </p:txBody>
-      </p:sp>
-    </p:spTree>
-  </p:cSld>
-  <p:clrMapOvr>
-    <a:masterClrMapping/>
-  </p:clrMapOvr>
-</p:sld>
-</file>
-
-<file path=ppt/slides/slide9.xml><?xml version="1.0" encoding="utf-8"?>
-<p:sld xmlns:a="http://schemas.openxmlformats.org/drawingml/2006/main" xmlns:r="http://schemas.openxmlformats.org/officeDocument/2006/relationships" xmlns:p="http://schemas.openxmlformats.org/presentationml/2006/main">
-  <p:cSld name="Slide 9">
-    <p:bg>
-      <p:bgPr>
-        <a:solidFill>
-          <a:srgbClr val="16262E"/>
-        </a:solidFill>
-      </p:bgPr>
-    </p:bg>
-    <p:spTree>
-      <p:nvGrpSpPr>
-        <p:cNvPr id="1" name=""/>
-        <p:cNvGrpSpPr/>
-        <p:nvPr/>
-      </p:nvGrpSpPr>
-      <p:grpSpPr>
-        <a:xfrm>
-          <a:off x="0" y="0"/>
-          <a:ext cx="0" cy="0"/>
-          <a:chOff x="0" y="0"/>
-          <a:chExt cx="0" cy="0"/>
-        </a:xfrm>
-      </p:grpSpPr>
-      <p:sp>
-        <p:nvSpPr>
-          <p:cNvPr id="2" name="Shape 0"/>
-          <p:cNvSpPr/>
-          <p:nvPr/>
-        </p:nvSpPr>
-        <p:spPr>
-          <a:xfrm>
-            <a:off x="566928" y="2331720"/>
-            <a:ext cx="1371600" cy="1371600"/>
-          </a:xfrm>
-          <a:prstGeom prst="ellipse">
-            <a:avLst/>
-          </a:prstGeom>
-          <a:solidFill>
-            <a:srgbClr val="C85A28"/>
-          </a:solidFill>
-          <a:ln w="12700">
-            <a:solidFill>
-              <a:srgbClr val="C85A28"/>
-            </a:solidFill>
-            <a:prstDash val="solid"/>
-          </a:ln>
-        </p:spPr>
-      </p:sp>
-      <p:sp>
-        <p:nvSpPr>
-          <p:cNvPr id="3" name="Text 1"/>
-          <p:cNvSpPr txBox="1"/>
-          <p:nvPr/>
-        </p:nvSpPr>
-        <p:spPr>
-          <a:xfrm>
-            <a:off x="566928" y="2331720"/>
-            <a:ext cx="1371600" cy="1371600"/>
-          </a:xfrm>
-          <a:prstGeom prst="rect">
-            <a:avLst/>
-          </a:prstGeom>
-          <a:noFill/>
-          <a:ln/>
-        </p:spPr>
-        <p:txBody>
-          <a:bodyPr wrap="square" lIns="0" tIns="0" rIns="0" bIns="0" rtlCol="0" anchor="ctr"/>
-          <a:lstStyle/>
-          <a:p>
-            <a:pPr algn="ctr" indent="0" marL="0">
-              <a:buNone/>
-            </a:pPr>
-            <a:r>
-              <a:rPr lang="en-US" sz="4400" b="1" dirty="0">
-                <a:solidFill>
-                  <a:srgbClr val="FFFFFF"/>
-                </a:solidFill>
-                <a:latin typeface="Arial" pitchFamily="34" charset="0"/>
-                <a:ea typeface="Arial" pitchFamily="34" charset="-122"/>
-                <a:cs typeface="Arial" pitchFamily="34" charset="-120"/>
-              </a:rPr>
-              <a:t>2</a:t>
-            </a:r>
-            <a:endParaRPr lang="en-US" sz="4400" dirty="0"/>
-          </a:p>
-        </p:txBody>
-      </p:sp>
-      <p:sp>
-        <p:nvSpPr>
-          <p:cNvPr id="4" name="Text 2"/>
-          <p:cNvSpPr txBox="1"/>
-          <p:nvPr/>
-        </p:nvSpPr>
-        <p:spPr>
-          <a:xfrm>
-            <a:off x="2487168" y="2331720"/>
-            <a:ext cx="8778240" cy="365760"/>
-          </a:xfrm>
-          <a:prstGeom prst="rect">
-            <a:avLst/>
-          </a:prstGeom>
-          <a:noFill/>
-          <a:ln/>
-        </p:spPr>
-        <p:txBody>
-          <a:bodyPr wrap="square" lIns="0" tIns="0" rIns="0" bIns="0" rtlCol="0" anchor="ctr"/>
-          <a:lstStyle/>
-          <a:p>
-            <a:pPr indent="0" marL="0">
-              <a:buNone/>
-            </a:pPr>
-            <a:r>
-              <a:rPr lang="en-US" sz="1400" b="1" spc="200" kern="0" dirty="0">
-                <a:solidFill>
-                  <a:srgbClr val="D7E7E7"/>
-                </a:solidFill>
-                <a:latin typeface="Calibri" pitchFamily="34" charset="0"/>
-                <a:ea typeface="Calibri" pitchFamily="34" charset="-122"/>
-                <a:cs typeface="Calibri" pitchFamily="34" charset="-120"/>
-              </a:rPr>
-              <a:t>PUESTA EN COMÚN</a:t>
-            </a:r>
-            <a:endParaRPr lang="en-US" sz="1400" dirty="0"/>
-          </a:p>
-        </p:txBody>
-      </p:sp>
-      <p:sp>
-        <p:nvSpPr>
-          <p:cNvPr id="5" name="Text 3"/>
-          <p:cNvSpPr txBox="1"/>
-          <p:nvPr/>
-        </p:nvSpPr>
-        <p:spPr>
-          <a:xfrm>
-            <a:off x="2487168" y="2697480"/>
-            <a:ext cx="8961120" cy="1188720"/>
-          </a:xfrm>
-          <a:prstGeom prst="rect">
-            <a:avLst/>
-          </a:prstGeom>
-          <a:noFill/>
-          <a:ln/>
-        </p:spPr>
-        <p:txBody>
-          <a:bodyPr wrap="square" lIns="0" tIns="0" rIns="0" bIns="0" rtlCol="0" anchor="t"/>
-          <a:lstStyle/>
-          <a:p>
-            <a:pPr indent="0" marL="0">
-              <a:buNone/>
-            </a:pPr>
-            <a:r>
-              <a:rPr lang="en-US" sz="3400" b="1" dirty="0">
-                <a:solidFill>
-                  <a:srgbClr val="FFFFFF"/>
-                </a:solidFill>
-                <a:latin typeface="Arial" pitchFamily="34" charset="0"/>
-                <a:ea typeface="Arial" pitchFamily="34" charset="-122"/>
-                <a:cs typeface="Arial" pitchFamily="34" charset="-120"/>
-              </a:rPr>
-              <a:t>Cinco minutos por equipo</a:t>
-            </a:r>
-            <a:endParaRPr lang="en-US" sz="3400" dirty="0"/>
-          </a:p>
-        </p:txBody>
-      </p:sp>
-      <p:sp>
-        <p:nvSpPr>
-          <p:cNvPr id="6" name="Shape 4"/>
-          <p:cNvSpPr/>
-          <p:nvPr/>
-        </p:nvSpPr>
-        <p:spPr>
-          <a:xfrm>
-            <a:off x="9338767" y="457200"/>
-            <a:ext cx="2286000" cy="347472"/>
-          </a:xfrm>
-          <a:prstGeom prst="roundRect">
-            <a:avLst>
-              <a:gd name="adj" fmla="val 50000"/>
-            </a:avLst>
-          </a:prstGeom>
-          <a:solidFill>
-            <a:srgbClr val="24404E"/>
-          </a:solidFill>
-          <a:ln w="12700">
-            <a:solidFill>
-              <a:srgbClr val="24404E"/>
-            </a:solidFill>
-            <a:prstDash val="solid"/>
-          </a:ln>
-        </p:spPr>
-      </p:sp>
-      <p:sp>
-        <p:nvSpPr>
-          <p:cNvPr id="7" name="Text 5"/>
-          <p:cNvSpPr txBox="1"/>
-          <p:nvPr/>
-        </p:nvSpPr>
-        <p:spPr>
-          <a:xfrm>
-            <a:off x="9338767" y="457200"/>
-            <a:ext cx="2286000" cy="347472"/>
-          </a:xfrm>
-          <a:prstGeom prst="rect">
-            <a:avLst/>
-          </a:prstGeom>
-          <a:noFill/>
-          <a:ln/>
-        </p:spPr>
-        <p:txBody>
-          <a:bodyPr wrap="square" lIns="0" tIns="0" rIns="0" bIns="0" rtlCol="0" anchor="ctr"/>
-          <a:lstStyle/>
-          <a:p>
-            <a:pPr algn="ctr" indent="0" marL="0">
-              <a:buNone/>
-            </a:pPr>
-            <a:r>
-              <a:rPr lang="en-US" sz="1200" b="1" dirty="0">
-                <a:solidFill>
-                  <a:srgbClr val="FFFFFF"/>
-                </a:solidFill>
-                <a:latin typeface="Calibri" pitchFamily="34" charset="0"/>
-                <a:ea typeface="Calibri" pitchFamily="34" charset="-122"/>
-                <a:cs typeface="Calibri" pitchFamily="34" charset="-120"/>
-              </a:rPr>
-              <a:t>10:20 a 10:55</a:t>
-            </a:r>
-            <a:endParaRPr lang="en-US" sz="1200" dirty="0"/>
+              <a:t>Codificar sin sustentar produce categorías bonitas que nadie puede defender. Sustentar sin codificar produce citas sueltas.</a:t>
+            </a:r>
+            <a:endParaRPr lang="en-US" sz="1000" dirty="0"/>
           </a:p>
         </p:txBody>
       </p:sp>

--- a/sesion-05/Sesion_05_Ecosistema_Herramientas.pptx
+++ b/sesion-05/Sesion_05_Ecosistema_Herramientas.pptx
@@ -2901,7 +2901,7 @@
                 <a:ea typeface="Calibri" pitchFamily="34" charset="-122"/>
                 <a:cs typeface="Calibri" pitchFamily="34" charset="-120"/>
               </a:rPr>
-              <a:t>Quince minutos con Copilot. Es el punto de comparación de todos los equipos. Si ya lo hiciste el viernes, revisa y anota lo que te dio.</a:t>
+              <a:t>Quince minutos con Copilot Chat. Es el punto de comparación de todos los equipos. Si ya lo hiciste el viernes, revisa y anota lo que te dio.</a:t>
             </a:r>
             <a:endParaRPr lang="en-US" sz="1450" dirty="0"/>
           </a:p>
@@ -5691,7 +5691,7 @@
                 <a:ea typeface="Arial" pitchFamily="34" charset="-122"/>
                 <a:cs typeface="Arial" pitchFamily="34" charset="-120"/>
               </a:rPr>
-              <a:t>SharePoint más Copilot anclado a una carpeta</a:t>
+              <a:t>OneDrive más Copilot Chat, anclados a una carpeta</a:t>
             </a:r>
             <a:endParaRPr lang="en-US" sz="2900" dirty="0"/>
           </a:p>
@@ -5957,7 +5957,7 @@
                 <a:ea typeface="Calibri" pitchFamily="34" charset="-122"/>
                 <a:cs typeface="Calibri" pitchFamily="34" charset="-120"/>
               </a:rPr>
-              <a:t>Organiza una carpeta de SharePoint como base documental de tu tema. Una carpeta por asunto, no una por año.</a:t>
+              <a:t>Organiza una carpeta de OneDrive como base documental de tu tema. Una carpeta por asunto, no una por año.</a:t>
             </a:r>
             <a:endParaRPr lang="en-US" sz="1450" dirty="0"/>
           </a:p>
@@ -6223,7 +6223,7 @@
                 <a:ea typeface="Calibri" pitchFamily="34" charset="-122"/>
                 <a:cs typeface="Calibri" pitchFamily="34" charset="-120"/>
               </a:rPr>
-              <a:t>Formula la pregunta señalando la carpeta expresamente, y compara contra la misma pregunta sin anclar. La diferencia suele ser grande.</a:t>
+              <a:t>Pregunta en Copilot Chat referenciando la carpeta o sus archivos, y compara contra la misma pregunta sin anclar. La diferencia suele ser grande.</a:t>
             </a:r>
             <a:endParaRPr lang="en-US" sz="1450" dirty="0"/>
           </a:p>
@@ -6289,7 +6289,7 @@
                 <a:ea typeface="Calibri" pitchFamily="34" charset="-122"/>
                 <a:cs typeface="Calibri" pitchFamily="34" charset="-120"/>
               </a:rPr>
-              <a:t>Esto es lo único de hoy que funciona con información amarilla. Todo lo demás que probaste es solo para información pública.</a:t>
+              <a:t>Es lo único de hoy que funciona con información amarilla; lo demás que probaste es solo para información pública. Si tu área vive en SharePoint, el mismo método aplica: verifica primero que tu Copilot Chat alcance esa carpeta.</a:t>
             </a:r>
             <a:endParaRPr lang="en-US" sz="1350" dirty="0"/>
           </a:p>

--- a/sesion-05/Sesion_05_Ecosistema_Herramientas.pptx
+++ b/sesion-05/Sesion_05_Ecosistema_Herramientas.pptx
@@ -3366,7 +3366,7 @@
                 <a:ea typeface="Calibri" pitchFamily="34" charset="-122"/>
                 <a:cs typeface="Calibri" pitchFamily="34" charset="-120"/>
               </a:rPr>
-              <a:t>Corpus: Registros_atencion_ciudadana_PARTICIPANTE.xlsx. Cuadro: Plantillas_tabulares_curso_IA.xlsx, hoja Cuadro comparativo.</a:t>
+              <a:t>Corpus: Registros_atencion_ciudadana_PARTICIPANTE.xlsx y Transcripciones_foro_PARTICIPANTE.docx, en sesion-04. Cuadro: Plantillas_tabulares_curso_IA.xlsx, hoja Cuadro comparativo.</a:t>
             </a:r>
             <a:endParaRPr lang="en-US" sz="1350" dirty="0"/>
           </a:p>

--- a/sesion-05/Sesion_05_Ecosistema_Herramientas.pptx
+++ b/sesion-05/Sesion_05_Ecosistema_Herramientas.pptx
@@ -20,6 +20,7 @@
     <p:sldId id="268" r:id="rId14"/>
     <p:sldId id="269" r:id="rId15"/>
     <p:sldId id="270" r:id="rId16"/>
+    <p:sldId id="273" r:id="rId24"/>
     <p:sldId id="271" r:id="rId17"/>
     <p:sldId id="272" r:id="rId18"/>
   </p:sldIdLst>
@@ -5652,7 +5653,7 @@
                 <a:ea typeface="Arial" pitchFamily="34" charset="-122"/>
                 <a:cs typeface="Arial" pitchFamily="34" charset="-120"/>
               </a:rPr>
-              <a:t>15 minutos</a:t>
+              <a:t>10 minutos</a:t>
             </a:r>
             <a:endParaRPr lang="en-US" sz="1300" dirty="0"/>
           </a:p>
@@ -6952,6 +6953,700 @@
                 <a:cs typeface="Calibri" pitchFamily="34" charset="-120"/>
               </a:rPr>
               <a:t>Sesión 6, martes 22 de septiembre: laboratorio cualitativo aplicado y cierre del bloque.</a:t>
+            </a:r>
+            <a:endParaRPr lang="en-US" sz="1300" dirty="0"/>
+          </a:p>
+        </p:txBody>
+      </p:sp>
+    </p:spTree>
+  </p:cSld>
+  <p:clrMapOvr>
+    <a:masterClrMapping/>
+  </p:clrMapOvr>
+</p:sld>
+</file>
+
+<file path=ppt/slides/slide18.xml><?xml version="1.0" encoding="utf-8"?>
+<p:sld xmlns:a="http://schemas.openxmlformats.org/drawingml/2006/main" xmlns:r="http://schemas.openxmlformats.org/officeDocument/2006/relationships" xmlns:p="http://schemas.openxmlformats.org/presentationml/2006/main">
+  <p:cSld name="RAG cercania">
+    <p:spTree>
+      <p:nvGrpSpPr>
+        <p:cNvPr id="1" name=""/>
+        <p:cNvGrpSpPr/>
+        <p:nvPr/>
+      </p:nvGrpSpPr>
+      <p:grpSpPr>
+        <a:xfrm>
+          <a:off x="0" y="0"/>
+          <a:ext cx="0" cy="0"/>
+          <a:chOff x="0" y="0"/>
+          <a:chExt cx="0" cy="0"/>
+        </a:xfrm>
+      </p:grpSpPr>
+      <p:sp>
+        <p:nvSpPr>
+          <p:cNvPr id="2" name="Text"/>
+          <p:cNvSpPr txBox="1"/>
+          <p:nvPr/>
+        </p:nvSpPr>
+        <p:spPr>
+          <a:xfrm>
+            <a:off x="566928" y="402336"/>
+            <a:ext cx="11057839" cy="749808"/>
+          </a:xfrm>
+          <a:prstGeom prst="rect">
+            <a:avLst/>
+          </a:prstGeom>
+          <a:noFill/>
+          <a:ln/>
+        </p:spPr>
+        <p:txBody>
+          <a:bodyPr wrap="square" lIns="0" tIns="0" rIns="0" bIns="0" rtlCol="0" anchor="t"/>
+          <a:lstStyle/>
+          <a:p>
+            <a:pPr algn="l" indent="0" marL="0">
+              <a:buNone/>
+            </a:pPr>
+            <a:r>
+              <a:rPr lang="en-US" sz="3200" b="1" dirty="0">
+                <a:solidFill>
+                  <a:srgbClr val="16262E"/>
+                </a:solidFill>
+                <a:latin typeface="Arial" pitchFamily="34" charset="0"/>
+                <a:ea typeface="Arial" pitchFamily="34" charset="-122"/>
+                <a:cs typeface="Arial" pitchFamily="34" charset="-120"/>
+              </a:rPr>
+              <a:t>Cómo busca: por cercanía, no por coincidencia</a:t>
+            </a:r>
+            <a:endParaRPr lang="en-US" sz="3200" dirty="0"/>
+          </a:p>
+        </p:txBody>
+      </p:sp>
+      <p:sp>
+        <p:nvSpPr>
+          <p:cNvPr id="3" name="Text"/>
+          <p:cNvSpPr txBox="1"/>
+          <p:nvPr/>
+        </p:nvSpPr>
+        <p:spPr>
+          <a:xfrm>
+            <a:off x="566928" y="1280160"/>
+            <a:ext cx="11057839" cy="731520"/>
+          </a:xfrm>
+          <a:prstGeom prst="rect">
+            <a:avLst/>
+          </a:prstGeom>
+          <a:noFill/>
+          <a:ln/>
+        </p:spPr>
+        <p:txBody>
+          <a:bodyPr wrap="square" lIns="0" tIns="0" rIns="0" bIns="0" rtlCol="0" anchor="t"/>
+          <a:lstStyle/>
+          <a:p>
+            <a:pPr indent="0" marL="0">
+              <a:buNone/>
+            </a:pPr>
+            <a:r>
+              <a:rPr lang="en-US" sz="1500" dirty="0">
+                <a:solidFill>
+                  <a:srgbClr val="5A6B73"/>
+                </a:solidFill>
+                <a:latin typeface="Calibri" pitchFamily="34" charset="0"/>
+                <a:ea typeface="Calibri" pitchFamily="34" charset="-122"/>
+                <a:cs typeface="Calibri" pitchFamily="34" charset="-120"/>
+              </a:rPr>
+              <a:t>Es la idea del viernes aplicada a tus carpetas. Saber cómo busca explica exactamente qué te toca hacer a ti.</a:t>
+            </a:r>
+            <a:endParaRPr lang="en-US" sz="1500" dirty="0"/>
+          </a:p>
+        </p:txBody>
+      </p:sp>
+      <p:sp>
+        <p:nvSpPr>
+          <p:cNvPr id="4" name="Shape"/>
+          <p:cNvSpPr/>
+          <p:nvPr/>
+        </p:nvSpPr>
+        <p:spPr>
+          <a:xfrm>
+            <a:off x="566928" y="2011680"/>
+            <a:ext cx="3503066" cy="2750000"/>
+          </a:xfrm>
+          <a:prstGeom prst="roundRect">
+            <a:avLst>
+              <a:gd name="adj" fmla="val 2933"/>
+            </a:avLst>
+          </a:prstGeom>
+          <a:solidFill>
+            <a:srgbClr val="F2F5F6"/>
+          </a:solidFill>
+          <a:ln w="12700">
+            <a:solidFill>
+              <a:srgbClr val="F2F5F6"/>
+            </a:solidFill>
+            <a:prstDash val="solid"/>
+          </a:ln>
+        </p:spPr>
+      </p:sp>
+      <p:sp>
+        <p:nvSpPr>
+          <p:cNvPr id="5" name="Shape"/>
+          <p:cNvSpPr/>
+          <p:nvPr/>
+        </p:nvSpPr>
+        <p:spPr>
+          <a:xfrm>
+            <a:off x="804672" y="2231136"/>
+            <a:ext cx="420624" cy="420624"/>
+          </a:xfrm>
+          <a:prstGeom prst="roundRect">
+            <a:avLst>
+              <a:gd name="adj" fmla="val 50000"/>
+            </a:avLst>
+          </a:prstGeom>
+          <a:solidFill>
+            <a:srgbClr val="2E7D7D"/>
+          </a:solidFill>
+          <a:ln w="12700">
+            <a:solidFill>
+              <a:srgbClr val="2E7D7D"/>
+            </a:solidFill>
+            <a:prstDash val="solid"/>
+          </a:ln>
+        </p:spPr>
+      </p:sp>
+      <p:sp>
+        <p:nvSpPr>
+          <p:cNvPr id="6" name="Text"/>
+          <p:cNvSpPr txBox="1"/>
+          <p:nvPr/>
+        </p:nvSpPr>
+        <p:spPr>
+          <a:xfrm>
+            <a:off x="804672" y="2231136"/>
+            <a:ext cx="420624" cy="420624"/>
+          </a:xfrm>
+          <a:prstGeom prst="rect">
+            <a:avLst/>
+          </a:prstGeom>
+          <a:noFill/>
+          <a:ln/>
+        </p:spPr>
+        <p:txBody>
+          <a:bodyPr wrap="square" lIns="0" tIns="0" rIns="0" bIns="0" rtlCol="0" anchor="ctr"/>
+          <a:lstStyle/>
+          <a:p>
+            <a:pPr algn="ctr" indent="0" marL="0">
+              <a:buNone/>
+            </a:pPr>
+            <a:r>
+              <a:rPr lang="en-US" sz="1400" b="1" dirty="0">
+                <a:solidFill>
+                  <a:srgbClr val="FFFFFF"/>
+                </a:solidFill>
+                <a:latin typeface="Arial" pitchFamily="34" charset="0"/>
+                <a:ea typeface="Arial" pitchFamily="34" charset="-122"/>
+                <a:cs typeface="Arial" pitchFamily="34" charset="-120"/>
+              </a:rPr>
+              <a:t>1</a:t>
+            </a:r>
+            <a:endParaRPr lang="en-US" sz="1400" dirty="0"/>
+          </a:p>
+        </p:txBody>
+      </p:sp>
+      <p:sp>
+        <p:nvSpPr>
+          <p:cNvPr id="7" name="Text"/>
+          <p:cNvSpPr txBox="1"/>
+          <p:nvPr/>
+        </p:nvSpPr>
+        <p:spPr>
+          <a:xfrm>
+            <a:off x="804672" y="2798064"/>
+            <a:ext cx="3027578" cy="583184"/>
+          </a:xfrm>
+          <a:prstGeom prst="rect">
+            <a:avLst/>
+          </a:prstGeom>
+          <a:noFill/>
+          <a:ln/>
+        </p:spPr>
+        <p:txBody>
+          <a:bodyPr wrap="square" lIns="0" tIns="0" rIns="0" bIns="0" rtlCol="0" anchor="t"/>
+          <a:lstStyle/>
+          <a:p>
+            <a:pPr indent="0" marL="0">
+              <a:buNone/>
+            </a:pPr>
+            <a:r>
+              <a:rPr lang="en-US" sz="1600" b="1" dirty="0">
+                <a:solidFill>
+                  <a:srgbClr val="16262E"/>
+                </a:solidFill>
+                <a:latin typeface="Arial" pitchFamily="34" charset="0"/>
+                <a:ea typeface="Arial" pitchFamily="34" charset="-122"/>
+                <a:cs typeface="Arial" pitchFamily="34" charset="-120"/>
+              </a:rPr>
+              <a:t>Parte tus documentos</a:t>
+            </a:r>
+            <a:endParaRPr lang="en-US" sz="1600" dirty="0"/>
+          </a:p>
+        </p:txBody>
+      </p:sp>
+      <p:sp>
+        <p:nvSpPr>
+          <p:cNvPr id="8" name="Text"/>
+          <p:cNvSpPr txBox="1"/>
+          <p:nvPr/>
+        </p:nvSpPr>
+        <p:spPr>
+          <a:xfrm>
+            <a:off x="804672" y="3455000"/>
+            <a:ext cx="3027578" cy="1260000"/>
+          </a:xfrm>
+          <a:prstGeom prst="rect">
+            <a:avLst/>
+          </a:prstGeom>
+          <a:noFill/>
+          <a:ln/>
+        </p:spPr>
+        <p:txBody>
+          <a:bodyPr wrap="square" lIns="0" tIns="0" rIns="0" bIns="0" rtlCol="0" anchor="t"/>
+          <a:lstStyle/>
+          <a:p>
+            <a:pPr indent="0" marL="0">
+              <a:lnSpc>
+                <a:spcPct val="110000"/>
+              </a:lnSpc>
+              <a:buNone/>
+            </a:pPr>
+            <a:r>
+              <a:rPr lang="en-US" sz="1300" dirty="0">
+                <a:solidFill>
+                  <a:srgbClr val="16262E"/>
+                </a:solidFill>
+                <a:latin typeface="Calibri" pitchFamily="34" charset="0"/>
+                <a:ea typeface="Calibri" pitchFamily="34" charset="-122"/>
+                <a:cs typeface="Calibri" pitchFamily="34" charset="-120"/>
+              </a:rPr>
+              <a:t>Corta cada archivo en fragmentos del tamaño de unos párrafos, porque un documento entero es demasiado grande para comparar de un golpe.</a:t>
+            </a:r>
+            <a:endParaRPr lang="en-US" sz="1300" dirty="0"/>
+          </a:p>
+        </p:txBody>
+      </p:sp>
+      <p:sp>
+        <p:nvSpPr>
+          <p:cNvPr id="9" name="Shape"/>
+          <p:cNvSpPr/>
+          <p:nvPr/>
+        </p:nvSpPr>
+        <p:spPr>
+          <a:xfrm>
+            <a:off x="4344314" y="2011680"/>
+            <a:ext cx="3503066" cy="2750000"/>
+          </a:xfrm>
+          <a:prstGeom prst="roundRect">
+            <a:avLst>
+              <a:gd name="adj" fmla="val 2933"/>
+            </a:avLst>
+          </a:prstGeom>
+          <a:solidFill>
+            <a:srgbClr val="F2F5F6"/>
+          </a:solidFill>
+          <a:ln w="12700">
+            <a:solidFill>
+              <a:srgbClr val="F2F5F6"/>
+            </a:solidFill>
+            <a:prstDash val="solid"/>
+          </a:ln>
+        </p:spPr>
+      </p:sp>
+      <p:sp>
+        <p:nvSpPr>
+          <p:cNvPr id="10" name="Shape"/>
+          <p:cNvSpPr/>
+          <p:nvPr/>
+        </p:nvSpPr>
+        <p:spPr>
+          <a:xfrm>
+            <a:off x="4582058" y="2231136"/>
+            <a:ext cx="420624" cy="420624"/>
+          </a:xfrm>
+          <a:prstGeom prst="roundRect">
+            <a:avLst>
+              <a:gd name="adj" fmla="val 50000"/>
+            </a:avLst>
+          </a:prstGeom>
+          <a:solidFill>
+            <a:srgbClr val="2E7D7D"/>
+          </a:solidFill>
+          <a:ln w="12700">
+            <a:solidFill>
+              <a:srgbClr val="2E7D7D"/>
+            </a:solidFill>
+            <a:prstDash val="solid"/>
+          </a:ln>
+        </p:spPr>
+      </p:sp>
+      <p:sp>
+        <p:nvSpPr>
+          <p:cNvPr id="11" name="Text"/>
+          <p:cNvSpPr txBox="1"/>
+          <p:nvPr/>
+        </p:nvSpPr>
+        <p:spPr>
+          <a:xfrm>
+            <a:off x="4582058" y="2231136"/>
+            <a:ext cx="420624" cy="420624"/>
+          </a:xfrm>
+          <a:prstGeom prst="rect">
+            <a:avLst/>
+          </a:prstGeom>
+          <a:noFill/>
+          <a:ln/>
+        </p:spPr>
+        <p:txBody>
+          <a:bodyPr wrap="square" lIns="0" tIns="0" rIns="0" bIns="0" rtlCol="0" anchor="ctr"/>
+          <a:lstStyle/>
+          <a:p>
+            <a:pPr algn="ctr" indent="0" marL="0">
+              <a:buNone/>
+            </a:pPr>
+            <a:r>
+              <a:rPr lang="en-US" sz="1400" b="1" dirty="0">
+                <a:solidFill>
+                  <a:srgbClr val="FFFFFF"/>
+                </a:solidFill>
+                <a:latin typeface="Arial" pitchFamily="34" charset="0"/>
+                <a:ea typeface="Arial" pitchFamily="34" charset="-122"/>
+                <a:cs typeface="Arial" pitchFamily="34" charset="-120"/>
+              </a:rPr>
+              <a:t>2</a:t>
+            </a:r>
+            <a:endParaRPr lang="en-US" sz="1400" dirty="0"/>
+          </a:p>
+        </p:txBody>
+      </p:sp>
+      <p:sp>
+        <p:nvSpPr>
+          <p:cNvPr id="12" name="Text"/>
+          <p:cNvSpPr txBox="1"/>
+          <p:nvPr/>
+        </p:nvSpPr>
+        <p:spPr>
+          <a:xfrm>
+            <a:off x="4582058" y="2798064"/>
+            <a:ext cx="3027578" cy="583184"/>
+          </a:xfrm>
+          <a:prstGeom prst="rect">
+            <a:avLst/>
+          </a:prstGeom>
+          <a:noFill/>
+          <a:ln/>
+        </p:spPr>
+        <p:txBody>
+          <a:bodyPr wrap="square" lIns="0" tIns="0" rIns="0" bIns="0" rtlCol="0" anchor="t"/>
+          <a:lstStyle/>
+          <a:p>
+            <a:pPr indent="0" marL="0">
+              <a:buNone/>
+            </a:pPr>
+            <a:r>
+              <a:rPr lang="en-US" sz="1600" b="1" dirty="0">
+                <a:solidFill>
+                  <a:srgbClr val="16262E"/>
+                </a:solidFill>
+                <a:latin typeface="Arial" pitchFamily="34" charset="0"/>
+                <a:ea typeface="Arial" pitchFamily="34" charset="-122"/>
+                <a:cs typeface="Arial" pitchFamily="34" charset="-120"/>
+              </a:rPr>
+              <a:t>Convierte cada fragmento</a:t>
+            </a:r>
+            <a:endParaRPr lang="en-US" sz="1600" dirty="0"/>
+          </a:p>
+        </p:txBody>
+      </p:sp>
+      <p:sp>
+        <p:nvSpPr>
+          <p:cNvPr id="13" name="Text"/>
+          <p:cNvSpPr txBox="1"/>
+          <p:nvPr/>
+        </p:nvSpPr>
+        <p:spPr>
+          <a:xfrm>
+            <a:off x="4582058" y="3455000"/>
+            <a:ext cx="3027578" cy="1260000"/>
+          </a:xfrm>
+          <a:prstGeom prst="rect">
+            <a:avLst/>
+          </a:prstGeom>
+          <a:noFill/>
+          <a:ln/>
+        </p:spPr>
+        <p:txBody>
+          <a:bodyPr wrap="square" lIns="0" tIns="0" rIns="0" bIns="0" rtlCol="0" anchor="t"/>
+          <a:lstStyle/>
+          <a:p>
+            <a:pPr indent="0" marL="0">
+              <a:lnSpc>
+                <a:spcPct val="110000"/>
+              </a:lnSpc>
+              <a:buNone/>
+            </a:pPr>
+            <a:r>
+              <a:rPr lang="en-US" sz="1300" dirty="0">
+                <a:solidFill>
+                  <a:srgbClr val="16262E"/>
+                </a:solidFill>
+                <a:latin typeface="Calibri" pitchFamily="34" charset="0"/>
+                <a:ea typeface="Calibri" pitchFamily="34" charset="-122"/>
+                <a:cs typeface="Calibri" pitchFamily="34" charset="-120"/>
+              </a:rPr>
+              <a:t>Cada fragmento se vuelve coordenadas, igual que los registros del viernes. Dos textos que significan lo mismo quedan cerca.</a:t>
+            </a:r>
+            <a:endParaRPr lang="en-US" sz="1300" dirty="0"/>
+          </a:p>
+        </p:txBody>
+      </p:sp>
+      <p:sp>
+        <p:nvSpPr>
+          <p:cNvPr id="14" name="Shape"/>
+          <p:cNvSpPr/>
+          <p:nvPr/>
+        </p:nvSpPr>
+        <p:spPr>
+          <a:xfrm>
+            <a:off x="8121701" y="2011680"/>
+            <a:ext cx="3503066" cy="2750000"/>
+          </a:xfrm>
+          <a:prstGeom prst="roundRect">
+            <a:avLst>
+              <a:gd name="adj" fmla="val 2933"/>
+            </a:avLst>
+          </a:prstGeom>
+          <a:solidFill>
+            <a:srgbClr val="F2F5F6"/>
+          </a:solidFill>
+          <a:ln w="12700">
+            <a:solidFill>
+              <a:srgbClr val="F2F5F6"/>
+            </a:solidFill>
+            <a:prstDash val="solid"/>
+          </a:ln>
+        </p:spPr>
+      </p:sp>
+      <p:sp>
+        <p:nvSpPr>
+          <p:cNvPr id="15" name="Shape"/>
+          <p:cNvSpPr/>
+          <p:nvPr/>
+        </p:nvSpPr>
+        <p:spPr>
+          <a:xfrm>
+            <a:off x="8359445" y="2231136"/>
+            <a:ext cx="420624" cy="420624"/>
+          </a:xfrm>
+          <a:prstGeom prst="roundRect">
+            <a:avLst>
+              <a:gd name="adj" fmla="val 50000"/>
+            </a:avLst>
+          </a:prstGeom>
+          <a:solidFill>
+            <a:srgbClr val="2E7D7D"/>
+          </a:solidFill>
+          <a:ln w="12700">
+            <a:solidFill>
+              <a:srgbClr val="2E7D7D"/>
+            </a:solidFill>
+            <a:prstDash val="solid"/>
+          </a:ln>
+        </p:spPr>
+      </p:sp>
+      <p:sp>
+        <p:nvSpPr>
+          <p:cNvPr id="16" name="Text"/>
+          <p:cNvSpPr txBox="1"/>
+          <p:nvPr/>
+        </p:nvSpPr>
+        <p:spPr>
+          <a:xfrm>
+            <a:off x="8359445" y="2231136"/>
+            <a:ext cx="420624" cy="420624"/>
+          </a:xfrm>
+          <a:prstGeom prst="rect">
+            <a:avLst/>
+          </a:prstGeom>
+          <a:noFill/>
+          <a:ln/>
+        </p:spPr>
+        <p:txBody>
+          <a:bodyPr wrap="square" lIns="0" tIns="0" rIns="0" bIns="0" rtlCol="0" anchor="ctr"/>
+          <a:lstStyle/>
+          <a:p>
+            <a:pPr algn="ctr" indent="0" marL="0">
+              <a:buNone/>
+            </a:pPr>
+            <a:r>
+              <a:rPr lang="en-US" sz="1400" b="1" dirty="0">
+                <a:solidFill>
+                  <a:srgbClr val="FFFFFF"/>
+                </a:solidFill>
+                <a:latin typeface="Arial" pitchFamily="34" charset="0"/>
+                <a:ea typeface="Arial" pitchFamily="34" charset="-122"/>
+                <a:cs typeface="Arial" pitchFamily="34" charset="-120"/>
+              </a:rPr>
+              <a:t>3</a:t>
+            </a:r>
+            <a:endParaRPr lang="en-US" sz="1400" dirty="0"/>
+          </a:p>
+        </p:txBody>
+      </p:sp>
+      <p:sp>
+        <p:nvSpPr>
+          <p:cNvPr id="17" name="Text"/>
+          <p:cNvSpPr txBox="1"/>
+          <p:nvPr/>
+        </p:nvSpPr>
+        <p:spPr>
+          <a:xfrm>
+            <a:off x="8359445" y="2798064"/>
+            <a:ext cx="3027578" cy="583184"/>
+          </a:xfrm>
+          <a:prstGeom prst="rect">
+            <a:avLst/>
+          </a:prstGeom>
+          <a:noFill/>
+          <a:ln/>
+        </p:spPr>
+        <p:txBody>
+          <a:bodyPr wrap="square" lIns="0" tIns="0" rIns="0" bIns="0" rtlCol="0" anchor="t"/>
+          <a:lstStyle/>
+          <a:p>
+            <a:pPr indent="0" marL="0">
+              <a:buNone/>
+            </a:pPr>
+            <a:r>
+              <a:rPr lang="en-US" sz="1600" b="1" dirty="0">
+                <a:solidFill>
+                  <a:srgbClr val="16262E"/>
+                </a:solidFill>
+                <a:latin typeface="Arial" pitchFamily="34" charset="0"/>
+                <a:ea typeface="Arial" pitchFamily="34" charset="-122"/>
+                <a:cs typeface="Arial" pitchFamily="34" charset="-120"/>
+              </a:rPr>
+              <a:t>Recupera lo más cercano</a:t>
+            </a:r>
+            <a:endParaRPr lang="en-US" sz="1600" dirty="0"/>
+          </a:p>
+        </p:txBody>
+      </p:sp>
+      <p:sp>
+        <p:nvSpPr>
+          <p:cNvPr id="18" name="Text"/>
+          <p:cNvSpPr txBox="1"/>
+          <p:nvPr/>
+        </p:nvSpPr>
+        <p:spPr>
+          <a:xfrm>
+            <a:off x="8359445" y="3455000"/>
+            <a:ext cx="3027578" cy="1260000"/>
+          </a:xfrm>
+          <a:prstGeom prst="rect">
+            <a:avLst/>
+          </a:prstGeom>
+          <a:noFill/>
+          <a:ln/>
+        </p:spPr>
+        <p:txBody>
+          <a:bodyPr wrap="square" lIns="0" tIns="0" rIns="0" bIns="0" rtlCol="0" anchor="t"/>
+          <a:lstStyle/>
+          <a:p>
+            <a:pPr indent="0" marL="0">
+              <a:lnSpc>
+                <a:spcPct val="110000"/>
+              </a:lnSpc>
+              <a:buNone/>
+            </a:pPr>
+            <a:r>
+              <a:rPr lang="en-US" sz="1300" dirty="0">
+                <a:solidFill>
+                  <a:srgbClr val="16262E"/>
+                </a:solidFill>
+                <a:latin typeface="Calibri" pitchFamily="34" charset="0"/>
+                <a:ea typeface="Calibri" pitchFamily="34" charset="-122"/>
+                <a:cs typeface="Calibri" pitchFamily="34" charset="-120"/>
+              </a:rPr>
+              <a:t>Tu pregunta también se vuelve coordenadas y la herramienta trae los fragmentos que caen más cerca. Solo con eso responde.</a:t>
+            </a:r>
+            <a:endParaRPr lang="en-US" sz="1300" dirty="0"/>
+          </a:p>
+        </p:txBody>
+      </p:sp>
+      <p:sp>
+        <p:nvSpPr>
+          <p:cNvPr id="19" name="Shape"/>
+          <p:cNvSpPr/>
+          <p:nvPr/>
+        </p:nvSpPr>
+        <p:spPr>
+          <a:xfrm>
+            <a:off x="566928" y="5824728"/>
+            <a:ext cx="11057839" cy="594360"/>
+          </a:xfrm>
+          <a:prstGeom prst="roundRect">
+            <a:avLst>
+              <a:gd name="adj" fmla="val 8235"/>
+            </a:avLst>
+          </a:prstGeom>
+          <a:solidFill>
+            <a:srgbClr val="F7E4D8"/>
+          </a:solidFill>
+          <a:ln w="12700">
+            <a:solidFill>
+              <a:srgbClr val="F7E4D8"/>
+            </a:solidFill>
+            <a:prstDash val="solid"/>
+          </a:ln>
+        </p:spPr>
+      </p:sp>
+      <p:sp>
+        <p:nvSpPr>
+          <p:cNvPr id="20" name="Text"/>
+          <p:cNvSpPr txBox="1"/>
+          <p:nvPr/>
+        </p:nvSpPr>
+        <p:spPr>
+          <a:xfrm>
+            <a:off x="804672" y="5824728"/>
+            <a:ext cx="10582351" cy="594360"/>
+          </a:xfrm>
+          <a:prstGeom prst="rect">
+            <a:avLst/>
+          </a:prstGeom>
+          <a:noFill/>
+          <a:ln/>
+        </p:spPr>
+        <p:txBody>
+          <a:bodyPr wrap="square" lIns="0" tIns="0" rIns="0" bIns="0" rtlCol="0" anchor="ctr"/>
+          <a:lstStyle/>
+          <a:p>
+            <a:pPr indent="0" marL="0">
+              <a:lnSpc>
+                <a:spcPct val="110000"/>
+              </a:lnSpc>
+              <a:buNone/>
+            </a:pPr>
+            <a:r>
+              <a:rPr lang="en-US" sz="1300" dirty="0">
+                <a:solidFill>
+                  <a:srgbClr val="16262E"/>
+                </a:solidFill>
+                <a:latin typeface="Calibri" pitchFamily="34" charset="0"/>
+                <a:ea typeface="Calibri" pitchFamily="34" charset="-122"/>
+                <a:cs typeface="Calibri" pitchFamily="34" charset="-120"/>
+              </a:rPr>
+              <a:t>De ahí salen las dos reglas de la práctica: un nombre que describe el contenido y una carpeta por asunto le dan señal para acercarse a lo que necesitas. Un documento gigante y revuelto se lo pone difícil, porque los fragmentos quedan mezclados.</a:t>
             </a:r>
             <a:endParaRPr lang="en-US" sz="1300" dirty="0"/>
           </a:p>

--- a/sesion-05/Sesion_05_Ecosistema_Herramientas.pptx
+++ b/sesion-05/Sesion_05_Ecosistema_Herramientas.pptx
@@ -7591,7 +7591,7 @@
         </p:nvSpPr>
         <p:spPr>
           <a:xfrm>
-            <a:off x="566928" y="5824728"/>
+            <a:off x="566928" y="5700000"/>
             <a:ext cx="11057839" cy="594360"/>
           </a:xfrm>
           <a:prstGeom prst="roundRect">
@@ -7618,7 +7618,7 @@
         </p:nvSpPr>
         <p:spPr>
           <a:xfrm>
-            <a:off x="804672" y="5824728"/>
+            <a:off x="804672" y="5700000"/>
             <a:ext cx="10582351" cy="594360"/>
           </a:xfrm>
           <a:prstGeom prst="rect">
@@ -7649,6 +7649,45 @@
               <a:t>De ahí salen las dos reglas de la práctica: un nombre que describe el contenido y una carpeta por asunto le dan señal para acercarse a lo que necesitas. Un documento gigante y revuelto se lo pone difícil, porque los fragmentos quedan mezclados.</a:t>
             </a:r>
             <a:endParaRPr lang="en-US" sz="1300" dirty="0"/>
+          </a:p>
+        </p:txBody>
+      </p:sp>
+      <p:sp>
+        <p:nvSpPr>
+          <p:cNvPr id="900" name="Fuente"/>
+          <p:cNvSpPr txBox="1"/>
+          <p:nvPr/>
+        </p:nvSpPr>
+        <p:spPr>
+          <a:xfrm>
+            <a:off x="566928" y="6390000"/>
+            <a:ext cx="11057839" cy="240000"/>
+          </a:xfrm>
+          <a:prstGeom prst="rect">
+            <a:avLst/>
+          </a:prstGeom>
+          <a:noFill/>
+          <a:ln/>
+        </p:spPr>
+        <p:txBody>
+          <a:bodyPr wrap="square" lIns="0" tIns="0" rIns="0" bIns="0" rtlCol="0" anchor="t"/>
+          <a:lstStyle/>
+          <a:p>
+            <a:pPr indent="0" marL="0">
+              <a:buNone/>
+            </a:pPr>
+            <a:r>
+              <a:rPr lang="en-US" sz="1000" dirty="0">
+                <a:solidFill>
+                  <a:srgbClr val="5A6B73"/>
+                </a:solidFill>
+                <a:latin typeface="Calibri" pitchFamily="34" charset="0"/>
+                <a:ea typeface="Calibri" pitchFamily="34" charset="-122"/>
+                <a:cs typeface="Calibri" pitchFamily="34" charset="-120"/>
+              </a:rPr>
+              <a:t>La idea es la misma del viernes, cuando agrupaste Registros_atencion_ciudadana_PARTICIPANTE.xlsx; hoy se aplica a tu carpeta de OneDrive.</a:t>
+            </a:r>
+            <a:endParaRPr lang="en-US" sz="1000" dirty="0"/>
           </a:p>
         </p:txBody>
       </p:sp>

--- a/sesion-05/Sesion_05_Ecosistema_Herramientas.pptx
+++ b/sesion-05/Sesion_05_Ecosistema_Herramientas.pptx
@@ -20,6 +20,7 @@
     <p:sldId id="268" r:id="rId14"/>
     <p:sldId id="269" r:id="rId15"/>
     <p:sldId id="270" r:id="rId16"/>
+    <p:sldId id="274" r:id="rId25"/>
     <p:sldId id="273" r:id="rId24"/>
     <p:sldId id="271" r:id="rId17"/>
     <p:sldId id="272" r:id="rId18"/>
@@ -1135,9 +1136,44 @@
           <a:p>
             <a:r>
               <a:rPr lang="en-US" dirty="0"/>
-              <a:t/>
-            </a:r>
-            <a:endParaRPr lang="en-US" dirty="0"/>
+              <a:t>Diez minutos de reloj. Mecánica: cada quien trabaja en su OneDrive institucional, con documentos de nivel verde o amarillo de su tema.</a:t>
+            </a:r>
+          </a:p>
+          <a:p>
+            <a:r>
+              <a:rPr lang="en-US" dirty="0"/>
+              <a:t>Minutos 0 a 3: crear o elegir una carpeta por asunto y renombrar tres o cuatro archivos para que el nombre diga qué contienen.</a:t>
+            </a:r>
+          </a:p>
+          <a:p>
+            <a:r>
+              <a:rPr lang="en-US" dirty="0"/>
+              <a:t>Minutos 3 a 8: en Copilot Chat, adjuntar desde OneDrive los archivos que responden una pregunta real de su trabajo, preguntar y pedir la cita del párrafo. Luego repetir la misma pregunta en un chat nuevo sin adjuntar nada.</a:t>
+            </a:r>
+          </a:p>
+          <a:p>
+            <a:r>
+              <a:rPr lang="en-US" dirty="0"/>
+              <a:t>Minutos 8 a 10: dos o tres personas cuentan la diferencia. Lo que debe salir: sin adjuntos responde de memoria y de la web; con adjuntos responde con tus documentos, pero solo con los que tú elegiste.</a:t>
+            </a:r>
+          </a:p>
+          <a:p>
+            <a:r>
+              <a:rPr lang="en-US" dirty="0"/>
+              <a:t>Por qué cambió esta práctica: el Instituto tiene Copilot Chat (Basic). Sin la licencia de paga no hay índice semántico ni búsqueda sobre todo OneDrive; el menú de archivos busca por nombre y actividad reciente solo para que tú elijas. Por eso los nombres descriptivos siguen importando.</a:t>
+            </a:r>
+          </a:p>
+          <a:p>
+            <a:r>
+              <a:rPr lang="en-US" dirty="0"/>
+              <a:t>Cada quien puede confirmar su etiqueta en m365.cloud.microsoft, al pie de la página de inicio, bajo su nombre.</a:t>
+            </a:r>
+          </a:p>
+          <a:p>
+            <a:r>
+              <a:rPr lang="en-US" dirty="0"/>
+              <a:t>Advertencia útil: con un documento muy largo no des por hecho que lo leyó completo. Pregunta por una sección intermedia o pártelo. Microsoft no publica un límite de archivos por conversación para Copilot Chat de trabajo; no cites cifras.</a:t>
+            </a:r>
           </a:p>
         </p:txBody>
       </p:sp>
@@ -1156,7 +1192,7 @@
           <a:bodyPr/>
           <a:lstStyle/>
           <a:p>
-            <a:fld id="{F7021451-1387-4CA6-816F-3879F97B5CBC}" type="slidenum">
+            <a:fld id="{B3C21451-1387-4CA6-816F-3879F97B5CB9}" type="slidenum">
               <a:rPr lang="en-US"/>
               <a:t>16</a:t>
             </a:fld>
@@ -1165,11 +1201,6 @@
         </p:txBody>
       </p:sp>
     </p:spTree>
-    <p:extLst>
-      <p:ext uri="{BB962C8B-B14F-4D97-AF65-F5344CB8AC3E}">
-        <p14:creationId xmlns:p14="http://schemas.microsoft.com/office/powerpoint/2010/main" val="1024086991"/>
-      </p:ext>
-    </p:extLst>
   </p:cSld>
   <p:clrMapOvr>
     <a:masterClrMapping/>
@@ -1258,6 +1289,218 @@
         <p14:creationId xmlns:p14="http://schemas.microsoft.com/office/powerpoint/2010/main" val="1024086991"/>
       </p:ext>
     </p:extLst>
+  </p:cSld>
+  <p:clrMapOvr>
+    <a:masterClrMapping/>
+  </p:clrMapOvr>
+</p:notes>
+</file>
+
+<file path=ppt/notesSlides/notesSlide18.xml><?xml version="1.0" encoding="utf-8"?>
+<p:notes xmlns:a="http://schemas.openxmlformats.org/drawingml/2006/main" xmlns:r="http://schemas.openxmlformats.org/officeDocument/2006/relationships" xmlns:p="http://schemas.openxmlformats.org/presentationml/2006/main">
+  <p:cSld>
+    <p:spTree>
+      <p:nvGrpSpPr>
+        <p:cNvPr id="1" name=""/>
+        <p:cNvGrpSpPr/>
+        <p:nvPr/>
+      </p:nvGrpSpPr>
+      <p:grpSpPr>
+        <a:xfrm>
+          <a:off x="0" y="0"/>
+          <a:ext cx="0" cy="0"/>
+          <a:chOff x="0" y="0"/>
+          <a:chExt cx="0" cy="0"/>
+        </a:xfrm>
+      </p:grpSpPr>
+      <p:sp>
+        <p:nvSpPr>
+          <p:cNvPr id="2" name="Slide Image Placeholder 1"/>
+          <p:cNvSpPr>
+            <a:spLocks noGrp="1" noRot="1" noChangeAspect="1"/>
+          </p:cNvSpPr>
+          <p:nvPr>
+            <p:ph type="sldImg"/>
+          </p:nvPr>
+        </p:nvSpPr>
+        <p:spPr/>
+      </p:sp>
+      <p:sp>
+        <p:nvSpPr>
+          <p:cNvPr id="3" name="Notes Placeholder 2"/>
+          <p:cNvSpPr>
+            <a:spLocks noGrp="1"/>
+          </p:cNvSpPr>
+          <p:nvPr>
+            <p:ph type="body" idx="1"/>
+          </p:nvPr>
+        </p:nvSpPr>
+        <p:spPr/>
+        <p:txBody>
+          <a:bodyPr/>
+          <a:lstStyle/>
+          <a:p>
+            <a:r>
+              <a:rPr lang="en-US" dirty="0"/>
+              <a:t>Dos minutos. Es la lámina del viernes aplicada a documentos: partir, convertir en coordenadas, recuperar lo más cercano.</a:t>
+            </a:r>
+          </a:p>
+          <a:p>
+            <a:r>
+              <a:rPr lang="en-US" dirty="0"/>
+              <a:t>Cierra con el dato del banner: los equipos 4, 5 y 6 ya usaron RAG esta mañana sin llamarlo así. Perplexity, Elicit y Consensus buscan antes de escribir; por eso traen citas.</a:t>
+            </a:r>
+          </a:p>
+          <a:p>
+            <a:r>
+              <a:rPr lang="en-US" dirty="0"/>
+              <a:t>Precisión para el grupo técnico: los sistemas reales casi nunca buscan solo por cercanía de significado. Combinan cercanía con coincidencia de palabras (búsqueda híbrida) y reordenan los resultados antes de entregarlos al modelo.</a:t>
+            </a:r>
+          </a:p>
+          <a:p>
+            <a:r>
+              <a:rPr lang="en-US" dirty="0"/>
+              <a:t>El puente a la práctica: en el Copilot Chat del Instituto no hay buscador sobre tu OneDrive. Microsoft reserva el índice semántico a la licencia de paga Microsoft 365 Copilot. Adjuntar o referenciar un archivo equivale a subirlo a la conversación.</a:t>
+            </a:r>
+          </a:p>
+        </p:txBody>
+      </p:sp>
+      <p:sp>
+        <p:nvSpPr>
+          <p:cNvPr id="4" name="Slide Number Placeholder 3"/>
+          <p:cNvSpPr>
+            <a:spLocks noGrp="1"/>
+          </p:cNvSpPr>
+          <p:nvPr>
+            <p:ph type="sldNum" sz="quarter" idx="10"/>
+          </p:nvPr>
+        </p:nvSpPr>
+        <p:spPr/>
+        <p:txBody>
+          <a:bodyPr/>
+          <a:lstStyle/>
+          <a:p>
+            <a:fld id="{B3C21451-1387-4CA6-816F-3879F97B5CB9}" type="slidenum">
+              <a:rPr lang="en-US"/>
+              <a:t>18</a:t>
+            </a:fld>
+            <a:endParaRPr lang="en-US"/>
+          </a:p>
+        </p:txBody>
+      </p:sp>
+    </p:spTree>
+  </p:cSld>
+  <p:clrMapOvr>
+    <a:masterClrMapping/>
+  </p:clrMapOvr>
+</p:notes>
+</file>
+
+<file path=ppt/notesSlides/notesSlide19.xml><?xml version="1.0" encoding="utf-8"?>
+<p:notes xmlns:a="http://schemas.openxmlformats.org/drawingml/2006/main" xmlns:r="http://schemas.openxmlformats.org/officeDocument/2006/relationships" xmlns:p="http://schemas.openxmlformats.org/presentationml/2006/main">
+  <p:cSld>
+    <p:spTree>
+      <p:nvGrpSpPr>
+        <p:cNvPr id="1" name=""/>
+        <p:cNvGrpSpPr/>
+        <p:nvPr/>
+      </p:nvGrpSpPr>
+      <p:grpSpPr>
+        <a:xfrm>
+          <a:off x="0" y="0"/>
+          <a:ext cx="0" cy="0"/>
+          <a:chOff x="0" y="0"/>
+          <a:chExt cx="0" cy="0"/>
+        </a:xfrm>
+      </p:grpSpPr>
+      <p:sp>
+        <p:nvSpPr>
+          <p:cNvPr id="2" name="Slide Image Placeholder 1"/>
+          <p:cNvSpPr>
+            <a:spLocks noGrp="1" noRot="1" noChangeAspect="1"/>
+          </p:cNvSpPr>
+          <p:nvPr>
+            <p:ph type="sldImg"/>
+          </p:nvPr>
+        </p:nvSpPr>
+        <p:spPr/>
+      </p:sp>
+      <p:sp>
+        <p:nvSpPr>
+          <p:cNvPr id="3" name="Notes Placeholder 2"/>
+          <p:cNvSpPr>
+            <a:spLocks noGrp="1"/>
+          </p:cNvSpPr>
+          <p:nvPr>
+            <p:ph type="body" idx="1"/>
+          </p:nvPr>
+        </p:nvSpPr>
+        <p:spPr/>
+        <p:txBody>
+          <a:bodyPr/>
+          <a:lstStyle/>
+          <a:p>
+            <a:r>
+              <a:rPr lang="en-US" dirty="0"/>
+              <a:t>Tres minutos. Es la única lámina de teoría del bloque; la profundidad va en el anexo y en la charla del receso.</a:t>
+            </a:r>
+          </a:p>
+          <a:p>
+            <a:r>
+              <a:rPr lang="en-US" dirty="0"/>
+              <a:t>Metáfora: adjuntar es poner los documentos sobre el escritorio; el modelo lee lo que tú pusiste. RAG es una biblioteca con bibliotecario: alguien indexó el acervo y un buscador trae los fragmentos que parecen pertinentes.</a:t>
+            </a:r>
+          </a:p>
+          <a:p>
+            <a:r>
+              <a:rPr lang="en-US" dirty="0"/>
+              <a:t>Para economistas: el escritorio no tiene costo fijo y su costo marginal crece con cada página que se procesa en cada pregunta. La biblioteca tiene costo fijo (armar y mantener el índice) y consultas baratas. Ninguna de las dos garantiza la respuesta.</a:t>
+            </a:r>
+          </a:p>
+          <a:p>
+            <a:r>
+              <a:rPr lang="en-US" dirty="0"/>
+              <a:t>Cómo falla cada una. Escritorio: Liu y otros («Lost in the Middle», TACL 2024) mostraron con modelos de 2023 que lo que queda en medio del contexto se aprovecha peor. Los modelos actuales lo mitigaron en búsquedas sencillas, pero su exactitud sigue bajando conforme crece el contexto (RULER, NoLiMa). Biblioteca: si el buscador no recupera el fragmento correcto, el modelo contesta sin él. Por eso es falso que el RAG «asegure» la respuesta exacta.</a:t>
+            </a:r>
+          </a:p>
+          <a:p>
+            <a:r>
+              <a:rPr lang="en-US" dirty="0"/>
+              <a:t>Dato para quien pregunte: ChatGPT no carga siempre el archivo completo. OpenAI documenta que en Enterprise pega en el contexto hasta cierto número de tokens y manda todo el texto a un índice privado del que recupera fragmentos. Es decir, hace RAG por dentro. No cites la cifra como fija: la página avisa que puede cambiar.</a:t>
+            </a:r>
+          </a:p>
+          <a:p>
+            <a:r>
+              <a:rPr lang="en-US" dirty="0"/>
+              <a:t>Si alguien técnico pide más (embeddings, búsqueda híbrida, reordenamiento, caché de prompts), remítelo al Anexo_Ventana_de_contexto_y_RAG.pptx. No abras ese frente aquí.</a:t>
+            </a:r>
+          </a:p>
+        </p:txBody>
+      </p:sp>
+      <p:sp>
+        <p:nvSpPr>
+          <p:cNvPr id="4" name="Slide Number Placeholder 3"/>
+          <p:cNvSpPr>
+            <a:spLocks noGrp="1"/>
+          </p:cNvSpPr>
+          <p:nvPr>
+            <p:ph type="sldNum" sz="quarter" idx="10"/>
+          </p:nvPr>
+        </p:nvSpPr>
+        <p:spPr/>
+        <p:txBody>
+          <a:bodyPr/>
+          <a:lstStyle/>
+          <a:p>
+            <a:fld id="{B3C21451-1387-4CA6-816F-3879F97B5CB9}" type="slidenum">
+              <a:rPr lang="en-US"/>
+              <a:t>19</a:t>
+            </a:fld>
+            <a:endParaRPr lang="en-US"/>
+          </a:p>
+        </p:txBody>
+      </p:sp>
+    </p:spTree>
   </p:cSld>
   <p:clrMapOvr>
     <a:masterClrMapping/>
@@ -4677,7 +4920,7 @@
                 <a:ea typeface="Calibri" pitchFamily="34" charset="-122"/>
                 <a:cs typeface="Calibri" pitchFamily="34" charset="-120"/>
               </a:rPr>
-              <a:t>10:50 a 11:10</a:t>
+              <a:t>10:50 a 11:07</a:t>
             </a:r>
             <a:endParaRPr lang="en-US" sz="1200" dirty="0"/>
           </a:p>
@@ -5054,7 +5297,7 @@
                 <a:ea typeface="Calibri" pitchFamily="34" charset="-122"/>
                 <a:cs typeface="Calibri" pitchFamily="34" charset="-120"/>
               </a:rPr>
-              <a:t>Responde citando el párrafo exacto de cada documento fuente.</a:t>
+              <a:t>Desde julio se llama Gemini Notebook. Responde citando el párrafo exacto de cada documento fuente.</a:t>
             </a:r>
             <a:endParaRPr lang="en-US" sz="1300" dirty="0"/>
           </a:p>
@@ -5489,7 +5732,7 @@
                 <a:ea typeface="Calibri" pitchFamily="34" charset="-122"/>
                 <a:cs typeface="Calibri" pitchFamily="34" charset="-120"/>
               </a:rPr>
-              <a:t>11:10 a 11:25</a:t>
+              <a:t>11:07 a 11:25</a:t>
             </a:r>
             <a:endParaRPr lang="en-US" sz="1200" dirty="0"/>
           </a:p>
@@ -5692,7 +5935,7 @@
                 <a:ea typeface="Arial" pitchFamily="34" charset="-122"/>
                 <a:cs typeface="Arial" pitchFamily="34" charset="-120"/>
               </a:rPr>
-              <a:t>OneDrive más Copilot Chat, anclados a una carpeta</a:t>
+              <a:t>Copilot Chat y OneDrive: el bibliotecario eres tú</a:t>
             </a:r>
             <a:endParaRPr lang="en-US" sz="2900" dirty="0"/>
           </a:p>
@@ -5825,7 +6068,7 @@
                 <a:ea typeface="Calibri" pitchFamily="34" charset="-122"/>
                 <a:cs typeface="Calibri" pitchFamily="34" charset="-120"/>
               </a:rPr>
-              <a:t>RAG quiere decir que la herramienta busca en tus documentos antes de responder, en lugar de contestar de memoria. Eso es lo que hace NotebookLM, y es lo que puedes armar con lo que ya tienes.</a:t>
+              <a:t>En un RAG, un buscador elige qué fragmentos lee el modelo. El Copilot Chat del Instituto no trae ese buscador: lee solo lo que tú le adjuntas. Hoy el paso de buscar lo haces tú.</a:t>
             </a:r>
             <a:endParaRPr lang="en-US" sz="1450" dirty="0"/>
           </a:p>
@@ -6091,7 +6334,7 @@
                 <a:ea typeface="Calibri" pitchFamily="34" charset="-122"/>
                 <a:cs typeface="Calibri" pitchFamily="34" charset="-120"/>
               </a:rPr>
-              <a:t>Nombra los archivos de manera que el nombre diga qué contiene. Copilot busca por nombre antes que por contenido.</a:t>
+              <a:t>Nombra los archivos de manera que el nombre diga qué contiene. Ese nombre es tu índice: con él decides qué adjuntar.</a:t>
             </a:r>
             <a:endParaRPr lang="en-US" sz="1450" dirty="0"/>
           </a:p>
@@ -6224,7 +6467,7 @@
                 <a:ea typeface="Calibri" pitchFamily="34" charset="-122"/>
                 <a:cs typeface="Calibri" pitchFamily="34" charset="-120"/>
               </a:rPr>
-              <a:t>Pregunta en Copilot Chat referenciando la carpeta o sus archivos, y compara contra la misma pregunta sin anclar. La diferencia suele ser grande.</a:t>
+              <a:t>Adjunta en Copilot Chat los archivos que responden tu pregunta y pide la cita del párrafo. Después haz la misma pregunta sin adjuntar nada y compara.</a:t>
             </a:r>
             <a:endParaRPr lang="en-US" sz="1450" dirty="0"/>
           </a:p>
@@ -6290,7 +6533,7 @@
                 <a:ea typeface="Calibri" pitchFamily="34" charset="-122"/>
                 <a:cs typeface="Calibri" pitchFamily="34" charset="-120"/>
               </a:rPr>
-              <a:t>Es lo único de hoy que funciona con información amarilla; lo demás que probaste es solo para información pública. Si tu área vive en SharePoint, el mismo método aplica: verifica primero que tu Copilot Chat alcance esa carpeta.</a:t>
+              <a:t>Es lo único de hoy que funciona con información amarilla; lo demás es solo para información pública. Con la licencia de paga Microsoft 365 Copilot, un índice buscaría por ti: es la que pone a Copilot dentro de Word y Excel, donde ya vimos que no aparece.</a:t>
             </a:r>
             <a:endParaRPr lang="en-US" sz="1350" dirty="0"/>
           </a:p>
@@ -7016,7 +7259,7 @@
                 <a:ea typeface="Arial" pitchFamily="34" charset="-122"/>
                 <a:cs typeface="Arial" pitchFamily="34" charset="-120"/>
               </a:rPr>
-              <a:t>Cómo busca: por cercanía, no por coincidencia</a:t>
+              <a:t>Cómo busca el bibliotecario: por cercanía</a:t>
             </a:r>
             <a:endParaRPr lang="en-US" sz="3200" dirty="0"/>
           </a:p>
@@ -7055,7 +7298,7 @@
                 <a:ea typeface="Calibri" pitchFamily="34" charset="-122"/>
                 <a:cs typeface="Calibri" pitchFamily="34" charset="-120"/>
               </a:rPr>
-              <a:t>Es la idea del viernes aplicada a tus carpetas. Saber cómo busca explica exactamente qué te toca hacer a ti.</a:t>
+              <a:t>Es la idea del viernes aplicada a documentos completos. Así trabajan por dentro las herramientas que buscan antes de escribir.</a:t>
             </a:r>
             <a:endParaRPr lang="en-US" sz="1500" dirty="0"/>
           </a:p>
@@ -7187,7 +7430,7 @@
                 <a:ea typeface="Arial" pitchFamily="34" charset="-122"/>
                 <a:cs typeface="Arial" pitchFamily="34" charset="-120"/>
               </a:rPr>
-              <a:t>Parte tus documentos</a:t>
+              <a:t>Parte los documentos</a:t>
             </a:r>
             <a:endParaRPr lang="en-US" sz="1600" dirty="0"/>
           </a:p>
@@ -7646,7 +7889,7 @@
                 <a:ea typeface="Calibri" pitchFamily="34" charset="-122"/>
                 <a:cs typeface="Calibri" pitchFamily="34" charset="-120"/>
               </a:rPr>
-              <a:t>De ahí salen las dos reglas de la práctica: un nombre que describe el contenido y una carpeta por asunto le dan señal para acercarse a lo que necesitas. Un documento gigante y revuelto se lo pone difícil, porque los fragmentos quedan mezclados.</a:t>
+              <a:t>Los equipos 4, 5 y 6 usaron RAG esta mañana: Perplexity, Elicit y Consensus buscan antes de escribir. En el Copilot Chat del Instituto ese buscador no existe, así que en la práctica que sigue quien elige los documentos eres tú.</a:t>
             </a:r>
             <a:endParaRPr lang="en-US" sz="1300" dirty="0"/>
           </a:p>
@@ -7685,7 +7928,1427 @@
                 <a:ea typeface="Calibri" pitchFamily="34" charset="-122"/>
                 <a:cs typeface="Calibri" pitchFamily="34" charset="-120"/>
               </a:rPr>
-              <a:t>La idea es la misma del viernes, cuando agrupaste Registros_atencion_ciudadana_PARTICIPANTE.xlsx; hoy se aplica a tu carpeta de OneDrive.</a:t>
+              <a:t>La idea es la misma del viernes, cuando agrupaste Registros_atencion_ciudadana_PARTICIPANTE.xlsx. Fuente: Lewis y otros (2020), arXiv:2005.11401.</a:t>
+            </a:r>
+            <a:endParaRPr lang="en-US" sz="1000" dirty="0"/>
+          </a:p>
+        </p:txBody>
+      </p:sp>
+    </p:spTree>
+  </p:cSld>
+  <p:clrMapOvr>
+    <a:masterClrMapping/>
+  </p:clrMapOvr>
+</p:sld>
+</file>
+
+<file path=ppt/slides/slide19.xml><?xml version="1.0" encoding="utf-8"?>
+<p:sld xmlns:a="http://schemas.openxmlformats.org/drawingml/2006/main" xmlns:r="http://schemas.openxmlformats.org/officeDocument/2006/relationships" xmlns:p="http://schemas.openxmlformats.org/presentationml/2006/main">
+  <p:cSld name="Adjuntar no es RAG">
+    <p:spTree>
+      <p:nvGrpSpPr>
+        <p:cNvPr id="1" name=""/>
+        <p:cNvGrpSpPr/>
+        <p:nvPr/>
+      </p:nvGrpSpPr>
+      <p:grpSpPr>
+        <a:xfrm>
+          <a:off x="0" y="0"/>
+          <a:ext cx="0" cy="0"/>
+          <a:chOff x="0" y="0"/>
+          <a:chExt cx="0" cy="0"/>
+        </a:xfrm>
+      </p:grpSpPr>
+      <p:sp>
+        <p:nvSpPr>
+          <p:cNvPr id="2" name="Text"/>
+          <p:cNvSpPr txBox="1"/>
+          <p:nvPr/>
+        </p:nvSpPr>
+        <p:spPr>
+          <a:xfrm>
+            <a:off x="566928" y="402336"/>
+            <a:ext cx="11057839" cy="749808"/>
+          </a:xfrm>
+          <a:prstGeom prst="rect">
+            <a:avLst/>
+          </a:prstGeom>
+          <a:noFill/>
+          <a:ln/>
+        </p:spPr>
+        <p:txBody>
+          <a:bodyPr wrap="square" lIns="0" tIns="0" rIns="0" bIns="0" rtlCol="0" anchor="t"/>
+          <a:lstStyle/>
+          <a:p>
+            <a:pPr algn="l" indent="0" marL="0">
+              <a:buNone/>
+            </a:pPr>
+            <a:r>
+              <a:rPr lang="en-US" sz="3200" b="1" dirty="0">
+                <a:solidFill>
+                  <a:srgbClr val="16262E"/>
+                </a:solidFill>
+                <a:latin typeface="Arial" pitchFamily="34" charset="0"/>
+                <a:ea typeface="Arial" pitchFamily="34" charset="-122"/>
+                <a:cs typeface="Arial" pitchFamily="34" charset="-120"/>
+              </a:rPr>
+              <a:t>Adjuntar no es lo mismo que RAG</a:t>
+            </a:r>
+            <a:endParaRPr lang="en-US" sz="3200" dirty="0"/>
+          </a:p>
+        </p:txBody>
+      </p:sp>
+      <p:sp>
+        <p:nvSpPr>
+          <p:cNvPr id="3" name="Text"/>
+          <p:cNvSpPr txBox="1"/>
+          <p:nvPr/>
+        </p:nvSpPr>
+        <p:spPr>
+          <a:xfrm>
+            <a:off x="566928" y="1230000"/>
+            <a:ext cx="11057839" cy="420000"/>
+          </a:xfrm>
+          <a:prstGeom prst="rect">
+            <a:avLst/>
+          </a:prstGeom>
+          <a:noFill/>
+          <a:ln/>
+        </p:spPr>
+        <p:txBody>
+          <a:bodyPr wrap="square" lIns="0" tIns="0" rIns="0" bIns="0" rtlCol="0" anchor="t"/>
+          <a:lstStyle/>
+          <a:p>
+            <a:pPr indent="0" marL="0">
+              <a:lnSpc>
+                <a:spcPct val="108000"/>
+              </a:lnSpc>
+              <a:buNone/>
+            </a:pPr>
+            <a:r>
+              <a:rPr lang="en-US" sz="1500" dirty="0">
+                <a:solidFill>
+                  <a:srgbClr val="5A6B73"/>
+                </a:solidFill>
+                <a:latin typeface="Calibri" pitchFamily="34" charset="0"/>
+                <a:ea typeface="Calibri" pitchFamily="34" charset="-122"/>
+                <a:cs typeface="Calibri" pitchFamily="34" charset="-120"/>
+              </a:rPr>
+              <a:t>Hay dos maneras de que un modelo trabaje con tus documentos. Desde fuera se parecen, y fallan de forma distinta.</a:t>
+            </a:r>
+            <a:endParaRPr lang="en-US" sz="1500" dirty="0"/>
+          </a:p>
+        </p:txBody>
+      </p:sp>
+      <p:sp>
+        <p:nvSpPr>
+          <p:cNvPr id="4" name="Shape"/>
+          <p:cNvSpPr/>
+          <p:nvPr/>
+        </p:nvSpPr>
+        <p:spPr>
+          <a:xfrm>
+            <a:off x="566928" y="1850000"/>
+            <a:ext cx="5378919" cy="3700000"/>
+          </a:xfrm>
+          <a:prstGeom prst="roundRect">
+            <a:avLst>
+              <a:gd name="adj" fmla="val 2933"/>
+            </a:avLst>
+          </a:prstGeom>
+          <a:solidFill>
+            <a:srgbClr val="F2F5F6"/>
+          </a:solidFill>
+          <a:ln w="12700">
+            <a:solidFill>
+              <a:srgbClr val="F2F5F6"/>
+            </a:solidFill>
+            <a:prstDash val="solid"/>
+          </a:ln>
+        </p:spPr>
+      </p:sp>
+      <p:sp>
+        <p:nvSpPr>
+          <p:cNvPr id="5" name="Text"/>
+          <p:cNvSpPr txBox="1"/>
+          <p:nvPr/>
+        </p:nvSpPr>
+        <p:spPr>
+          <a:xfrm>
+            <a:off x="804672" y="2040000"/>
+            <a:ext cx="4903431" cy="220000"/>
+          </a:xfrm>
+          <a:prstGeom prst="rect">
+            <a:avLst/>
+          </a:prstGeom>
+          <a:noFill/>
+          <a:ln/>
+        </p:spPr>
+        <p:txBody>
+          <a:bodyPr wrap="square" lIns="0" tIns="0" rIns="0" bIns="0" rtlCol="0" anchor="t"/>
+          <a:lstStyle/>
+          <a:p>
+            <a:pPr indent="0" marL="0">
+              <a:buNone/>
+            </a:pPr>
+            <a:r>
+              <a:rPr lang="en-US" sz="1100" b="1" spc="100" kern="0" dirty="0">
+                <a:solidFill>
+                  <a:srgbClr val="2E7D7D"/>
+                </a:solidFill>
+                <a:latin typeface="Arial" pitchFamily="34" charset="0"/>
+                <a:ea typeface="Arial" pitchFamily="34" charset="-122"/>
+                <a:cs typeface="Arial" pitchFamily="34" charset="-120"/>
+              </a:rPr>
+              <a:t>EL ESCRITORIO</a:t>
+            </a:r>
+            <a:endParaRPr lang="en-US" sz="1100" dirty="0"/>
+          </a:p>
+        </p:txBody>
+      </p:sp>
+      <p:sp>
+        <p:nvSpPr>
+          <p:cNvPr id="6" name="Shape"/>
+          <p:cNvSpPr/>
+          <p:nvPr/>
+        </p:nvSpPr>
+        <p:spPr>
+          <a:xfrm>
+            <a:off x="804672" y="2430000"/>
+            <a:ext cx="230000" cy="300000"/>
+          </a:xfrm>
+          <a:prstGeom prst="rect">
+            <a:avLst/>
+          </a:prstGeom>
+          <a:solidFill>
+            <a:srgbClr val="FFFFFF"/>
+          </a:solidFill>
+          <a:ln w="9525">
+            <a:solidFill>
+              <a:srgbClr val="16262E"/>
+            </a:solidFill>
+            <a:prstDash val="solid"/>
+          </a:ln>
+        </p:spPr>
+      </p:sp>
+      <p:sp>
+        <p:nvSpPr>
+          <p:cNvPr id="7" name="Shape"/>
+          <p:cNvSpPr/>
+          <p:nvPr/>
+        </p:nvSpPr>
+        <p:spPr>
+          <a:xfrm>
+            <a:off x="1094672" y="2430000"/>
+            <a:ext cx="230000" cy="300000"/>
+          </a:xfrm>
+          <a:prstGeom prst="rect">
+            <a:avLst/>
+          </a:prstGeom>
+          <a:solidFill>
+            <a:srgbClr val="FFFFFF"/>
+          </a:solidFill>
+          <a:ln w="9525">
+            <a:solidFill>
+              <a:srgbClr val="16262E"/>
+            </a:solidFill>
+            <a:prstDash val="solid"/>
+          </a:ln>
+        </p:spPr>
+      </p:sp>
+      <p:sp>
+        <p:nvSpPr>
+          <p:cNvPr id="8" name="Shape"/>
+          <p:cNvSpPr/>
+          <p:nvPr/>
+        </p:nvSpPr>
+        <p:spPr>
+          <a:xfrm>
+            <a:off x="1384672" y="2430000"/>
+            <a:ext cx="230000" cy="300000"/>
+          </a:xfrm>
+          <a:prstGeom prst="rect">
+            <a:avLst/>
+          </a:prstGeom>
+          <a:solidFill>
+            <a:srgbClr val="FFFFFF"/>
+          </a:solidFill>
+          <a:ln w="9525">
+            <a:solidFill>
+              <a:srgbClr val="16262E"/>
+            </a:solidFill>
+            <a:prstDash val="solid"/>
+          </a:ln>
+        </p:spPr>
+      </p:sp>
+      <p:sp>
+        <p:nvSpPr>
+          <p:cNvPr id="9" name="Shape"/>
+          <p:cNvSpPr/>
+          <p:nvPr/>
+        </p:nvSpPr>
+        <p:spPr>
+          <a:xfrm>
+            <a:off x="1714672" y="2460000"/>
+            <a:ext cx="280000" cy="240000"/>
+          </a:xfrm>
+          <a:prstGeom prst="rightArrow">
+            <a:avLst/>
+          </a:prstGeom>
+          <a:solidFill>
+            <a:srgbClr val="2E7D7D"/>
+          </a:solidFill>
+          <a:ln w="12700">
+            <a:solidFill>
+              <a:srgbClr val="2E7D7D"/>
+            </a:solidFill>
+            <a:prstDash val="solid"/>
+          </a:ln>
+        </p:spPr>
+      </p:sp>
+      <p:sp>
+        <p:nvSpPr>
+          <p:cNvPr id="10" name="Shape"/>
+          <p:cNvSpPr/>
+          <p:nvPr/>
+        </p:nvSpPr>
+        <p:spPr>
+          <a:xfrm>
+            <a:off x="2074672" y="2370000"/>
+            <a:ext cx="1900000" cy="420000"/>
+          </a:xfrm>
+          <a:prstGeom prst="roundRect">
+            <a:avLst>
+              <a:gd name="adj" fmla="val 30000"/>
+            </a:avLst>
+          </a:prstGeom>
+          <a:solidFill>
+            <a:srgbClr val="2E7D7D"/>
+          </a:solidFill>
+          <a:ln w="12700">
+            <a:solidFill>
+              <a:srgbClr val="2E7D7D"/>
+            </a:solidFill>
+            <a:prstDash val="solid"/>
+          </a:ln>
+        </p:spPr>
+      </p:sp>
+      <p:sp>
+        <p:nvSpPr>
+          <p:cNvPr id="11" name="Text"/>
+          <p:cNvSpPr txBox="1"/>
+          <p:nvPr/>
+        </p:nvSpPr>
+        <p:spPr>
+          <a:xfrm>
+            <a:off x="2074672" y="2370000"/>
+            <a:ext cx="1900000" cy="420000"/>
+          </a:xfrm>
+          <a:prstGeom prst="rect">
+            <a:avLst/>
+          </a:prstGeom>
+          <a:noFill/>
+          <a:ln/>
+        </p:spPr>
+        <p:txBody>
+          <a:bodyPr wrap="square" lIns="0" tIns="0" rIns="0" bIns="0" rtlCol="0" anchor="ctr"/>
+          <a:lstStyle/>
+          <a:p>
+            <a:pPr algn="ctr" indent="0" marL="0">
+              <a:buNone/>
+            </a:pPr>
+            <a:r>
+              <a:rPr lang="en-US" sz="1050" b="1" dirty="0">
+                <a:solidFill>
+                  <a:srgbClr val="FFFFFF"/>
+                </a:solidFill>
+                <a:latin typeface="Arial" pitchFamily="34" charset="0"/>
+                <a:ea typeface="Arial" pitchFamily="34" charset="-122"/>
+                <a:cs typeface="Arial" pitchFamily="34" charset="-120"/>
+              </a:rPr>
+              <a:t>ventana de contexto</a:t>
+            </a:r>
+            <a:endParaRPr lang="en-US" sz="1050" dirty="0"/>
+          </a:p>
+        </p:txBody>
+      </p:sp>
+      <p:sp>
+        <p:nvSpPr>
+          <p:cNvPr id="12" name="Shape"/>
+          <p:cNvSpPr/>
+          <p:nvPr/>
+        </p:nvSpPr>
+        <p:spPr>
+          <a:xfrm>
+            <a:off x="4054672" y="2460000"/>
+            <a:ext cx="280000" cy="240000"/>
+          </a:xfrm>
+          <a:prstGeom prst="rightArrow">
+            <a:avLst/>
+          </a:prstGeom>
+          <a:solidFill>
+            <a:srgbClr val="2E7D7D"/>
+          </a:solidFill>
+          <a:ln w="12700">
+            <a:solidFill>
+              <a:srgbClr val="2E7D7D"/>
+            </a:solidFill>
+            <a:prstDash val="solid"/>
+          </a:ln>
+        </p:spPr>
+      </p:sp>
+      <p:sp>
+        <p:nvSpPr>
+          <p:cNvPr id="13" name="Shape"/>
+          <p:cNvSpPr/>
+          <p:nvPr/>
+        </p:nvSpPr>
+        <p:spPr>
+          <a:xfrm>
+            <a:off x="4414672" y="2370000"/>
+            <a:ext cx="1150000" cy="420000"/>
+          </a:xfrm>
+          <a:prstGeom prst="roundRect">
+            <a:avLst>
+              <a:gd name="adj" fmla="val 30000"/>
+            </a:avLst>
+          </a:prstGeom>
+          <a:solidFill>
+            <a:srgbClr val="16262E"/>
+          </a:solidFill>
+          <a:ln w="12700">
+            <a:solidFill>
+              <a:srgbClr val="16262E"/>
+            </a:solidFill>
+            <a:prstDash val="solid"/>
+          </a:ln>
+        </p:spPr>
+      </p:sp>
+      <p:sp>
+        <p:nvSpPr>
+          <p:cNvPr id="14" name="Text"/>
+          <p:cNvSpPr txBox="1"/>
+          <p:nvPr/>
+        </p:nvSpPr>
+        <p:spPr>
+          <a:xfrm>
+            <a:off x="4414672" y="2370000"/>
+            <a:ext cx="1150000" cy="420000"/>
+          </a:xfrm>
+          <a:prstGeom prst="rect">
+            <a:avLst/>
+          </a:prstGeom>
+          <a:noFill/>
+          <a:ln/>
+        </p:spPr>
+        <p:txBody>
+          <a:bodyPr wrap="square" lIns="0" tIns="0" rIns="0" bIns="0" rtlCol="0" anchor="ctr"/>
+          <a:lstStyle/>
+          <a:p>
+            <a:pPr algn="ctr" indent="0" marL="0">
+              <a:buNone/>
+            </a:pPr>
+            <a:r>
+              <a:rPr lang="en-US" sz="1050" b="1" dirty="0">
+                <a:solidFill>
+                  <a:srgbClr val="FFFFFF"/>
+                </a:solidFill>
+                <a:latin typeface="Arial" pitchFamily="34" charset="0"/>
+                <a:ea typeface="Arial" pitchFamily="34" charset="-122"/>
+                <a:cs typeface="Arial" pitchFamily="34" charset="-120"/>
+              </a:rPr>
+              <a:t>respuesta</a:t>
+            </a:r>
+            <a:endParaRPr lang="en-US" sz="1050" dirty="0"/>
+          </a:p>
+        </p:txBody>
+      </p:sp>
+      <p:sp>
+        <p:nvSpPr>
+          <p:cNvPr id="15" name="Text"/>
+          <p:cNvSpPr txBox="1"/>
+          <p:nvPr/>
+        </p:nvSpPr>
+        <p:spPr>
+          <a:xfrm>
+            <a:off x="804672" y="2980000"/>
+            <a:ext cx="4903431" cy="330000"/>
+          </a:xfrm>
+          <a:prstGeom prst="rect">
+            <a:avLst/>
+          </a:prstGeom>
+          <a:noFill/>
+          <a:ln/>
+        </p:spPr>
+        <p:txBody>
+          <a:bodyPr wrap="square" lIns="0" tIns="0" rIns="0" bIns="0" rtlCol="0" anchor="t"/>
+          <a:lstStyle/>
+          <a:p>
+            <a:pPr indent="0" marL="0">
+              <a:buNone/>
+            </a:pPr>
+            <a:r>
+              <a:rPr lang="en-US" sz="1600" b="1" dirty="0">
+                <a:solidFill>
+                  <a:srgbClr val="16262E"/>
+                </a:solidFill>
+                <a:latin typeface="Arial" pitchFamily="34" charset="0"/>
+                <a:ea typeface="Arial" pitchFamily="34" charset="-122"/>
+                <a:cs typeface="Arial" pitchFamily="34" charset="-120"/>
+              </a:rPr>
+              <a:t>Ventana de contexto: todo sobre la mesa</a:t>
+            </a:r>
+            <a:endParaRPr lang="en-US" sz="1600" dirty="0"/>
+          </a:p>
+        </p:txBody>
+      </p:sp>
+      <p:sp>
+        <p:nvSpPr>
+          <p:cNvPr id="16" name="Text"/>
+          <p:cNvSpPr txBox="1"/>
+          <p:nvPr/>
+        </p:nvSpPr>
+        <p:spPr>
+          <a:xfrm>
+            <a:off x="804672" y="3410000"/>
+            <a:ext cx="4903431" cy="2000000"/>
+          </a:xfrm>
+          <a:prstGeom prst="rect">
+            <a:avLst/>
+          </a:prstGeom>
+          <a:noFill/>
+          <a:ln/>
+        </p:spPr>
+        <p:txBody>
+          <a:bodyPr wrap="square" lIns="0" tIns="0" rIns="0" bIns="0" rtlCol="0" anchor="t"/>
+          <a:lstStyle/>
+          <a:p>
+            <a:pPr indent="0" marL="0">
+              <a:lnSpc>
+                <a:spcPct val="108000"/>
+              </a:lnSpc>
+              <a:spcAft>
+                <a:spcPts val="650"/>
+              </a:spcAft>
+              <a:buNone/>
+            </a:pPr>
+            <a:r>
+              <a:rPr lang="en-US" sz="1300" dirty="0">
+                <a:solidFill>
+                  <a:srgbClr val="16262E"/>
+                </a:solidFill>
+                <a:latin typeface="Calibri" pitchFamily="34" charset="0"/>
+                <a:ea typeface="Calibri" pitchFamily="34" charset="-122"/>
+                <a:cs typeface="Calibri" pitchFamily="34" charset="-120"/>
+              </a:rPr>
+              <a:t>Tú eliges qué entra. El modelo lee lo que le pusiste enfrente y nada más.</a:t>
+            </a:r>
+            <a:endParaRPr lang="en-US" sz="1300" dirty="0"/>
+          </a:p>
+          <a:p>
+            <a:pPr indent="0" marL="0">
+              <a:lnSpc>
+                <a:spcPct val="108000"/>
+              </a:lnSpc>
+              <a:spcAft>
+                <a:spcPts val="650"/>
+              </a:spcAft>
+              <a:buNone/>
+            </a:pPr>
+            <a:r>
+              <a:rPr lang="en-US" sz="1300" dirty="0">
+                <a:solidFill>
+                  <a:srgbClr val="16262E"/>
+                </a:solidFill>
+                <a:latin typeface="Calibri" pitchFamily="34" charset="0"/>
+                <a:ea typeface="Calibri" pitchFamily="34" charset="-122"/>
+                <a:cs typeface="Calibri" pitchFamily="34" charset="-120"/>
+              </a:rPr>
+              <a:t>Cada pregunta vuelve a procesar todo lo que está en la mesa: a más páginas, más costo y más espera.</a:t>
+            </a:r>
+            <a:endParaRPr lang="en-US" sz="1300" dirty="0"/>
+          </a:p>
+          <a:p>
+            <a:pPr indent="0" marL="0">
+              <a:lnSpc>
+                <a:spcPct val="108000"/>
+              </a:lnSpc>
+              <a:spcAft>
+                <a:spcPts val="650"/>
+              </a:spcAft>
+              <a:buNone/>
+            </a:pPr>
+            <a:r>
+              <a:rPr lang="en-US" sz="1300" dirty="0">
+                <a:solidFill>
+                  <a:srgbClr val="16262E"/>
+                </a:solidFill>
+                <a:latin typeface="Calibri" pitchFamily="34" charset="0"/>
+                <a:ea typeface="Calibri" pitchFamily="34" charset="-122"/>
+                <a:cs typeface="Calibri" pitchFamily="34" charset="-120"/>
+              </a:rPr>
+              <a:t>Falla por saturación. Entre más texto hay en la mesa, peor aprovecha cada parte, sobre todo lo que queda en medio, y no te avisa.</a:t>
+            </a:r>
+            <a:endParaRPr lang="en-US" sz="1300" dirty="0"/>
+          </a:p>
+        </p:txBody>
+      </p:sp>
+      <p:sp>
+        <p:nvSpPr>
+          <p:cNvPr id="17" name="Shape"/>
+          <p:cNvSpPr/>
+          <p:nvPr/>
+        </p:nvSpPr>
+        <p:spPr>
+          <a:xfrm>
+            <a:off x="6245847" y="1850000"/>
+            <a:ext cx="5378919" cy="3700000"/>
+          </a:xfrm>
+          <a:prstGeom prst="roundRect">
+            <a:avLst>
+              <a:gd name="adj" fmla="val 2933"/>
+            </a:avLst>
+          </a:prstGeom>
+          <a:solidFill>
+            <a:srgbClr val="F2F5F6"/>
+          </a:solidFill>
+          <a:ln w="12700">
+            <a:solidFill>
+              <a:srgbClr val="F2F5F6"/>
+            </a:solidFill>
+            <a:prstDash val="solid"/>
+          </a:ln>
+        </p:spPr>
+      </p:sp>
+      <p:sp>
+        <p:nvSpPr>
+          <p:cNvPr id="18" name="Text"/>
+          <p:cNvSpPr txBox="1"/>
+          <p:nvPr/>
+        </p:nvSpPr>
+        <p:spPr>
+          <a:xfrm>
+            <a:off x="6483591" y="2040000"/>
+            <a:ext cx="4903431" cy="220000"/>
+          </a:xfrm>
+          <a:prstGeom prst="rect">
+            <a:avLst/>
+          </a:prstGeom>
+          <a:noFill/>
+          <a:ln/>
+        </p:spPr>
+        <p:txBody>
+          <a:bodyPr wrap="square" lIns="0" tIns="0" rIns="0" bIns="0" rtlCol="0" anchor="t"/>
+          <a:lstStyle/>
+          <a:p>
+            <a:pPr indent="0" marL="0">
+              <a:buNone/>
+            </a:pPr>
+            <a:r>
+              <a:rPr lang="en-US" sz="1100" b="1" spc="100" kern="0" dirty="0">
+                <a:solidFill>
+                  <a:srgbClr val="2E7D7D"/>
+                </a:solidFill>
+                <a:latin typeface="Arial" pitchFamily="34" charset="0"/>
+                <a:ea typeface="Arial" pitchFamily="34" charset="-122"/>
+                <a:cs typeface="Arial" pitchFamily="34" charset="-120"/>
+              </a:rPr>
+              <a:t>LA BIBLIOTECA CON BIBLIOTECARIO</a:t>
+            </a:r>
+            <a:endParaRPr lang="en-US" sz="1100" dirty="0"/>
+          </a:p>
+        </p:txBody>
+      </p:sp>
+      <p:sp>
+        <p:nvSpPr>
+          <p:cNvPr id="19" name="Shape"/>
+          <p:cNvSpPr/>
+          <p:nvPr/>
+        </p:nvSpPr>
+        <p:spPr>
+          <a:xfrm>
+            <a:off x="6483591" y="2370000"/>
+            <a:ext cx="110000" cy="180000"/>
+          </a:xfrm>
+          <a:prstGeom prst="rect">
+            <a:avLst/>
+          </a:prstGeom>
+          <a:solidFill>
+            <a:srgbClr val="FFFFFF"/>
+          </a:solidFill>
+          <a:ln w="9525">
+            <a:solidFill>
+              <a:srgbClr val="16262E"/>
+            </a:solidFill>
+            <a:prstDash val="solid"/>
+          </a:ln>
+        </p:spPr>
+      </p:sp>
+      <p:sp>
+        <p:nvSpPr>
+          <p:cNvPr id="20" name="Shape"/>
+          <p:cNvSpPr/>
+          <p:nvPr/>
+        </p:nvSpPr>
+        <p:spPr>
+          <a:xfrm>
+            <a:off x="6633591" y="2370000"/>
+            <a:ext cx="110000" cy="180000"/>
+          </a:xfrm>
+          <a:prstGeom prst="rect">
+            <a:avLst/>
+          </a:prstGeom>
+          <a:solidFill>
+            <a:srgbClr val="FFFFFF"/>
+          </a:solidFill>
+          <a:ln w="9525">
+            <a:solidFill>
+              <a:srgbClr val="16262E"/>
+            </a:solidFill>
+            <a:prstDash val="solid"/>
+          </a:ln>
+        </p:spPr>
+      </p:sp>
+      <p:sp>
+        <p:nvSpPr>
+          <p:cNvPr id="21" name="Shape"/>
+          <p:cNvSpPr/>
+          <p:nvPr/>
+        </p:nvSpPr>
+        <p:spPr>
+          <a:xfrm>
+            <a:off x="6783591" y="2370000"/>
+            <a:ext cx="110000" cy="180000"/>
+          </a:xfrm>
+          <a:prstGeom prst="rect">
+            <a:avLst/>
+          </a:prstGeom>
+          <a:solidFill>
+            <a:srgbClr val="FFFFFF"/>
+          </a:solidFill>
+          <a:ln w="9525">
+            <a:solidFill>
+              <a:srgbClr val="16262E"/>
+            </a:solidFill>
+            <a:prstDash val="solid"/>
+          </a:ln>
+        </p:spPr>
+      </p:sp>
+      <p:sp>
+        <p:nvSpPr>
+          <p:cNvPr id="22" name="Shape"/>
+          <p:cNvSpPr/>
+          <p:nvPr/>
+        </p:nvSpPr>
+        <p:spPr>
+          <a:xfrm>
+            <a:off x="6933591" y="2370000"/>
+            <a:ext cx="110000" cy="180000"/>
+          </a:xfrm>
+          <a:prstGeom prst="rect">
+            <a:avLst/>
+          </a:prstGeom>
+          <a:solidFill>
+            <a:srgbClr val="FFFFFF"/>
+          </a:solidFill>
+          <a:ln w="9525">
+            <a:solidFill>
+              <a:srgbClr val="16262E"/>
+            </a:solidFill>
+            <a:prstDash val="solid"/>
+          </a:ln>
+        </p:spPr>
+      </p:sp>
+      <p:sp>
+        <p:nvSpPr>
+          <p:cNvPr id="23" name="Shape"/>
+          <p:cNvSpPr/>
+          <p:nvPr/>
+        </p:nvSpPr>
+        <p:spPr>
+          <a:xfrm>
+            <a:off x="7083591" y="2370000"/>
+            <a:ext cx="110000" cy="180000"/>
+          </a:xfrm>
+          <a:prstGeom prst="rect">
+            <a:avLst/>
+          </a:prstGeom>
+          <a:solidFill>
+            <a:srgbClr val="FFFFFF"/>
+          </a:solidFill>
+          <a:ln w="9525">
+            <a:solidFill>
+              <a:srgbClr val="16262E"/>
+            </a:solidFill>
+            <a:prstDash val="solid"/>
+          </a:ln>
+        </p:spPr>
+      </p:sp>
+      <p:sp>
+        <p:nvSpPr>
+          <p:cNvPr id="24" name="Shape"/>
+          <p:cNvSpPr/>
+          <p:nvPr/>
+        </p:nvSpPr>
+        <p:spPr>
+          <a:xfrm>
+            <a:off x="7233591" y="2370000"/>
+            <a:ext cx="110000" cy="180000"/>
+          </a:xfrm>
+          <a:prstGeom prst="rect">
+            <a:avLst/>
+          </a:prstGeom>
+          <a:solidFill>
+            <a:srgbClr val="FFFFFF"/>
+          </a:solidFill>
+          <a:ln w="9525">
+            <a:solidFill>
+              <a:srgbClr val="16262E"/>
+            </a:solidFill>
+            <a:prstDash val="solid"/>
+          </a:ln>
+        </p:spPr>
+      </p:sp>
+      <p:sp>
+        <p:nvSpPr>
+          <p:cNvPr id="25" name="Shape"/>
+          <p:cNvSpPr/>
+          <p:nvPr/>
+        </p:nvSpPr>
+        <p:spPr>
+          <a:xfrm>
+            <a:off x="6483591" y="2585000"/>
+            <a:ext cx="110000" cy="180000"/>
+          </a:xfrm>
+          <a:prstGeom prst="rect">
+            <a:avLst/>
+          </a:prstGeom>
+          <a:solidFill>
+            <a:srgbClr val="FFFFFF"/>
+          </a:solidFill>
+          <a:ln w="9525">
+            <a:solidFill>
+              <a:srgbClr val="16262E"/>
+            </a:solidFill>
+            <a:prstDash val="solid"/>
+          </a:ln>
+        </p:spPr>
+      </p:sp>
+      <p:sp>
+        <p:nvSpPr>
+          <p:cNvPr id="26" name="Shape"/>
+          <p:cNvSpPr/>
+          <p:nvPr/>
+        </p:nvSpPr>
+        <p:spPr>
+          <a:xfrm>
+            <a:off x="6633591" y="2585000"/>
+            <a:ext cx="110000" cy="180000"/>
+          </a:xfrm>
+          <a:prstGeom prst="rect">
+            <a:avLst/>
+          </a:prstGeom>
+          <a:solidFill>
+            <a:srgbClr val="FFFFFF"/>
+          </a:solidFill>
+          <a:ln w="9525">
+            <a:solidFill>
+              <a:srgbClr val="16262E"/>
+            </a:solidFill>
+            <a:prstDash val="solid"/>
+          </a:ln>
+        </p:spPr>
+      </p:sp>
+      <p:sp>
+        <p:nvSpPr>
+          <p:cNvPr id="27" name="Shape"/>
+          <p:cNvSpPr/>
+          <p:nvPr/>
+        </p:nvSpPr>
+        <p:spPr>
+          <a:xfrm>
+            <a:off x="6783591" y="2585000"/>
+            <a:ext cx="110000" cy="180000"/>
+          </a:xfrm>
+          <a:prstGeom prst="rect">
+            <a:avLst/>
+          </a:prstGeom>
+          <a:solidFill>
+            <a:srgbClr val="FFFFFF"/>
+          </a:solidFill>
+          <a:ln w="9525">
+            <a:solidFill>
+              <a:srgbClr val="16262E"/>
+            </a:solidFill>
+            <a:prstDash val="solid"/>
+          </a:ln>
+        </p:spPr>
+      </p:sp>
+      <p:sp>
+        <p:nvSpPr>
+          <p:cNvPr id="28" name="Shape"/>
+          <p:cNvSpPr/>
+          <p:nvPr/>
+        </p:nvSpPr>
+        <p:spPr>
+          <a:xfrm>
+            <a:off x="6933591" y="2585000"/>
+            <a:ext cx="110000" cy="180000"/>
+          </a:xfrm>
+          <a:prstGeom prst="rect">
+            <a:avLst/>
+          </a:prstGeom>
+          <a:solidFill>
+            <a:srgbClr val="FFFFFF"/>
+          </a:solidFill>
+          <a:ln w="9525">
+            <a:solidFill>
+              <a:srgbClr val="16262E"/>
+            </a:solidFill>
+            <a:prstDash val="solid"/>
+          </a:ln>
+        </p:spPr>
+      </p:sp>
+      <p:sp>
+        <p:nvSpPr>
+          <p:cNvPr id="29" name="Shape"/>
+          <p:cNvSpPr/>
+          <p:nvPr/>
+        </p:nvSpPr>
+        <p:spPr>
+          <a:xfrm>
+            <a:off x="7083591" y="2585000"/>
+            <a:ext cx="110000" cy="180000"/>
+          </a:xfrm>
+          <a:prstGeom prst="rect">
+            <a:avLst/>
+          </a:prstGeom>
+          <a:solidFill>
+            <a:srgbClr val="FFFFFF"/>
+          </a:solidFill>
+          <a:ln w="9525">
+            <a:solidFill>
+              <a:srgbClr val="16262E"/>
+            </a:solidFill>
+            <a:prstDash val="solid"/>
+          </a:ln>
+        </p:spPr>
+      </p:sp>
+      <p:sp>
+        <p:nvSpPr>
+          <p:cNvPr id="30" name="Shape"/>
+          <p:cNvSpPr/>
+          <p:nvPr/>
+        </p:nvSpPr>
+        <p:spPr>
+          <a:xfrm>
+            <a:off x="7233591" y="2585000"/>
+            <a:ext cx="110000" cy="180000"/>
+          </a:xfrm>
+          <a:prstGeom prst="rect">
+            <a:avLst/>
+          </a:prstGeom>
+          <a:solidFill>
+            <a:srgbClr val="FFFFFF"/>
+          </a:solidFill>
+          <a:ln w="9525">
+            <a:solidFill>
+              <a:srgbClr val="16262E"/>
+            </a:solidFill>
+            <a:prstDash val="solid"/>
+          </a:ln>
+        </p:spPr>
+      </p:sp>
+      <p:sp>
+        <p:nvSpPr>
+          <p:cNvPr id="31" name="Shape"/>
+          <p:cNvSpPr/>
+          <p:nvPr/>
+        </p:nvSpPr>
+        <p:spPr>
+          <a:xfrm>
+            <a:off x="7403591" y="2460000"/>
+            <a:ext cx="240000" cy="240000"/>
+          </a:xfrm>
+          <a:prstGeom prst="rightArrow">
+            <a:avLst/>
+          </a:prstGeom>
+          <a:solidFill>
+            <a:srgbClr val="2E7D7D"/>
+          </a:solidFill>
+          <a:ln w="12700">
+            <a:solidFill>
+              <a:srgbClr val="2E7D7D"/>
+            </a:solidFill>
+            <a:prstDash val="solid"/>
+          </a:ln>
+        </p:spPr>
+      </p:sp>
+      <p:sp>
+        <p:nvSpPr>
+          <p:cNvPr id="32" name="Shape"/>
+          <p:cNvSpPr/>
+          <p:nvPr/>
+        </p:nvSpPr>
+        <p:spPr>
+          <a:xfrm>
+            <a:off x="7703591" y="2370000"/>
+            <a:ext cx="950000" cy="420000"/>
+          </a:xfrm>
+          <a:prstGeom prst="roundRect">
+            <a:avLst>
+              <a:gd name="adj" fmla="val 30000"/>
+            </a:avLst>
+          </a:prstGeom>
+          <a:solidFill>
+            <a:srgbClr val="2E7D7D"/>
+          </a:solidFill>
+          <a:ln w="12700">
+            <a:solidFill>
+              <a:srgbClr val="2E7D7D"/>
+            </a:solidFill>
+            <a:prstDash val="solid"/>
+          </a:ln>
+        </p:spPr>
+      </p:sp>
+      <p:sp>
+        <p:nvSpPr>
+          <p:cNvPr id="33" name="Text"/>
+          <p:cNvSpPr txBox="1"/>
+          <p:nvPr/>
+        </p:nvSpPr>
+        <p:spPr>
+          <a:xfrm>
+            <a:off x="7703591" y="2370000"/>
+            <a:ext cx="950000" cy="420000"/>
+          </a:xfrm>
+          <a:prstGeom prst="rect">
+            <a:avLst/>
+          </a:prstGeom>
+          <a:noFill/>
+          <a:ln/>
+        </p:spPr>
+        <p:txBody>
+          <a:bodyPr wrap="square" lIns="0" tIns="0" rIns="0" bIns="0" rtlCol="0" anchor="ctr"/>
+          <a:lstStyle/>
+          <a:p>
+            <a:pPr algn="ctr" indent="0" marL="0">
+              <a:buNone/>
+            </a:pPr>
+            <a:r>
+              <a:rPr lang="en-US" sz="1050" b="1" dirty="0">
+                <a:solidFill>
+                  <a:srgbClr val="FFFFFF"/>
+                </a:solidFill>
+                <a:latin typeface="Arial" pitchFamily="34" charset="0"/>
+                <a:ea typeface="Arial" pitchFamily="34" charset="-122"/>
+                <a:cs typeface="Arial" pitchFamily="34" charset="-120"/>
+              </a:rPr>
+              <a:t>buscador</a:t>
+            </a:r>
+            <a:endParaRPr lang="en-US" sz="1050" dirty="0"/>
+          </a:p>
+        </p:txBody>
+      </p:sp>
+      <p:sp>
+        <p:nvSpPr>
+          <p:cNvPr id="34" name="Shape"/>
+          <p:cNvSpPr/>
+          <p:nvPr/>
+        </p:nvSpPr>
+        <p:spPr>
+          <a:xfrm>
+            <a:off x="8713591" y="2460000"/>
+            <a:ext cx="240000" cy="240000"/>
+          </a:xfrm>
+          <a:prstGeom prst="rightArrow">
+            <a:avLst/>
+          </a:prstGeom>
+          <a:solidFill>
+            <a:srgbClr val="2E7D7D"/>
+          </a:solidFill>
+          <a:ln w="12700">
+            <a:solidFill>
+              <a:srgbClr val="2E7D7D"/>
+            </a:solidFill>
+            <a:prstDash val="solid"/>
+          </a:ln>
+        </p:spPr>
+      </p:sp>
+      <p:sp>
+        <p:nvSpPr>
+          <p:cNvPr id="35" name="Shape"/>
+          <p:cNvSpPr/>
+          <p:nvPr/>
+        </p:nvSpPr>
+        <p:spPr>
+          <a:xfrm>
+            <a:off x="9013591" y="2430000"/>
+            <a:ext cx="230000" cy="300000"/>
+          </a:xfrm>
+          <a:prstGeom prst="rect">
+            <a:avLst/>
+          </a:prstGeom>
+          <a:solidFill>
+            <a:srgbClr val="F7E4D8"/>
+          </a:solidFill>
+          <a:ln w="9525">
+            <a:solidFill>
+              <a:srgbClr val="C85A28"/>
+            </a:solidFill>
+            <a:prstDash val="solid"/>
+          </a:ln>
+        </p:spPr>
+      </p:sp>
+      <p:sp>
+        <p:nvSpPr>
+          <p:cNvPr id="36" name="Shape"/>
+          <p:cNvSpPr/>
+          <p:nvPr/>
+        </p:nvSpPr>
+        <p:spPr>
+          <a:xfrm>
+            <a:off x="9293591" y="2430000"/>
+            <a:ext cx="230000" cy="300000"/>
+          </a:xfrm>
+          <a:prstGeom prst="rect">
+            <a:avLst/>
+          </a:prstGeom>
+          <a:solidFill>
+            <a:srgbClr val="F7E4D8"/>
+          </a:solidFill>
+          <a:ln w="9525">
+            <a:solidFill>
+              <a:srgbClr val="C85A28"/>
+            </a:solidFill>
+            <a:prstDash val="solid"/>
+          </a:ln>
+        </p:spPr>
+      </p:sp>
+      <p:sp>
+        <p:nvSpPr>
+          <p:cNvPr id="37" name="Shape"/>
+          <p:cNvSpPr/>
+          <p:nvPr/>
+        </p:nvSpPr>
+        <p:spPr>
+          <a:xfrm>
+            <a:off x="9583591" y="2460000"/>
+            <a:ext cx="240000" cy="240000"/>
+          </a:xfrm>
+          <a:prstGeom prst="rightArrow">
+            <a:avLst/>
+          </a:prstGeom>
+          <a:solidFill>
+            <a:srgbClr val="2E7D7D"/>
+          </a:solidFill>
+          <a:ln w="12700">
+            <a:solidFill>
+              <a:srgbClr val="2E7D7D"/>
+            </a:solidFill>
+            <a:prstDash val="solid"/>
+          </a:ln>
+        </p:spPr>
+      </p:sp>
+      <p:sp>
+        <p:nvSpPr>
+          <p:cNvPr id="38" name="Shape"/>
+          <p:cNvSpPr/>
+          <p:nvPr/>
+        </p:nvSpPr>
+        <p:spPr>
+          <a:xfrm>
+            <a:off x="9883591" y="2370000"/>
+            <a:ext cx="1000000" cy="420000"/>
+          </a:xfrm>
+          <a:prstGeom prst="roundRect">
+            <a:avLst>
+              <a:gd name="adj" fmla="val 30000"/>
+            </a:avLst>
+          </a:prstGeom>
+          <a:solidFill>
+            <a:srgbClr val="16262E"/>
+          </a:solidFill>
+          <a:ln w="12700">
+            <a:solidFill>
+              <a:srgbClr val="16262E"/>
+            </a:solidFill>
+            <a:prstDash val="solid"/>
+          </a:ln>
+        </p:spPr>
+      </p:sp>
+      <p:sp>
+        <p:nvSpPr>
+          <p:cNvPr id="39" name="Text"/>
+          <p:cNvSpPr txBox="1"/>
+          <p:nvPr/>
+        </p:nvSpPr>
+        <p:spPr>
+          <a:xfrm>
+            <a:off x="9883591" y="2370000"/>
+            <a:ext cx="1000000" cy="420000"/>
+          </a:xfrm>
+          <a:prstGeom prst="rect">
+            <a:avLst/>
+          </a:prstGeom>
+          <a:noFill/>
+          <a:ln/>
+        </p:spPr>
+        <p:txBody>
+          <a:bodyPr wrap="square" lIns="0" tIns="0" rIns="0" bIns="0" rtlCol="0" anchor="ctr"/>
+          <a:lstStyle/>
+          <a:p>
+            <a:pPr algn="ctr" indent="0" marL="0">
+              <a:buNone/>
+            </a:pPr>
+            <a:r>
+              <a:rPr lang="en-US" sz="1050" b="1" dirty="0">
+                <a:solidFill>
+                  <a:srgbClr val="FFFFFF"/>
+                </a:solidFill>
+                <a:latin typeface="Arial" pitchFamily="34" charset="0"/>
+                <a:ea typeface="Arial" pitchFamily="34" charset="-122"/>
+                <a:cs typeface="Arial" pitchFamily="34" charset="-120"/>
+              </a:rPr>
+              <a:t>respuesta</a:t>
+            </a:r>
+            <a:endParaRPr lang="en-US" sz="1050" dirty="0"/>
+          </a:p>
+        </p:txBody>
+      </p:sp>
+      <p:sp>
+        <p:nvSpPr>
+          <p:cNvPr id="40" name="Text"/>
+          <p:cNvSpPr txBox="1"/>
+          <p:nvPr/>
+        </p:nvSpPr>
+        <p:spPr>
+          <a:xfrm>
+            <a:off x="6483591" y="2980000"/>
+            <a:ext cx="4903431" cy="330000"/>
+          </a:xfrm>
+          <a:prstGeom prst="rect">
+            <a:avLst/>
+          </a:prstGeom>
+          <a:noFill/>
+          <a:ln/>
+        </p:spPr>
+        <p:txBody>
+          <a:bodyPr wrap="square" lIns="0" tIns="0" rIns="0" bIns="0" rtlCol="0" anchor="t"/>
+          <a:lstStyle/>
+          <a:p>
+            <a:pPr indent="0" marL="0">
+              <a:buNone/>
+            </a:pPr>
+            <a:r>
+              <a:rPr lang="en-US" sz="1600" b="1" dirty="0">
+                <a:solidFill>
+                  <a:srgbClr val="16262E"/>
+                </a:solidFill>
+                <a:latin typeface="Arial" pitchFamily="34" charset="0"/>
+                <a:ea typeface="Arial" pitchFamily="34" charset="-122"/>
+                <a:cs typeface="Arial" pitchFamily="34" charset="-120"/>
+              </a:rPr>
+              <a:t>RAG: un buscador elige por ti</a:t>
+            </a:r>
+            <a:endParaRPr lang="en-US" sz="1600" dirty="0"/>
+          </a:p>
+        </p:txBody>
+      </p:sp>
+      <p:sp>
+        <p:nvSpPr>
+          <p:cNvPr id="41" name="Text"/>
+          <p:cNvSpPr txBox="1"/>
+          <p:nvPr/>
+        </p:nvSpPr>
+        <p:spPr>
+          <a:xfrm>
+            <a:off x="6483591" y="3410000"/>
+            <a:ext cx="4903431" cy="2000000"/>
+          </a:xfrm>
+          <a:prstGeom prst="rect">
+            <a:avLst/>
+          </a:prstGeom>
+          <a:noFill/>
+          <a:ln/>
+        </p:spPr>
+        <p:txBody>
+          <a:bodyPr wrap="square" lIns="0" tIns="0" rIns="0" bIns="0" rtlCol="0" anchor="t"/>
+          <a:lstStyle/>
+          <a:p>
+            <a:pPr indent="0" marL="0">
+              <a:lnSpc>
+                <a:spcPct val="108000"/>
+              </a:lnSpc>
+              <a:spcAft>
+                <a:spcPts val="650"/>
+              </a:spcAft>
+              <a:buNone/>
+            </a:pPr>
+            <a:r>
+              <a:rPr lang="en-US" sz="1300" dirty="0">
+                <a:solidFill>
+                  <a:srgbClr val="16262E"/>
+                </a:solidFill>
+                <a:latin typeface="Calibri" pitchFamily="34" charset="0"/>
+                <a:ea typeface="Calibri" pitchFamily="34" charset="-122"/>
+                <a:cs typeface="Calibri" pitchFamily="34" charset="-120"/>
+              </a:rPr>
+              <a:t>Los documentos se indexan una vez. Al preguntar, un buscador trae los fragmentos más cercanos y el modelo responde solo con esos.</a:t>
+            </a:r>
+            <a:endParaRPr lang="en-US" sz="1300" dirty="0"/>
+          </a:p>
+          <a:p>
+            <a:pPr indent="0" marL="0">
+              <a:lnSpc>
+                <a:spcPct val="108000"/>
+              </a:lnSpc>
+              <a:spcAft>
+                <a:spcPts val="650"/>
+              </a:spcAft>
+              <a:buNone/>
+            </a:pPr>
+            <a:r>
+              <a:rPr lang="en-US" sz="1300" dirty="0">
+                <a:solidFill>
+                  <a:srgbClr val="16262E"/>
+                </a:solidFill>
+                <a:latin typeface="Calibri" pitchFamily="34" charset="0"/>
+                <a:ea typeface="Calibri" pitchFamily="34" charset="-122"/>
+                <a:cs typeface="Calibri" pitchFamily="34" charset="-120"/>
+              </a:rPr>
+              <a:t>Armar y mantener el índice cuesta; después, cada consulta es barata aunque el acervo sea enorme.</a:t>
+            </a:r>
+            <a:endParaRPr lang="en-US" sz="1300" dirty="0"/>
+          </a:p>
+          <a:p>
+            <a:pPr indent="0" marL="0">
+              <a:lnSpc>
+                <a:spcPct val="108000"/>
+              </a:lnSpc>
+              <a:spcAft>
+                <a:spcPts val="650"/>
+              </a:spcAft>
+              <a:buNone/>
+            </a:pPr>
+            <a:r>
+              <a:rPr lang="en-US" sz="1300" dirty="0">
+                <a:solidFill>
+                  <a:srgbClr val="16262E"/>
+                </a:solidFill>
+                <a:latin typeface="Calibri" pitchFamily="34" charset="0"/>
+                <a:ea typeface="Calibri" pitchFamily="34" charset="-122"/>
+                <a:cs typeface="Calibri" pitchFamily="34" charset="-120"/>
+              </a:rPr>
+              <a:t>Falla por omisión. Si el buscador no trae el fragmento correcto, el modelo responde sin él y con el mismo aplomo.</a:t>
+            </a:r>
+            <a:endParaRPr lang="en-US" sz="1300" dirty="0"/>
+          </a:p>
+        </p:txBody>
+      </p:sp>
+      <p:sp>
+        <p:nvSpPr>
+          <p:cNvPr id="42" name="Shape"/>
+          <p:cNvSpPr/>
+          <p:nvPr/>
+        </p:nvSpPr>
+        <p:spPr>
+          <a:xfrm>
+            <a:off x="566928" y="5700000"/>
+            <a:ext cx="11057839" cy="594360"/>
+          </a:xfrm>
+          <a:prstGeom prst="roundRect">
+            <a:avLst>
+              <a:gd name="adj" fmla="val 8235"/>
+            </a:avLst>
+          </a:prstGeom>
+          <a:solidFill>
+            <a:srgbClr val="F7E4D8"/>
+          </a:solidFill>
+          <a:ln w="12700">
+            <a:solidFill>
+              <a:srgbClr val="F7E4D8"/>
+            </a:solidFill>
+            <a:prstDash val="solid"/>
+          </a:ln>
+        </p:spPr>
+      </p:sp>
+      <p:sp>
+        <p:nvSpPr>
+          <p:cNvPr id="43" name="Text"/>
+          <p:cNvSpPr txBox="1"/>
+          <p:nvPr/>
+        </p:nvSpPr>
+        <p:spPr>
+          <a:xfrm>
+            <a:off x="804672" y="5700000"/>
+            <a:ext cx="10582351" cy="594360"/>
+          </a:xfrm>
+          <a:prstGeom prst="rect">
+            <a:avLst/>
+          </a:prstGeom>
+          <a:noFill/>
+          <a:ln/>
+        </p:spPr>
+        <p:txBody>
+          <a:bodyPr wrap="square" lIns="0" tIns="0" rIns="0" bIns="0" rtlCol="0" anchor="ctr"/>
+          <a:lstStyle/>
+          <a:p>
+            <a:pPr indent="0" marL="0">
+              <a:lnSpc>
+                <a:spcPct val="110000"/>
+              </a:lnSpc>
+              <a:buNone/>
+            </a:pPr>
+            <a:r>
+              <a:rPr lang="en-US" sz="1300" dirty="0">
+                <a:solidFill>
+                  <a:srgbClr val="16262E"/>
+                </a:solidFill>
+                <a:latin typeface="Calibri" pitchFamily="34" charset="0"/>
+                <a:ea typeface="Calibri" pitchFamily="34" charset="-122"/>
+                <a:cs typeface="Calibri" pitchFamily="34" charset="-120"/>
+              </a:rPr>
+              <a:t>Desde fuera no siempre sabes cuál te tocó: ChatGPT, con archivos largos, pasa del escritorio a la biblioteca sin avisarte. Como las dos fallan calladas, la regla es la misma: pide la cita y ve al párrafo.</a:t>
+            </a:r>
+            <a:endParaRPr lang="en-US" sz="1300" dirty="0"/>
+          </a:p>
+        </p:txBody>
+      </p:sp>
+      <p:sp>
+        <p:nvSpPr>
+          <p:cNvPr id="44" name="Text"/>
+          <p:cNvSpPr txBox="1"/>
+          <p:nvPr/>
+        </p:nvSpPr>
+        <p:spPr>
+          <a:xfrm>
+            <a:off x="566928" y="6360000"/>
+            <a:ext cx="11057839" cy="240000"/>
+          </a:xfrm>
+          <a:prstGeom prst="rect">
+            <a:avLst/>
+          </a:prstGeom>
+          <a:noFill/>
+          <a:ln/>
+        </p:spPr>
+        <p:txBody>
+          <a:bodyPr wrap="square" lIns="0" tIns="0" rIns="0" bIns="0" rtlCol="0" anchor="t"/>
+          <a:lstStyle/>
+          <a:p>
+            <a:pPr indent="0" marL="0">
+              <a:buNone/>
+            </a:pPr>
+            <a:r>
+              <a:rPr lang="en-US" sz="1000" dirty="0">
+                <a:solidFill>
+                  <a:srgbClr val="5A6B73"/>
+                </a:solidFill>
+                <a:latin typeface="Calibri" pitchFamily="34" charset="0"/>
+                <a:ea typeface="Calibri" pitchFamily="34" charset="-122"/>
+                <a:cs typeface="Calibri" pitchFamily="34" charset="-120"/>
+              </a:rPr>
+              <a:t>Fuentes: Lewis y otros (2020), arXiv:2005.11401 · Liu y otros (2024), arXiv:2307.03172 · OpenAI, «Optimizing File Uploads in ChatGPT Enterprise». Ligas en el anexo de la sesión.</a:t>
             </a:r>
             <a:endParaRPr lang="en-US" sz="1000" dirty="0"/>
           </a:p>
@@ -8247,7 +9910,7 @@
                 <a:ea typeface="Calibri" pitchFamily="34" charset="-122"/>
                 <a:cs typeface="Calibri" pitchFamily="34" charset="-120"/>
               </a:rPr>
-              <a:t>Receso de diez minutos</a:t>
+              <a:t>Receso de diez minutos, con charla opcional: ventana de contexto y RAG</a:t>
             </a:r>
             <a:endParaRPr lang="en-US" sz="1350" dirty="0"/>
           </a:p>
@@ -8529,7 +10192,7 @@
                 <a:ea typeface="Arial" pitchFamily="34" charset="-122"/>
                 <a:cs typeface="Arial" pitchFamily="34" charset="-120"/>
               </a:rPr>
-              <a:t>11:10</a:t>
+              <a:t>11:07</a:t>
             </a:r>
             <a:endParaRPr lang="en-US" sz="1300" dirty="0"/>
           </a:p>
@@ -10623,7 +12286,7 @@
                           <a:ea typeface="Calibri" pitchFamily="34" charset="-122"/>
                           <a:cs typeface="Calibri" pitchFamily="34" charset="-120"/>
                         </a:rPr>
-                        <a:t>NotebookLM, bloqueada</a:t>
+                        <a:t>NotebookLM (hoy Gemini Notebook), bloqueada</a:t>
                       </a:r>
                       <a:endParaRPr lang="en-US" sz="1250" dirty="0">
                         <a:latin typeface="Calibri" charset="0"/>
@@ -13704,7 +15367,7 @@
                 <a:ea typeface="Calibri" pitchFamily="34" charset="-122"/>
                 <a:cs typeface="Calibri" pitchFamily="34" charset="-120"/>
               </a:rPr>
-              <a:t>Equipo 5: activa la prueba de Elicit hoy y no antes. Son siete días y se vencen el 28.</a:t>
+              <a:t>Equipo 5: activa la prueba de Elicit hoy y no antes; son siete días y se vencen el 28. Equipo 4: la cuenta gratuita de You.com es hoy una prueba de 25 consultas; trabaja en Perplexity y usa You.com solo para contrastar.</a:t>
             </a:r>
             <a:endParaRPr lang="en-US" sz="1000" dirty="0"/>
           </a:p>

--- a/sesion-05/Sesion_05_Ecosistema_Herramientas.pptx
+++ b/sesion-05/Sesion_05_Ecosistema_Herramientas.pptx
@@ -1136,43 +1136,55 @@
           <a:p>
             <a:r>
               <a:rPr lang="en-US" dirty="0"/>
-              <a:t>Diez minutos de reloj. Mecánica: cada quien trabaja en su OneDrive institucional, con documentos de nivel verde o amarillo de su tema.</a:t>
+              <a:t>Diez minutos de reloj. Todo se hace con información verde; la prueba usa un dato inventado.</a:t>
             </a:r>
           </a:p>
           <a:p>
             <a:r>
               <a:rPr lang="en-US" dirty="0"/>
-              <a:t>Minutos 0 a 3: crear o elegir una carpeta por asunto y renombrar tres o cuatro archivos para que el nombre diga qué contienen.</a:t>
+              <a:t>Los participantes confirmaron el 21 de septiembre que desde Copilot Chat llegan a sus documentos del OneDrive institucional; ya se había comprobado en vivo el 15. Eso es acceso por selección, no búsqueda para contestar: según la documentación de Microsoft, sin la licencia de paga no hay índice semántico ni anclaje amplio a datos de trabajo, y elegir un archivo de OneDrive equivale a subirlo a la conversación. El menú sí sugiere archivos, por actividad reciente y por nombre, tipo o autor; quien elige eres tú.</a:t>
             </a:r>
           </a:p>
           <a:p>
             <a:r>
               <a:rPr lang="en-US" dirty="0"/>
-              <a:t>Minutos 3 a 8: en Copilot Chat, adjuntar desde OneDrive los archivos que responden una pregunta real de su trabajo, preguntar y pedir la cita del párrafo. Luego repetir la misma pregunta en un chat nuevo sin adjuntar nada.</a:t>
+              <a:t>Minutos 0 a 2, el dato señuelo: cada quien crea en su OneDrive un Word de nombre neutro, por ejemplo «Notas sueltas», con un dato inventado que no exista en la web: «La clave del equipo Ajolote es magnolia-7391». Lo guarda y lo cierra. El paso 2 de la lámina, organizar la carpeta y nombrar bien, es la regla para su trabajo diario; hoy basta con entenderla.</a:t>
             </a:r>
           </a:p>
           <a:p>
             <a:r>
               <a:rPr lang="en-US" dirty="0"/>
-              <a:t>Minutos 8 a 10: dos o tres personas cuentan la diferencia. Lo que debe salir: sin adjuntos responde de memoria y de la web; con adjuntos responde con tus documentos, pero solo con los que tú elegiste.</a:t>
+              <a:t>Minutos 2 a 5, paso 3: Copilot Chat en página completa del navegador, no en el panel de Edge ni en Outlook, sin agente y en un chat nuevo. Sin escribir «/» ni tocar las sugerencias bajo el cuadro, teclean: «Sin que yo adjunte nada: ¿cuál es la clave del equipo Ajolote? Dime en qué archivo de mi OneDrive está y dame la liga». Solo cuenta como hallazgo si contesta magnolia-7391 y la liga abre su archivo. Lo esperado con Copilot Chat es que no lo encuentre.</a:t>
             </a:r>
           </a:p>
           <a:p>
             <a:r>
               <a:rPr lang="en-US" dirty="0"/>
-              <a:t>Por qué cambió esta práctica: el Instituto tiene Copilot Chat (Basic). Sin la licencia de paga no hay índice semántico ni búsqueda sobre todo OneDrive; el menú de archivos busca por nombre y actividad reciente solo para que tú elijas. Por eso los nombres descriptivos siguen importando.</a:t>
+              <a:t>Minutos 5 a 8, paso 4: en ese mismo chat agregan el archivo desde OneDrive y repiten la pregunta pidiendo la cita. Debe contestar la clave. Es el control: si con el archivo agregado tampoco contesta, la prueba no es concluyente; el acceso estándar puede restringirse en horas de alta demanda. Que empiecen con uno o dos archivos: Microsoft no publica un tope para Copilot Chat de trabajo, así que no cites cifras.</a:t>
             </a:r>
           </a:p>
           <a:p>
             <a:r>
               <a:rPr lang="en-US" dirty="0"/>
-              <a:t>Cada quien puede confirmar su etiqueta en m365.cloud.microsoft, al pie de la página de inicio, bajo su nombre.</a:t>
+              <a:t>Minutos 8 a 10: dos o tres personas cuentan la diferencia. Lo que debe salir: sin archivo contesta de memoria y de la web; con archivo contesta con tus documentos, pero solo con los que tú elegiste.</a:t>
             </a:r>
           </a:p>
           <a:p>
             <a:r>
               <a:rPr lang="en-US" dirty="0"/>
-              <a:t>Advertencia útil: con un documento muy largo no des por hecho que lo leyó completo. Pregunta por una sección intermedia o pártelo. Microsoft no publica un límite de archivos por conversación para Copilot Chat de trabajo; no cites cifras.</a:t>
+              <a:t>Si a alguien Copilot le cita el archivo sin señalárselo, no concluyas que tiene la licencia de paga. Descarta primero una sugerencia con archivo, el panel de Edge, un agente o cuaderno, la memoria de otro chat y la web; después revisa la etiqueta bajo su nombre en m365.cloud.microsoft, al pie de la página de inicio. El resultado describe esa cuenta ese día, no al Instituto completo.</a:t>
+            </a:r>
+          </a:p>
+          <a:p>
+            <a:r>
+              <a:rPr lang="en-US" dirty="0"/>
+              <a:t>Para información amarilla: es apta aquí porque Copilot Chat con cuenta institucional es la única herramienta con contrato, no porque el archivo se quede en OneDrive. Con la búsqueda web activa pueden salir a Bing unas cuantas palabras derivadas de la pregunta.</a:t>
+            </a:r>
+          </a:p>
+          <a:p>
+            <a:r>
+              <a:rPr lang="en-US" dirty="0"/>
+              <a:t>Con un documento muy largo no des por hecho que lo leyó completo: pregunta por una sección intermedia o pártelo. No prometas que se puede agregar una carpeta completa de un golpe; para Copilot Chat sin licencia no está documentado.</a:t>
             </a:r>
           </a:p>
         </p:txBody>
@@ -1360,7 +1372,7 @@
           <a:p>
             <a:r>
               <a:rPr lang="en-US" dirty="0"/>
-              <a:t>El puente a la práctica: en el Copilot Chat del Instituto no hay buscador sobre tu OneDrive. Microsoft reserva el índice semántico a la licencia de paga Microsoft 365 Copilot. Adjuntar o referenciar un archivo equivale a subirlo a la conversación.</a:t>
+              <a:t>El puente a la práctica: desde el Copilot Chat del Instituto sí se llega a los archivos de OneDrive, pero no hay un buscador que elija por ti. El menú sugiere archivos por nombre y por actividad reciente para que tú escojas; Microsoft reserva el índice semántico a la licencia de paga Microsoft 365 Copilot. Elegir un archivo equivale a subirlo a la conversación.</a:t>
             </a:r>
           </a:p>
         </p:txBody>
@@ -6068,7 +6080,7 @@
                 <a:ea typeface="Calibri" pitchFamily="34" charset="-122"/>
                 <a:cs typeface="Calibri" pitchFamily="34" charset="-120"/>
               </a:rPr>
-              <a:t>En un RAG, un buscador elige qué fragmentos lee el modelo. El Copilot Chat del Instituto no trae ese buscador: lee solo lo que tú le adjuntas. Hoy el paso de buscar lo haces tú.</a:t>
+              <a:t>Desde Copilot Chat sí llegas a tu OneDrive institucional y eliges tus archivos ahí mismo. Puede sugerirte archivos, pero no escoge por ti como haría un RAG: trabaja solo con los que tú agregas.</a:t>
             </a:r>
             <a:endParaRPr lang="en-US" sz="1450" dirty="0"/>
           </a:p>
@@ -6201,7 +6213,7 @@
                 <a:ea typeface="Calibri" pitchFamily="34" charset="-122"/>
                 <a:cs typeface="Calibri" pitchFamily="34" charset="-120"/>
               </a:rPr>
-              <a:t>Organiza una carpeta de OneDrive como base documental de tu tema. Una carpeta por asunto, no una por año.</a:t>
+              <a:t>Organiza una carpeta de OneDrive como base documental de tu tema, una por asunto y no una por año, y nombra cada archivo de manera que el nombre diga qué contiene. Ese nombre es tu índice.</a:t>
             </a:r>
             <a:endParaRPr lang="en-US" sz="1450" dirty="0"/>
           </a:p>
@@ -6334,7 +6346,7 @@
                 <a:ea typeface="Calibri" pitchFamily="34" charset="-122"/>
                 <a:cs typeface="Calibri" pitchFamily="34" charset="-120"/>
               </a:rPr>
-              <a:t>Nombra los archivos de manera que el nombre diga qué contiene. Ese nombre es tu índice: con él decides qué adjuntar.</a:t>
+              <a:t>Haz la prueba: en un chat nuevo, sin agregar archivos ni tocar sugerencias, pregunta un dato que esté en tus documentos y no en la web, y pide el archivo de donde sale. Anota si citó tu archivo o contestó sin él.</a:t>
             </a:r>
             <a:endParaRPr lang="en-US" sz="1450" dirty="0"/>
           </a:p>
@@ -6467,7 +6479,7 @@
                 <a:ea typeface="Calibri" pitchFamily="34" charset="-122"/>
                 <a:cs typeface="Calibri" pitchFamily="34" charset="-120"/>
               </a:rPr>
-              <a:t>Adjunta en Copilot Chat los archivos que responden tu pregunta y pide la cita del párrafo. Después haz la misma pregunta sin adjuntar nada y compara.</a:t>
+              <a:t>Ahora elige desde OneDrive los archivos que responden esa pregunta, repítela y pide la cita del párrafo. Compara las dos respuestas.</a:t>
             </a:r>
             <a:endParaRPr lang="en-US" sz="1450" dirty="0"/>
           </a:p>
@@ -6533,7 +6545,7 @@
                 <a:ea typeface="Calibri" pitchFamily="34" charset="-122"/>
                 <a:cs typeface="Calibri" pitchFamily="34" charset="-120"/>
               </a:rPr>
-              <a:t>Es lo único de hoy que funciona con información amarilla; lo demás es solo para información pública. Con la licencia de paga Microsoft 365 Copilot, un índice buscaría por ti: es la que pone a Copilot dentro de Word y Excel, donde ya vimos que no aparece.</a:t>
+              <a:t>Es lo único de hoy apto para información amarilla; lo demás es solo para información pública. Si en el paso 3 Copilot citó tu archivo sin que se lo señalaras, avísame: puede ser la licencia de paga, una sugerencia con archivo, otro chat o la web. Lo aclara la etiqueta bajo tu nombre.</a:t>
             </a:r>
             <a:endParaRPr lang="en-US" sz="1350" dirty="0"/>
           </a:p>
@@ -7889,7 +7901,7 @@
                 <a:ea typeface="Calibri" pitchFamily="34" charset="-122"/>
                 <a:cs typeface="Calibri" pitchFamily="34" charset="-120"/>
               </a:rPr>
-              <a:t>Los equipos 4, 5 y 6 usaron RAG esta mañana: Perplexity, Elicit y Consensus buscan antes de escribir. En el Copilot Chat del Instituto ese buscador no existe, así que en la práctica que sigue quien elige los documentos eres tú.</a:t>
+              <a:t>Los equipos 4, 5 y 6 usaron RAG esta mañana: Perplexity, Elicit y Consensus buscan antes de escribir. El Copilot Chat del Instituto sí abre los archivos de tu OneDrive, pero no los elige por ti: en la práctica que sigue, quien decide cuáles lee eres tú.</a:t>
             </a:r>
             <a:endParaRPr lang="en-US" sz="1300" dirty="0"/>
           </a:p>
